--- a/lecture_notes/chapter7/chapter7.pptx
+++ b/lecture_notes/chapter7/chapter7.pptx
@@ -778,10 +778,25 @@
   <pc:docChgLst>
     <pc:chgData name="Toby Donaldson" userId="2e6e5431-bb17-4c41-9985-d39c50d83c73" providerId="ADAL" clId="{7F9681A8-EEE2-56F4-9B39-ECCBEE0471AC}"/>
     <pc:docChg chg="custSel addSld modSld sldOrd modSection">
-      <pc:chgData name="Toby Donaldson" userId="2e6e5431-bb17-4c41-9985-d39c50d83c73" providerId="ADAL" clId="{7F9681A8-EEE2-56F4-9B39-ECCBEE0471AC}" dt="2026-02-22T21:33:22.630" v="322" actId="5793"/>
+      <pc:chgData name="Toby Donaldson" userId="2e6e5431-bb17-4c41-9985-d39c50d83c73" providerId="ADAL" clId="{7F9681A8-EEE2-56F4-9B39-ECCBEE0471AC}" dt="2026-02-22T21:42:08.849" v="323" actId="113"/>
       <pc:docMkLst>
         <pc:docMk/>
       </pc:docMkLst>
+      <pc:sldChg chg="modSp mod">
+        <pc:chgData name="Toby Donaldson" userId="2e6e5431-bb17-4c41-9985-d39c50d83c73" providerId="ADAL" clId="{7F9681A8-EEE2-56F4-9B39-ECCBEE0471AC}" dt="2026-02-22T21:42:08.849" v="323" actId="113"/>
+        <pc:sldMkLst>
+          <pc:docMk/>
+          <pc:sldMk cId="2693912225" sldId="350"/>
+        </pc:sldMkLst>
+        <pc:spChg chg="mod">
+          <ac:chgData name="Toby Donaldson" userId="2e6e5431-bb17-4c41-9985-d39c50d83c73" providerId="ADAL" clId="{7F9681A8-EEE2-56F4-9B39-ECCBEE0471AC}" dt="2026-02-22T21:42:08.849" v="323" actId="113"/>
+          <ac:spMkLst>
+            <pc:docMk/>
+            <pc:sldMk cId="2693912225" sldId="350"/>
+            <ac:spMk id="41" creationId="{E5CBE02D-89B2-6D60-189D-FC0E58776964}"/>
+          </ac:spMkLst>
+        </pc:spChg>
+      </pc:sldChg>
       <pc:sldChg chg="delSp modSp mod">
         <pc:chgData name="Toby Donaldson" userId="2e6e5431-bb17-4c41-9985-d39c50d83c73" providerId="ADAL" clId="{7F9681A8-EEE2-56F4-9B39-ECCBEE0471AC}" dt="2026-02-22T21:19:22.515" v="218" actId="20577"/>
         <pc:sldMkLst>
@@ -11873,7 +11888,15 @@
             <a:pPr algn="ctr"/>
             <a:r>
               <a:rPr lang="en-CA" dirty="0"/>
-              <a:t>How many execution paths are there through this code?</a:t>
+              <a:t>How many </a:t>
+            </a:r>
+            <a:r>
+              <a:rPr lang="en-CA" b="1" dirty="0"/>
+              <a:t>execution paths </a:t>
+            </a:r>
+            <a:r>
+              <a:rPr lang="en-CA" dirty="0"/>
+              <a:t>are there through this code?</a:t>
             </a:r>
             <a:endParaRPr lang="en-AU" dirty="0"/>
           </a:p>

--- a/lecture_notes/chapter7/chapter7.pptx
+++ b/lecture_notes/chapter7/chapter7.pptx
@@ -5,7 +5,7 @@
     <p:sldMasterId id="2147483648" r:id="rId1"/>
   </p:sldMasterIdLst>
   <p:notesMasterIdLst>
-    <p:notesMasterId r:id="rId84"/>
+    <p:notesMasterId r:id="rId85"/>
   </p:notesMasterIdLst>
   <p:sldIdLst>
     <p:sldId id="298" r:id="rId2"/>
@@ -38,7 +38,7 @@
     <p:sldId id="299" r:id="rId29"/>
     <p:sldId id="301" r:id="rId30"/>
     <p:sldId id="302" r:id="rId31"/>
-    <p:sldId id="303" r:id="rId32"/>
+    <p:sldId id="383" r:id="rId32"/>
     <p:sldId id="304" r:id="rId33"/>
     <p:sldId id="305" r:id="rId34"/>
     <p:sldId id="306" r:id="rId35"/>
@@ -65,31 +65,32 @@
     <p:sldId id="328" r:id="rId56"/>
     <p:sldId id="370" r:id="rId57"/>
     <p:sldId id="329" r:id="rId58"/>
-    <p:sldId id="330" r:id="rId59"/>
-    <p:sldId id="331" r:id="rId60"/>
-    <p:sldId id="334" r:id="rId61"/>
-    <p:sldId id="374" r:id="rId62"/>
-    <p:sldId id="335" r:id="rId63"/>
-    <p:sldId id="336" r:id="rId64"/>
-    <p:sldId id="338" r:id="rId65"/>
-    <p:sldId id="337" r:id="rId66"/>
-    <p:sldId id="339" r:id="rId67"/>
-    <p:sldId id="375" r:id="rId68"/>
-    <p:sldId id="358" r:id="rId69"/>
-    <p:sldId id="376" r:id="rId70"/>
-    <p:sldId id="359" r:id="rId71"/>
-    <p:sldId id="377" r:id="rId72"/>
-    <p:sldId id="378" r:id="rId73"/>
-    <p:sldId id="360" r:id="rId74"/>
-    <p:sldId id="361" r:id="rId75"/>
-    <p:sldId id="362" r:id="rId76"/>
-    <p:sldId id="363" r:id="rId77"/>
-    <p:sldId id="364" r:id="rId78"/>
-    <p:sldId id="365" r:id="rId79"/>
-    <p:sldId id="366" r:id="rId80"/>
-    <p:sldId id="367" r:id="rId81"/>
-    <p:sldId id="368" r:id="rId82"/>
-    <p:sldId id="371" r:id="rId83"/>
+    <p:sldId id="384" r:id="rId59"/>
+    <p:sldId id="330" r:id="rId60"/>
+    <p:sldId id="331" r:id="rId61"/>
+    <p:sldId id="334" r:id="rId62"/>
+    <p:sldId id="374" r:id="rId63"/>
+    <p:sldId id="335" r:id="rId64"/>
+    <p:sldId id="336" r:id="rId65"/>
+    <p:sldId id="338" r:id="rId66"/>
+    <p:sldId id="337" r:id="rId67"/>
+    <p:sldId id="339" r:id="rId68"/>
+    <p:sldId id="375" r:id="rId69"/>
+    <p:sldId id="358" r:id="rId70"/>
+    <p:sldId id="376" r:id="rId71"/>
+    <p:sldId id="359" r:id="rId72"/>
+    <p:sldId id="377" r:id="rId73"/>
+    <p:sldId id="378" r:id="rId74"/>
+    <p:sldId id="360" r:id="rId75"/>
+    <p:sldId id="361" r:id="rId76"/>
+    <p:sldId id="362" r:id="rId77"/>
+    <p:sldId id="363" r:id="rId78"/>
+    <p:sldId id="364" r:id="rId79"/>
+    <p:sldId id="365" r:id="rId80"/>
+    <p:sldId id="366" r:id="rId81"/>
+    <p:sldId id="367" r:id="rId82"/>
+    <p:sldId id="368" r:id="rId83"/>
+    <p:sldId id="371" r:id="rId84"/>
   </p:sldIdLst>
   <p:sldSz cx="12192000" cy="6858000"/>
   <p:notesSz cx="7010400" cy="9296400"/>
@@ -239,7 +240,7 @@
         <p14:section name="Searching a string" id="{B9145289-9759-4E57-8FB5-1D63805649D7}">
           <p14:sldIdLst>
             <p14:sldId id="302"/>
-            <p14:sldId id="303"/>
+            <p14:sldId id="383"/>
             <p14:sldId id="304"/>
             <p14:sldId id="305"/>
             <p14:sldId id="306"/>
@@ -274,6 +275,7 @@
         </p14:section>
         <p14:section name="English words" id="{041046FF-EBCD-45BA-883B-E38B4B076FC1}">
           <p14:sldIdLst>
+            <p14:sldId id="384"/>
             <p14:sldId id="330"/>
             <p14:sldId id="331"/>
             <p14:sldId id="334"/>
@@ -317,7 +319,7 @@
 <file path=ppt/revisionInfo.xml><?xml version="1.0" encoding="utf-8"?>
 <p1510:revInfo xmlns:a="http://schemas.openxmlformats.org/drawingml/2006/main" xmlns:r="http://schemas.openxmlformats.org/officeDocument/2006/relationships" xmlns:p1510="http://schemas.microsoft.com/office/powerpoint/2015/10/main">
   <p1510:revLst>
-    <p1510:client id="{561D49D2-520B-EC45-9286-8C23B84321E3}" v="2" dt="2026-02-22T21:20:26.978"/>
+    <p1510:client id="{561D49D2-520B-EC45-9286-8C23B84321E3}" v="22" dt="2026-02-22T22:18:49.992"/>
   </p1510:revLst>
 </p1510:revInfo>
 </file>
@@ -343,21 +345,6 @@
             <pc:docMk/>
             <pc:sldMk cId="3108921986" sldId="297"/>
             <ac:spMk id="12" creationId="{3AF2C4DB-946E-1805-ACEA-E990CBE59E01}"/>
-          </ac:spMkLst>
-        </pc:spChg>
-      </pc:sldChg>
-      <pc:sldChg chg="addSp delSp modSp mod">
-        <pc:chgData name="Toby Donaldson" userId="2e6e5431-bb17-4c41-9985-d39c50d83c73" providerId="ADAL" clId="{F31BC264-820E-54C4-A6D1-F92AF9CC222E}" dt="2026-02-16T07:21:28.326" v="92"/>
-        <pc:sldMkLst>
-          <pc:docMk/>
-          <pc:sldMk cId="3543262634" sldId="303"/>
-        </pc:sldMkLst>
-        <pc:spChg chg="add mod">
-          <ac:chgData name="Toby Donaldson" userId="2e6e5431-bb17-4c41-9985-d39c50d83c73" providerId="ADAL" clId="{F31BC264-820E-54C4-A6D1-F92AF9CC222E}" dt="2026-02-16T07:21:28.326" v="92"/>
-          <ac:spMkLst>
-            <pc:docMk/>
-            <pc:sldMk cId="3543262634" sldId="303"/>
-            <ac:spMk id="7" creationId="{F1E06168-84F9-C1D5-F6F8-6EBE97F901CA}"/>
           </ac:spMkLst>
         </pc:spChg>
       </pc:sldChg>
@@ -777,11 +764,108 @@
   </pc:docChgLst>
   <pc:docChgLst>
     <pc:chgData name="Toby Donaldson" userId="2e6e5431-bb17-4c41-9985-d39c50d83c73" providerId="ADAL" clId="{7F9681A8-EEE2-56F4-9B39-ECCBEE0471AC}"/>
-    <pc:docChg chg="custSel addSld modSld sldOrd modSection">
-      <pc:chgData name="Toby Donaldson" userId="2e6e5431-bb17-4c41-9985-d39c50d83c73" providerId="ADAL" clId="{7F9681A8-EEE2-56F4-9B39-ECCBEE0471AC}" dt="2026-02-22T21:42:08.849" v="323" actId="113"/>
+    <pc:docChg chg="undo custSel addSld delSld modSld sldOrd modSection">
+      <pc:chgData name="Toby Donaldson" userId="2e6e5431-bb17-4c41-9985-d39c50d83c73" providerId="ADAL" clId="{7F9681A8-EEE2-56F4-9B39-ECCBEE0471AC}" dt="2026-02-22T22:18:53.621" v="905" actId="20577"/>
       <pc:docMkLst>
         <pc:docMk/>
       </pc:docMkLst>
+      <pc:sldChg chg="del">
+        <pc:chgData name="Toby Donaldson" userId="2e6e5431-bb17-4c41-9985-d39c50d83c73" providerId="ADAL" clId="{7F9681A8-EEE2-56F4-9B39-ECCBEE0471AC}" dt="2026-02-22T21:52:07.167" v="449" actId="2696"/>
+        <pc:sldMkLst>
+          <pc:docMk/>
+          <pc:sldMk cId="3543262634" sldId="303"/>
+        </pc:sldMkLst>
+      </pc:sldChg>
+      <pc:sldChg chg="modSp mod">
+        <pc:chgData name="Toby Donaldson" userId="2e6e5431-bb17-4c41-9985-d39c50d83c73" providerId="ADAL" clId="{7F9681A8-EEE2-56F4-9B39-ECCBEE0471AC}" dt="2026-02-22T21:54:12.125" v="455" actId="20577"/>
+        <pc:sldMkLst>
+          <pc:docMk/>
+          <pc:sldMk cId="2217005126" sldId="317"/>
+        </pc:sldMkLst>
+        <pc:spChg chg="mod">
+          <ac:chgData name="Toby Donaldson" userId="2e6e5431-bb17-4c41-9985-d39c50d83c73" providerId="ADAL" clId="{7F9681A8-EEE2-56F4-9B39-ECCBEE0471AC}" dt="2026-02-22T21:54:12.125" v="455" actId="20577"/>
+          <ac:spMkLst>
+            <pc:docMk/>
+            <pc:sldMk cId="2217005126" sldId="317"/>
+            <ac:spMk id="10" creationId="{E7F4B539-4DD0-2F94-C5D1-EC9D32FE3C37}"/>
+          </ac:spMkLst>
+        </pc:spChg>
+      </pc:sldChg>
+      <pc:sldChg chg="modSp mod">
+        <pc:chgData name="Toby Donaldson" userId="2e6e5431-bb17-4c41-9985-d39c50d83c73" providerId="ADAL" clId="{7F9681A8-EEE2-56F4-9B39-ECCBEE0471AC}" dt="2026-02-22T21:56:06.555" v="467" actId="313"/>
+        <pc:sldMkLst>
+          <pc:docMk/>
+          <pc:sldMk cId="3354571621" sldId="326"/>
+        </pc:sldMkLst>
+        <pc:spChg chg="mod">
+          <ac:chgData name="Toby Donaldson" userId="2e6e5431-bb17-4c41-9985-d39c50d83c73" providerId="ADAL" clId="{7F9681A8-EEE2-56F4-9B39-ECCBEE0471AC}" dt="2026-02-22T21:56:06.555" v="467" actId="313"/>
+          <ac:spMkLst>
+            <pc:docMk/>
+            <pc:sldMk cId="3354571621" sldId="326"/>
+            <ac:spMk id="9" creationId="{6B9DED66-71DD-8FC9-554B-6438B00D051D}"/>
+          </ac:spMkLst>
+        </pc:spChg>
+      </pc:sldChg>
+      <pc:sldChg chg="modSp mod">
+        <pc:chgData name="Toby Donaldson" userId="2e6e5431-bb17-4c41-9985-d39c50d83c73" providerId="ADAL" clId="{7F9681A8-EEE2-56F4-9B39-ECCBEE0471AC}" dt="2026-02-22T21:56:02.372" v="463" actId="313"/>
+        <pc:sldMkLst>
+          <pc:docMk/>
+          <pc:sldMk cId="2782017614" sldId="327"/>
+        </pc:sldMkLst>
+        <pc:spChg chg="mod">
+          <ac:chgData name="Toby Donaldson" userId="2e6e5431-bb17-4c41-9985-d39c50d83c73" providerId="ADAL" clId="{7F9681A8-EEE2-56F4-9B39-ECCBEE0471AC}" dt="2026-02-22T21:56:02.372" v="463" actId="313"/>
+          <ac:spMkLst>
+            <pc:docMk/>
+            <pc:sldMk cId="2782017614" sldId="327"/>
+            <ac:spMk id="9" creationId="{692CB4F5-4CB1-5EEC-95C9-EA0A1D9C57AD}"/>
+          </ac:spMkLst>
+        </pc:spChg>
+      </pc:sldChg>
+      <pc:sldChg chg="modSp mod">
+        <pc:chgData name="Toby Donaldson" userId="2e6e5431-bb17-4c41-9985-d39c50d83c73" providerId="ADAL" clId="{7F9681A8-EEE2-56F4-9B39-ECCBEE0471AC}" dt="2026-02-22T21:55:57.047" v="459" actId="313"/>
+        <pc:sldMkLst>
+          <pc:docMk/>
+          <pc:sldMk cId="291094791" sldId="328"/>
+        </pc:sldMkLst>
+        <pc:spChg chg="mod">
+          <ac:chgData name="Toby Donaldson" userId="2e6e5431-bb17-4c41-9985-d39c50d83c73" providerId="ADAL" clId="{7F9681A8-EEE2-56F4-9B39-ECCBEE0471AC}" dt="2026-02-22T21:55:57.047" v="459" actId="313"/>
+          <ac:spMkLst>
+            <pc:docMk/>
+            <pc:sldMk cId="291094791" sldId="328"/>
+            <ac:spMk id="9" creationId="{89D05729-CC84-0DEA-EA87-4919481CA92F}"/>
+          </ac:spMkLst>
+        </pc:spChg>
+      </pc:sldChg>
+      <pc:sldChg chg="modSp mod">
+        <pc:chgData name="Toby Donaldson" userId="2e6e5431-bb17-4c41-9985-d39c50d83c73" providerId="ADAL" clId="{7F9681A8-EEE2-56F4-9B39-ECCBEE0471AC}" dt="2026-02-22T21:56:18.056" v="471" actId="313"/>
+        <pc:sldMkLst>
+          <pc:docMk/>
+          <pc:sldMk cId="727847569" sldId="329"/>
+        </pc:sldMkLst>
+        <pc:spChg chg="mod">
+          <ac:chgData name="Toby Donaldson" userId="2e6e5431-bb17-4c41-9985-d39c50d83c73" providerId="ADAL" clId="{7F9681A8-EEE2-56F4-9B39-ECCBEE0471AC}" dt="2026-02-22T21:56:18.056" v="471" actId="313"/>
+          <ac:spMkLst>
+            <pc:docMk/>
+            <pc:sldMk cId="727847569" sldId="329"/>
+            <ac:spMk id="9" creationId="{40EE5F8C-F3CE-2299-9254-A981E2BCAD7D}"/>
+          </ac:spMkLst>
+        </pc:spChg>
+      </pc:sldChg>
+      <pc:sldChg chg="modSp mod ord">
+        <pc:chgData name="Toby Donaldson" userId="2e6e5431-bb17-4c41-9985-d39c50d83c73" providerId="ADAL" clId="{7F9681A8-EEE2-56F4-9B39-ECCBEE0471AC}" dt="2026-02-22T21:56:56.246" v="476" actId="20578"/>
+        <pc:sldMkLst>
+          <pc:docMk/>
+          <pc:sldMk cId="943254403" sldId="330"/>
+        </pc:sldMkLst>
+        <pc:spChg chg="mod">
+          <ac:chgData name="Toby Donaldson" userId="2e6e5431-bb17-4c41-9985-d39c50d83c73" providerId="ADAL" clId="{7F9681A8-EEE2-56F4-9B39-ECCBEE0471AC}" dt="2026-02-22T21:56:51.889" v="475" actId="20577"/>
+          <ac:spMkLst>
+            <pc:docMk/>
+            <pc:sldMk cId="943254403" sldId="330"/>
+            <ac:spMk id="7" creationId="{625F8F35-6907-9A87-317F-0BA911AA4D80}"/>
+          </ac:spMkLst>
+        </pc:spChg>
+      </pc:sldChg>
       <pc:sldChg chg="modSp mod">
         <pc:chgData name="Toby Donaldson" userId="2e6e5431-bb17-4c41-9985-d39c50d83c73" providerId="ADAL" clId="{7F9681A8-EEE2-56F4-9B39-ECCBEE0471AC}" dt="2026-02-22T21:42:08.849" v="323" actId="113"/>
         <pc:sldMkLst>
@@ -821,6 +905,378 @@
         </pc:spChg>
       </pc:sldChg>
       <pc:sldChg chg="modSp mod">
+        <pc:chgData name="Toby Donaldson" userId="2e6e5431-bb17-4c41-9985-d39c50d83c73" providerId="ADAL" clId="{7F9681A8-EEE2-56F4-9B39-ECCBEE0471AC}" dt="2026-02-22T22:12:15.077" v="756" actId="20577"/>
+        <pc:sldMkLst>
+          <pc:docMk/>
+          <pc:sldMk cId="554056988" sldId="358"/>
+        </pc:sldMkLst>
+        <pc:spChg chg="mod">
+          <ac:chgData name="Toby Donaldson" userId="2e6e5431-bb17-4c41-9985-d39c50d83c73" providerId="ADAL" clId="{7F9681A8-EEE2-56F4-9B39-ECCBEE0471AC}" dt="2026-02-22T22:12:15.077" v="756" actId="20577"/>
+          <ac:spMkLst>
+            <pc:docMk/>
+            <pc:sldMk cId="554056988" sldId="358"/>
+            <ac:spMk id="13" creationId="{2AAFF7AE-6FFF-20F5-E870-C30C5520DC04}"/>
+          </ac:spMkLst>
+        </pc:spChg>
+      </pc:sldChg>
+      <pc:sldChg chg="addSp delSp modSp mod">
+        <pc:chgData name="Toby Donaldson" userId="2e6e5431-bb17-4c41-9985-d39c50d83c73" providerId="ADAL" clId="{7F9681A8-EEE2-56F4-9B39-ECCBEE0471AC}" dt="2026-02-22T22:12:49.386" v="762" actId="20577"/>
+        <pc:sldMkLst>
+          <pc:docMk/>
+          <pc:sldMk cId="4070484776" sldId="359"/>
+        </pc:sldMkLst>
+        <pc:spChg chg="mod">
+          <ac:chgData name="Toby Donaldson" userId="2e6e5431-bb17-4c41-9985-d39c50d83c73" providerId="ADAL" clId="{7F9681A8-EEE2-56F4-9B39-ECCBEE0471AC}" dt="2026-02-22T22:00:11.017" v="485" actId="20577"/>
+          <ac:spMkLst>
+            <pc:docMk/>
+            <pc:sldMk cId="4070484776" sldId="359"/>
+            <ac:spMk id="2" creationId="{AD0EB34F-4A9C-6695-0C13-AF24407D9D68}"/>
+          </ac:spMkLst>
+        </pc:spChg>
+        <pc:spChg chg="add mod">
+          <ac:chgData name="Toby Donaldson" userId="2e6e5431-bb17-4c41-9985-d39c50d83c73" providerId="ADAL" clId="{7F9681A8-EEE2-56F4-9B39-ECCBEE0471AC}" dt="2026-02-22T22:12:49.386" v="762" actId="20577"/>
+          <ac:spMkLst>
+            <pc:docMk/>
+            <pc:sldMk cId="4070484776" sldId="359"/>
+            <ac:spMk id="3" creationId="{B13230A4-194E-4184-95C5-E1B0EE0134E5}"/>
+          </ac:spMkLst>
+        </pc:spChg>
+        <pc:spChg chg="del">
+          <ac:chgData name="Toby Donaldson" userId="2e6e5431-bb17-4c41-9985-d39c50d83c73" providerId="ADAL" clId="{7F9681A8-EEE2-56F4-9B39-ECCBEE0471AC}" dt="2026-02-22T22:12:35.903" v="759" actId="21"/>
+          <ac:spMkLst>
+            <pc:docMk/>
+            <pc:sldMk cId="4070484776" sldId="359"/>
+            <ac:spMk id="13" creationId="{175E9AE4-A71D-D55A-E235-33328B96C5C6}"/>
+          </ac:spMkLst>
+        </pc:spChg>
+      </pc:sldChg>
+      <pc:sldChg chg="addSp delSp modSp mod">
+        <pc:chgData name="Toby Donaldson" userId="2e6e5431-bb17-4c41-9985-d39c50d83c73" providerId="ADAL" clId="{7F9681A8-EEE2-56F4-9B39-ECCBEE0471AC}" dt="2026-02-22T22:15:49.802" v="861" actId="20577"/>
+        <pc:sldMkLst>
+          <pc:docMk/>
+          <pc:sldMk cId="917755974" sldId="360"/>
+        </pc:sldMkLst>
+        <pc:spChg chg="add mod">
+          <ac:chgData name="Toby Donaldson" userId="2e6e5431-bb17-4c41-9985-d39c50d83c73" providerId="ADAL" clId="{7F9681A8-EEE2-56F4-9B39-ECCBEE0471AC}" dt="2026-02-22T22:14:11.590" v="777"/>
+          <ac:spMkLst>
+            <pc:docMk/>
+            <pc:sldMk cId="917755974" sldId="360"/>
+            <ac:spMk id="3" creationId="{4D23ADFF-0DC1-14EF-E28D-7EC46295425D}"/>
+          </ac:spMkLst>
+        </pc:spChg>
+        <pc:spChg chg="mod">
+          <ac:chgData name="Toby Donaldson" userId="2e6e5431-bb17-4c41-9985-d39c50d83c73" providerId="ADAL" clId="{7F9681A8-EEE2-56F4-9B39-ECCBEE0471AC}" dt="2026-02-22T22:15:49.802" v="861" actId="20577"/>
+          <ac:spMkLst>
+            <pc:docMk/>
+            <pc:sldMk cId="917755974" sldId="360"/>
+            <ac:spMk id="8" creationId="{AAC66A44-560B-8BFA-02DA-5682F9C14FCC}"/>
+          </ac:spMkLst>
+        </pc:spChg>
+        <pc:spChg chg="del">
+          <ac:chgData name="Toby Donaldson" userId="2e6e5431-bb17-4c41-9985-d39c50d83c73" providerId="ADAL" clId="{7F9681A8-EEE2-56F4-9B39-ECCBEE0471AC}" dt="2026-02-22T22:13:30.704" v="767" actId="21"/>
+          <ac:spMkLst>
+            <pc:docMk/>
+            <pc:sldMk cId="917755974" sldId="360"/>
+            <ac:spMk id="13" creationId="{E98030AF-790D-3684-DF4E-062503483DE0}"/>
+          </ac:spMkLst>
+        </pc:spChg>
+      </pc:sldChg>
+      <pc:sldChg chg="addSp delSp modSp mod">
+        <pc:chgData name="Toby Donaldson" userId="2e6e5431-bb17-4c41-9985-d39c50d83c73" providerId="ADAL" clId="{7F9681A8-EEE2-56F4-9B39-ECCBEE0471AC}" dt="2026-02-22T22:16:21.901" v="868" actId="20577"/>
+        <pc:sldMkLst>
+          <pc:docMk/>
+          <pc:sldMk cId="1138805861" sldId="361"/>
+        </pc:sldMkLst>
+        <pc:spChg chg="add mod">
+          <ac:chgData name="Toby Donaldson" userId="2e6e5431-bb17-4c41-9985-d39c50d83c73" providerId="ADAL" clId="{7F9681A8-EEE2-56F4-9B39-ECCBEE0471AC}" dt="2026-02-22T22:14:13.224" v="778"/>
+          <ac:spMkLst>
+            <pc:docMk/>
+            <pc:sldMk cId="1138805861" sldId="361"/>
+            <ac:spMk id="3" creationId="{C6CD40DC-4833-AE46-EB0D-7DA7D0343282}"/>
+          </ac:spMkLst>
+        </pc:spChg>
+        <pc:spChg chg="mod">
+          <ac:chgData name="Toby Donaldson" userId="2e6e5431-bb17-4c41-9985-d39c50d83c73" providerId="ADAL" clId="{7F9681A8-EEE2-56F4-9B39-ECCBEE0471AC}" dt="2026-02-22T22:16:21.901" v="868" actId="20577"/>
+          <ac:spMkLst>
+            <pc:docMk/>
+            <pc:sldMk cId="1138805861" sldId="361"/>
+            <ac:spMk id="8" creationId="{61006462-9941-5204-4860-72F9C8680662}"/>
+          </ac:spMkLst>
+        </pc:spChg>
+        <pc:spChg chg="del">
+          <ac:chgData name="Toby Donaldson" userId="2e6e5431-bb17-4c41-9985-d39c50d83c73" providerId="ADAL" clId="{7F9681A8-EEE2-56F4-9B39-ECCBEE0471AC}" dt="2026-02-22T22:13:33.903" v="768" actId="21"/>
+          <ac:spMkLst>
+            <pc:docMk/>
+            <pc:sldMk cId="1138805861" sldId="361"/>
+            <ac:spMk id="13" creationId="{CD1C8DF3-2971-622F-9543-527C2EBB5F0E}"/>
+          </ac:spMkLst>
+        </pc:spChg>
+      </pc:sldChg>
+      <pc:sldChg chg="addSp delSp modSp mod">
+        <pc:chgData name="Toby Donaldson" userId="2e6e5431-bb17-4c41-9985-d39c50d83c73" providerId="ADAL" clId="{7F9681A8-EEE2-56F4-9B39-ECCBEE0471AC}" dt="2026-02-22T22:16:54.104" v="878" actId="1076"/>
+        <pc:sldMkLst>
+          <pc:docMk/>
+          <pc:sldMk cId="1284719906" sldId="362"/>
+        </pc:sldMkLst>
+        <pc:spChg chg="mod">
+          <ac:chgData name="Toby Donaldson" userId="2e6e5431-bb17-4c41-9985-d39c50d83c73" providerId="ADAL" clId="{7F9681A8-EEE2-56F4-9B39-ECCBEE0471AC}" dt="2026-02-22T22:16:50.006" v="877" actId="14100"/>
+          <ac:spMkLst>
+            <pc:docMk/>
+            <pc:sldMk cId="1284719906" sldId="362"/>
+            <ac:spMk id="2" creationId="{AE2F2F70-61F3-6D30-823C-4300AB1FE4D1}"/>
+          </ac:spMkLst>
+        </pc:spChg>
+        <pc:spChg chg="add mod">
+          <ac:chgData name="Toby Donaldson" userId="2e6e5431-bb17-4c41-9985-d39c50d83c73" providerId="ADAL" clId="{7F9681A8-EEE2-56F4-9B39-ECCBEE0471AC}" dt="2026-02-22T22:14:14.429" v="779"/>
+          <ac:spMkLst>
+            <pc:docMk/>
+            <pc:sldMk cId="1284719906" sldId="362"/>
+            <ac:spMk id="3" creationId="{317D8174-328E-9171-0EF9-41B449F86FB5}"/>
+          </ac:spMkLst>
+        </pc:spChg>
+        <pc:spChg chg="mod">
+          <ac:chgData name="Toby Donaldson" userId="2e6e5431-bb17-4c41-9985-d39c50d83c73" providerId="ADAL" clId="{7F9681A8-EEE2-56F4-9B39-ECCBEE0471AC}" dt="2026-02-22T22:16:37.155" v="875" actId="20577"/>
+          <ac:spMkLst>
+            <pc:docMk/>
+            <pc:sldMk cId="1284719906" sldId="362"/>
+            <ac:spMk id="8" creationId="{93F4B653-A754-C226-69EF-14B44F8FF672}"/>
+          </ac:spMkLst>
+        </pc:spChg>
+        <pc:spChg chg="del">
+          <ac:chgData name="Toby Donaldson" userId="2e6e5431-bb17-4c41-9985-d39c50d83c73" providerId="ADAL" clId="{7F9681A8-EEE2-56F4-9B39-ECCBEE0471AC}" dt="2026-02-22T22:13:36.479" v="769" actId="21"/>
+          <ac:spMkLst>
+            <pc:docMk/>
+            <pc:sldMk cId="1284719906" sldId="362"/>
+            <ac:spMk id="13" creationId="{F42D6FC1-4595-2ED0-305A-9CAD4AC0995D}"/>
+          </ac:spMkLst>
+        </pc:spChg>
+        <pc:spChg chg="mod">
+          <ac:chgData name="Toby Donaldson" userId="2e6e5431-bb17-4c41-9985-d39c50d83c73" providerId="ADAL" clId="{7F9681A8-EEE2-56F4-9B39-ECCBEE0471AC}" dt="2026-02-22T22:16:54.104" v="878" actId="1076"/>
+          <ac:spMkLst>
+            <pc:docMk/>
+            <pc:sldMk cId="1284719906" sldId="362"/>
+            <ac:spMk id="16" creationId="{48AD8FBE-0821-ADF3-3C3E-D20D83F36C86}"/>
+          </ac:spMkLst>
+        </pc:spChg>
+      </pc:sldChg>
+      <pc:sldChg chg="addSp delSp modSp mod">
+        <pc:chgData name="Toby Donaldson" userId="2e6e5431-bb17-4c41-9985-d39c50d83c73" providerId="ADAL" clId="{7F9681A8-EEE2-56F4-9B39-ECCBEE0471AC}" dt="2026-02-22T22:17:36.926" v="882" actId="207"/>
+        <pc:sldMkLst>
+          <pc:docMk/>
+          <pc:sldMk cId="2449079006" sldId="363"/>
+        </pc:sldMkLst>
+        <pc:spChg chg="del">
+          <ac:chgData name="Toby Donaldson" userId="2e6e5431-bb17-4c41-9985-d39c50d83c73" providerId="ADAL" clId="{7F9681A8-EEE2-56F4-9B39-ECCBEE0471AC}" dt="2026-02-22T22:17:28.205" v="881" actId="21"/>
+          <ac:spMkLst>
+            <pc:docMk/>
+            <pc:sldMk cId="2449079006" sldId="363"/>
+            <ac:spMk id="2" creationId="{C0CB5DA9-59DE-4210-7C00-F1ACE396232D}"/>
+          </ac:spMkLst>
+        </pc:spChg>
+        <pc:spChg chg="mod">
+          <ac:chgData name="Toby Donaldson" userId="2e6e5431-bb17-4c41-9985-d39c50d83c73" providerId="ADAL" clId="{7F9681A8-EEE2-56F4-9B39-ECCBEE0471AC}" dt="2026-02-22T22:17:23.956" v="880" actId="1076"/>
+          <ac:spMkLst>
+            <pc:docMk/>
+            <pc:sldMk cId="2449079006" sldId="363"/>
+            <ac:spMk id="3" creationId="{4746548D-4ABA-E7FA-38EE-76DEC52242C3}"/>
+          </ac:spMkLst>
+        </pc:spChg>
+        <pc:spChg chg="add mod">
+          <ac:chgData name="Toby Donaldson" userId="2e6e5431-bb17-4c41-9985-d39c50d83c73" providerId="ADAL" clId="{7F9681A8-EEE2-56F4-9B39-ECCBEE0471AC}" dt="2026-02-22T22:14:16.877" v="780"/>
+          <ac:spMkLst>
+            <pc:docMk/>
+            <pc:sldMk cId="2449079006" sldId="363"/>
+            <ac:spMk id="5" creationId="{D9B0C36F-EF08-2EE5-EBF5-266FE4C8DF4E}"/>
+          </ac:spMkLst>
+        </pc:spChg>
+        <pc:spChg chg="mod">
+          <ac:chgData name="Toby Donaldson" userId="2e6e5431-bb17-4c41-9985-d39c50d83c73" providerId="ADAL" clId="{7F9681A8-EEE2-56F4-9B39-ECCBEE0471AC}" dt="2026-02-22T22:17:36.926" v="882" actId="207"/>
+          <ac:spMkLst>
+            <pc:docMk/>
+            <pc:sldMk cId="2449079006" sldId="363"/>
+            <ac:spMk id="8" creationId="{2E7B6826-0853-7587-6564-CFAF19DAA755}"/>
+          </ac:spMkLst>
+        </pc:spChg>
+        <pc:spChg chg="del">
+          <ac:chgData name="Toby Donaldson" userId="2e6e5431-bb17-4c41-9985-d39c50d83c73" providerId="ADAL" clId="{7F9681A8-EEE2-56F4-9B39-ECCBEE0471AC}" dt="2026-02-22T22:13:40.523" v="770" actId="21"/>
+          <ac:spMkLst>
+            <pc:docMk/>
+            <pc:sldMk cId="2449079006" sldId="363"/>
+            <ac:spMk id="13" creationId="{90959C8C-DF63-0C8D-7AB6-B7F27BAC9135}"/>
+          </ac:spMkLst>
+        </pc:spChg>
+      </pc:sldChg>
+      <pc:sldChg chg="addSp delSp modSp mod">
+        <pc:chgData name="Toby Donaldson" userId="2e6e5431-bb17-4c41-9985-d39c50d83c73" providerId="ADAL" clId="{7F9681A8-EEE2-56F4-9B39-ECCBEE0471AC}" dt="2026-02-22T22:14:17.916" v="781"/>
+        <pc:sldMkLst>
+          <pc:docMk/>
+          <pc:sldMk cId="4126514322" sldId="364"/>
+        </pc:sldMkLst>
+        <pc:spChg chg="add mod">
+          <ac:chgData name="Toby Donaldson" userId="2e6e5431-bb17-4c41-9985-d39c50d83c73" providerId="ADAL" clId="{7F9681A8-EEE2-56F4-9B39-ECCBEE0471AC}" dt="2026-02-22T22:14:17.916" v="781"/>
+          <ac:spMkLst>
+            <pc:docMk/>
+            <pc:sldMk cId="4126514322" sldId="364"/>
+            <ac:spMk id="2" creationId="{41ED180E-7A76-103A-A5EF-F6B6E677EE64}"/>
+          </ac:spMkLst>
+        </pc:spChg>
+        <pc:spChg chg="del">
+          <ac:chgData name="Toby Donaldson" userId="2e6e5431-bb17-4c41-9985-d39c50d83c73" providerId="ADAL" clId="{7F9681A8-EEE2-56F4-9B39-ECCBEE0471AC}" dt="2026-02-22T22:13:43.551" v="771" actId="21"/>
+          <ac:spMkLst>
+            <pc:docMk/>
+            <pc:sldMk cId="4126514322" sldId="364"/>
+            <ac:spMk id="13" creationId="{C8E7BA90-93D3-3F19-8ECB-2E7DA69BDCEE}"/>
+          </ac:spMkLst>
+        </pc:spChg>
+      </pc:sldChg>
+      <pc:sldChg chg="addSp delSp modSp mod">
+        <pc:chgData name="Toby Donaldson" userId="2e6e5431-bb17-4c41-9985-d39c50d83c73" providerId="ADAL" clId="{7F9681A8-EEE2-56F4-9B39-ECCBEE0471AC}" dt="2026-02-22T22:14:18.956" v="782"/>
+        <pc:sldMkLst>
+          <pc:docMk/>
+          <pc:sldMk cId="1293448474" sldId="365"/>
+        </pc:sldMkLst>
+        <pc:spChg chg="mod">
+          <ac:chgData name="Toby Donaldson" userId="2e6e5431-bb17-4c41-9985-d39c50d83c73" providerId="ADAL" clId="{7F9681A8-EEE2-56F4-9B39-ECCBEE0471AC}" dt="2026-02-22T22:01:43.778" v="487" actId="20577"/>
+          <ac:spMkLst>
+            <pc:docMk/>
+            <pc:sldMk cId="1293448474" sldId="365"/>
+            <ac:spMk id="2" creationId="{97A7E02D-F94E-03EF-BB37-95D82E705B72}"/>
+          </ac:spMkLst>
+        </pc:spChg>
+        <pc:spChg chg="add mod">
+          <ac:chgData name="Toby Donaldson" userId="2e6e5431-bb17-4c41-9985-d39c50d83c73" providerId="ADAL" clId="{7F9681A8-EEE2-56F4-9B39-ECCBEE0471AC}" dt="2026-02-22T22:14:18.956" v="782"/>
+          <ac:spMkLst>
+            <pc:docMk/>
+            <pc:sldMk cId="1293448474" sldId="365"/>
+            <ac:spMk id="3" creationId="{2FD0445C-C0B9-DD9B-A990-057013B90790}"/>
+          </ac:spMkLst>
+        </pc:spChg>
+        <pc:spChg chg="del">
+          <ac:chgData name="Toby Donaldson" userId="2e6e5431-bb17-4c41-9985-d39c50d83c73" providerId="ADAL" clId="{7F9681A8-EEE2-56F4-9B39-ECCBEE0471AC}" dt="2026-02-22T22:13:46.792" v="772" actId="21"/>
+          <ac:spMkLst>
+            <pc:docMk/>
+            <pc:sldMk cId="1293448474" sldId="365"/>
+            <ac:spMk id="13" creationId="{6E8023B5-8E01-1026-4932-2979AF8F2DE0}"/>
+          </ac:spMkLst>
+        </pc:spChg>
+      </pc:sldChg>
+      <pc:sldChg chg="addSp delSp modSp mod">
+        <pc:chgData name="Toby Donaldson" userId="2e6e5431-bb17-4c41-9985-d39c50d83c73" providerId="ADAL" clId="{7F9681A8-EEE2-56F4-9B39-ECCBEE0471AC}" dt="2026-02-22T22:14:21.015" v="783"/>
+        <pc:sldMkLst>
+          <pc:docMk/>
+          <pc:sldMk cId="421622308" sldId="366"/>
+        </pc:sldMkLst>
+        <pc:spChg chg="mod">
+          <ac:chgData name="Toby Donaldson" userId="2e6e5431-bb17-4c41-9985-d39c50d83c73" providerId="ADAL" clId="{7F9681A8-EEE2-56F4-9B39-ECCBEE0471AC}" dt="2026-02-22T22:01:47.301" v="489" actId="20577"/>
+          <ac:spMkLst>
+            <pc:docMk/>
+            <pc:sldMk cId="421622308" sldId="366"/>
+            <ac:spMk id="2" creationId="{E6AC7D00-8FA8-8E6A-F822-4F5436216ACD}"/>
+          </ac:spMkLst>
+        </pc:spChg>
+        <pc:spChg chg="add mod">
+          <ac:chgData name="Toby Donaldson" userId="2e6e5431-bb17-4c41-9985-d39c50d83c73" providerId="ADAL" clId="{7F9681A8-EEE2-56F4-9B39-ECCBEE0471AC}" dt="2026-02-22T22:08:37.165" v="735" actId="1076"/>
+          <ac:spMkLst>
+            <pc:docMk/>
+            <pc:sldMk cId="421622308" sldId="366"/>
+            <ac:spMk id="3" creationId="{38AECEDE-0163-7D72-1A0D-A9624FDA574C}"/>
+          </ac:spMkLst>
+        </pc:spChg>
+        <pc:spChg chg="add mod">
+          <ac:chgData name="Toby Donaldson" userId="2e6e5431-bb17-4c41-9985-d39c50d83c73" providerId="ADAL" clId="{7F9681A8-EEE2-56F4-9B39-ECCBEE0471AC}" dt="2026-02-22T22:14:21.015" v="783"/>
+          <ac:spMkLst>
+            <pc:docMk/>
+            <pc:sldMk cId="421622308" sldId="366"/>
+            <ac:spMk id="7" creationId="{36317DB9-B17B-48F0-5368-E5AC938DFEFD}"/>
+          </ac:spMkLst>
+        </pc:spChg>
+        <pc:spChg chg="del">
+          <ac:chgData name="Toby Donaldson" userId="2e6e5431-bb17-4c41-9985-d39c50d83c73" providerId="ADAL" clId="{7F9681A8-EEE2-56F4-9B39-ECCBEE0471AC}" dt="2026-02-22T22:13:51.608" v="773" actId="21"/>
+          <ac:spMkLst>
+            <pc:docMk/>
+            <pc:sldMk cId="421622308" sldId="366"/>
+            <ac:spMk id="13" creationId="{10B94123-D430-E060-427E-15EE3DD852C2}"/>
+          </ac:spMkLst>
+        </pc:spChg>
+      </pc:sldChg>
+      <pc:sldChg chg="addSp delSp modSp mod">
+        <pc:chgData name="Toby Donaldson" userId="2e6e5431-bb17-4c41-9985-d39c50d83c73" providerId="ADAL" clId="{7F9681A8-EEE2-56F4-9B39-ECCBEE0471AC}" dt="2026-02-22T22:18:53.621" v="905" actId="20577"/>
+        <pc:sldMkLst>
+          <pc:docMk/>
+          <pc:sldMk cId="1753056197" sldId="367"/>
+        </pc:sldMkLst>
+        <pc:spChg chg="add mod">
+          <ac:chgData name="Toby Donaldson" userId="2e6e5431-bb17-4c41-9985-d39c50d83c73" providerId="ADAL" clId="{7F9681A8-EEE2-56F4-9B39-ECCBEE0471AC}" dt="2026-02-22T22:14:21.839" v="784"/>
+          <ac:spMkLst>
+            <pc:docMk/>
+            <pc:sldMk cId="1753056197" sldId="367"/>
+            <ac:spMk id="3" creationId="{5B24FC2C-71BC-E179-2C3C-54F23083FFAF}"/>
+          </ac:spMkLst>
+        </pc:spChg>
+        <pc:spChg chg="mod">
+          <ac:chgData name="Toby Donaldson" userId="2e6e5431-bb17-4c41-9985-d39c50d83c73" providerId="ADAL" clId="{7F9681A8-EEE2-56F4-9B39-ECCBEE0471AC}" dt="2026-02-22T22:18:53.621" v="905" actId="20577"/>
+          <ac:spMkLst>
+            <pc:docMk/>
+            <pc:sldMk cId="1753056197" sldId="367"/>
+            <ac:spMk id="5" creationId="{74500349-6A04-0D1E-FD63-9FD1660106DF}"/>
+          </ac:spMkLst>
+        </pc:spChg>
+        <pc:spChg chg="del">
+          <ac:chgData name="Toby Donaldson" userId="2e6e5431-bb17-4c41-9985-d39c50d83c73" providerId="ADAL" clId="{7F9681A8-EEE2-56F4-9B39-ECCBEE0471AC}" dt="2026-02-22T22:13:54.800" v="774" actId="21"/>
+          <ac:spMkLst>
+            <pc:docMk/>
+            <pc:sldMk cId="1753056197" sldId="367"/>
+            <ac:spMk id="13" creationId="{C99DBD87-F576-6EE2-374A-F38781E8C895}"/>
+          </ac:spMkLst>
+        </pc:spChg>
+      </pc:sldChg>
+      <pc:sldChg chg="addSp delSp modSp mod">
+        <pc:chgData name="Toby Donaldson" userId="2e6e5431-bb17-4c41-9985-d39c50d83c73" providerId="ADAL" clId="{7F9681A8-EEE2-56F4-9B39-ECCBEE0471AC}" dt="2026-02-22T22:14:22.824" v="785"/>
+        <pc:sldMkLst>
+          <pc:docMk/>
+          <pc:sldMk cId="231730313" sldId="368"/>
+        </pc:sldMkLst>
+        <pc:spChg chg="add mod">
+          <ac:chgData name="Toby Donaldson" userId="2e6e5431-bb17-4c41-9985-d39c50d83c73" providerId="ADAL" clId="{7F9681A8-EEE2-56F4-9B39-ECCBEE0471AC}" dt="2026-02-22T22:14:22.824" v="785"/>
+          <ac:spMkLst>
+            <pc:docMk/>
+            <pc:sldMk cId="231730313" sldId="368"/>
+            <ac:spMk id="7" creationId="{3931F9C5-CB5A-4AE2-3811-DF8AA0BB9594}"/>
+          </ac:spMkLst>
+        </pc:spChg>
+        <pc:spChg chg="del">
+          <ac:chgData name="Toby Donaldson" userId="2e6e5431-bb17-4c41-9985-d39c50d83c73" providerId="ADAL" clId="{7F9681A8-EEE2-56F4-9B39-ECCBEE0471AC}" dt="2026-02-22T22:13:58.502" v="775" actId="21"/>
+          <ac:spMkLst>
+            <pc:docMk/>
+            <pc:sldMk cId="231730313" sldId="368"/>
+            <ac:spMk id="13" creationId="{6CCC3F08-505C-0466-33F3-58C6FA026FCC}"/>
+          </ac:spMkLst>
+        </pc:spChg>
+      </pc:sldChg>
+      <pc:sldChg chg="addSp delSp modSp mod">
+        <pc:chgData name="Toby Donaldson" userId="2e6e5431-bb17-4c41-9985-d39c50d83c73" providerId="ADAL" clId="{7F9681A8-EEE2-56F4-9B39-ECCBEE0471AC}" dt="2026-02-22T22:14:24.475" v="786"/>
+        <pc:sldMkLst>
+          <pc:docMk/>
+          <pc:sldMk cId="1183669396" sldId="371"/>
+        </pc:sldMkLst>
+        <pc:spChg chg="add mod">
+          <ac:chgData name="Toby Donaldson" userId="2e6e5431-bb17-4c41-9985-d39c50d83c73" providerId="ADAL" clId="{7F9681A8-EEE2-56F4-9B39-ECCBEE0471AC}" dt="2026-02-22T22:14:24.475" v="786"/>
+          <ac:spMkLst>
+            <pc:docMk/>
+            <pc:sldMk cId="1183669396" sldId="371"/>
+            <ac:spMk id="8" creationId="{FF1DFB6F-E89F-DB36-0EC8-E26B3D6227BF}"/>
+          </ac:spMkLst>
+        </pc:spChg>
+        <pc:spChg chg="del">
+          <ac:chgData name="Toby Donaldson" userId="2e6e5431-bb17-4c41-9985-d39c50d83c73" providerId="ADAL" clId="{7F9681A8-EEE2-56F4-9B39-ECCBEE0471AC}" dt="2026-02-22T22:14:01.152" v="776" actId="21"/>
+          <ac:spMkLst>
+            <pc:docMk/>
+            <pc:sldMk cId="1183669396" sldId="371"/>
+            <ac:spMk id="13" creationId="{8659986C-907D-6665-29FE-4520A6EB225C}"/>
+          </ac:spMkLst>
+        </pc:spChg>
+      </pc:sldChg>
+      <pc:sldChg chg="modSp mod">
         <pc:chgData name="Toby Donaldson" userId="2e6e5431-bb17-4c41-9985-d39c50d83c73" providerId="ADAL" clId="{7F9681A8-EEE2-56F4-9B39-ECCBEE0471AC}" dt="2026-02-22T21:17:00.744" v="107" actId="20577"/>
         <pc:sldMkLst>
           <pc:docMk/>
@@ -832,6 +1288,98 @@
             <pc:docMk/>
             <pc:sldMk cId="3054231408" sldId="372"/>
             <ac:spMk id="3" creationId="{636BB7AF-536E-960D-5DBF-B13DCDB5AE38}"/>
+          </ac:spMkLst>
+        </pc:spChg>
+      </pc:sldChg>
+      <pc:sldChg chg="modSp mod">
+        <pc:chgData name="Toby Donaldson" userId="2e6e5431-bb17-4c41-9985-d39c50d83c73" providerId="ADAL" clId="{7F9681A8-EEE2-56F4-9B39-ECCBEE0471AC}" dt="2026-02-22T21:58:12.380" v="484" actId="313"/>
+        <pc:sldMkLst>
+          <pc:docMk/>
+          <pc:sldMk cId="424805642" sldId="374"/>
+        </pc:sldMkLst>
+        <pc:spChg chg="mod">
+          <ac:chgData name="Toby Donaldson" userId="2e6e5431-bb17-4c41-9985-d39c50d83c73" providerId="ADAL" clId="{7F9681A8-EEE2-56F4-9B39-ECCBEE0471AC}" dt="2026-02-22T21:58:12.380" v="484" actId="313"/>
+          <ac:spMkLst>
+            <pc:docMk/>
+            <pc:sldMk cId="424805642" sldId="374"/>
+            <ac:spMk id="7" creationId="{B6CD8394-EAD2-8EA2-FF7B-42630ECF5EED}"/>
+          </ac:spMkLst>
+        </pc:spChg>
+      </pc:sldChg>
+      <pc:sldChg chg="addSp delSp modSp mod">
+        <pc:chgData name="Toby Donaldson" userId="2e6e5431-bb17-4c41-9985-d39c50d83c73" providerId="ADAL" clId="{7F9681A8-EEE2-56F4-9B39-ECCBEE0471AC}" dt="2026-02-22T22:12:31.002" v="758"/>
+        <pc:sldMkLst>
+          <pc:docMk/>
+          <pc:sldMk cId="1153658592" sldId="376"/>
+        </pc:sldMkLst>
+        <pc:spChg chg="add mod">
+          <ac:chgData name="Toby Donaldson" userId="2e6e5431-bb17-4c41-9985-d39c50d83c73" providerId="ADAL" clId="{7F9681A8-EEE2-56F4-9B39-ECCBEE0471AC}" dt="2026-02-22T22:12:31.002" v="758"/>
+          <ac:spMkLst>
+            <pc:docMk/>
+            <pc:sldMk cId="1153658592" sldId="376"/>
+            <ac:spMk id="2" creationId="{CCF4A50D-D8B9-24A2-CF5F-B80C1DEC9CEC}"/>
+          </ac:spMkLst>
+        </pc:spChg>
+        <pc:spChg chg="del">
+          <ac:chgData name="Toby Donaldson" userId="2e6e5431-bb17-4c41-9985-d39c50d83c73" providerId="ADAL" clId="{7F9681A8-EEE2-56F4-9B39-ECCBEE0471AC}" dt="2026-02-22T22:12:25.809" v="757" actId="21"/>
+          <ac:spMkLst>
+            <pc:docMk/>
+            <pc:sldMk cId="1153658592" sldId="376"/>
+            <ac:spMk id="13" creationId="{D2FA35C1-C330-2694-3B2C-09F9346EC6EB}"/>
+          </ac:spMkLst>
+        </pc:spChg>
+      </pc:sldChg>
+      <pc:sldChg chg="addSp delSp modSp mod">
+        <pc:chgData name="Toby Donaldson" userId="2e6e5431-bb17-4c41-9985-d39c50d83c73" providerId="ADAL" clId="{7F9681A8-EEE2-56F4-9B39-ECCBEE0471AC}" dt="2026-02-22T22:13:08.323" v="764"/>
+        <pc:sldMkLst>
+          <pc:docMk/>
+          <pc:sldMk cId="3485724722" sldId="377"/>
+        </pc:sldMkLst>
+        <pc:spChg chg="add mod">
+          <ac:chgData name="Toby Donaldson" userId="2e6e5431-bb17-4c41-9985-d39c50d83c73" providerId="ADAL" clId="{7F9681A8-EEE2-56F4-9B39-ECCBEE0471AC}" dt="2026-02-22T22:13:08.323" v="764"/>
+          <ac:spMkLst>
+            <pc:docMk/>
+            <pc:sldMk cId="3485724722" sldId="377"/>
+            <ac:spMk id="2" creationId="{8A4F8B5B-04FD-8F26-8E30-3F5D6A46992C}"/>
+          </ac:spMkLst>
+        </pc:spChg>
+        <pc:spChg chg="del">
+          <ac:chgData name="Toby Donaldson" userId="2e6e5431-bb17-4c41-9985-d39c50d83c73" providerId="ADAL" clId="{7F9681A8-EEE2-56F4-9B39-ECCBEE0471AC}" dt="2026-02-22T22:13:03.069" v="763" actId="21"/>
+          <ac:spMkLst>
+            <pc:docMk/>
+            <pc:sldMk cId="3485724722" sldId="377"/>
+            <ac:spMk id="13" creationId="{66BE07DC-CE31-C9E2-9195-1C1F6E45EA04}"/>
+          </ac:spMkLst>
+        </pc:spChg>
+      </pc:sldChg>
+      <pc:sldChg chg="addSp delSp modSp mod">
+        <pc:chgData name="Toby Donaldson" userId="2e6e5431-bb17-4c41-9985-d39c50d83c73" providerId="ADAL" clId="{7F9681A8-EEE2-56F4-9B39-ECCBEE0471AC}" dt="2026-02-22T22:16:07.892" v="865" actId="20577"/>
+        <pc:sldMkLst>
+          <pc:docMk/>
+          <pc:sldMk cId="412921335" sldId="378"/>
+        </pc:sldMkLst>
+        <pc:spChg chg="add mod">
+          <ac:chgData name="Toby Donaldson" userId="2e6e5431-bb17-4c41-9985-d39c50d83c73" providerId="ADAL" clId="{7F9681A8-EEE2-56F4-9B39-ECCBEE0471AC}" dt="2026-02-22T22:13:23.435" v="766"/>
+          <ac:spMkLst>
+            <pc:docMk/>
+            <pc:sldMk cId="412921335" sldId="378"/>
+            <ac:spMk id="2" creationId="{E9270EA4-1FD7-CF3E-6D21-A745D402CC3F}"/>
+          </ac:spMkLst>
+        </pc:spChg>
+        <pc:spChg chg="mod">
+          <ac:chgData name="Toby Donaldson" userId="2e6e5431-bb17-4c41-9985-d39c50d83c73" providerId="ADAL" clId="{7F9681A8-EEE2-56F4-9B39-ECCBEE0471AC}" dt="2026-02-22T22:16:07.892" v="865" actId="20577"/>
+          <ac:spMkLst>
+            <pc:docMk/>
+            <pc:sldMk cId="412921335" sldId="378"/>
+            <ac:spMk id="5" creationId="{4F773B17-212E-B453-2887-9DA356577476}"/>
+          </ac:spMkLst>
+        </pc:spChg>
+        <pc:spChg chg="del">
+          <ac:chgData name="Toby Donaldson" userId="2e6e5431-bb17-4c41-9985-d39c50d83c73" providerId="ADAL" clId="{7F9681A8-EEE2-56F4-9B39-ECCBEE0471AC}" dt="2026-02-22T22:13:18.127" v="765" actId="21"/>
+          <ac:spMkLst>
+            <pc:docMk/>
+            <pc:sldMk cId="412921335" sldId="378"/>
+            <ac:spMk id="13" creationId="{A066B6E3-4C31-0452-2F0E-A3268EEF8A08}"/>
           </ac:spMkLst>
         </pc:spChg>
       </pc:sldChg>
@@ -892,6 +1440,52 @@
             <pc:docMk/>
             <pc:sldMk cId="2638747293" sldId="382"/>
             <ac:spMk id="3" creationId="{08F8135C-35F7-CC56-A4E4-BD367B7AFED9}"/>
+          </ac:spMkLst>
+        </pc:spChg>
+      </pc:sldChg>
+      <pc:sldChg chg="delSp modSp add mod">
+        <pc:chgData name="Toby Donaldson" userId="2e6e5431-bb17-4c41-9985-d39c50d83c73" providerId="ADAL" clId="{7F9681A8-EEE2-56F4-9B39-ECCBEE0471AC}" dt="2026-02-22T21:51:28.521" v="448" actId="207"/>
+        <pc:sldMkLst>
+          <pc:docMk/>
+          <pc:sldMk cId="2732305658" sldId="383"/>
+        </pc:sldMkLst>
+        <pc:spChg chg="mod">
+          <ac:chgData name="Toby Donaldson" userId="2e6e5431-bb17-4c41-9985-d39c50d83c73" providerId="ADAL" clId="{7F9681A8-EEE2-56F4-9B39-ECCBEE0471AC}" dt="2026-02-22T21:51:28.521" v="448" actId="207"/>
+          <ac:spMkLst>
+            <pc:docMk/>
+            <pc:sldMk cId="2732305658" sldId="383"/>
+            <ac:spMk id="3" creationId="{6E790511-AADC-B824-D395-5F01300CEBC4}"/>
+          </ac:spMkLst>
+        </pc:spChg>
+        <pc:spChg chg="del">
+          <ac:chgData name="Toby Donaldson" userId="2e6e5431-bb17-4c41-9985-d39c50d83c73" providerId="ADAL" clId="{7F9681A8-EEE2-56F4-9B39-ECCBEE0471AC}" dt="2026-02-22T21:50:57.924" v="411" actId="21"/>
+          <ac:spMkLst>
+            <pc:docMk/>
+            <pc:sldMk cId="2732305658" sldId="383"/>
+            <ac:spMk id="7" creationId="{E24B1024-BAF6-9EA7-458A-83CAEFBF1BCF}"/>
+          </ac:spMkLst>
+        </pc:spChg>
+      </pc:sldChg>
+      <pc:sldChg chg="delSp modSp add mod">
+        <pc:chgData name="Toby Donaldson" userId="2e6e5431-bb17-4c41-9985-d39c50d83c73" providerId="ADAL" clId="{7F9681A8-EEE2-56F4-9B39-ECCBEE0471AC}" dt="2026-02-22T21:56:46.875" v="474" actId="20577"/>
+        <pc:sldMkLst>
+          <pc:docMk/>
+          <pc:sldMk cId="3014772453" sldId="384"/>
+        </pc:sldMkLst>
+        <pc:spChg chg="mod">
+          <ac:chgData name="Toby Donaldson" userId="2e6e5431-bb17-4c41-9985-d39c50d83c73" providerId="ADAL" clId="{7F9681A8-EEE2-56F4-9B39-ECCBEE0471AC}" dt="2026-02-22T21:56:46.875" v="474" actId="20577"/>
+          <ac:spMkLst>
+            <pc:docMk/>
+            <pc:sldMk cId="3014772453" sldId="384"/>
+            <ac:spMk id="7" creationId="{C5B93777-FC5E-EEDC-0AA8-C1F3E99C299B}"/>
+          </ac:spMkLst>
+        </pc:spChg>
+        <pc:spChg chg="del">
+          <ac:chgData name="Toby Donaldson" userId="2e6e5431-bb17-4c41-9985-d39c50d83c73" providerId="ADAL" clId="{7F9681A8-EEE2-56F4-9B39-ECCBEE0471AC}" dt="2026-02-22T21:56:40.879" v="473" actId="21"/>
+          <ac:spMkLst>
+            <pc:docMk/>
+            <pc:sldMk cId="3014772453" sldId="384"/>
+            <ac:spMk id="9" creationId="{3B410024-9437-CFD6-51A1-1E68E228DCD7}"/>
           </ac:spMkLst>
         </pc:spChg>
       </pc:sldChg>
@@ -3826,6 +4420,114 @@
         <p:cNvPr id="1" name="">
           <a:extLst>
             <a:ext uri="{FF2B5EF4-FFF2-40B4-BE49-F238E27FC236}">
+              <a16:creationId xmlns:a16="http://schemas.microsoft.com/office/drawing/2014/main" id="{546AA87E-5FB5-A053-D62B-FF2B869DA75A}"/>
+            </a:ext>
+          </a:extLst>
+        </p:cNvPr>
+        <p:cNvGrpSpPr/>
+        <p:nvPr/>
+      </p:nvGrpSpPr>
+      <p:grpSpPr>
+        <a:xfrm>
+          <a:off x="0" y="0"/>
+          <a:ext cx="0" cy="0"/>
+          <a:chOff x="0" y="0"/>
+          <a:chExt cx="0" cy="0"/>
+        </a:xfrm>
+      </p:grpSpPr>
+      <p:sp>
+        <p:nvSpPr>
+          <p:cNvPr id="2" name="Slide Image Placeholder 1">
+            <a:extLst>
+              <a:ext uri="{FF2B5EF4-FFF2-40B4-BE49-F238E27FC236}">
+                <a16:creationId xmlns:a16="http://schemas.microsoft.com/office/drawing/2014/main" id="{B9298FF6-0CB8-185B-F2B7-5DC3B291D7C3}"/>
+              </a:ext>
+            </a:extLst>
+          </p:cNvPr>
+          <p:cNvSpPr>
+            <a:spLocks noGrp="1" noRot="1" noChangeAspect="1"/>
+          </p:cNvSpPr>
+          <p:nvPr>
+            <p:ph type="sldImg"/>
+          </p:nvPr>
+        </p:nvSpPr>
+        <p:spPr/>
+      </p:sp>
+      <p:sp>
+        <p:nvSpPr>
+          <p:cNvPr id="3" name="Notes Placeholder 2">
+            <a:extLst>
+              <a:ext uri="{FF2B5EF4-FFF2-40B4-BE49-F238E27FC236}">
+                <a16:creationId xmlns:a16="http://schemas.microsoft.com/office/drawing/2014/main" id="{A2640846-5DAF-24F2-6875-8F27443A17E7}"/>
+              </a:ext>
+            </a:extLst>
+          </p:cNvPr>
+          <p:cNvSpPr>
+            <a:spLocks noGrp="1"/>
+          </p:cNvSpPr>
+          <p:nvPr>
+            <p:ph type="body" idx="1"/>
+          </p:nvPr>
+        </p:nvSpPr>
+        <p:spPr/>
+        <p:txBody>
+          <a:bodyPr/>
+          <a:lstStyle/>
+          <a:p>
+            <a:endParaRPr lang="en-AU" dirty="0"/>
+          </a:p>
+        </p:txBody>
+      </p:sp>
+      <p:sp>
+        <p:nvSpPr>
+          <p:cNvPr id="4" name="Slide Number Placeholder 3">
+            <a:extLst>
+              <a:ext uri="{FF2B5EF4-FFF2-40B4-BE49-F238E27FC236}">
+                <a16:creationId xmlns:a16="http://schemas.microsoft.com/office/drawing/2014/main" id="{7D180596-6601-B32B-AE29-F730B6EC3E4C}"/>
+              </a:ext>
+            </a:extLst>
+          </p:cNvPr>
+          <p:cNvSpPr>
+            <a:spLocks noGrp="1"/>
+          </p:cNvSpPr>
+          <p:nvPr>
+            <p:ph type="sldNum" sz="quarter" idx="5"/>
+          </p:nvPr>
+        </p:nvSpPr>
+        <p:spPr/>
+        <p:txBody>
+          <a:bodyPr/>
+          <a:lstStyle/>
+          <a:p>
+            <a:fld id="{2F9F5347-3E6A-4C40-928A-729612897D4A}" type="slidenum">
+              <a:rPr lang="en-AU" smtClean="0"/>
+              <a:t>58</a:t>
+            </a:fld>
+            <a:endParaRPr lang="en-AU"/>
+          </a:p>
+        </p:txBody>
+      </p:sp>
+    </p:spTree>
+    <p:extLst>
+      <p:ext uri="{BB962C8B-B14F-4D97-AF65-F5344CB8AC3E}">
+        <p14:creationId xmlns:p14="http://schemas.microsoft.com/office/powerpoint/2010/main" val="975054968"/>
+      </p:ext>
+    </p:extLst>
+  </p:cSld>
+  <p:clrMapOvr>
+    <a:masterClrMapping/>
+  </p:clrMapOvr>
+</p:notes>
+</file>
+
+<file path=ppt/notesSlides/notesSlide32.xml><?xml version="1.0" encoding="utf-8"?>
+<p:notes xmlns:a="http://schemas.openxmlformats.org/drawingml/2006/main" xmlns:r="http://schemas.openxmlformats.org/officeDocument/2006/relationships" xmlns:p="http://schemas.openxmlformats.org/presentationml/2006/main">
+  <p:cSld>
+    <p:spTree>
+      <p:nvGrpSpPr>
+        <p:cNvPr id="1" name="">
+          <a:extLst>
+            <a:ext uri="{FF2B5EF4-FFF2-40B4-BE49-F238E27FC236}">
               <a16:creationId xmlns:a16="http://schemas.microsoft.com/office/drawing/2014/main" id="{90D8DBB2-365B-24F7-07D5-B00745761901}"/>
             </a:ext>
           </a:extLst>
@@ -3907,7 +4609,7 @@
           <a:p>
             <a:fld id="{2F9F5347-3E6A-4C40-928A-729612897D4A}" type="slidenum">
               <a:rPr lang="en-AU" smtClean="0"/>
-              <a:t>58</a:t>
+              <a:t>59</a:t>
             </a:fld>
             <a:endParaRPr lang="en-AU"/>
           </a:p>
@@ -3926,7 +4628,7 @@
 </p:notes>
 </file>
 
-<file path=ppt/notesSlides/notesSlide32.xml><?xml version="1.0" encoding="utf-8"?>
+<file path=ppt/notesSlides/notesSlide33.xml><?xml version="1.0" encoding="utf-8"?>
 <p:notes xmlns:a="http://schemas.openxmlformats.org/drawingml/2006/main" xmlns:r="http://schemas.openxmlformats.org/officeDocument/2006/relationships" xmlns:p="http://schemas.openxmlformats.org/presentationml/2006/main">
   <p:cSld>
     <p:spTree>
@@ -4015,7 +4717,7 @@
           <a:p>
             <a:fld id="{2F9F5347-3E6A-4C40-928A-729612897D4A}" type="slidenum">
               <a:rPr lang="en-AU" smtClean="0"/>
-              <a:t>59</a:t>
+              <a:t>60</a:t>
             </a:fld>
             <a:endParaRPr lang="en-AU"/>
           </a:p>
@@ -4034,7 +4736,7 @@
 </p:notes>
 </file>
 
-<file path=ppt/notesSlides/notesSlide33.xml><?xml version="1.0" encoding="utf-8"?>
+<file path=ppt/notesSlides/notesSlide34.xml><?xml version="1.0" encoding="utf-8"?>
 <p:notes xmlns:a="http://schemas.openxmlformats.org/drawingml/2006/main" xmlns:r="http://schemas.openxmlformats.org/officeDocument/2006/relationships" xmlns:p="http://schemas.openxmlformats.org/presentationml/2006/main">
   <p:cSld>
     <p:spTree>
@@ -4123,7 +4825,7 @@
           <a:p>
             <a:fld id="{2F9F5347-3E6A-4C40-928A-729612897D4A}" type="slidenum">
               <a:rPr lang="en-AU" smtClean="0"/>
-              <a:t>60</a:t>
+              <a:t>61</a:t>
             </a:fld>
             <a:endParaRPr lang="en-AU"/>
           </a:p>
@@ -4142,7 +4844,7 @@
 </p:notes>
 </file>
 
-<file path=ppt/notesSlides/notesSlide34.xml><?xml version="1.0" encoding="utf-8"?>
+<file path=ppt/notesSlides/notesSlide35.xml><?xml version="1.0" encoding="utf-8"?>
 <p:notes xmlns:a="http://schemas.openxmlformats.org/drawingml/2006/main" xmlns:r="http://schemas.openxmlformats.org/officeDocument/2006/relationships" xmlns:p="http://schemas.openxmlformats.org/presentationml/2006/main">
   <p:cSld>
     <p:spTree>
@@ -4231,7 +4933,7 @@
           <a:p>
             <a:fld id="{2F9F5347-3E6A-4C40-928A-729612897D4A}" type="slidenum">
               <a:rPr lang="en-AU" smtClean="0"/>
-              <a:t>61</a:t>
+              <a:t>62</a:t>
             </a:fld>
             <a:endParaRPr lang="en-AU"/>
           </a:p>
@@ -4250,7 +4952,7 @@
 </p:notes>
 </file>
 
-<file path=ppt/notesSlides/notesSlide35.xml><?xml version="1.0" encoding="utf-8"?>
+<file path=ppt/notesSlides/notesSlide36.xml><?xml version="1.0" encoding="utf-8"?>
 <p:notes xmlns:a="http://schemas.openxmlformats.org/drawingml/2006/main" xmlns:r="http://schemas.openxmlformats.org/officeDocument/2006/relationships" xmlns:p="http://schemas.openxmlformats.org/presentationml/2006/main">
   <p:cSld>
     <p:spTree>
@@ -4339,7 +5041,7 @@
           <a:p>
             <a:fld id="{2F9F5347-3E6A-4C40-928A-729612897D4A}" type="slidenum">
               <a:rPr lang="en-AU" smtClean="0"/>
-              <a:t>62</a:t>
+              <a:t>63</a:t>
             </a:fld>
             <a:endParaRPr lang="en-AU"/>
           </a:p>
@@ -4358,7 +5060,7 @@
 </p:notes>
 </file>
 
-<file path=ppt/notesSlides/notesSlide36.xml><?xml version="1.0" encoding="utf-8"?>
+<file path=ppt/notesSlides/notesSlide37.xml><?xml version="1.0" encoding="utf-8"?>
 <p:notes xmlns:a="http://schemas.openxmlformats.org/drawingml/2006/main" xmlns:r="http://schemas.openxmlformats.org/officeDocument/2006/relationships" xmlns:p="http://schemas.openxmlformats.org/presentationml/2006/main">
   <p:cSld>
     <p:spTree>
@@ -4447,7 +5149,7 @@
           <a:p>
             <a:fld id="{2F9F5347-3E6A-4C40-928A-729612897D4A}" type="slidenum">
               <a:rPr lang="en-AU" smtClean="0"/>
-              <a:t>63</a:t>
+              <a:t>64</a:t>
             </a:fld>
             <a:endParaRPr lang="en-AU"/>
           </a:p>
@@ -4466,7 +5168,7 @@
 </p:notes>
 </file>
 
-<file path=ppt/notesSlides/notesSlide37.xml><?xml version="1.0" encoding="utf-8"?>
+<file path=ppt/notesSlides/notesSlide38.xml><?xml version="1.0" encoding="utf-8"?>
 <p:notes xmlns:a="http://schemas.openxmlformats.org/drawingml/2006/main" xmlns:r="http://schemas.openxmlformats.org/officeDocument/2006/relationships" xmlns:p="http://schemas.openxmlformats.org/presentationml/2006/main">
   <p:cSld>
     <p:spTree>
@@ -4555,7 +5257,7 @@
           <a:p>
             <a:fld id="{2F9F5347-3E6A-4C40-928A-729612897D4A}" type="slidenum">
               <a:rPr lang="en-AU" smtClean="0"/>
-              <a:t>64</a:t>
+              <a:t>65</a:t>
             </a:fld>
             <a:endParaRPr lang="en-AU"/>
           </a:p>
@@ -4574,7 +5276,7 @@
 </p:notes>
 </file>
 
-<file path=ppt/notesSlides/notesSlide38.xml><?xml version="1.0" encoding="utf-8"?>
+<file path=ppt/notesSlides/notesSlide39.xml><?xml version="1.0" encoding="utf-8"?>
 <p:notes xmlns:a="http://schemas.openxmlformats.org/drawingml/2006/main" xmlns:r="http://schemas.openxmlformats.org/officeDocument/2006/relationships" xmlns:p="http://schemas.openxmlformats.org/presentationml/2006/main">
   <p:cSld>
     <p:spTree>
@@ -4663,7 +5365,7 @@
           <a:p>
             <a:fld id="{2F9F5347-3E6A-4C40-928A-729612897D4A}" type="slidenum">
               <a:rPr lang="en-AU" smtClean="0"/>
-              <a:t>65</a:t>
+              <a:t>66</a:t>
             </a:fld>
             <a:endParaRPr lang="en-AU"/>
           </a:p>
@@ -4682,7 +5384,115 @@
 </p:notes>
 </file>
 
-<file path=ppt/notesSlides/notesSlide39.xml><?xml version="1.0" encoding="utf-8"?>
+<file path=ppt/notesSlides/notesSlide4.xml><?xml version="1.0" encoding="utf-8"?>
+<p:notes xmlns:a="http://schemas.openxmlformats.org/drawingml/2006/main" xmlns:r="http://schemas.openxmlformats.org/officeDocument/2006/relationships" xmlns:p="http://schemas.openxmlformats.org/presentationml/2006/main">
+  <p:cSld>
+    <p:spTree>
+      <p:nvGrpSpPr>
+        <p:cNvPr id="1" name="">
+          <a:extLst>
+            <a:ext uri="{FF2B5EF4-FFF2-40B4-BE49-F238E27FC236}">
+              <a16:creationId xmlns:a16="http://schemas.microsoft.com/office/drawing/2014/main" id="{BFC185C0-DEDB-F0DE-5770-FA58F6A89904}"/>
+            </a:ext>
+          </a:extLst>
+        </p:cNvPr>
+        <p:cNvGrpSpPr/>
+        <p:nvPr/>
+      </p:nvGrpSpPr>
+      <p:grpSpPr>
+        <a:xfrm>
+          <a:off x="0" y="0"/>
+          <a:ext cx="0" cy="0"/>
+          <a:chOff x="0" y="0"/>
+          <a:chExt cx="0" cy="0"/>
+        </a:xfrm>
+      </p:grpSpPr>
+      <p:sp>
+        <p:nvSpPr>
+          <p:cNvPr id="2" name="Slide Image Placeholder 1">
+            <a:extLst>
+              <a:ext uri="{FF2B5EF4-FFF2-40B4-BE49-F238E27FC236}">
+                <a16:creationId xmlns:a16="http://schemas.microsoft.com/office/drawing/2014/main" id="{02946557-D87A-73E2-6D6E-61E8B9B3C965}"/>
+              </a:ext>
+            </a:extLst>
+          </p:cNvPr>
+          <p:cNvSpPr>
+            <a:spLocks noGrp="1" noRot="1" noChangeAspect="1"/>
+          </p:cNvSpPr>
+          <p:nvPr>
+            <p:ph type="sldImg"/>
+          </p:nvPr>
+        </p:nvSpPr>
+        <p:spPr/>
+      </p:sp>
+      <p:sp>
+        <p:nvSpPr>
+          <p:cNvPr id="3" name="Notes Placeholder 2">
+            <a:extLst>
+              <a:ext uri="{FF2B5EF4-FFF2-40B4-BE49-F238E27FC236}">
+                <a16:creationId xmlns:a16="http://schemas.microsoft.com/office/drawing/2014/main" id="{175F892C-A4FC-FDE0-77FC-428DE84D72A7}"/>
+              </a:ext>
+            </a:extLst>
+          </p:cNvPr>
+          <p:cNvSpPr>
+            <a:spLocks noGrp="1"/>
+          </p:cNvSpPr>
+          <p:nvPr>
+            <p:ph type="body" idx="1"/>
+          </p:nvPr>
+        </p:nvSpPr>
+        <p:spPr/>
+        <p:txBody>
+          <a:bodyPr/>
+          <a:lstStyle/>
+          <a:p>
+            <a:endParaRPr lang="en-AU" dirty="0"/>
+          </a:p>
+        </p:txBody>
+      </p:sp>
+      <p:sp>
+        <p:nvSpPr>
+          <p:cNvPr id="4" name="Slide Number Placeholder 3">
+            <a:extLst>
+              <a:ext uri="{FF2B5EF4-FFF2-40B4-BE49-F238E27FC236}">
+                <a16:creationId xmlns:a16="http://schemas.microsoft.com/office/drawing/2014/main" id="{92F5077D-5B20-9FCB-1453-47A7E7B76726}"/>
+              </a:ext>
+            </a:extLst>
+          </p:cNvPr>
+          <p:cNvSpPr>
+            <a:spLocks noGrp="1"/>
+          </p:cNvSpPr>
+          <p:nvPr>
+            <p:ph type="sldNum" sz="quarter" idx="5"/>
+          </p:nvPr>
+        </p:nvSpPr>
+        <p:spPr/>
+        <p:txBody>
+          <a:bodyPr/>
+          <a:lstStyle/>
+          <a:p>
+            <a:fld id="{2F9F5347-3E6A-4C40-928A-729612897D4A}" type="slidenum">
+              <a:rPr lang="en-AU" smtClean="0"/>
+              <a:t>31</a:t>
+            </a:fld>
+            <a:endParaRPr lang="en-AU"/>
+          </a:p>
+        </p:txBody>
+      </p:sp>
+    </p:spTree>
+    <p:extLst>
+      <p:ext uri="{BB962C8B-B14F-4D97-AF65-F5344CB8AC3E}">
+        <p14:creationId xmlns:p14="http://schemas.microsoft.com/office/powerpoint/2010/main" val="3321173335"/>
+      </p:ext>
+    </p:extLst>
+  </p:cSld>
+  <p:clrMapOvr>
+    <a:masterClrMapping/>
+  </p:clrMapOvr>
+</p:notes>
+</file>
+
+<file path=ppt/notesSlides/notesSlide40.xml><?xml version="1.0" encoding="utf-8"?>
 <p:notes xmlns:a="http://schemas.openxmlformats.org/drawingml/2006/main" xmlns:r="http://schemas.openxmlformats.org/officeDocument/2006/relationships" xmlns:p="http://schemas.openxmlformats.org/presentationml/2006/main">
   <p:cSld>
     <p:spTree>
@@ -4771,7 +5581,7 @@
           <a:p>
             <a:fld id="{2F9F5347-3E6A-4C40-928A-729612897D4A}" type="slidenum">
               <a:rPr lang="en-AU" smtClean="0"/>
-              <a:t>66</a:t>
+              <a:t>67</a:t>
             </a:fld>
             <a:endParaRPr lang="en-AU"/>
           </a:p>
@@ -4781,114 +5591,6 @@
     <p:extLst>
       <p:ext uri="{BB962C8B-B14F-4D97-AF65-F5344CB8AC3E}">
         <p14:creationId xmlns:p14="http://schemas.microsoft.com/office/powerpoint/2010/main" val="465552010"/>
-      </p:ext>
-    </p:extLst>
-  </p:cSld>
-  <p:clrMapOvr>
-    <a:masterClrMapping/>
-  </p:clrMapOvr>
-</p:notes>
-</file>
-
-<file path=ppt/notesSlides/notesSlide4.xml><?xml version="1.0" encoding="utf-8"?>
-<p:notes xmlns:a="http://schemas.openxmlformats.org/drawingml/2006/main" xmlns:r="http://schemas.openxmlformats.org/officeDocument/2006/relationships" xmlns:p="http://schemas.openxmlformats.org/presentationml/2006/main">
-  <p:cSld>
-    <p:spTree>
-      <p:nvGrpSpPr>
-        <p:cNvPr id="1" name="">
-          <a:extLst>
-            <a:ext uri="{FF2B5EF4-FFF2-40B4-BE49-F238E27FC236}">
-              <a16:creationId xmlns:a16="http://schemas.microsoft.com/office/drawing/2014/main" id="{9B1DBE69-598A-F03F-7C67-50BFFFCB43FD}"/>
-            </a:ext>
-          </a:extLst>
-        </p:cNvPr>
-        <p:cNvGrpSpPr/>
-        <p:nvPr/>
-      </p:nvGrpSpPr>
-      <p:grpSpPr>
-        <a:xfrm>
-          <a:off x="0" y="0"/>
-          <a:ext cx="0" cy="0"/>
-          <a:chOff x="0" y="0"/>
-          <a:chExt cx="0" cy="0"/>
-        </a:xfrm>
-      </p:grpSpPr>
-      <p:sp>
-        <p:nvSpPr>
-          <p:cNvPr id="2" name="Slide Image Placeholder 1">
-            <a:extLst>
-              <a:ext uri="{FF2B5EF4-FFF2-40B4-BE49-F238E27FC236}">
-                <a16:creationId xmlns:a16="http://schemas.microsoft.com/office/drawing/2014/main" id="{97CE000B-BA2D-EBB9-3487-853060BDD15A}"/>
-              </a:ext>
-            </a:extLst>
-          </p:cNvPr>
-          <p:cNvSpPr>
-            <a:spLocks noGrp="1" noRot="1" noChangeAspect="1"/>
-          </p:cNvSpPr>
-          <p:nvPr>
-            <p:ph type="sldImg"/>
-          </p:nvPr>
-        </p:nvSpPr>
-        <p:spPr/>
-      </p:sp>
-      <p:sp>
-        <p:nvSpPr>
-          <p:cNvPr id="3" name="Notes Placeholder 2">
-            <a:extLst>
-              <a:ext uri="{FF2B5EF4-FFF2-40B4-BE49-F238E27FC236}">
-                <a16:creationId xmlns:a16="http://schemas.microsoft.com/office/drawing/2014/main" id="{E47D1AA7-8D6B-C6E4-9B3A-FA320FEE7661}"/>
-              </a:ext>
-            </a:extLst>
-          </p:cNvPr>
-          <p:cNvSpPr>
-            <a:spLocks noGrp="1"/>
-          </p:cNvSpPr>
-          <p:nvPr>
-            <p:ph type="body" idx="1"/>
-          </p:nvPr>
-        </p:nvSpPr>
-        <p:spPr/>
-        <p:txBody>
-          <a:bodyPr/>
-          <a:lstStyle/>
-          <a:p>
-            <a:endParaRPr lang="en-AU" dirty="0"/>
-          </a:p>
-        </p:txBody>
-      </p:sp>
-      <p:sp>
-        <p:nvSpPr>
-          <p:cNvPr id="4" name="Slide Number Placeholder 3">
-            <a:extLst>
-              <a:ext uri="{FF2B5EF4-FFF2-40B4-BE49-F238E27FC236}">
-                <a16:creationId xmlns:a16="http://schemas.microsoft.com/office/drawing/2014/main" id="{40C348B4-BA96-5402-F17B-6B8912A93555}"/>
-              </a:ext>
-            </a:extLst>
-          </p:cNvPr>
-          <p:cNvSpPr>
-            <a:spLocks noGrp="1"/>
-          </p:cNvSpPr>
-          <p:nvPr>
-            <p:ph type="sldNum" sz="quarter" idx="5"/>
-          </p:nvPr>
-        </p:nvSpPr>
-        <p:spPr/>
-        <p:txBody>
-          <a:bodyPr/>
-          <a:lstStyle/>
-          <a:p>
-            <a:fld id="{2F9F5347-3E6A-4C40-928A-729612897D4A}" type="slidenum">
-              <a:rPr lang="en-AU" smtClean="0"/>
-              <a:t>31</a:t>
-            </a:fld>
-            <a:endParaRPr lang="en-AU"/>
-          </a:p>
-        </p:txBody>
-      </p:sp>
-    </p:spTree>
-    <p:extLst>
-      <p:ext uri="{BB962C8B-B14F-4D97-AF65-F5344CB8AC3E}">
-        <p14:creationId xmlns:p14="http://schemas.microsoft.com/office/powerpoint/2010/main" val="2765769875"/>
       </p:ext>
     </p:extLst>
   </p:cSld>
@@ -18600,7 +19302,7 @@
         <p:cNvPr id="1" name="">
           <a:extLst>
             <a:ext uri="{FF2B5EF4-FFF2-40B4-BE49-F238E27FC236}">
-              <a16:creationId xmlns:a16="http://schemas.microsoft.com/office/drawing/2014/main" id="{F74C4829-5866-CC7F-AB72-3FD551DFC757}"/>
+              <a16:creationId xmlns:a16="http://schemas.microsoft.com/office/drawing/2014/main" id="{4DBD11CC-24EC-59BF-D05D-B5C375DA3143}"/>
             </a:ext>
           </a:extLst>
         </p:cNvPr>
@@ -18620,7 +19322,7 @@
           <p:cNvPr id="2" name="Title 1">
             <a:extLst>
               <a:ext uri="{FF2B5EF4-FFF2-40B4-BE49-F238E27FC236}">
-                <a16:creationId xmlns:a16="http://schemas.microsoft.com/office/drawing/2014/main" id="{354C96E7-D898-151A-36D4-9B83A20D49DC}"/>
+                <a16:creationId xmlns:a16="http://schemas.microsoft.com/office/drawing/2014/main" id="{B979F2ED-4D20-88A0-7683-D80E7B4F56A2}"/>
               </a:ext>
             </a:extLst>
           </p:cNvPr>
@@ -18663,7 +19365,7 @@
           <p:cNvPr id="4" name="Slide Number Placeholder 3">
             <a:extLst>
               <a:ext uri="{FF2B5EF4-FFF2-40B4-BE49-F238E27FC236}">
-                <a16:creationId xmlns:a16="http://schemas.microsoft.com/office/drawing/2014/main" id="{4F546D19-F255-1490-3EC2-3AF42C65DC75}"/>
+                <a16:creationId xmlns:a16="http://schemas.microsoft.com/office/drawing/2014/main" id="{F3284F65-E90F-72AB-86FA-A7C41C465963}"/>
               </a:ext>
             </a:extLst>
           </p:cNvPr>
@@ -18692,7 +19394,7 @@
           <p:cNvPr id="3" name="TextBox 2">
             <a:extLst>
               <a:ext uri="{FF2B5EF4-FFF2-40B4-BE49-F238E27FC236}">
-                <a16:creationId xmlns:a16="http://schemas.microsoft.com/office/drawing/2014/main" id="{316251F9-DD3A-76B2-DB86-118B0AFEC53A}"/>
+                <a16:creationId xmlns:a16="http://schemas.microsoft.com/office/drawing/2014/main" id="{6E790511-AADC-B824-D395-5F01300CEBC4}"/>
               </a:ext>
             </a:extLst>
           </p:cNvPr>
@@ -18702,7 +19404,7 @@
         <p:spPr>
           <a:xfrm>
             <a:off x="692315" y="2474893"/>
-            <a:ext cx="6888424" cy="3108543"/>
+            <a:ext cx="9451626" cy="3108543"/>
           </a:xfrm>
           <a:prstGeom prst="rect">
             <a:avLst/>
@@ -18750,18 +19452,7 @@
               <a:rPr lang="en-US" sz="2800" dirty="0">
                 <a:latin typeface="Consolas" panose="020B0609020204030204" pitchFamily="49" charset="0"/>
               </a:rPr>
-              <a:t>    print('contains "lo"') </a:t>
-            </a:r>
-            <a:br>
-              <a:rPr lang="en-US" sz="2800" dirty="0">
-                <a:latin typeface="Consolas" panose="020B0609020204030204" pitchFamily="49" charset="0"/>
-              </a:rPr>
-            </a:br>
-            <a:r>
-              <a:rPr lang="en-US" sz="2800" dirty="0">
-                <a:latin typeface="Consolas" panose="020B0609020204030204" pitchFamily="49" charset="0"/>
-              </a:rPr>
-              <a:t>if </a:t>
+              <a:t>    print('contains "lo"')        </a:t>
             </a:r>
             <a:r>
               <a:rPr lang="en-US" sz="2800" dirty="0">
@@ -18770,6 +19461,26 @@
                 </a:solidFill>
                 <a:latin typeface="Consolas" panose="020B0609020204030204" pitchFamily="49" charset="0"/>
               </a:rPr>
+              <a:t># printed</a:t>
+            </a:r>
+            <a:br>
+              <a:rPr lang="en-US" sz="2800" dirty="0">
+                <a:latin typeface="Consolas" panose="020B0609020204030204" pitchFamily="49" charset="0"/>
+              </a:rPr>
+            </a:br>
+            <a:r>
+              <a:rPr lang="en-US" sz="2800" dirty="0">
+                <a:latin typeface="Consolas" panose="020B0609020204030204" pitchFamily="49" charset="0"/>
+              </a:rPr>
+              <a:t>if </a:t>
+            </a:r>
+            <a:r>
+              <a:rPr lang="en-US" sz="2800" dirty="0">
+                <a:solidFill>
+                  <a:srgbClr val="FF0000"/>
+                </a:solidFill>
+                <a:latin typeface="Consolas" panose="020B0609020204030204" pitchFamily="49" charset="0"/>
+              </a:rPr>
               <a:t>'</a:t>
             </a:r>
             <a:r>
@@ -18814,15 +19525,7 @@
               <a:rPr lang="en-US" sz="2800" dirty="0">
                 <a:latin typeface="Consolas" panose="020B0609020204030204" pitchFamily="49" charset="0"/>
               </a:rPr>
-              <a:t>"')</a:t>
-            </a:r>
-          </a:p>
-          <a:p>
-            <a:r>
-              <a:rPr lang="en-US" sz="2800" dirty="0">
-                <a:latin typeface="Consolas" panose="020B0609020204030204" pitchFamily="49" charset="0"/>
-              </a:rPr>
-              <a:t>if </a:t>
+              <a:t>"')       </a:t>
             </a:r>
             <a:r>
               <a:rPr lang="en-US" sz="2800" dirty="0">
@@ -18831,6 +19534,23 @@
                 </a:solidFill>
                 <a:latin typeface="Consolas" panose="020B0609020204030204" pitchFamily="49" charset="0"/>
               </a:rPr>
+              <a:t># not printed</a:t>
+            </a:r>
+          </a:p>
+          <a:p>
+            <a:r>
+              <a:rPr lang="en-US" sz="2800" dirty="0">
+                <a:latin typeface="Consolas" panose="020B0609020204030204" pitchFamily="49" charset="0"/>
+              </a:rPr>
+              <a:t>if </a:t>
+            </a:r>
+            <a:r>
+              <a:rPr lang="en-US" sz="2800" dirty="0">
+                <a:solidFill>
+                  <a:srgbClr val="FF0000"/>
+                </a:solidFill>
+                <a:latin typeface="Consolas" panose="020B0609020204030204" pitchFamily="49" charset="0"/>
+              </a:rPr>
               <a:t>'?' not in s</a:t>
             </a:r>
             <a:r>
@@ -18845,9 +19565,21 @@
               <a:rPr lang="en-US" sz="2800" dirty="0">
                 <a:latin typeface="Consolas" panose="020B0609020204030204" pitchFamily="49" charset="0"/>
               </a:rPr>
-              <a:t>    print('does not contain "?"')</a:t>
+              <a:t>    print('does not contain "?"') </a:t>
+            </a:r>
+            <a:r>
+              <a:rPr lang="en-US" sz="2800" dirty="0">
+                <a:solidFill>
+                  <a:srgbClr val="FF0000"/>
+                </a:solidFill>
+                <a:latin typeface="Consolas" panose="020B0609020204030204" pitchFamily="49" charset="0"/>
+              </a:rPr>
+              <a:t># printed</a:t>
             </a:r>
             <a:endParaRPr lang="en-AU" sz="2800" dirty="0">
+              <a:solidFill>
+                <a:srgbClr val="FF0000"/>
+              </a:solidFill>
               <a:latin typeface="Consolas" panose="020B0609020204030204" pitchFamily="49" charset="0"/>
             </a:endParaRPr>
           </a:p>
@@ -18855,58 +19587,10 @@
       </p:sp>
       <p:sp>
         <p:nvSpPr>
-          <p:cNvPr id="5" name="TextBox 4">
-            <a:extLst>
-              <a:ext uri="{FF2B5EF4-FFF2-40B4-BE49-F238E27FC236}">
-                <a16:creationId xmlns:a16="http://schemas.microsoft.com/office/drawing/2014/main" id="{61E0DAC6-19AD-D7BF-E075-25722D2C0BDF}"/>
-              </a:ext>
-            </a:extLst>
-          </p:cNvPr>
-          <p:cNvSpPr txBox="1"/>
-          <p:nvPr/>
-        </p:nvSpPr>
-        <p:spPr>
-          <a:xfrm>
-            <a:off x="8055155" y="3300882"/>
-            <a:ext cx="3583032" cy="830997"/>
-          </a:xfrm>
-          <a:prstGeom prst="rect">
-            <a:avLst/>
-          </a:prstGeom>
-          <a:noFill/>
-        </p:spPr>
-        <p:txBody>
-          <a:bodyPr wrap="none" rtlCol="0">
-            <a:spAutoFit/>
-          </a:bodyPr>
-          <a:lstStyle/>
-          <a:p>
-            <a:r>
-              <a:rPr lang="en-US" sz="2400" dirty="0">
-                <a:latin typeface="Consolas" panose="020B0609020204030204" pitchFamily="49" charset="0"/>
-              </a:rPr>
-              <a:t>contains "lo"</a:t>
-            </a:r>
-          </a:p>
-          <a:p>
-            <a:r>
-              <a:rPr lang="en-US" sz="2400" dirty="0">
-                <a:latin typeface="Consolas" panose="020B0609020204030204" pitchFamily="49" charset="0"/>
-              </a:rPr>
-              <a:t>does not contain "?"</a:t>
-            </a:r>
-            <a:endParaRPr lang="en-AU" sz="2400" dirty="0">
-              <a:latin typeface="Consolas" panose="020B0609020204030204" pitchFamily="49" charset="0"/>
-            </a:endParaRPr>
-          </a:p>
-        </p:txBody>
-      </p:sp>
-      <p:sp>
-        <p:nvSpPr>
-          <p:cNvPr id="7" name="TextBox 6">
-            <a:extLst>
-              <a:ext uri="{FF2B5EF4-FFF2-40B4-BE49-F238E27FC236}">
-                <a16:creationId xmlns:a16="http://schemas.microsoft.com/office/drawing/2014/main" id="{F1E06168-84F9-C1D5-F6F8-6EBE97F901CA}"/>
+          <p:cNvPr id="6" name="TextBox 5">
+            <a:extLst>
+              <a:ext uri="{FF2B5EF4-FFF2-40B4-BE49-F238E27FC236}">
+                <a16:creationId xmlns:a16="http://schemas.microsoft.com/office/drawing/2014/main" id="{CB8A7DE4-1BBE-09D8-2C41-8B3E80803FAD}"/>
               </a:ext>
             </a:extLst>
           </p:cNvPr>
@@ -18964,7 +19648,7 @@
     </p:spTree>
     <p:extLst>
       <p:ext uri="{BB962C8B-B14F-4D97-AF65-F5344CB8AC3E}">
-        <p14:creationId xmlns:p14="http://schemas.microsoft.com/office/powerpoint/2010/main" val="3543262634"/>
+        <p14:creationId xmlns:p14="http://schemas.microsoft.com/office/powerpoint/2010/main" val="2732305658"/>
       </p:ext>
     </p:extLst>
   </p:cSld>
@@ -23461,7 +24145,7 @@
         <p:spPr>
           <a:xfrm>
             <a:off x="4753688" y="4899681"/>
-            <a:ext cx="3531289" cy="1477328"/>
+            <a:ext cx="3531289" cy="1200329"/>
           </a:xfrm>
           <a:prstGeom prst="rect">
             <a:avLst/>
@@ -23489,7 +24173,7 @@
             </a:br>
             <a:r>
               <a:rPr lang="en-CA" dirty="0"/>
-              <a:t>In general, it is good to make functions pure if possible. Pure functions  tend to be easier to use and reason about.</a:t>
+              <a:t>In general, make functions pure if possible. They tend to be easier to use and reason about.</a:t>
             </a:r>
             <a:endParaRPr lang="en-AU" dirty="0"/>
           </a:p>
@@ -30988,7 +31672,19 @@
               <a:rPr lang="en-US" sz="2800" dirty="0">
                 <a:latin typeface="Consolas" panose="020B0609020204030204" pitchFamily="49" charset="0"/>
               </a:rPr>
-              <a:t> = open('story.txt’)</a:t>
+              <a:t> = open('</a:t>
+            </a:r>
+            <a:r>
+              <a:rPr lang="en-US" sz="2800" dirty="0" err="1">
+                <a:latin typeface="Consolas" panose="020B0609020204030204" pitchFamily="49" charset="0"/>
+              </a:rPr>
+              <a:t>story.txt</a:t>
+            </a:r>
+            <a:r>
+              <a:rPr lang="en-US" sz="2800" dirty="0">
+                <a:latin typeface="Consolas" panose="020B0609020204030204" pitchFamily="49" charset="0"/>
+              </a:rPr>
+              <a:t>')</a:t>
             </a:r>
           </a:p>
           <a:p>
@@ -31621,7 +32317,19 @@
               <a:rPr lang="en-US" sz="2800" dirty="0">
                 <a:latin typeface="Consolas" panose="020B0609020204030204" pitchFamily="49" charset="0"/>
               </a:rPr>
-              <a:t> = open('story.txt’)</a:t>
+              <a:t> = open('</a:t>
+            </a:r>
+            <a:r>
+              <a:rPr lang="en-US" sz="2800" dirty="0" err="1">
+                <a:latin typeface="Consolas" panose="020B0609020204030204" pitchFamily="49" charset="0"/>
+              </a:rPr>
+              <a:t>story.txt</a:t>
+            </a:r>
+            <a:r>
+              <a:rPr lang="en-US" sz="2800" dirty="0">
+                <a:latin typeface="Consolas" panose="020B0609020204030204" pitchFamily="49" charset="0"/>
+              </a:rPr>
+              <a:t>')</a:t>
             </a:r>
           </a:p>
           <a:p>
@@ -32267,7 +32975,19 @@
               <a:rPr lang="en-US" sz="2800" dirty="0">
                 <a:latin typeface="Consolas" panose="020B0609020204030204" pitchFamily="49" charset="0"/>
               </a:rPr>
-              <a:t> = open('story.txt’)</a:t>
+              <a:t> = open('</a:t>
+            </a:r>
+            <a:r>
+              <a:rPr lang="en-US" sz="2800" dirty="0" err="1">
+                <a:latin typeface="Consolas" panose="020B0609020204030204" pitchFamily="49" charset="0"/>
+              </a:rPr>
+              <a:t>story.txt</a:t>
+            </a:r>
+            <a:r>
+              <a:rPr lang="en-US" sz="2800" dirty="0">
+                <a:latin typeface="Consolas" panose="020B0609020204030204" pitchFamily="49" charset="0"/>
+              </a:rPr>
+              <a:t>')</a:t>
             </a:r>
           </a:p>
           <a:p>
@@ -33554,7 +34274,19 @@
               <a:rPr lang="en-US" sz="2800" dirty="0">
                 <a:latin typeface="Consolas" panose="020B0609020204030204" pitchFamily="49" charset="0"/>
               </a:rPr>
-              <a:t> = open('story.txt’)</a:t>
+              <a:t> = open('</a:t>
+            </a:r>
+            <a:r>
+              <a:rPr lang="en-US" sz="2800" dirty="0" err="1">
+                <a:latin typeface="Consolas" panose="020B0609020204030204" pitchFamily="49" charset="0"/>
+              </a:rPr>
+              <a:t>story.txt</a:t>
+            </a:r>
+            <a:r>
+              <a:rPr lang="en-US" sz="2800" dirty="0">
+                <a:latin typeface="Consolas" panose="020B0609020204030204" pitchFamily="49" charset="0"/>
+              </a:rPr>
+              <a:t>')</a:t>
             </a:r>
           </a:p>
           <a:p>
@@ -33910,6 +34642,386 @@
         <p:cNvPr id="1" name="">
           <a:extLst>
             <a:ext uri="{FF2B5EF4-FFF2-40B4-BE49-F238E27FC236}">
+              <a16:creationId xmlns:a16="http://schemas.microsoft.com/office/drawing/2014/main" id="{9CEB882F-1EBA-878F-0419-7C78713D55FF}"/>
+            </a:ext>
+          </a:extLst>
+        </p:cNvPr>
+        <p:cNvGrpSpPr/>
+        <p:nvPr/>
+      </p:nvGrpSpPr>
+      <p:grpSpPr>
+        <a:xfrm>
+          <a:off x="0" y="0"/>
+          <a:ext cx="0" cy="0"/>
+          <a:chOff x="0" y="0"/>
+          <a:chExt cx="0" cy="0"/>
+        </a:xfrm>
+      </p:grpSpPr>
+      <p:sp>
+        <p:nvSpPr>
+          <p:cNvPr id="2" name="Title 1">
+            <a:extLst>
+              <a:ext uri="{FF2B5EF4-FFF2-40B4-BE49-F238E27FC236}">
+                <a16:creationId xmlns:a16="http://schemas.microsoft.com/office/drawing/2014/main" id="{E3194AE2-DB1D-6BFE-E6C2-BD10545037D2}"/>
+              </a:ext>
+            </a:extLst>
+          </p:cNvPr>
+          <p:cNvSpPr>
+            <a:spLocks noGrp="1"/>
+          </p:cNvSpPr>
+          <p:nvPr>
+            <p:ph type="title"/>
+          </p:nvPr>
+        </p:nvSpPr>
+        <p:spPr>
+          <a:xfrm>
+            <a:off x="465665" y="203993"/>
+            <a:ext cx="3300577" cy="1325563"/>
+          </a:xfrm>
+        </p:spPr>
+        <p:txBody>
+          <a:bodyPr>
+            <a:normAutofit/>
+          </a:bodyPr>
+          <a:lstStyle/>
+          <a:p>
+            <a:r>
+              <a:rPr lang="en-CA" dirty="0"/>
+              <a:t>Reading a</a:t>
+            </a:r>
+            <a:br>
+              <a:rPr lang="en-CA" dirty="0"/>
+            </a:br>
+            <a:r>
+              <a:rPr lang="en-CA" dirty="0"/>
+              <a:t>word list</a:t>
+            </a:r>
+            <a:endParaRPr lang="en-AU" dirty="0"/>
+          </a:p>
+        </p:txBody>
+      </p:sp>
+      <p:sp>
+        <p:nvSpPr>
+          <p:cNvPr id="4" name="Slide Number Placeholder 3">
+            <a:extLst>
+              <a:ext uri="{FF2B5EF4-FFF2-40B4-BE49-F238E27FC236}">
+                <a16:creationId xmlns:a16="http://schemas.microsoft.com/office/drawing/2014/main" id="{11218C5C-A2A6-DAFB-EED1-17D48F236759}"/>
+              </a:ext>
+            </a:extLst>
+          </p:cNvPr>
+          <p:cNvSpPr>
+            <a:spLocks noGrp="1"/>
+          </p:cNvSpPr>
+          <p:nvPr>
+            <p:ph type="sldNum" sz="quarter" idx="12"/>
+          </p:nvPr>
+        </p:nvSpPr>
+        <p:spPr/>
+        <p:txBody>
+          <a:bodyPr/>
+          <a:lstStyle/>
+          <a:p>
+            <a:fld id="{CBA0A0CD-12E5-4065-8C87-26D031211F61}" type="slidenum">
+              <a:rPr lang="en-AU" smtClean="0"/>
+              <a:t>58</a:t>
+            </a:fld>
+            <a:endParaRPr lang="en-AU"/>
+          </a:p>
+        </p:txBody>
+      </p:sp>
+      <p:sp>
+        <p:nvSpPr>
+          <p:cNvPr id="7" name="TextBox 6">
+            <a:extLst>
+              <a:ext uri="{FF2B5EF4-FFF2-40B4-BE49-F238E27FC236}">
+                <a16:creationId xmlns:a16="http://schemas.microsoft.com/office/drawing/2014/main" id="{C5B93777-FC5E-EEDC-0AA8-C1F3E99C299B}"/>
+              </a:ext>
+            </a:extLst>
+          </p:cNvPr>
+          <p:cNvSpPr txBox="1"/>
+          <p:nvPr/>
+        </p:nvSpPr>
+        <p:spPr>
+          <a:xfrm>
+            <a:off x="1799190" y="2346235"/>
+            <a:ext cx="3179210" cy="1200329"/>
+          </a:xfrm>
+          <a:prstGeom prst="rect">
+            <a:avLst/>
+          </a:prstGeom>
+          <a:solidFill>
+            <a:schemeClr val="accent2">
+              <a:lumMod val="40000"/>
+              <a:lumOff val="60000"/>
+            </a:schemeClr>
+          </a:solidFill>
+        </p:spPr>
+        <p:txBody>
+          <a:bodyPr wrap="square" rtlCol="0">
+            <a:spAutoFit/>
+          </a:bodyPr>
+          <a:lstStyle/>
+          <a:p>
+            <a:r>
+              <a:rPr lang="en-CA" dirty="0"/>
+              <a:t>The text file </a:t>
+            </a:r>
+            <a:r>
+              <a:rPr lang="en-CA" b="1" dirty="0"/>
+              <a:t>words.txt</a:t>
+            </a:r>
+            <a:r>
+              <a:rPr lang="en-CA" dirty="0"/>
+              <a:t> is a list of over 100,000 English words:</a:t>
+            </a:r>
+          </a:p>
+          <a:p>
+            <a:pPr marL="285750" indent="-285750">
+              <a:buFont typeface="Arial" panose="020B0604020202020204" pitchFamily="34" charset="0"/>
+              <a:buChar char="•"/>
+            </a:pPr>
+            <a:r>
+              <a:rPr lang="en-CA" dirty="0"/>
+              <a:t>one word per line</a:t>
+            </a:r>
+          </a:p>
+          <a:p>
+            <a:pPr marL="285750" indent="-285750">
+              <a:buFont typeface="Arial" panose="020B0604020202020204" pitchFamily="34" charset="0"/>
+              <a:buChar char="•"/>
+            </a:pPr>
+            <a:r>
+              <a:rPr lang="en-CA" dirty="0"/>
+              <a:t>in alphabetical order</a:t>
+            </a:r>
+            <a:endParaRPr lang="en-AU" dirty="0"/>
+          </a:p>
+        </p:txBody>
+      </p:sp>
+      <p:grpSp>
+        <p:nvGrpSpPr>
+          <p:cNvPr id="8" name="Group 7">
+            <a:extLst>
+              <a:ext uri="{FF2B5EF4-FFF2-40B4-BE49-F238E27FC236}">
+                <a16:creationId xmlns:a16="http://schemas.microsoft.com/office/drawing/2014/main" id="{21CE0C36-A2EE-64D6-3ED5-C5FFFA5D832A}"/>
+              </a:ext>
+            </a:extLst>
+          </p:cNvPr>
+          <p:cNvGrpSpPr/>
+          <p:nvPr/>
+        </p:nvGrpSpPr>
+        <p:grpSpPr>
+          <a:xfrm>
+            <a:off x="5765799" y="1074508"/>
+            <a:ext cx="2150534" cy="4339650"/>
+            <a:chOff x="5765799" y="1074508"/>
+            <a:chExt cx="2150534" cy="4339650"/>
+          </a:xfrm>
+        </p:grpSpPr>
+        <p:sp>
+          <p:nvSpPr>
+            <p:cNvPr id="5" name="TextBox 4">
+              <a:extLst>
+                <a:ext uri="{FF2B5EF4-FFF2-40B4-BE49-F238E27FC236}">
+                  <a16:creationId xmlns:a16="http://schemas.microsoft.com/office/drawing/2014/main" id="{1728C5D0-A0D0-3886-158C-F172E3A66C46}"/>
+                </a:ext>
+              </a:extLst>
+            </p:cNvPr>
+            <p:cNvSpPr txBox="1"/>
+            <p:nvPr/>
+          </p:nvSpPr>
+          <p:spPr>
+            <a:xfrm>
+              <a:off x="5765799" y="1443840"/>
+              <a:ext cx="2150534" cy="3970318"/>
+            </a:xfrm>
+            <a:prstGeom prst="rect">
+              <a:avLst/>
+            </a:prstGeom>
+            <a:noFill/>
+            <a:ln>
+              <a:solidFill>
+                <a:schemeClr val="tx1"/>
+              </a:solidFill>
+            </a:ln>
+          </p:spPr>
+          <p:txBody>
+            <a:bodyPr wrap="square" rtlCol="0">
+              <a:spAutoFit/>
+            </a:bodyPr>
+            <a:lstStyle/>
+            <a:p>
+              <a:r>
+                <a:rPr lang="en-US" dirty="0">
+                  <a:latin typeface="Consolas" panose="020B0609020204030204" pitchFamily="49" charset="0"/>
+                </a:rPr>
+                <a:t>aa</a:t>
+              </a:r>
+            </a:p>
+            <a:p>
+              <a:r>
+                <a:rPr lang="en-US" dirty="0">
+                  <a:latin typeface="Consolas" panose="020B0609020204030204" pitchFamily="49" charset="0"/>
+                </a:rPr>
+                <a:t>aah</a:t>
+              </a:r>
+            </a:p>
+            <a:p>
+              <a:r>
+                <a:rPr lang="en-US" dirty="0">
+                  <a:latin typeface="Consolas" panose="020B0609020204030204" pitchFamily="49" charset="0"/>
+                </a:rPr>
+                <a:t>aahed</a:t>
+              </a:r>
+            </a:p>
+            <a:p>
+              <a:r>
+                <a:rPr lang="en-US" dirty="0">
+                  <a:latin typeface="Consolas" panose="020B0609020204030204" pitchFamily="49" charset="0"/>
+                </a:rPr>
+                <a:t>aahing</a:t>
+              </a:r>
+            </a:p>
+            <a:p>
+              <a:r>
+                <a:rPr lang="en-US" dirty="0">
+                  <a:latin typeface="Consolas" panose="020B0609020204030204" pitchFamily="49" charset="0"/>
+                </a:rPr>
+                <a:t>aahs</a:t>
+              </a:r>
+            </a:p>
+            <a:p>
+              <a:r>
+                <a:rPr lang="en-US" dirty="0">
+                  <a:latin typeface="Consolas" panose="020B0609020204030204" pitchFamily="49" charset="0"/>
+                </a:rPr>
+                <a:t>aal</a:t>
+              </a:r>
+            </a:p>
+            <a:p>
+              <a:r>
+                <a:rPr lang="en-US" dirty="0">
+                  <a:latin typeface="Consolas" panose="020B0609020204030204" pitchFamily="49" charset="0"/>
+                </a:rPr>
+                <a:t>aalii</a:t>
+              </a:r>
+            </a:p>
+            <a:p>
+              <a:endParaRPr lang="en-US" dirty="0">
+                <a:latin typeface="Consolas" panose="020B0609020204030204" pitchFamily="49" charset="0"/>
+              </a:endParaRPr>
+            </a:p>
+            <a:p>
+              <a:r>
+                <a:rPr lang="en-US" dirty="0">
+                  <a:latin typeface="Consolas" panose="020B0609020204030204" pitchFamily="49" charset="0"/>
+                </a:rPr>
+                <a:t>...</a:t>
+              </a:r>
+            </a:p>
+            <a:p>
+              <a:endParaRPr lang="en-US" dirty="0">
+                <a:latin typeface="Consolas" panose="020B0609020204030204" pitchFamily="49" charset="0"/>
+              </a:endParaRPr>
+            </a:p>
+            <a:p>
+              <a:r>
+                <a:rPr lang="en-US" dirty="0" err="1">
+                  <a:latin typeface="Consolas" panose="020B0609020204030204" pitchFamily="49" charset="0"/>
+                </a:rPr>
+                <a:t>zymosis</a:t>
+              </a:r>
+              <a:endParaRPr lang="en-US" dirty="0">
+                <a:latin typeface="Consolas" panose="020B0609020204030204" pitchFamily="49" charset="0"/>
+              </a:endParaRPr>
+            </a:p>
+            <a:p>
+              <a:r>
+                <a:rPr lang="en-US" dirty="0">
+                  <a:latin typeface="Consolas" panose="020B0609020204030204" pitchFamily="49" charset="0"/>
+                </a:rPr>
+                <a:t>zymotic</a:t>
+              </a:r>
+            </a:p>
+            <a:p>
+              <a:r>
+                <a:rPr lang="en-US" dirty="0">
+                  <a:latin typeface="Consolas" panose="020B0609020204030204" pitchFamily="49" charset="0"/>
+                </a:rPr>
+                <a:t>zymurgies</a:t>
+              </a:r>
+            </a:p>
+            <a:p>
+              <a:r>
+                <a:rPr lang="en-US" dirty="0">
+                  <a:latin typeface="Consolas" panose="020B0609020204030204" pitchFamily="49" charset="0"/>
+                </a:rPr>
+                <a:t>zymurgy</a:t>
+              </a:r>
+              <a:endParaRPr lang="en-AU" dirty="0">
+                <a:latin typeface="Consolas" panose="020B0609020204030204" pitchFamily="49" charset="0"/>
+              </a:endParaRPr>
+            </a:p>
+          </p:txBody>
+        </p:sp>
+        <p:sp>
+          <p:nvSpPr>
+            <p:cNvPr id="3" name="TextBox 2">
+              <a:extLst>
+                <a:ext uri="{FF2B5EF4-FFF2-40B4-BE49-F238E27FC236}">
+                  <a16:creationId xmlns:a16="http://schemas.microsoft.com/office/drawing/2014/main" id="{DAD54685-262B-DFEA-C4B4-30E18DBDBF18}"/>
+                </a:ext>
+              </a:extLst>
+            </p:cNvPr>
+            <p:cNvSpPr txBox="1"/>
+            <p:nvPr/>
+          </p:nvSpPr>
+          <p:spPr>
+            <a:xfrm>
+              <a:off x="6292229" y="1074508"/>
+              <a:ext cx="1097673" cy="369332"/>
+            </a:xfrm>
+            <a:prstGeom prst="rect">
+              <a:avLst/>
+            </a:prstGeom>
+            <a:noFill/>
+          </p:spPr>
+          <p:txBody>
+            <a:bodyPr wrap="none" rtlCol="0">
+              <a:spAutoFit/>
+            </a:bodyPr>
+            <a:lstStyle/>
+            <a:p>
+              <a:r>
+                <a:rPr lang="en-CA" dirty="0"/>
+                <a:t>words.txt</a:t>
+              </a:r>
+              <a:endParaRPr lang="en-AU" dirty="0"/>
+            </a:p>
+          </p:txBody>
+        </p:sp>
+      </p:grpSp>
+    </p:spTree>
+    <p:extLst>
+      <p:ext uri="{BB962C8B-B14F-4D97-AF65-F5344CB8AC3E}">
+        <p14:creationId xmlns:p14="http://schemas.microsoft.com/office/powerpoint/2010/main" val="3014772453"/>
+      </p:ext>
+    </p:extLst>
+  </p:cSld>
+  <p:clrMapOvr>
+    <a:masterClrMapping/>
+  </p:clrMapOvr>
+</p:sld>
+</file>
+
+<file path=ppt/slides/slide59.xml><?xml version="1.0" encoding="utf-8"?>
+<p:sld xmlns:a="http://schemas.openxmlformats.org/drawingml/2006/main" xmlns:r="http://schemas.openxmlformats.org/officeDocument/2006/relationships" xmlns:p="http://schemas.openxmlformats.org/presentationml/2006/main">
+  <p:cSld>
+    <p:spTree>
+      <p:nvGrpSpPr>
+        <p:cNvPr id="1" name="">
+          <a:extLst>
+            <a:ext uri="{FF2B5EF4-FFF2-40B4-BE49-F238E27FC236}">
               <a16:creationId xmlns:a16="http://schemas.microsoft.com/office/drawing/2014/main" id="{239F79ED-BA93-984C-3F89-97C23AD9FEF2}"/>
             </a:ext>
           </a:extLst>
@@ -33991,7 +35103,7 @@
           <a:p>
             <a:fld id="{CBA0A0CD-12E5-4065-8C87-26D031211F61}" type="slidenum">
               <a:rPr lang="en-AU" smtClean="0"/>
-              <a:t>58</a:t>
+              <a:t>59</a:t>
             </a:fld>
             <a:endParaRPr lang="en-AU"/>
           </a:p>
@@ -34060,7 +35172,7 @@
             </a:pPr>
             <a:r>
               <a:rPr lang="en-CA" dirty="0"/>
-              <a:t>in alphabetical order.</a:t>
+              <a:t>in alphabetical order</a:t>
             </a:r>
             <a:endParaRPr lang="en-AU" dirty="0"/>
           </a:p>
@@ -34339,7 +35451,670 @@
 </p:sld>
 </file>
 
-<file path=ppt/slides/slide59.xml><?xml version="1.0" encoding="utf-8"?>
+<file path=ppt/slides/slide6.xml><?xml version="1.0" encoding="utf-8"?>
+<p:sld xmlns:a="http://schemas.openxmlformats.org/drawingml/2006/main" xmlns:r="http://schemas.openxmlformats.org/officeDocument/2006/relationships" xmlns:p="http://schemas.openxmlformats.org/presentationml/2006/main">
+  <p:cSld>
+    <p:spTree>
+      <p:nvGrpSpPr>
+        <p:cNvPr id="1" name="">
+          <a:extLst>
+            <a:ext uri="{FF2B5EF4-FFF2-40B4-BE49-F238E27FC236}">
+              <a16:creationId xmlns:a16="http://schemas.microsoft.com/office/drawing/2014/main" id="{F09971AB-F1CA-5930-AF22-CFCE7774BED6}"/>
+            </a:ext>
+          </a:extLst>
+        </p:cNvPr>
+        <p:cNvGrpSpPr/>
+        <p:nvPr/>
+      </p:nvGrpSpPr>
+      <p:grpSpPr>
+        <a:xfrm>
+          <a:off x="0" y="0"/>
+          <a:ext cx="0" cy="0"/>
+          <a:chOff x="0" y="0"/>
+          <a:chExt cx="0" cy="0"/>
+        </a:xfrm>
+      </p:grpSpPr>
+      <p:sp>
+        <p:nvSpPr>
+          <p:cNvPr id="2" name="Title 1">
+            <a:extLst>
+              <a:ext uri="{FF2B5EF4-FFF2-40B4-BE49-F238E27FC236}">
+                <a16:creationId xmlns:a16="http://schemas.microsoft.com/office/drawing/2014/main" id="{0FD2FE41-14E3-35BC-D80B-086A6D7FA036}"/>
+              </a:ext>
+            </a:extLst>
+          </p:cNvPr>
+          <p:cNvSpPr>
+            <a:spLocks noGrp="1"/>
+          </p:cNvSpPr>
+          <p:nvPr>
+            <p:ph type="title"/>
+          </p:nvPr>
+        </p:nvSpPr>
+        <p:spPr>
+          <a:xfrm>
+            <a:off x="465665" y="203993"/>
+            <a:ext cx="3300577" cy="1325563"/>
+          </a:xfrm>
+        </p:spPr>
+        <p:txBody>
+          <a:bodyPr>
+            <a:normAutofit/>
+          </a:bodyPr>
+          <a:lstStyle/>
+          <a:p>
+            <a:r>
+              <a:rPr lang="en-CA" dirty="0"/>
+              <a:t>While-loops</a:t>
+            </a:r>
+            <a:endParaRPr lang="en-AU" dirty="0"/>
+          </a:p>
+        </p:txBody>
+      </p:sp>
+      <p:sp>
+        <p:nvSpPr>
+          <p:cNvPr id="4" name="Slide Number Placeholder 3">
+            <a:extLst>
+              <a:ext uri="{FF2B5EF4-FFF2-40B4-BE49-F238E27FC236}">
+                <a16:creationId xmlns:a16="http://schemas.microsoft.com/office/drawing/2014/main" id="{E2388FE1-6259-1D66-0214-2605180DAB39}"/>
+              </a:ext>
+            </a:extLst>
+          </p:cNvPr>
+          <p:cNvSpPr>
+            <a:spLocks noGrp="1"/>
+          </p:cNvSpPr>
+          <p:nvPr>
+            <p:ph type="sldNum" sz="quarter" idx="12"/>
+          </p:nvPr>
+        </p:nvSpPr>
+        <p:spPr/>
+        <p:txBody>
+          <a:bodyPr/>
+          <a:lstStyle/>
+          <a:p>
+            <a:fld id="{CBA0A0CD-12E5-4065-8C87-26D031211F61}" type="slidenum">
+              <a:rPr lang="en-AU" smtClean="0"/>
+              <a:t>6</a:t>
+            </a:fld>
+            <a:endParaRPr lang="en-AU"/>
+          </a:p>
+        </p:txBody>
+      </p:sp>
+      <p:sp>
+        <p:nvSpPr>
+          <p:cNvPr id="5" name="TextBox 4">
+            <a:extLst>
+              <a:ext uri="{FF2B5EF4-FFF2-40B4-BE49-F238E27FC236}">
+                <a16:creationId xmlns:a16="http://schemas.microsoft.com/office/drawing/2014/main" id="{AB6C619C-16E1-A07B-4D53-510758086256}"/>
+              </a:ext>
+            </a:extLst>
+          </p:cNvPr>
+          <p:cNvSpPr txBox="1"/>
+          <p:nvPr/>
+        </p:nvSpPr>
+        <p:spPr>
+          <a:xfrm>
+            <a:off x="311010" y="1674847"/>
+            <a:ext cx="2460862" cy="646331"/>
+          </a:xfrm>
+          <a:prstGeom prst="rect">
+            <a:avLst/>
+          </a:prstGeom>
+          <a:solidFill>
+            <a:schemeClr val="accent2">
+              <a:lumMod val="40000"/>
+              <a:lumOff val="60000"/>
+            </a:schemeClr>
+          </a:solidFill>
+        </p:spPr>
+        <p:txBody>
+          <a:bodyPr wrap="square" rtlCol="0">
+            <a:spAutoFit/>
+          </a:bodyPr>
+          <a:lstStyle/>
+          <a:p>
+            <a:pPr algn="ctr"/>
+            <a:r>
+              <a:rPr lang="en-CA" dirty="0"/>
+              <a:t>What would you guess this code does?</a:t>
+            </a:r>
+            <a:endParaRPr lang="en-AU" dirty="0"/>
+          </a:p>
+        </p:txBody>
+      </p:sp>
+      <p:sp>
+        <p:nvSpPr>
+          <p:cNvPr id="3" name="TextBox 2">
+            <a:extLst>
+              <a:ext uri="{FF2B5EF4-FFF2-40B4-BE49-F238E27FC236}">
+                <a16:creationId xmlns:a16="http://schemas.microsoft.com/office/drawing/2014/main" id="{FDE58487-0240-1172-D3E6-9B4EA1296253}"/>
+              </a:ext>
+            </a:extLst>
+          </p:cNvPr>
+          <p:cNvSpPr txBox="1"/>
+          <p:nvPr/>
+        </p:nvSpPr>
+        <p:spPr>
+          <a:xfrm>
+            <a:off x="3272350" y="1674847"/>
+            <a:ext cx="3733714" cy="2246769"/>
+          </a:xfrm>
+          <a:prstGeom prst="rect">
+            <a:avLst/>
+          </a:prstGeom>
+          <a:noFill/>
+        </p:spPr>
+        <p:txBody>
+          <a:bodyPr wrap="none" rtlCol="0">
+            <a:spAutoFit/>
+          </a:bodyPr>
+          <a:lstStyle/>
+          <a:p>
+            <a:r>
+              <a:rPr lang="en-US" sz="2800" dirty="0">
+                <a:latin typeface="Consolas" panose="020B0609020204030204" pitchFamily="49" charset="0"/>
+              </a:rPr>
+              <a:t>while True:</a:t>
+            </a:r>
+          </a:p>
+          <a:p>
+            <a:r>
+              <a:rPr lang="en-US" sz="2800" dirty="0">
+                <a:latin typeface="Consolas" panose="020B0609020204030204" pitchFamily="49" charset="0"/>
+              </a:rPr>
+              <a:t>    print('hello')</a:t>
+            </a:r>
+          </a:p>
+          <a:p>
+            <a:r>
+              <a:rPr lang="en-US" sz="2800" dirty="0">
+                <a:latin typeface="Consolas" panose="020B0609020204030204" pitchFamily="49" charset="0"/>
+              </a:rPr>
+              <a:t>    print('world')</a:t>
+            </a:r>
+          </a:p>
+          <a:p>
+            <a:br>
+              <a:rPr lang="en-US" sz="2800" dirty="0">
+                <a:latin typeface="Consolas" panose="020B0609020204030204" pitchFamily="49" charset="0"/>
+              </a:rPr>
+            </a:br>
+            <a:r>
+              <a:rPr lang="en-US" sz="2800" dirty="0">
+                <a:solidFill>
+                  <a:srgbClr val="FF0000"/>
+                </a:solidFill>
+                <a:latin typeface="Consolas" panose="020B0609020204030204" pitchFamily="49" charset="0"/>
+              </a:rPr>
+              <a:t>print('dead code!)</a:t>
+            </a:r>
+            <a:endParaRPr lang="en-AU" sz="2800" dirty="0">
+              <a:solidFill>
+                <a:srgbClr val="FF0000"/>
+              </a:solidFill>
+              <a:latin typeface="Consolas" panose="020B0609020204030204" pitchFamily="49" charset="0"/>
+            </a:endParaRPr>
+          </a:p>
+        </p:txBody>
+      </p:sp>
+      <p:sp>
+        <p:nvSpPr>
+          <p:cNvPr id="13" name="TextBox 12">
+            <a:extLst>
+              <a:ext uri="{FF2B5EF4-FFF2-40B4-BE49-F238E27FC236}">
+                <a16:creationId xmlns:a16="http://schemas.microsoft.com/office/drawing/2014/main" id="{FD52A42C-95CA-7BFF-8937-EB6F905253F3}"/>
+              </a:ext>
+            </a:extLst>
+          </p:cNvPr>
+          <p:cNvSpPr txBox="1"/>
+          <p:nvPr/>
+        </p:nvSpPr>
+        <p:spPr>
+          <a:xfrm>
+            <a:off x="7790510" y="2920996"/>
+            <a:ext cx="1269999" cy="3139321"/>
+          </a:xfrm>
+          <a:prstGeom prst="rect">
+            <a:avLst/>
+          </a:prstGeom>
+          <a:noFill/>
+          <a:ln>
+            <a:solidFill>
+              <a:schemeClr val="tx1"/>
+            </a:solidFill>
+          </a:ln>
+        </p:spPr>
+        <p:txBody>
+          <a:bodyPr wrap="square" rtlCol="0">
+            <a:spAutoFit/>
+          </a:bodyPr>
+          <a:lstStyle/>
+          <a:p>
+            <a:r>
+              <a:rPr lang="en-CA" dirty="0">
+                <a:latin typeface="Consolas" panose="020B0609020204030204" pitchFamily="49" charset="0"/>
+              </a:rPr>
+              <a:t>hello</a:t>
+            </a:r>
+          </a:p>
+          <a:p>
+            <a:r>
+              <a:rPr lang="en-AU" dirty="0">
+                <a:latin typeface="Consolas" panose="020B0609020204030204" pitchFamily="49" charset="0"/>
+              </a:rPr>
+              <a:t>world</a:t>
+            </a:r>
+          </a:p>
+          <a:p>
+            <a:r>
+              <a:rPr lang="en-CA" dirty="0">
+                <a:latin typeface="Consolas" panose="020B0609020204030204" pitchFamily="49" charset="0"/>
+              </a:rPr>
+              <a:t>hello</a:t>
+            </a:r>
+          </a:p>
+          <a:p>
+            <a:r>
+              <a:rPr lang="en-AU" dirty="0">
+                <a:latin typeface="Consolas" panose="020B0609020204030204" pitchFamily="49" charset="0"/>
+              </a:rPr>
+              <a:t>world</a:t>
+            </a:r>
+          </a:p>
+          <a:p>
+            <a:r>
+              <a:rPr lang="en-CA" dirty="0">
+                <a:latin typeface="Consolas" panose="020B0609020204030204" pitchFamily="49" charset="0"/>
+              </a:rPr>
+              <a:t>hello</a:t>
+            </a:r>
+          </a:p>
+          <a:p>
+            <a:r>
+              <a:rPr lang="en-AU" dirty="0">
+                <a:latin typeface="Consolas" panose="020B0609020204030204" pitchFamily="49" charset="0"/>
+              </a:rPr>
+              <a:t>world</a:t>
+            </a:r>
+          </a:p>
+          <a:p>
+            <a:r>
+              <a:rPr lang="en-CA" dirty="0">
+                <a:latin typeface="Consolas" panose="020B0609020204030204" pitchFamily="49" charset="0"/>
+              </a:rPr>
+              <a:t>hello</a:t>
+            </a:r>
+          </a:p>
+          <a:p>
+            <a:r>
+              <a:rPr lang="en-AU" dirty="0">
+                <a:latin typeface="Consolas" panose="020B0609020204030204" pitchFamily="49" charset="0"/>
+              </a:rPr>
+              <a:t>world</a:t>
+            </a:r>
+          </a:p>
+          <a:p>
+            <a:r>
+              <a:rPr lang="en-CA" dirty="0">
+                <a:latin typeface="Consolas" panose="020B0609020204030204" pitchFamily="49" charset="0"/>
+              </a:rPr>
+              <a:t>hello</a:t>
+            </a:r>
+          </a:p>
+          <a:p>
+            <a:r>
+              <a:rPr lang="en-AU" dirty="0">
+                <a:latin typeface="Consolas" panose="020B0609020204030204" pitchFamily="49" charset="0"/>
+              </a:rPr>
+              <a:t>world</a:t>
+            </a:r>
+          </a:p>
+          <a:p>
+            <a:r>
+              <a:rPr lang="en-AU" dirty="0">
+                <a:latin typeface="Consolas" panose="020B0609020204030204" pitchFamily="49" charset="0"/>
+              </a:rPr>
+              <a:t>…</a:t>
+            </a:r>
+          </a:p>
+        </p:txBody>
+      </p:sp>
+      <p:sp>
+        <p:nvSpPr>
+          <p:cNvPr id="14" name="TextBox 13">
+            <a:extLst>
+              <a:ext uri="{FF2B5EF4-FFF2-40B4-BE49-F238E27FC236}">
+                <a16:creationId xmlns:a16="http://schemas.microsoft.com/office/drawing/2014/main" id="{C9ECBEAF-3BD4-2427-75F7-86ECABF99EA3}"/>
+              </a:ext>
+            </a:extLst>
+          </p:cNvPr>
+          <p:cNvSpPr txBox="1"/>
+          <p:nvPr/>
+        </p:nvSpPr>
+        <p:spPr>
+          <a:xfrm>
+            <a:off x="4197268" y="4122329"/>
+            <a:ext cx="2743199" cy="1200329"/>
+          </a:xfrm>
+          <a:prstGeom prst="rect">
+            <a:avLst/>
+          </a:prstGeom>
+          <a:solidFill>
+            <a:schemeClr val="accent2">
+              <a:lumMod val="40000"/>
+              <a:lumOff val="60000"/>
+            </a:schemeClr>
+          </a:solidFill>
+        </p:spPr>
+        <p:txBody>
+          <a:bodyPr wrap="square" rtlCol="0">
+            <a:spAutoFit/>
+          </a:bodyPr>
+          <a:lstStyle/>
+          <a:p>
+            <a:pPr algn="ctr"/>
+            <a:r>
+              <a:rPr lang="en-CA" dirty="0"/>
+              <a:t>It’s an example of an </a:t>
+            </a:r>
+            <a:r>
+              <a:rPr lang="en-CA" b="1" dirty="0"/>
+              <a:t>infinite loop</a:t>
+            </a:r>
+            <a:r>
+              <a:rPr lang="en-CA" dirty="0"/>
+              <a:t>. The indented print statements are run forever.</a:t>
+            </a:r>
+            <a:endParaRPr lang="en-AU" dirty="0"/>
+          </a:p>
+        </p:txBody>
+      </p:sp>
+      <p:sp>
+        <p:nvSpPr>
+          <p:cNvPr id="16" name="TextBox 15">
+            <a:extLst>
+              <a:ext uri="{FF2B5EF4-FFF2-40B4-BE49-F238E27FC236}">
+                <a16:creationId xmlns:a16="http://schemas.microsoft.com/office/drawing/2014/main" id="{C8A30D46-99DF-0D17-69CA-3781EAD1573F}"/>
+              </a:ext>
+            </a:extLst>
+          </p:cNvPr>
+          <p:cNvSpPr txBox="1"/>
+          <p:nvPr/>
+        </p:nvSpPr>
+        <p:spPr>
+          <a:xfrm>
+            <a:off x="9060509" y="1613292"/>
+            <a:ext cx="2159566" cy="707886"/>
+          </a:xfrm>
+          <a:prstGeom prst="rect">
+            <a:avLst/>
+          </a:prstGeom>
+          <a:noFill/>
+          <a:ln>
+            <a:solidFill>
+              <a:schemeClr val="tx1"/>
+            </a:solidFill>
+          </a:ln>
+        </p:spPr>
+        <p:txBody>
+          <a:bodyPr wrap="none" rtlCol="0">
+            <a:spAutoFit/>
+          </a:bodyPr>
+          <a:lstStyle/>
+          <a:p>
+            <a:r>
+              <a:rPr lang="en-US" sz="2000" dirty="0">
+                <a:latin typeface="Consolas" panose="020B0609020204030204" pitchFamily="49" charset="0"/>
+              </a:rPr>
+              <a:t>print('hello')</a:t>
+            </a:r>
+          </a:p>
+          <a:p>
+            <a:r>
+              <a:rPr lang="en-US" sz="2000" dirty="0">
+                <a:latin typeface="Consolas" panose="020B0609020204030204" pitchFamily="49" charset="0"/>
+              </a:rPr>
+              <a:t>print('world')</a:t>
+            </a:r>
+            <a:endParaRPr lang="en-AU" sz="2000" dirty="0">
+              <a:latin typeface="Consolas" panose="020B0609020204030204" pitchFamily="49" charset="0"/>
+            </a:endParaRPr>
+          </a:p>
+        </p:txBody>
+      </p:sp>
+      <p:cxnSp>
+        <p:nvCxnSpPr>
+          <p:cNvPr id="18" name="Straight Arrow Connector 17">
+            <a:extLst>
+              <a:ext uri="{FF2B5EF4-FFF2-40B4-BE49-F238E27FC236}">
+                <a16:creationId xmlns:a16="http://schemas.microsoft.com/office/drawing/2014/main" id="{D47978D5-2E8F-73F4-316F-6AAFFE4A2A2A}"/>
+              </a:ext>
+            </a:extLst>
+          </p:cNvPr>
+          <p:cNvCxnSpPr>
+            <a:cxnSpLocks/>
+            <a:endCxn id="16" idx="0"/>
+          </p:cNvCxnSpPr>
+          <p:nvPr/>
+        </p:nvCxnSpPr>
+        <p:spPr>
+          <a:xfrm>
+            <a:off x="10140292" y="866774"/>
+            <a:ext cx="0" cy="746518"/>
+          </a:xfrm>
+          <a:prstGeom prst="straightConnector1">
+            <a:avLst/>
+          </a:prstGeom>
+          <a:ln>
+            <a:tailEnd type="triangle"/>
+          </a:ln>
+        </p:spPr>
+        <p:style>
+          <a:lnRef idx="2">
+            <a:schemeClr val="accent1"/>
+          </a:lnRef>
+          <a:fillRef idx="0">
+            <a:schemeClr val="accent1"/>
+          </a:fillRef>
+          <a:effectRef idx="1">
+            <a:schemeClr val="accent1"/>
+          </a:effectRef>
+          <a:fontRef idx="minor">
+            <a:schemeClr val="tx1"/>
+          </a:fontRef>
+        </p:style>
+      </p:cxnSp>
+      <p:cxnSp>
+        <p:nvCxnSpPr>
+          <p:cNvPr id="22" name="Connector: Elbow 21">
+            <a:extLst>
+              <a:ext uri="{FF2B5EF4-FFF2-40B4-BE49-F238E27FC236}">
+                <a16:creationId xmlns:a16="http://schemas.microsoft.com/office/drawing/2014/main" id="{D8707AA6-C906-88A8-1988-BC018EC39590}"/>
+              </a:ext>
+            </a:extLst>
+          </p:cNvPr>
+          <p:cNvCxnSpPr>
+            <a:stCxn id="16" idx="2"/>
+            <a:endCxn id="16" idx="3"/>
+          </p:cNvCxnSpPr>
+          <p:nvPr/>
+        </p:nvCxnSpPr>
+        <p:spPr>
+          <a:xfrm rot="5400000" flipH="1" flipV="1">
+            <a:off x="10503211" y="1604315"/>
+            <a:ext cx="353943" cy="1079783"/>
+          </a:xfrm>
+          <a:prstGeom prst="bentConnector4">
+            <a:avLst>
+              <a:gd name="adj1" fmla="val -136350"/>
+              <a:gd name="adj2" fmla="val 121171"/>
+            </a:avLst>
+          </a:prstGeom>
+          <a:ln>
+            <a:tailEnd type="triangle"/>
+          </a:ln>
+        </p:spPr>
+        <p:style>
+          <a:lnRef idx="2">
+            <a:schemeClr val="accent1"/>
+          </a:lnRef>
+          <a:fillRef idx="0">
+            <a:schemeClr val="accent1"/>
+          </a:fillRef>
+          <a:effectRef idx="1">
+            <a:schemeClr val="accent1"/>
+          </a:effectRef>
+          <a:fontRef idx="minor">
+            <a:schemeClr val="tx1"/>
+          </a:fontRef>
+        </p:style>
+      </p:cxnSp>
+      <p:sp>
+        <p:nvSpPr>
+          <p:cNvPr id="6" name="TextBox 5">
+            <a:extLst>
+              <a:ext uri="{FF2B5EF4-FFF2-40B4-BE49-F238E27FC236}">
+                <a16:creationId xmlns:a16="http://schemas.microsoft.com/office/drawing/2014/main" id="{1859BC8A-7DEA-F8A6-2A59-0180239197A3}"/>
+              </a:ext>
+            </a:extLst>
+          </p:cNvPr>
+          <p:cNvSpPr txBox="1"/>
+          <p:nvPr/>
+        </p:nvSpPr>
+        <p:spPr>
+          <a:xfrm>
+            <a:off x="6855742" y="405109"/>
+            <a:ext cx="2678897" cy="923330"/>
+          </a:xfrm>
+          <a:prstGeom prst="rect">
+            <a:avLst/>
+          </a:prstGeom>
+          <a:solidFill>
+            <a:schemeClr val="accent2">
+              <a:lumMod val="40000"/>
+              <a:lumOff val="60000"/>
+            </a:schemeClr>
+          </a:solidFill>
+        </p:spPr>
+        <p:txBody>
+          <a:bodyPr wrap="square" rtlCol="0">
+            <a:spAutoFit/>
+          </a:bodyPr>
+          <a:lstStyle/>
+          <a:p>
+            <a:pPr algn="ctr"/>
+            <a:r>
+              <a:rPr lang="en-CA" dirty="0"/>
+              <a:t>This is a </a:t>
+            </a:r>
+            <a:r>
+              <a:rPr lang="en-CA" b="1" dirty="0"/>
+              <a:t>flow chart </a:t>
+            </a:r>
+            <a:r>
+              <a:rPr lang="en-CA" dirty="0"/>
+              <a:t>of the code that shows visually what’s happening.</a:t>
+            </a:r>
+            <a:endParaRPr lang="en-AU" dirty="0"/>
+          </a:p>
+        </p:txBody>
+      </p:sp>
+      <p:sp>
+        <p:nvSpPr>
+          <p:cNvPr id="7" name="TextBox 6">
+            <a:extLst>
+              <a:ext uri="{FF2B5EF4-FFF2-40B4-BE49-F238E27FC236}">
+                <a16:creationId xmlns:a16="http://schemas.microsoft.com/office/drawing/2014/main" id="{9C2C001F-82BD-D8C2-5B67-5C84736643DD}"/>
+              </a:ext>
+            </a:extLst>
+          </p:cNvPr>
+          <p:cNvSpPr txBox="1"/>
+          <p:nvPr/>
+        </p:nvSpPr>
+        <p:spPr>
+          <a:xfrm>
+            <a:off x="311010" y="3429000"/>
+            <a:ext cx="2460862" cy="646331"/>
+          </a:xfrm>
+          <a:prstGeom prst="rect">
+            <a:avLst/>
+          </a:prstGeom>
+          <a:solidFill>
+            <a:schemeClr val="accent2">
+              <a:lumMod val="40000"/>
+              <a:lumOff val="60000"/>
+            </a:schemeClr>
+          </a:solidFill>
+        </p:spPr>
+        <p:txBody>
+          <a:bodyPr wrap="square" rtlCol="0">
+            <a:spAutoFit/>
+          </a:bodyPr>
+          <a:lstStyle/>
+          <a:p>
+            <a:pPr algn="ctr"/>
+            <a:r>
+              <a:rPr lang="en-CA" dirty="0"/>
+              <a:t>Any code after the loop never runs.</a:t>
+            </a:r>
+            <a:endParaRPr lang="en-AU" dirty="0"/>
+          </a:p>
+        </p:txBody>
+      </p:sp>
+      <p:cxnSp>
+        <p:nvCxnSpPr>
+          <p:cNvPr id="9" name="Straight Arrow Connector 8">
+            <a:extLst>
+              <a:ext uri="{FF2B5EF4-FFF2-40B4-BE49-F238E27FC236}">
+                <a16:creationId xmlns:a16="http://schemas.microsoft.com/office/drawing/2014/main" id="{C5EA5E28-C3C5-C867-B3B2-9CC087A7D42C}"/>
+              </a:ext>
+            </a:extLst>
+          </p:cNvPr>
+          <p:cNvCxnSpPr>
+            <a:stCxn id="7" idx="3"/>
+          </p:cNvCxnSpPr>
+          <p:nvPr/>
+        </p:nvCxnSpPr>
+        <p:spPr>
+          <a:xfrm flipV="1">
+            <a:off x="2771872" y="3613666"/>
+            <a:ext cx="589395" cy="138500"/>
+          </a:xfrm>
+          <a:prstGeom prst="straightConnector1">
+            <a:avLst/>
+          </a:prstGeom>
+          <a:ln>
+            <a:tailEnd type="triangle"/>
+          </a:ln>
+        </p:spPr>
+        <p:style>
+          <a:lnRef idx="2">
+            <a:schemeClr val="accent1"/>
+          </a:lnRef>
+          <a:fillRef idx="0">
+            <a:schemeClr val="accent1"/>
+          </a:fillRef>
+          <a:effectRef idx="1">
+            <a:schemeClr val="accent1"/>
+          </a:effectRef>
+          <a:fontRef idx="minor">
+            <a:schemeClr val="tx1"/>
+          </a:fontRef>
+        </p:style>
+      </p:cxnSp>
+    </p:spTree>
+    <p:extLst>
+      <p:ext uri="{BB962C8B-B14F-4D97-AF65-F5344CB8AC3E}">
+        <p14:creationId xmlns:p14="http://schemas.microsoft.com/office/powerpoint/2010/main" val="2817996570"/>
+      </p:ext>
+    </p:extLst>
+  </p:cSld>
+  <p:clrMapOvr>
+    <a:masterClrMapping/>
+  </p:clrMapOvr>
+</p:sld>
+</file>
+
+<file path=ppt/slides/slide60.xml><?xml version="1.0" encoding="utf-8"?>
 <p:sld xmlns:a="http://schemas.openxmlformats.org/drawingml/2006/main" xmlns:r="http://schemas.openxmlformats.org/officeDocument/2006/relationships" xmlns:p="http://schemas.openxmlformats.org/presentationml/2006/main">
   <p:cSld>
     <p:spTree>
@@ -34428,7 +36203,7 @@
           <a:p>
             <a:fld id="{CBA0A0CD-12E5-4065-8C87-26D031211F61}" type="slidenum">
               <a:rPr lang="en-AU" smtClean="0"/>
-              <a:t>59</a:t>
+              <a:t>60</a:t>
             </a:fld>
             <a:endParaRPr lang="en-AU"/>
           </a:p>
@@ -35093,670 +36868,7 @@
 </p:sld>
 </file>
 
-<file path=ppt/slides/slide6.xml><?xml version="1.0" encoding="utf-8"?>
-<p:sld xmlns:a="http://schemas.openxmlformats.org/drawingml/2006/main" xmlns:r="http://schemas.openxmlformats.org/officeDocument/2006/relationships" xmlns:p="http://schemas.openxmlformats.org/presentationml/2006/main">
-  <p:cSld>
-    <p:spTree>
-      <p:nvGrpSpPr>
-        <p:cNvPr id="1" name="">
-          <a:extLst>
-            <a:ext uri="{FF2B5EF4-FFF2-40B4-BE49-F238E27FC236}">
-              <a16:creationId xmlns:a16="http://schemas.microsoft.com/office/drawing/2014/main" id="{F09971AB-F1CA-5930-AF22-CFCE7774BED6}"/>
-            </a:ext>
-          </a:extLst>
-        </p:cNvPr>
-        <p:cNvGrpSpPr/>
-        <p:nvPr/>
-      </p:nvGrpSpPr>
-      <p:grpSpPr>
-        <a:xfrm>
-          <a:off x="0" y="0"/>
-          <a:ext cx="0" cy="0"/>
-          <a:chOff x="0" y="0"/>
-          <a:chExt cx="0" cy="0"/>
-        </a:xfrm>
-      </p:grpSpPr>
-      <p:sp>
-        <p:nvSpPr>
-          <p:cNvPr id="2" name="Title 1">
-            <a:extLst>
-              <a:ext uri="{FF2B5EF4-FFF2-40B4-BE49-F238E27FC236}">
-                <a16:creationId xmlns:a16="http://schemas.microsoft.com/office/drawing/2014/main" id="{0FD2FE41-14E3-35BC-D80B-086A6D7FA036}"/>
-              </a:ext>
-            </a:extLst>
-          </p:cNvPr>
-          <p:cNvSpPr>
-            <a:spLocks noGrp="1"/>
-          </p:cNvSpPr>
-          <p:nvPr>
-            <p:ph type="title"/>
-          </p:nvPr>
-        </p:nvSpPr>
-        <p:spPr>
-          <a:xfrm>
-            <a:off x="465665" y="203993"/>
-            <a:ext cx="3300577" cy="1325563"/>
-          </a:xfrm>
-        </p:spPr>
-        <p:txBody>
-          <a:bodyPr>
-            <a:normAutofit/>
-          </a:bodyPr>
-          <a:lstStyle/>
-          <a:p>
-            <a:r>
-              <a:rPr lang="en-CA" dirty="0"/>
-              <a:t>While-loops</a:t>
-            </a:r>
-            <a:endParaRPr lang="en-AU" dirty="0"/>
-          </a:p>
-        </p:txBody>
-      </p:sp>
-      <p:sp>
-        <p:nvSpPr>
-          <p:cNvPr id="4" name="Slide Number Placeholder 3">
-            <a:extLst>
-              <a:ext uri="{FF2B5EF4-FFF2-40B4-BE49-F238E27FC236}">
-                <a16:creationId xmlns:a16="http://schemas.microsoft.com/office/drawing/2014/main" id="{E2388FE1-6259-1D66-0214-2605180DAB39}"/>
-              </a:ext>
-            </a:extLst>
-          </p:cNvPr>
-          <p:cNvSpPr>
-            <a:spLocks noGrp="1"/>
-          </p:cNvSpPr>
-          <p:nvPr>
-            <p:ph type="sldNum" sz="quarter" idx="12"/>
-          </p:nvPr>
-        </p:nvSpPr>
-        <p:spPr/>
-        <p:txBody>
-          <a:bodyPr/>
-          <a:lstStyle/>
-          <a:p>
-            <a:fld id="{CBA0A0CD-12E5-4065-8C87-26D031211F61}" type="slidenum">
-              <a:rPr lang="en-AU" smtClean="0"/>
-              <a:t>6</a:t>
-            </a:fld>
-            <a:endParaRPr lang="en-AU"/>
-          </a:p>
-        </p:txBody>
-      </p:sp>
-      <p:sp>
-        <p:nvSpPr>
-          <p:cNvPr id="5" name="TextBox 4">
-            <a:extLst>
-              <a:ext uri="{FF2B5EF4-FFF2-40B4-BE49-F238E27FC236}">
-                <a16:creationId xmlns:a16="http://schemas.microsoft.com/office/drawing/2014/main" id="{AB6C619C-16E1-A07B-4D53-510758086256}"/>
-              </a:ext>
-            </a:extLst>
-          </p:cNvPr>
-          <p:cNvSpPr txBox="1"/>
-          <p:nvPr/>
-        </p:nvSpPr>
-        <p:spPr>
-          <a:xfrm>
-            <a:off x="311010" y="1674847"/>
-            <a:ext cx="2460862" cy="646331"/>
-          </a:xfrm>
-          <a:prstGeom prst="rect">
-            <a:avLst/>
-          </a:prstGeom>
-          <a:solidFill>
-            <a:schemeClr val="accent2">
-              <a:lumMod val="40000"/>
-              <a:lumOff val="60000"/>
-            </a:schemeClr>
-          </a:solidFill>
-        </p:spPr>
-        <p:txBody>
-          <a:bodyPr wrap="square" rtlCol="0">
-            <a:spAutoFit/>
-          </a:bodyPr>
-          <a:lstStyle/>
-          <a:p>
-            <a:pPr algn="ctr"/>
-            <a:r>
-              <a:rPr lang="en-CA" dirty="0"/>
-              <a:t>What would you guess this code does?</a:t>
-            </a:r>
-            <a:endParaRPr lang="en-AU" dirty="0"/>
-          </a:p>
-        </p:txBody>
-      </p:sp>
-      <p:sp>
-        <p:nvSpPr>
-          <p:cNvPr id="3" name="TextBox 2">
-            <a:extLst>
-              <a:ext uri="{FF2B5EF4-FFF2-40B4-BE49-F238E27FC236}">
-                <a16:creationId xmlns:a16="http://schemas.microsoft.com/office/drawing/2014/main" id="{FDE58487-0240-1172-D3E6-9B4EA1296253}"/>
-              </a:ext>
-            </a:extLst>
-          </p:cNvPr>
-          <p:cNvSpPr txBox="1"/>
-          <p:nvPr/>
-        </p:nvSpPr>
-        <p:spPr>
-          <a:xfrm>
-            <a:off x="3272350" y="1674847"/>
-            <a:ext cx="3733714" cy="2246769"/>
-          </a:xfrm>
-          <a:prstGeom prst="rect">
-            <a:avLst/>
-          </a:prstGeom>
-          <a:noFill/>
-        </p:spPr>
-        <p:txBody>
-          <a:bodyPr wrap="none" rtlCol="0">
-            <a:spAutoFit/>
-          </a:bodyPr>
-          <a:lstStyle/>
-          <a:p>
-            <a:r>
-              <a:rPr lang="en-US" sz="2800" dirty="0">
-                <a:latin typeface="Consolas" panose="020B0609020204030204" pitchFamily="49" charset="0"/>
-              </a:rPr>
-              <a:t>while True:</a:t>
-            </a:r>
-          </a:p>
-          <a:p>
-            <a:r>
-              <a:rPr lang="en-US" sz="2800" dirty="0">
-                <a:latin typeface="Consolas" panose="020B0609020204030204" pitchFamily="49" charset="0"/>
-              </a:rPr>
-              <a:t>    print('hello')</a:t>
-            </a:r>
-          </a:p>
-          <a:p>
-            <a:r>
-              <a:rPr lang="en-US" sz="2800" dirty="0">
-                <a:latin typeface="Consolas" panose="020B0609020204030204" pitchFamily="49" charset="0"/>
-              </a:rPr>
-              <a:t>    print('world')</a:t>
-            </a:r>
-          </a:p>
-          <a:p>
-            <a:br>
-              <a:rPr lang="en-US" sz="2800" dirty="0">
-                <a:latin typeface="Consolas" panose="020B0609020204030204" pitchFamily="49" charset="0"/>
-              </a:rPr>
-            </a:br>
-            <a:r>
-              <a:rPr lang="en-US" sz="2800" dirty="0">
-                <a:solidFill>
-                  <a:srgbClr val="FF0000"/>
-                </a:solidFill>
-                <a:latin typeface="Consolas" panose="020B0609020204030204" pitchFamily="49" charset="0"/>
-              </a:rPr>
-              <a:t>print('dead code!)</a:t>
-            </a:r>
-            <a:endParaRPr lang="en-AU" sz="2800" dirty="0">
-              <a:solidFill>
-                <a:srgbClr val="FF0000"/>
-              </a:solidFill>
-              <a:latin typeface="Consolas" panose="020B0609020204030204" pitchFamily="49" charset="0"/>
-            </a:endParaRPr>
-          </a:p>
-        </p:txBody>
-      </p:sp>
-      <p:sp>
-        <p:nvSpPr>
-          <p:cNvPr id="13" name="TextBox 12">
-            <a:extLst>
-              <a:ext uri="{FF2B5EF4-FFF2-40B4-BE49-F238E27FC236}">
-                <a16:creationId xmlns:a16="http://schemas.microsoft.com/office/drawing/2014/main" id="{FD52A42C-95CA-7BFF-8937-EB6F905253F3}"/>
-              </a:ext>
-            </a:extLst>
-          </p:cNvPr>
-          <p:cNvSpPr txBox="1"/>
-          <p:nvPr/>
-        </p:nvSpPr>
-        <p:spPr>
-          <a:xfrm>
-            <a:off x="7790510" y="2920996"/>
-            <a:ext cx="1269999" cy="3139321"/>
-          </a:xfrm>
-          <a:prstGeom prst="rect">
-            <a:avLst/>
-          </a:prstGeom>
-          <a:noFill/>
-          <a:ln>
-            <a:solidFill>
-              <a:schemeClr val="tx1"/>
-            </a:solidFill>
-          </a:ln>
-        </p:spPr>
-        <p:txBody>
-          <a:bodyPr wrap="square" rtlCol="0">
-            <a:spAutoFit/>
-          </a:bodyPr>
-          <a:lstStyle/>
-          <a:p>
-            <a:r>
-              <a:rPr lang="en-CA" dirty="0">
-                <a:latin typeface="Consolas" panose="020B0609020204030204" pitchFamily="49" charset="0"/>
-              </a:rPr>
-              <a:t>hello</a:t>
-            </a:r>
-          </a:p>
-          <a:p>
-            <a:r>
-              <a:rPr lang="en-AU" dirty="0">
-                <a:latin typeface="Consolas" panose="020B0609020204030204" pitchFamily="49" charset="0"/>
-              </a:rPr>
-              <a:t>world</a:t>
-            </a:r>
-          </a:p>
-          <a:p>
-            <a:r>
-              <a:rPr lang="en-CA" dirty="0">
-                <a:latin typeface="Consolas" panose="020B0609020204030204" pitchFamily="49" charset="0"/>
-              </a:rPr>
-              <a:t>hello</a:t>
-            </a:r>
-          </a:p>
-          <a:p>
-            <a:r>
-              <a:rPr lang="en-AU" dirty="0">
-                <a:latin typeface="Consolas" panose="020B0609020204030204" pitchFamily="49" charset="0"/>
-              </a:rPr>
-              <a:t>world</a:t>
-            </a:r>
-          </a:p>
-          <a:p>
-            <a:r>
-              <a:rPr lang="en-CA" dirty="0">
-                <a:latin typeface="Consolas" panose="020B0609020204030204" pitchFamily="49" charset="0"/>
-              </a:rPr>
-              <a:t>hello</a:t>
-            </a:r>
-          </a:p>
-          <a:p>
-            <a:r>
-              <a:rPr lang="en-AU" dirty="0">
-                <a:latin typeface="Consolas" panose="020B0609020204030204" pitchFamily="49" charset="0"/>
-              </a:rPr>
-              <a:t>world</a:t>
-            </a:r>
-          </a:p>
-          <a:p>
-            <a:r>
-              <a:rPr lang="en-CA" dirty="0">
-                <a:latin typeface="Consolas" panose="020B0609020204030204" pitchFamily="49" charset="0"/>
-              </a:rPr>
-              <a:t>hello</a:t>
-            </a:r>
-          </a:p>
-          <a:p>
-            <a:r>
-              <a:rPr lang="en-AU" dirty="0">
-                <a:latin typeface="Consolas" panose="020B0609020204030204" pitchFamily="49" charset="0"/>
-              </a:rPr>
-              <a:t>world</a:t>
-            </a:r>
-          </a:p>
-          <a:p>
-            <a:r>
-              <a:rPr lang="en-CA" dirty="0">
-                <a:latin typeface="Consolas" panose="020B0609020204030204" pitchFamily="49" charset="0"/>
-              </a:rPr>
-              <a:t>hello</a:t>
-            </a:r>
-          </a:p>
-          <a:p>
-            <a:r>
-              <a:rPr lang="en-AU" dirty="0">
-                <a:latin typeface="Consolas" panose="020B0609020204030204" pitchFamily="49" charset="0"/>
-              </a:rPr>
-              <a:t>world</a:t>
-            </a:r>
-          </a:p>
-          <a:p>
-            <a:r>
-              <a:rPr lang="en-AU" dirty="0">
-                <a:latin typeface="Consolas" panose="020B0609020204030204" pitchFamily="49" charset="0"/>
-              </a:rPr>
-              <a:t>…</a:t>
-            </a:r>
-          </a:p>
-        </p:txBody>
-      </p:sp>
-      <p:sp>
-        <p:nvSpPr>
-          <p:cNvPr id="14" name="TextBox 13">
-            <a:extLst>
-              <a:ext uri="{FF2B5EF4-FFF2-40B4-BE49-F238E27FC236}">
-                <a16:creationId xmlns:a16="http://schemas.microsoft.com/office/drawing/2014/main" id="{C9ECBEAF-3BD4-2427-75F7-86ECABF99EA3}"/>
-              </a:ext>
-            </a:extLst>
-          </p:cNvPr>
-          <p:cNvSpPr txBox="1"/>
-          <p:nvPr/>
-        </p:nvSpPr>
-        <p:spPr>
-          <a:xfrm>
-            <a:off x="4197268" y="4122329"/>
-            <a:ext cx="2743199" cy="1200329"/>
-          </a:xfrm>
-          <a:prstGeom prst="rect">
-            <a:avLst/>
-          </a:prstGeom>
-          <a:solidFill>
-            <a:schemeClr val="accent2">
-              <a:lumMod val="40000"/>
-              <a:lumOff val="60000"/>
-            </a:schemeClr>
-          </a:solidFill>
-        </p:spPr>
-        <p:txBody>
-          <a:bodyPr wrap="square" rtlCol="0">
-            <a:spAutoFit/>
-          </a:bodyPr>
-          <a:lstStyle/>
-          <a:p>
-            <a:pPr algn="ctr"/>
-            <a:r>
-              <a:rPr lang="en-CA" dirty="0"/>
-              <a:t>It’s an example of an </a:t>
-            </a:r>
-            <a:r>
-              <a:rPr lang="en-CA" b="1" dirty="0"/>
-              <a:t>infinite loop</a:t>
-            </a:r>
-            <a:r>
-              <a:rPr lang="en-CA" dirty="0"/>
-              <a:t>. The indented print statements are run forever.</a:t>
-            </a:r>
-            <a:endParaRPr lang="en-AU" dirty="0"/>
-          </a:p>
-        </p:txBody>
-      </p:sp>
-      <p:sp>
-        <p:nvSpPr>
-          <p:cNvPr id="16" name="TextBox 15">
-            <a:extLst>
-              <a:ext uri="{FF2B5EF4-FFF2-40B4-BE49-F238E27FC236}">
-                <a16:creationId xmlns:a16="http://schemas.microsoft.com/office/drawing/2014/main" id="{C8A30D46-99DF-0D17-69CA-3781EAD1573F}"/>
-              </a:ext>
-            </a:extLst>
-          </p:cNvPr>
-          <p:cNvSpPr txBox="1"/>
-          <p:nvPr/>
-        </p:nvSpPr>
-        <p:spPr>
-          <a:xfrm>
-            <a:off x="9060509" y="1613292"/>
-            <a:ext cx="2159566" cy="707886"/>
-          </a:xfrm>
-          <a:prstGeom prst="rect">
-            <a:avLst/>
-          </a:prstGeom>
-          <a:noFill/>
-          <a:ln>
-            <a:solidFill>
-              <a:schemeClr val="tx1"/>
-            </a:solidFill>
-          </a:ln>
-        </p:spPr>
-        <p:txBody>
-          <a:bodyPr wrap="none" rtlCol="0">
-            <a:spAutoFit/>
-          </a:bodyPr>
-          <a:lstStyle/>
-          <a:p>
-            <a:r>
-              <a:rPr lang="en-US" sz="2000" dirty="0">
-                <a:latin typeface="Consolas" panose="020B0609020204030204" pitchFamily="49" charset="0"/>
-              </a:rPr>
-              <a:t>print('hello')</a:t>
-            </a:r>
-          </a:p>
-          <a:p>
-            <a:r>
-              <a:rPr lang="en-US" sz="2000" dirty="0">
-                <a:latin typeface="Consolas" panose="020B0609020204030204" pitchFamily="49" charset="0"/>
-              </a:rPr>
-              <a:t>print('world')</a:t>
-            </a:r>
-            <a:endParaRPr lang="en-AU" sz="2000" dirty="0">
-              <a:latin typeface="Consolas" panose="020B0609020204030204" pitchFamily="49" charset="0"/>
-            </a:endParaRPr>
-          </a:p>
-        </p:txBody>
-      </p:sp>
-      <p:cxnSp>
-        <p:nvCxnSpPr>
-          <p:cNvPr id="18" name="Straight Arrow Connector 17">
-            <a:extLst>
-              <a:ext uri="{FF2B5EF4-FFF2-40B4-BE49-F238E27FC236}">
-                <a16:creationId xmlns:a16="http://schemas.microsoft.com/office/drawing/2014/main" id="{D47978D5-2E8F-73F4-316F-6AAFFE4A2A2A}"/>
-              </a:ext>
-            </a:extLst>
-          </p:cNvPr>
-          <p:cNvCxnSpPr>
-            <a:cxnSpLocks/>
-            <a:endCxn id="16" idx="0"/>
-          </p:cNvCxnSpPr>
-          <p:nvPr/>
-        </p:nvCxnSpPr>
-        <p:spPr>
-          <a:xfrm>
-            <a:off x="10140292" y="866774"/>
-            <a:ext cx="0" cy="746518"/>
-          </a:xfrm>
-          <a:prstGeom prst="straightConnector1">
-            <a:avLst/>
-          </a:prstGeom>
-          <a:ln>
-            <a:tailEnd type="triangle"/>
-          </a:ln>
-        </p:spPr>
-        <p:style>
-          <a:lnRef idx="2">
-            <a:schemeClr val="accent1"/>
-          </a:lnRef>
-          <a:fillRef idx="0">
-            <a:schemeClr val="accent1"/>
-          </a:fillRef>
-          <a:effectRef idx="1">
-            <a:schemeClr val="accent1"/>
-          </a:effectRef>
-          <a:fontRef idx="minor">
-            <a:schemeClr val="tx1"/>
-          </a:fontRef>
-        </p:style>
-      </p:cxnSp>
-      <p:cxnSp>
-        <p:nvCxnSpPr>
-          <p:cNvPr id="22" name="Connector: Elbow 21">
-            <a:extLst>
-              <a:ext uri="{FF2B5EF4-FFF2-40B4-BE49-F238E27FC236}">
-                <a16:creationId xmlns:a16="http://schemas.microsoft.com/office/drawing/2014/main" id="{D8707AA6-C906-88A8-1988-BC018EC39590}"/>
-              </a:ext>
-            </a:extLst>
-          </p:cNvPr>
-          <p:cNvCxnSpPr>
-            <a:stCxn id="16" idx="2"/>
-            <a:endCxn id="16" idx="3"/>
-          </p:cNvCxnSpPr>
-          <p:nvPr/>
-        </p:nvCxnSpPr>
-        <p:spPr>
-          <a:xfrm rot="5400000" flipH="1" flipV="1">
-            <a:off x="10503211" y="1604315"/>
-            <a:ext cx="353943" cy="1079783"/>
-          </a:xfrm>
-          <a:prstGeom prst="bentConnector4">
-            <a:avLst>
-              <a:gd name="adj1" fmla="val -136350"/>
-              <a:gd name="adj2" fmla="val 121171"/>
-            </a:avLst>
-          </a:prstGeom>
-          <a:ln>
-            <a:tailEnd type="triangle"/>
-          </a:ln>
-        </p:spPr>
-        <p:style>
-          <a:lnRef idx="2">
-            <a:schemeClr val="accent1"/>
-          </a:lnRef>
-          <a:fillRef idx="0">
-            <a:schemeClr val="accent1"/>
-          </a:fillRef>
-          <a:effectRef idx="1">
-            <a:schemeClr val="accent1"/>
-          </a:effectRef>
-          <a:fontRef idx="minor">
-            <a:schemeClr val="tx1"/>
-          </a:fontRef>
-        </p:style>
-      </p:cxnSp>
-      <p:sp>
-        <p:nvSpPr>
-          <p:cNvPr id="6" name="TextBox 5">
-            <a:extLst>
-              <a:ext uri="{FF2B5EF4-FFF2-40B4-BE49-F238E27FC236}">
-                <a16:creationId xmlns:a16="http://schemas.microsoft.com/office/drawing/2014/main" id="{1859BC8A-7DEA-F8A6-2A59-0180239197A3}"/>
-              </a:ext>
-            </a:extLst>
-          </p:cNvPr>
-          <p:cNvSpPr txBox="1"/>
-          <p:nvPr/>
-        </p:nvSpPr>
-        <p:spPr>
-          <a:xfrm>
-            <a:off x="6855742" y="405109"/>
-            <a:ext cx="2678897" cy="923330"/>
-          </a:xfrm>
-          <a:prstGeom prst="rect">
-            <a:avLst/>
-          </a:prstGeom>
-          <a:solidFill>
-            <a:schemeClr val="accent2">
-              <a:lumMod val="40000"/>
-              <a:lumOff val="60000"/>
-            </a:schemeClr>
-          </a:solidFill>
-        </p:spPr>
-        <p:txBody>
-          <a:bodyPr wrap="square" rtlCol="0">
-            <a:spAutoFit/>
-          </a:bodyPr>
-          <a:lstStyle/>
-          <a:p>
-            <a:pPr algn="ctr"/>
-            <a:r>
-              <a:rPr lang="en-CA" dirty="0"/>
-              <a:t>This is a </a:t>
-            </a:r>
-            <a:r>
-              <a:rPr lang="en-CA" b="1" dirty="0"/>
-              <a:t>flow chart </a:t>
-            </a:r>
-            <a:r>
-              <a:rPr lang="en-CA" dirty="0"/>
-              <a:t>of the code that shows visually what’s happening.</a:t>
-            </a:r>
-            <a:endParaRPr lang="en-AU" dirty="0"/>
-          </a:p>
-        </p:txBody>
-      </p:sp>
-      <p:sp>
-        <p:nvSpPr>
-          <p:cNvPr id="7" name="TextBox 6">
-            <a:extLst>
-              <a:ext uri="{FF2B5EF4-FFF2-40B4-BE49-F238E27FC236}">
-                <a16:creationId xmlns:a16="http://schemas.microsoft.com/office/drawing/2014/main" id="{9C2C001F-82BD-D8C2-5B67-5C84736643DD}"/>
-              </a:ext>
-            </a:extLst>
-          </p:cNvPr>
-          <p:cNvSpPr txBox="1"/>
-          <p:nvPr/>
-        </p:nvSpPr>
-        <p:spPr>
-          <a:xfrm>
-            <a:off x="311010" y="3429000"/>
-            <a:ext cx="2460862" cy="646331"/>
-          </a:xfrm>
-          <a:prstGeom prst="rect">
-            <a:avLst/>
-          </a:prstGeom>
-          <a:solidFill>
-            <a:schemeClr val="accent2">
-              <a:lumMod val="40000"/>
-              <a:lumOff val="60000"/>
-            </a:schemeClr>
-          </a:solidFill>
-        </p:spPr>
-        <p:txBody>
-          <a:bodyPr wrap="square" rtlCol="0">
-            <a:spAutoFit/>
-          </a:bodyPr>
-          <a:lstStyle/>
-          <a:p>
-            <a:pPr algn="ctr"/>
-            <a:r>
-              <a:rPr lang="en-CA" dirty="0"/>
-              <a:t>Any code after the loop never runs.</a:t>
-            </a:r>
-            <a:endParaRPr lang="en-AU" dirty="0"/>
-          </a:p>
-        </p:txBody>
-      </p:sp>
-      <p:cxnSp>
-        <p:nvCxnSpPr>
-          <p:cNvPr id="9" name="Straight Arrow Connector 8">
-            <a:extLst>
-              <a:ext uri="{FF2B5EF4-FFF2-40B4-BE49-F238E27FC236}">
-                <a16:creationId xmlns:a16="http://schemas.microsoft.com/office/drawing/2014/main" id="{C5EA5E28-C3C5-C867-B3B2-9CC087A7D42C}"/>
-              </a:ext>
-            </a:extLst>
-          </p:cNvPr>
-          <p:cNvCxnSpPr>
-            <a:stCxn id="7" idx="3"/>
-          </p:cNvCxnSpPr>
-          <p:nvPr/>
-        </p:nvCxnSpPr>
-        <p:spPr>
-          <a:xfrm flipV="1">
-            <a:off x="2771872" y="3613666"/>
-            <a:ext cx="589395" cy="138500"/>
-          </a:xfrm>
-          <a:prstGeom prst="straightConnector1">
-            <a:avLst/>
-          </a:prstGeom>
-          <a:ln>
-            <a:tailEnd type="triangle"/>
-          </a:ln>
-        </p:spPr>
-        <p:style>
-          <a:lnRef idx="2">
-            <a:schemeClr val="accent1"/>
-          </a:lnRef>
-          <a:fillRef idx="0">
-            <a:schemeClr val="accent1"/>
-          </a:fillRef>
-          <a:effectRef idx="1">
-            <a:schemeClr val="accent1"/>
-          </a:effectRef>
-          <a:fontRef idx="minor">
-            <a:schemeClr val="tx1"/>
-          </a:fontRef>
-        </p:style>
-      </p:cxnSp>
-    </p:spTree>
-    <p:extLst>
-      <p:ext uri="{BB962C8B-B14F-4D97-AF65-F5344CB8AC3E}">
-        <p14:creationId xmlns:p14="http://schemas.microsoft.com/office/powerpoint/2010/main" val="2817996570"/>
-      </p:ext>
-    </p:extLst>
-  </p:cSld>
-  <p:clrMapOvr>
-    <a:masterClrMapping/>
-  </p:clrMapOvr>
-</p:sld>
-</file>
-
-<file path=ppt/slides/slide60.xml><?xml version="1.0" encoding="utf-8"?>
+<file path=ppt/slides/slide61.xml><?xml version="1.0" encoding="utf-8"?>
 <p:sld xmlns:a="http://schemas.openxmlformats.org/drawingml/2006/main" xmlns:r="http://schemas.openxmlformats.org/officeDocument/2006/relationships" xmlns:p="http://schemas.openxmlformats.org/presentationml/2006/main">
   <p:cSld>
     <p:spTree>
@@ -35845,7 +36957,7 @@
           <a:p>
             <a:fld id="{CBA0A0CD-12E5-4065-8C87-26D031211F61}" type="slidenum">
               <a:rPr lang="en-AU" smtClean="0"/>
-              <a:t>60</a:t>
+              <a:t>61</a:t>
             </a:fld>
             <a:endParaRPr lang="en-AU"/>
           </a:p>
@@ -36164,7 +37276,7 @@
 </p:sld>
 </file>
 
-<file path=ppt/slides/slide61.xml><?xml version="1.0" encoding="utf-8"?>
+<file path=ppt/slides/slide62.xml><?xml version="1.0" encoding="utf-8"?>
 <p:sld xmlns:a="http://schemas.openxmlformats.org/drawingml/2006/main" xmlns:r="http://schemas.openxmlformats.org/officeDocument/2006/relationships" xmlns:p="http://schemas.openxmlformats.org/presentationml/2006/main">
   <p:cSld>
     <p:spTree>
@@ -36253,7 +37365,7 @@
           <a:p>
             <a:fld id="{CBA0A0CD-12E5-4065-8C87-26D031211F61}" type="slidenum">
               <a:rPr lang="en-AU" smtClean="0"/>
-              <a:t>61</a:t>
+              <a:t>62</a:t>
             </a:fld>
             <a:endParaRPr lang="en-AU"/>
           </a:p>
@@ -36737,7 +37849,7 @@
               <a:rPr lang="en-US" sz="2000" dirty="0">
                 <a:latin typeface="Consolas" panose="020B0609020204030204" pitchFamily="49" charset="0"/>
               </a:rPr>
-              <a:t>('cat’))     # True</a:t>
+              <a:t>('cat'))     # True</a:t>
             </a:r>
           </a:p>
           <a:p>
@@ -36757,7 +37869,7 @@
               <a:rPr lang="en-US" sz="2000" dirty="0">
                 <a:latin typeface="Consolas" panose="020B0609020204030204" pitchFamily="49" charset="0"/>
               </a:rPr>
-              <a:t>('MOOSE!’))  # True</a:t>
+              <a:t>('MOOSE!'))  # True</a:t>
             </a:r>
           </a:p>
           <a:p>
@@ -36818,7 +37930,7 @@
 </p:sld>
 </file>
 
-<file path=ppt/slides/slide62.xml><?xml version="1.0" encoding="utf-8"?>
+<file path=ppt/slides/slide63.xml><?xml version="1.0" encoding="utf-8"?>
 <p:sld xmlns:a="http://schemas.openxmlformats.org/drawingml/2006/main" xmlns:r="http://schemas.openxmlformats.org/officeDocument/2006/relationships" xmlns:p="http://schemas.openxmlformats.org/presentationml/2006/main">
   <p:cSld>
     <p:spTree>
@@ -36907,7 +38019,7 @@
           <a:p>
             <a:fld id="{CBA0A0CD-12E5-4065-8C87-26D031211F61}" type="slidenum">
               <a:rPr lang="en-AU" smtClean="0"/>
-              <a:t>62</a:t>
+              <a:t>63</a:t>
             </a:fld>
             <a:endParaRPr lang="en-AU"/>
           </a:p>
@@ -37397,7 +38509,7 @@
 </p:sld>
 </file>
 
-<file path=ppt/slides/slide63.xml><?xml version="1.0" encoding="utf-8"?>
+<file path=ppt/slides/slide64.xml><?xml version="1.0" encoding="utf-8"?>
 <p:sld xmlns:a="http://schemas.openxmlformats.org/drawingml/2006/main" xmlns:r="http://schemas.openxmlformats.org/officeDocument/2006/relationships" xmlns:p="http://schemas.openxmlformats.org/presentationml/2006/main">
   <p:cSld>
     <p:spTree>
@@ -37486,7 +38598,7 @@
           <a:p>
             <a:fld id="{CBA0A0CD-12E5-4065-8C87-26D031211F61}" type="slidenum">
               <a:rPr lang="en-AU" smtClean="0"/>
-              <a:t>63</a:t>
+              <a:t>64</a:t>
             </a:fld>
             <a:endParaRPr lang="en-AU"/>
           </a:p>
@@ -38105,7 +39217,7 @@
 </p:sld>
 </file>
 
-<file path=ppt/slides/slide64.xml><?xml version="1.0" encoding="utf-8"?>
+<file path=ppt/slides/slide65.xml><?xml version="1.0" encoding="utf-8"?>
 <p:sld xmlns:a="http://schemas.openxmlformats.org/drawingml/2006/main" xmlns:r="http://schemas.openxmlformats.org/officeDocument/2006/relationships" xmlns:p="http://schemas.openxmlformats.org/presentationml/2006/main">
   <p:cSld>
     <p:spTree>
@@ -38194,7 +39306,7 @@
           <a:p>
             <a:fld id="{CBA0A0CD-12E5-4065-8C87-26D031211F61}" type="slidenum">
               <a:rPr lang="en-AU" smtClean="0"/>
-              <a:t>64</a:t>
+              <a:t>65</a:t>
             </a:fld>
             <a:endParaRPr lang="en-AU"/>
           </a:p>
@@ -38875,7 +39987,7 @@
 </p:sld>
 </file>
 
-<file path=ppt/slides/slide65.xml><?xml version="1.0" encoding="utf-8"?>
+<file path=ppt/slides/slide66.xml><?xml version="1.0" encoding="utf-8"?>
 <p:sld xmlns:a="http://schemas.openxmlformats.org/drawingml/2006/main" xmlns:r="http://schemas.openxmlformats.org/officeDocument/2006/relationships" xmlns:p="http://schemas.openxmlformats.org/presentationml/2006/main">
   <p:cSld>
     <p:spTree>
@@ -38964,7 +40076,7 @@
           <a:p>
             <a:fld id="{CBA0A0CD-12E5-4065-8C87-26D031211F61}" type="slidenum">
               <a:rPr lang="en-AU" smtClean="0"/>
-              <a:t>65</a:t>
+              <a:t>66</a:t>
             </a:fld>
             <a:endParaRPr lang="en-AU"/>
           </a:p>
@@ -39432,7 +40544,7 @@
 </p:sld>
 </file>
 
-<file path=ppt/slides/slide66.xml><?xml version="1.0" encoding="utf-8"?>
+<file path=ppt/slides/slide67.xml><?xml version="1.0" encoding="utf-8"?>
 <p:sld xmlns:a="http://schemas.openxmlformats.org/drawingml/2006/main" xmlns:r="http://schemas.openxmlformats.org/officeDocument/2006/relationships" xmlns:p="http://schemas.openxmlformats.org/presentationml/2006/main">
   <p:cSld>
     <p:spTree>
@@ -39521,7 +40633,7 @@
           <a:p>
             <a:fld id="{CBA0A0CD-12E5-4065-8C87-26D031211F61}" type="slidenum">
               <a:rPr lang="en-AU" smtClean="0"/>
-              <a:t>66</a:t>
+              <a:t>67</a:t>
             </a:fld>
             <a:endParaRPr lang="en-AU"/>
           </a:p>
@@ -40173,7 +41285,7 @@
 </p:sld>
 </file>
 
-<file path=ppt/slides/slide67.xml><?xml version="1.0" encoding="utf-8"?>
+<file path=ppt/slides/slide68.xml><?xml version="1.0" encoding="utf-8"?>
 <p:sld xmlns:a="http://schemas.openxmlformats.org/drawingml/2006/main" xmlns:r="http://schemas.openxmlformats.org/officeDocument/2006/relationships" xmlns:p="http://schemas.openxmlformats.org/presentationml/2006/main">
   <p:cSld>
     <p:spTree>
@@ -40219,7 +41331,7 @@
           <a:p>
             <a:fld id="{CBA0A0CD-12E5-4065-8C87-26D031211F61}" type="slidenum">
               <a:rPr lang="en-AU" smtClean="0"/>
-              <a:t>67</a:t>
+              <a:t>68</a:t>
             </a:fld>
             <a:endParaRPr lang="en-AU"/>
           </a:p>
@@ -40313,7 +41425,7 @@
 </p:sld>
 </file>
 
-<file path=ppt/slides/slide68.xml><?xml version="1.0" encoding="utf-8"?>
+<file path=ppt/slides/slide69.xml><?xml version="1.0" encoding="utf-8"?>
 <p:sld xmlns:a="http://schemas.openxmlformats.org/drawingml/2006/main" xmlns:r="http://schemas.openxmlformats.org/officeDocument/2006/relationships" xmlns:p="http://schemas.openxmlformats.org/presentationml/2006/main">
   <p:cSld>
     <p:spTree>
@@ -40353,7 +41465,7 @@
           <a:p>
             <a:fld id="{CBA0A0CD-12E5-4065-8C87-26D031211F61}" type="slidenum">
               <a:rPr lang="en-AU" smtClean="0"/>
-              <a:t>68</a:t>
+              <a:t>69</a:t>
             </a:fld>
             <a:endParaRPr lang="en-AU"/>
           </a:p>
@@ -40519,7 +41631,7 @@
         <p:spPr>
           <a:xfrm>
             <a:off x="275447" y="3582154"/>
-            <a:ext cx="3932485" cy="2862322"/>
+            <a:ext cx="3932485" cy="3139321"/>
           </a:xfrm>
           <a:prstGeom prst="rect">
             <a:avLst/>
@@ -40553,7 +41665,13 @@
           <a:p>
             <a:r>
               <a:rPr lang="en-CA" dirty="0"/>
-              <a:t>4 or more letters: 1 point per letter</a:t>
+              <a:t>4 letters: 1 point</a:t>
+            </a:r>
+          </a:p>
+          <a:p>
+            <a:r>
+              <a:rPr lang="en-CA" dirty="0"/>
+              <a:t>5 or more letters: 1 point per letter</a:t>
             </a:r>
           </a:p>
           <a:p>
@@ -40591,441 +41709,6 @@
     <p:extLst>
       <p:ext uri="{BB962C8B-B14F-4D97-AF65-F5344CB8AC3E}">
         <p14:creationId xmlns:p14="http://schemas.microsoft.com/office/powerpoint/2010/main" val="554056988"/>
-      </p:ext>
-    </p:extLst>
-  </p:cSld>
-  <p:clrMapOvr>
-    <a:masterClrMapping/>
-  </p:clrMapOvr>
-</p:sld>
-</file>
-
-<file path=ppt/slides/slide69.xml><?xml version="1.0" encoding="utf-8"?>
-<p:sld xmlns:a="http://schemas.openxmlformats.org/drawingml/2006/main" xmlns:r="http://schemas.openxmlformats.org/officeDocument/2006/relationships" xmlns:p="http://schemas.openxmlformats.org/presentationml/2006/main">
-  <p:cSld>
-    <p:spTree>
-      <p:nvGrpSpPr>
-        <p:cNvPr id="1" name="">
-          <a:extLst>
-            <a:ext uri="{FF2B5EF4-FFF2-40B4-BE49-F238E27FC236}">
-              <a16:creationId xmlns:a16="http://schemas.microsoft.com/office/drawing/2014/main" id="{74B53FE8-72C1-8BCC-8660-BA8FEFB8BB1D}"/>
-            </a:ext>
-          </a:extLst>
-        </p:cNvPr>
-        <p:cNvGrpSpPr/>
-        <p:nvPr/>
-      </p:nvGrpSpPr>
-      <p:grpSpPr>
-        <a:xfrm>
-          <a:off x="0" y="0"/>
-          <a:ext cx="0" cy="0"/>
-          <a:chOff x="0" y="0"/>
-          <a:chExt cx="0" cy="0"/>
-        </a:xfrm>
-      </p:grpSpPr>
-      <p:sp>
-        <p:nvSpPr>
-          <p:cNvPr id="4" name="Slide Number Placeholder 3">
-            <a:extLst>
-              <a:ext uri="{FF2B5EF4-FFF2-40B4-BE49-F238E27FC236}">
-                <a16:creationId xmlns:a16="http://schemas.microsoft.com/office/drawing/2014/main" id="{735FD436-83DB-0761-B904-FB0AC1D96590}"/>
-              </a:ext>
-            </a:extLst>
-          </p:cNvPr>
-          <p:cNvSpPr>
-            <a:spLocks noGrp="1"/>
-          </p:cNvSpPr>
-          <p:nvPr>
-            <p:ph type="sldNum" sz="quarter" idx="12"/>
-          </p:nvPr>
-        </p:nvSpPr>
-        <p:spPr/>
-        <p:txBody>
-          <a:bodyPr/>
-          <a:lstStyle/>
-          <a:p>
-            <a:fld id="{CBA0A0CD-12E5-4065-8C87-26D031211F61}" type="slidenum">
-              <a:rPr lang="en-AU" smtClean="0"/>
-              <a:t>69</a:t>
-            </a:fld>
-            <a:endParaRPr lang="en-AU"/>
-          </a:p>
-        </p:txBody>
-      </p:sp>
-      <p:pic>
-        <p:nvPicPr>
-          <p:cNvPr id="6" name="Picture 5">
-            <a:extLst>
-              <a:ext uri="{FF2B5EF4-FFF2-40B4-BE49-F238E27FC236}">
-                <a16:creationId xmlns:a16="http://schemas.microsoft.com/office/drawing/2014/main" id="{C7FEDA9A-967B-C30E-07F9-E338EECFE448}"/>
-              </a:ext>
-            </a:extLst>
-          </p:cNvPr>
-          <p:cNvPicPr>
-            <a:picLocks noChangeAspect="1"/>
-          </p:cNvPicPr>
-          <p:nvPr/>
-        </p:nvPicPr>
-        <p:blipFill>
-          <a:blip r:embed="rId2"/>
-          <a:stretch>
-            <a:fillRect/>
-          </a:stretch>
-        </p:blipFill>
-        <p:spPr>
-          <a:xfrm>
-            <a:off x="5351471" y="0"/>
-            <a:ext cx="2715004" cy="4067743"/>
-          </a:xfrm>
-          <a:prstGeom prst="rect">
-            <a:avLst/>
-          </a:prstGeom>
-        </p:spPr>
-      </p:pic>
-      <p:sp>
-        <p:nvSpPr>
-          <p:cNvPr id="8" name="TextBox 7">
-            <a:extLst>
-              <a:ext uri="{FF2B5EF4-FFF2-40B4-BE49-F238E27FC236}">
-                <a16:creationId xmlns:a16="http://schemas.microsoft.com/office/drawing/2014/main" id="{09D64FD1-09AE-4E43-3415-AD524177F795}"/>
-              </a:ext>
-            </a:extLst>
-          </p:cNvPr>
-          <p:cNvSpPr txBox="1"/>
-          <p:nvPr/>
-        </p:nvSpPr>
-        <p:spPr>
-          <a:xfrm>
-            <a:off x="275447" y="272916"/>
-            <a:ext cx="3932485" cy="2031325"/>
-          </a:xfrm>
-          <a:prstGeom prst="rect">
-            <a:avLst/>
-          </a:prstGeom>
-          <a:solidFill>
-            <a:schemeClr val="accent2">
-              <a:lumMod val="40000"/>
-              <a:lumOff val="60000"/>
-            </a:schemeClr>
-          </a:solidFill>
-        </p:spPr>
-        <p:txBody>
-          <a:bodyPr wrap="square" rtlCol="0">
-            <a:spAutoFit/>
-          </a:bodyPr>
-          <a:lstStyle/>
-          <a:p>
-            <a:pPr marL="285750" indent="-285750">
-              <a:buFont typeface="Arial" panose="020B0604020202020204" pitchFamily="34" charset="0"/>
-              <a:buChar char="•"/>
-            </a:pPr>
-            <a:r>
-              <a:rPr lang="en-CA" dirty="0"/>
-              <a:t>Each word must use the center letter, </a:t>
-            </a:r>
-            <a:r>
-              <a:rPr lang="en-CA" b="1" dirty="0"/>
-              <a:t>P</a:t>
-            </a:r>
-            <a:r>
-              <a:rPr lang="en-CA" dirty="0"/>
-              <a:t> in this case</a:t>
-            </a:r>
-            <a:br>
-              <a:rPr lang="en-CA" dirty="0"/>
-            </a:br>
-            <a:r>
-              <a:rPr lang="en-CA" dirty="0"/>
-              <a:t>e.g. </a:t>
-            </a:r>
-            <a:r>
-              <a:rPr lang="en-CA" b="1" dirty="0">
-                <a:solidFill>
-                  <a:srgbClr val="FF0000"/>
-                </a:solidFill>
-              </a:rPr>
-              <a:t>CHAT</a:t>
-            </a:r>
-            <a:r>
-              <a:rPr lang="en-CA" dirty="0"/>
-              <a:t> is invalid</a:t>
-            </a:r>
-          </a:p>
-          <a:p>
-            <a:pPr marL="285750" indent="-285750">
-              <a:buFont typeface="Arial" panose="020B0604020202020204" pitchFamily="34" charset="0"/>
-              <a:buChar char="•"/>
-            </a:pPr>
-            <a:r>
-              <a:rPr lang="en-CA" dirty="0"/>
-              <a:t>Letters do </a:t>
-            </a:r>
-            <a:r>
-              <a:rPr lang="en-CA" i="1" dirty="0"/>
-              <a:t>not</a:t>
-            </a:r>
-            <a:r>
-              <a:rPr lang="en-CA" dirty="0"/>
-              <a:t> need to connect, e.g. </a:t>
-            </a:r>
-            <a:r>
-              <a:rPr lang="en-CA" b="1" dirty="0"/>
-              <a:t>CHAP</a:t>
-            </a:r>
-            <a:r>
-              <a:rPr lang="en-CA" dirty="0"/>
-              <a:t> is valid</a:t>
-            </a:r>
-          </a:p>
-          <a:p>
-            <a:pPr marL="285750" indent="-285750">
-              <a:buFont typeface="Arial" panose="020B0604020202020204" pitchFamily="34" charset="0"/>
-              <a:buChar char="•"/>
-            </a:pPr>
-            <a:r>
-              <a:rPr lang="en-CA" dirty="0"/>
-              <a:t>Letters can repeat, e.g. </a:t>
-            </a:r>
-            <a:r>
-              <a:rPr lang="en-CA" b="1" dirty="0"/>
-              <a:t>TEEPEE</a:t>
-            </a:r>
-            <a:r>
-              <a:rPr lang="en-CA" dirty="0"/>
-              <a:t> is valid</a:t>
-            </a:r>
-          </a:p>
-        </p:txBody>
-      </p:sp>
-      <p:sp>
-        <p:nvSpPr>
-          <p:cNvPr id="9" name="TextBox 8">
-            <a:extLst>
-              <a:ext uri="{FF2B5EF4-FFF2-40B4-BE49-F238E27FC236}">
-                <a16:creationId xmlns:a16="http://schemas.microsoft.com/office/drawing/2014/main" id="{C9EC8680-9BE8-C661-0A01-5EEA5EF4FFD9}"/>
-              </a:ext>
-            </a:extLst>
-          </p:cNvPr>
-          <p:cNvSpPr txBox="1"/>
-          <p:nvPr/>
-        </p:nvSpPr>
-        <p:spPr>
-          <a:xfrm>
-            <a:off x="9210014" y="136525"/>
-            <a:ext cx="1688819" cy="2308324"/>
-          </a:xfrm>
-          <a:prstGeom prst="rect">
-            <a:avLst/>
-          </a:prstGeom>
-          <a:solidFill>
-            <a:schemeClr val="accent2">
-              <a:lumMod val="40000"/>
-              <a:lumOff val="60000"/>
-            </a:schemeClr>
-          </a:solidFill>
-        </p:spPr>
-        <p:txBody>
-          <a:bodyPr wrap="square" rtlCol="0">
-            <a:spAutoFit/>
-          </a:bodyPr>
-          <a:lstStyle/>
-          <a:p>
-            <a:r>
-              <a:rPr lang="en-CA" dirty="0"/>
-              <a:t>Some words:</a:t>
-            </a:r>
-          </a:p>
-          <a:p>
-            <a:r>
-              <a:rPr lang="en-CA" dirty="0"/>
-              <a:t>TA</a:t>
-            </a:r>
-            <a:r>
-              <a:rPr lang="en-CA" dirty="0">
-                <a:solidFill>
-                  <a:srgbClr val="00B050"/>
-                </a:solidFill>
-              </a:rPr>
-              <a:t>P</a:t>
-            </a:r>
-            <a:r>
-              <a:rPr lang="en-CA" dirty="0"/>
-              <a:t>E,  4</a:t>
-            </a:r>
-          </a:p>
-          <a:p>
-            <a:r>
-              <a:rPr lang="en-CA" dirty="0">
-                <a:solidFill>
-                  <a:srgbClr val="00B050"/>
-                </a:solidFill>
-              </a:rPr>
-              <a:t>P</a:t>
-            </a:r>
-            <a:r>
-              <a:rPr lang="en-CA" dirty="0"/>
-              <a:t>ATH, 4</a:t>
-            </a:r>
-          </a:p>
-          <a:p>
-            <a:r>
-              <a:rPr lang="en-CA" dirty="0"/>
-              <a:t>CHEA</a:t>
-            </a:r>
-            <a:r>
-              <a:rPr lang="en-CA" dirty="0">
-                <a:solidFill>
-                  <a:srgbClr val="00B050"/>
-                </a:solidFill>
-              </a:rPr>
-              <a:t>P</a:t>
-            </a:r>
-            <a:r>
-              <a:rPr lang="en-CA" dirty="0"/>
-              <a:t>, 5</a:t>
-            </a:r>
-          </a:p>
-          <a:p>
-            <a:r>
-              <a:rPr lang="en-CA" dirty="0">
-                <a:solidFill>
-                  <a:srgbClr val="00B050"/>
-                </a:solidFill>
-              </a:rPr>
-              <a:t>P</a:t>
-            </a:r>
-            <a:r>
-              <a:rPr lang="en-CA" dirty="0"/>
-              <a:t>ATCH, 5</a:t>
-            </a:r>
-          </a:p>
-          <a:p>
-            <a:r>
-              <a:rPr lang="en-CA" dirty="0"/>
-              <a:t>A</a:t>
-            </a:r>
-            <a:r>
-              <a:rPr lang="en-CA" dirty="0">
-                <a:solidFill>
-                  <a:srgbClr val="00B050"/>
-                </a:solidFill>
-              </a:rPr>
-              <a:t>PP</a:t>
-            </a:r>
-            <a:r>
-              <a:rPr lang="en-CA" dirty="0"/>
-              <a:t>ETITE, 8</a:t>
-            </a:r>
-          </a:p>
-          <a:p>
-            <a:r>
-              <a:rPr lang="en-CA" dirty="0">
-                <a:solidFill>
-                  <a:srgbClr val="00B050"/>
-                </a:solidFill>
-              </a:rPr>
-              <a:t>P</a:t>
-            </a:r>
-            <a:r>
-              <a:rPr lang="en-CA" dirty="0"/>
-              <a:t>ATHETIC, 15</a:t>
-            </a:r>
-          </a:p>
-          <a:p>
-            <a:r>
-              <a:rPr lang="en-CA" dirty="0"/>
-              <a:t>…</a:t>
-            </a:r>
-          </a:p>
-        </p:txBody>
-      </p:sp>
-      <p:sp>
-        <p:nvSpPr>
-          <p:cNvPr id="13" name="TextBox 12">
-            <a:extLst>
-              <a:ext uri="{FF2B5EF4-FFF2-40B4-BE49-F238E27FC236}">
-                <a16:creationId xmlns:a16="http://schemas.microsoft.com/office/drawing/2014/main" id="{D2FA35C1-C330-2694-3B2C-09F9346EC6EB}"/>
-              </a:ext>
-            </a:extLst>
-          </p:cNvPr>
-          <p:cNvSpPr txBox="1"/>
-          <p:nvPr/>
-        </p:nvSpPr>
-        <p:spPr>
-          <a:xfrm>
-            <a:off x="275447" y="3582154"/>
-            <a:ext cx="3932485" cy="2862322"/>
-          </a:xfrm>
-          <a:prstGeom prst="rect">
-            <a:avLst/>
-          </a:prstGeom>
-          <a:solidFill>
-            <a:schemeClr val="accent2">
-              <a:lumMod val="40000"/>
-              <a:lumOff val="60000"/>
-            </a:schemeClr>
-          </a:solidFill>
-        </p:spPr>
-        <p:txBody>
-          <a:bodyPr wrap="square" rtlCol="0">
-            <a:spAutoFit/>
-          </a:bodyPr>
-          <a:lstStyle/>
-          <a:p>
-            <a:pPr algn="ctr"/>
-            <a:r>
-              <a:rPr lang="en-CA" b="1" dirty="0"/>
-              <a:t>Word Scoring</a:t>
-            </a:r>
-            <a:endParaRPr lang="en-CA" dirty="0"/>
-          </a:p>
-          <a:p>
-            <a:r>
-              <a:rPr lang="en-CA" dirty="0"/>
-              <a:t>3 or fewer letters: 0 points</a:t>
-            </a:r>
-          </a:p>
-          <a:p>
-            <a:r>
-              <a:rPr lang="en-CA" dirty="0"/>
-              <a:t>4 or more letters: 1 point per letter</a:t>
-            </a:r>
-          </a:p>
-          <a:p>
-            <a:endParaRPr lang="en-CA" dirty="0"/>
-          </a:p>
-          <a:p>
-            <a:r>
-              <a:rPr lang="en-CA" b="1" dirty="0"/>
-              <a:t>Pangram bonus</a:t>
-            </a:r>
-          </a:p>
-          <a:p>
-            <a:pPr marL="285750" indent="-285750">
-              <a:buFont typeface="Arial" panose="020B0604020202020204" pitchFamily="34" charset="0"/>
-              <a:buChar char="•"/>
-            </a:pPr>
-            <a:r>
-              <a:rPr lang="en-CA" dirty="0"/>
-              <a:t>7 bonus points if all 7 different letters are used (plus you still get 1 point per letter)</a:t>
-            </a:r>
-          </a:p>
-          <a:p>
-            <a:pPr marL="285750" indent="-285750">
-              <a:buFont typeface="Arial" panose="020B0604020202020204" pitchFamily="34" charset="0"/>
-              <a:buChar char="•"/>
-            </a:pPr>
-            <a:r>
-              <a:rPr lang="en-CA" dirty="0"/>
-              <a:t>Each puzzle is guaranteed to have at least one pangram</a:t>
-            </a:r>
-          </a:p>
-        </p:txBody>
-      </p:sp>
-    </p:spTree>
-    <p:extLst>
-      <p:ext uri="{BB962C8B-B14F-4D97-AF65-F5344CB8AC3E}">
-        <p14:creationId xmlns:p14="http://schemas.microsoft.com/office/powerpoint/2010/main" val="1153658592"/>
       </p:ext>
     </p:extLst>
   </p:cSld>
@@ -41164,6 +41847,447 @@
         <p:cNvPr id="1" name="">
           <a:extLst>
             <a:ext uri="{FF2B5EF4-FFF2-40B4-BE49-F238E27FC236}">
+              <a16:creationId xmlns:a16="http://schemas.microsoft.com/office/drawing/2014/main" id="{74B53FE8-72C1-8BCC-8660-BA8FEFB8BB1D}"/>
+            </a:ext>
+          </a:extLst>
+        </p:cNvPr>
+        <p:cNvGrpSpPr/>
+        <p:nvPr/>
+      </p:nvGrpSpPr>
+      <p:grpSpPr>
+        <a:xfrm>
+          <a:off x="0" y="0"/>
+          <a:ext cx="0" cy="0"/>
+          <a:chOff x="0" y="0"/>
+          <a:chExt cx="0" cy="0"/>
+        </a:xfrm>
+      </p:grpSpPr>
+      <p:sp>
+        <p:nvSpPr>
+          <p:cNvPr id="4" name="Slide Number Placeholder 3">
+            <a:extLst>
+              <a:ext uri="{FF2B5EF4-FFF2-40B4-BE49-F238E27FC236}">
+                <a16:creationId xmlns:a16="http://schemas.microsoft.com/office/drawing/2014/main" id="{735FD436-83DB-0761-B904-FB0AC1D96590}"/>
+              </a:ext>
+            </a:extLst>
+          </p:cNvPr>
+          <p:cNvSpPr>
+            <a:spLocks noGrp="1"/>
+          </p:cNvSpPr>
+          <p:nvPr>
+            <p:ph type="sldNum" sz="quarter" idx="12"/>
+          </p:nvPr>
+        </p:nvSpPr>
+        <p:spPr/>
+        <p:txBody>
+          <a:bodyPr/>
+          <a:lstStyle/>
+          <a:p>
+            <a:fld id="{CBA0A0CD-12E5-4065-8C87-26D031211F61}" type="slidenum">
+              <a:rPr lang="en-AU" smtClean="0"/>
+              <a:t>70</a:t>
+            </a:fld>
+            <a:endParaRPr lang="en-AU"/>
+          </a:p>
+        </p:txBody>
+      </p:sp>
+      <p:pic>
+        <p:nvPicPr>
+          <p:cNvPr id="6" name="Picture 5">
+            <a:extLst>
+              <a:ext uri="{FF2B5EF4-FFF2-40B4-BE49-F238E27FC236}">
+                <a16:creationId xmlns:a16="http://schemas.microsoft.com/office/drawing/2014/main" id="{C7FEDA9A-967B-C30E-07F9-E338EECFE448}"/>
+              </a:ext>
+            </a:extLst>
+          </p:cNvPr>
+          <p:cNvPicPr>
+            <a:picLocks noChangeAspect="1"/>
+          </p:cNvPicPr>
+          <p:nvPr/>
+        </p:nvPicPr>
+        <p:blipFill>
+          <a:blip r:embed="rId2"/>
+          <a:stretch>
+            <a:fillRect/>
+          </a:stretch>
+        </p:blipFill>
+        <p:spPr>
+          <a:xfrm>
+            <a:off x="5351471" y="0"/>
+            <a:ext cx="2715004" cy="4067743"/>
+          </a:xfrm>
+          <a:prstGeom prst="rect">
+            <a:avLst/>
+          </a:prstGeom>
+        </p:spPr>
+      </p:pic>
+      <p:sp>
+        <p:nvSpPr>
+          <p:cNvPr id="8" name="TextBox 7">
+            <a:extLst>
+              <a:ext uri="{FF2B5EF4-FFF2-40B4-BE49-F238E27FC236}">
+                <a16:creationId xmlns:a16="http://schemas.microsoft.com/office/drawing/2014/main" id="{09D64FD1-09AE-4E43-3415-AD524177F795}"/>
+              </a:ext>
+            </a:extLst>
+          </p:cNvPr>
+          <p:cNvSpPr txBox="1"/>
+          <p:nvPr/>
+        </p:nvSpPr>
+        <p:spPr>
+          <a:xfrm>
+            <a:off x="275447" y="272916"/>
+            <a:ext cx="3932485" cy="2031325"/>
+          </a:xfrm>
+          <a:prstGeom prst="rect">
+            <a:avLst/>
+          </a:prstGeom>
+          <a:solidFill>
+            <a:schemeClr val="accent2">
+              <a:lumMod val="40000"/>
+              <a:lumOff val="60000"/>
+            </a:schemeClr>
+          </a:solidFill>
+        </p:spPr>
+        <p:txBody>
+          <a:bodyPr wrap="square" rtlCol="0">
+            <a:spAutoFit/>
+          </a:bodyPr>
+          <a:lstStyle/>
+          <a:p>
+            <a:pPr marL="285750" indent="-285750">
+              <a:buFont typeface="Arial" panose="020B0604020202020204" pitchFamily="34" charset="0"/>
+              <a:buChar char="•"/>
+            </a:pPr>
+            <a:r>
+              <a:rPr lang="en-CA" dirty="0"/>
+              <a:t>Each word must use the center letter, </a:t>
+            </a:r>
+            <a:r>
+              <a:rPr lang="en-CA" b="1" dirty="0"/>
+              <a:t>P</a:t>
+            </a:r>
+            <a:r>
+              <a:rPr lang="en-CA" dirty="0"/>
+              <a:t> in this case</a:t>
+            </a:r>
+            <a:br>
+              <a:rPr lang="en-CA" dirty="0"/>
+            </a:br>
+            <a:r>
+              <a:rPr lang="en-CA" dirty="0"/>
+              <a:t>e.g. </a:t>
+            </a:r>
+            <a:r>
+              <a:rPr lang="en-CA" b="1" dirty="0">
+                <a:solidFill>
+                  <a:srgbClr val="FF0000"/>
+                </a:solidFill>
+              </a:rPr>
+              <a:t>CHAT</a:t>
+            </a:r>
+            <a:r>
+              <a:rPr lang="en-CA" dirty="0"/>
+              <a:t> is invalid</a:t>
+            </a:r>
+          </a:p>
+          <a:p>
+            <a:pPr marL="285750" indent="-285750">
+              <a:buFont typeface="Arial" panose="020B0604020202020204" pitchFamily="34" charset="0"/>
+              <a:buChar char="•"/>
+            </a:pPr>
+            <a:r>
+              <a:rPr lang="en-CA" dirty="0"/>
+              <a:t>Letters do </a:t>
+            </a:r>
+            <a:r>
+              <a:rPr lang="en-CA" i="1" dirty="0"/>
+              <a:t>not</a:t>
+            </a:r>
+            <a:r>
+              <a:rPr lang="en-CA" dirty="0"/>
+              <a:t> need to connect, e.g. </a:t>
+            </a:r>
+            <a:r>
+              <a:rPr lang="en-CA" b="1" dirty="0"/>
+              <a:t>CHAP</a:t>
+            </a:r>
+            <a:r>
+              <a:rPr lang="en-CA" dirty="0"/>
+              <a:t> is valid</a:t>
+            </a:r>
+          </a:p>
+          <a:p>
+            <a:pPr marL="285750" indent="-285750">
+              <a:buFont typeface="Arial" panose="020B0604020202020204" pitchFamily="34" charset="0"/>
+              <a:buChar char="•"/>
+            </a:pPr>
+            <a:r>
+              <a:rPr lang="en-CA" dirty="0"/>
+              <a:t>Letters can repeat, e.g. </a:t>
+            </a:r>
+            <a:r>
+              <a:rPr lang="en-CA" b="1" dirty="0"/>
+              <a:t>TEEPEE</a:t>
+            </a:r>
+            <a:r>
+              <a:rPr lang="en-CA" dirty="0"/>
+              <a:t> is valid</a:t>
+            </a:r>
+          </a:p>
+        </p:txBody>
+      </p:sp>
+      <p:sp>
+        <p:nvSpPr>
+          <p:cNvPr id="9" name="TextBox 8">
+            <a:extLst>
+              <a:ext uri="{FF2B5EF4-FFF2-40B4-BE49-F238E27FC236}">
+                <a16:creationId xmlns:a16="http://schemas.microsoft.com/office/drawing/2014/main" id="{C9EC8680-9BE8-C661-0A01-5EEA5EF4FFD9}"/>
+              </a:ext>
+            </a:extLst>
+          </p:cNvPr>
+          <p:cNvSpPr txBox="1"/>
+          <p:nvPr/>
+        </p:nvSpPr>
+        <p:spPr>
+          <a:xfrm>
+            <a:off x="9210014" y="136525"/>
+            <a:ext cx="1688819" cy="2308324"/>
+          </a:xfrm>
+          <a:prstGeom prst="rect">
+            <a:avLst/>
+          </a:prstGeom>
+          <a:solidFill>
+            <a:schemeClr val="accent2">
+              <a:lumMod val="40000"/>
+              <a:lumOff val="60000"/>
+            </a:schemeClr>
+          </a:solidFill>
+        </p:spPr>
+        <p:txBody>
+          <a:bodyPr wrap="square" rtlCol="0">
+            <a:spAutoFit/>
+          </a:bodyPr>
+          <a:lstStyle/>
+          <a:p>
+            <a:r>
+              <a:rPr lang="en-CA" dirty="0"/>
+              <a:t>Some words:</a:t>
+            </a:r>
+          </a:p>
+          <a:p>
+            <a:r>
+              <a:rPr lang="en-CA" dirty="0"/>
+              <a:t>TA</a:t>
+            </a:r>
+            <a:r>
+              <a:rPr lang="en-CA" dirty="0">
+                <a:solidFill>
+                  <a:srgbClr val="00B050"/>
+                </a:solidFill>
+              </a:rPr>
+              <a:t>P</a:t>
+            </a:r>
+            <a:r>
+              <a:rPr lang="en-CA" dirty="0"/>
+              <a:t>E,  4</a:t>
+            </a:r>
+          </a:p>
+          <a:p>
+            <a:r>
+              <a:rPr lang="en-CA" dirty="0">
+                <a:solidFill>
+                  <a:srgbClr val="00B050"/>
+                </a:solidFill>
+              </a:rPr>
+              <a:t>P</a:t>
+            </a:r>
+            <a:r>
+              <a:rPr lang="en-CA" dirty="0"/>
+              <a:t>ATH, 4</a:t>
+            </a:r>
+          </a:p>
+          <a:p>
+            <a:r>
+              <a:rPr lang="en-CA" dirty="0"/>
+              <a:t>CHEA</a:t>
+            </a:r>
+            <a:r>
+              <a:rPr lang="en-CA" dirty="0">
+                <a:solidFill>
+                  <a:srgbClr val="00B050"/>
+                </a:solidFill>
+              </a:rPr>
+              <a:t>P</a:t>
+            </a:r>
+            <a:r>
+              <a:rPr lang="en-CA" dirty="0"/>
+              <a:t>, 5</a:t>
+            </a:r>
+          </a:p>
+          <a:p>
+            <a:r>
+              <a:rPr lang="en-CA" dirty="0">
+                <a:solidFill>
+                  <a:srgbClr val="00B050"/>
+                </a:solidFill>
+              </a:rPr>
+              <a:t>P</a:t>
+            </a:r>
+            <a:r>
+              <a:rPr lang="en-CA" dirty="0"/>
+              <a:t>ATCH, 5</a:t>
+            </a:r>
+          </a:p>
+          <a:p>
+            <a:r>
+              <a:rPr lang="en-CA" dirty="0"/>
+              <a:t>A</a:t>
+            </a:r>
+            <a:r>
+              <a:rPr lang="en-CA" dirty="0">
+                <a:solidFill>
+                  <a:srgbClr val="00B050"/>
+                </a:solidFill>
+              </a:rPr>
+              <a:t>PP</a:t>
+            </a:r>
+            <a:r>
+              <a:rPr lang="en-CA" dirty="0"/>
+              <a:t>ETITE, 8</a:t>
+            </a:r>
+          </a:p>
+          <a:p>
+            <a:r>
+              <a:rPr lang="en-CA" dirty="0">
+                <a:solidFill>
+                  <a:srgbClr val="00B050"/>
+                </a:solidFill>
+              </a:rPr>
+              <a:t>P</a:t>
+            </a:r>
+            <a:r>
+              <a:rPr lang="en-CA" dirty="0"/>
+              <a:t>ATHETIC, 15</a:t>
+            </a:r>
+          </a:p>
+          <a:p>
+            <a:r>
+              <a:rPr lang="en-CA" dirty="0"/>
+              <a:t>…</a:t>
+            </a:r>
+          </a:p>
+        </p:txBody>
+      </p:sp>
+      <p:sp>
+        <p:nvSpPr>
+          <p:cNvPr id="2" name="TextBox 1">
+            <a:extLst>
+              <a:ext uri="{FF2B5EF4-FFF2-40B4-BE49-F238E27FC236}">
+                <a16:creationId xmlns:a16="http://schemas.microsoft.com/office/drawing/2014/main" id="{CCF4A50D-D8B9-24A2-CF5F-B80C1DEC9CEC}"/>
+              </a:ext>
+            </a:extLst>
+          </p:cNvPr>
+          <p:cNvSpPr txBox="1"/>
+          <p:nvPr/>
+        </p:nvSpPr>
+        <p:spPr>
+          <a:xfrm>
+            <a:off x="275447" y="3582154"/>
+            <a:ext cx="3932485" cy="3139321"/>
+          </a:xfrm>
+          <a:prstGeom prst="rect">
+            <a:avLst/>
+          </a:prstGeom>
+          <a:solidFill>
+            <a:schemeClr val="accent2">
+              <a:lumMod val="40000"/>
+              <a:lumOff val="60000"/>
+            </a:schemeClr>
+          </a:solidFill>
+        </p:spPr>
+        <p:txBody>
+          <a:bodyPr wrap="square" rtlCol="0">
+            <a:spAutoFit/>
+          </a:bodyPr>
+          <a:lstStyle/>
+          <a:p>
+            <a:pPr algn="ctr"/>
+            <a:r>
+              <a:rPr lang="en-CA" b="1" dirty="0"/>
+              <a:t>Word Scoring</a:t>
+            </a:r>
+            <a:endParaRPr lang="en-CA" dirty="0"/>
+          </a:p>
+          <a:p>
+            <a:r>
+              <a:rPr lang="en-CA" dirty="0"/>
+              <a:t>3 or fewer letters: 0 points</a:t>
+            </a:r>
+          </a:p>
+          <a:p>
+            <a:r>
+              <a:rPr lang="en-CA" dirty="0"/>
+              <a:t>4 letters: 1 point</a:t>
+            </a:r>
+          </a:p>
+          <a:p>
+            <a:r>
+              <a:rPr lang="en-CA" dirty="0"/>
+              <a:t>5 or more letters: 1 point per letter</a:t>
+            </a:r>
+          </a:p>
+          <a:p>
+            <a:endParaRPr lang="en-CA" dirty="0"/>
+          </a:p>
+          <a:p>
+            <a:r>
+              <a:rPr lang="en-CA" b="1" dirty="0"/>
+              <a:t>Pangram bonus</a:t>
+            </a:r>
+          </a:p>
+          <a:p>
+            <a:pPr marL="285750" indent="-285750">
+              <a:buFont typeface="Arial" panose="020B0604020202020204" pitchFamily="34" charset="0"/>
+              <a:buChar char="•"/>
+            </a:pPr>
+            <a:r>
+              <a:rPr lang="en-CA" dirty="0"/>
+              <a:t>7 bonus points if all 7 different letters are used (plus you still get 1 point per letter)</a:t>
+            </a:r>
+          </a:p>
+          <a:p>
+            <a:pPr marL="285750" indent="-285750">
+              <a:buFont typeface="Arial" panose="020B0604020202020204" pitchFamily="34" charset="0"/>
+              <a:buChar char="•"/>
+            </a:pPr>
+            <a:r>
+              <a:rPr lang="en-CA" dirty="0"/>
+              <a:t>Each puzzle is guaranteed to have at least one pangram</a:t>
+            </a:r>
+          </a:p>
+        </p:txBody>
+      </p:sp>
+    </p:spTree>
+    <p:extLst>
+      <p:ext uri="{BB962C8B-B14F-4D97-AF65-F5344CB8AC3E}">
+        <p14:creationId xmlns:p14="http://schemas.microsoft.com/office/powerpoint/2010/main" val="1153658592"/>
+      </p:ext>
+    </p:extLst>
+  </p:cSld>
+  <p:clrMapOvr>
+    <a:masterClrMapping/>
+  </p:clrMapOvr>
+</p:sld>
+</file>
+
+<file path=ppt/slides/slide71.xml><?xml version="1.0" encoding="utf-8"?>
+<p:sld xmlns:a="http://schemas.openxmlformats.org/drawingml/2006/main" xmlns:r="http://schemas.openxmlformats.org/officeDocument/2006/relationships" xmlns:p="http://schemas.openxmlformats.org/presentationml/2006/main">
+  <p:cSld>
+    <p:spTree>
+      <p:nvGrpSpPr>
+        <p:cNvPr id="1" name="">
+          <a:extLst>
+            <a:ext uri="{FF2B5EF4-FFF2-40B4-BE49-F238E27FC236}">
               <a16:creationId xmlns:a16="http://schemas.microsoft.com/office/drawing/2014/main" id="{D560C0DF-391C-FF4D-2746-4A8EA13BE997}"/>
             </a:ext>
           </a:extLst>
@@ -41202,7 +42326,7 @@
           <a:p>
             <a:fld id="{CBA0A0CD-12E5-4065-8C87-26D031211F61}" type="slidenum">
               <a:rPr lang="en-AU" smtClean="0"/>
-              <a:t>70</a:t>
+              <a:t>71</a:t>
             </a:fld>
             <a:endParaRPr lang="en-AU"/>
           </a:p>
@@ -41382,10 +42506,10 @@
       </p:sp>
       <p:sp>
         <p:nvSpPr>
-          <p:cNvPr id="13" name="TextBox 12">
-            <a:extLst>
-              <a:ext uri="{FF2B5EF4-FFF2-40B4-BE49-F238E27FC236}">
-                <a16:creationId xmlns:a16="http://schemas.microsoft.com/office/drawing/2014/main" id="{175E9AE4-A71D-D55A-E235-33328B96C5C6}"/>
+          <p:cNvPr id="5" name="TextBox 4">
+            <a:extLst>
+              <a:ext uri="{FF2B5EF4-FFF2-40B4-BE49-F238E27FC236}">
+                <a16:creationId xmlns:a16="http://schemas.microsoft.com/office/drawing/2014/main" id="{26539832-25B9-B678-FC28-155BA30DF887}"/>
               </a:ext>
             </a:extLst>
           </p:cNvPr>
@@ -41394,8 +42518,80 @@
         </p:nvSpPr>
         <p:spPr>
           <a:xfrm>
-            <a:off x="143641" y="136525"/>
-            <a:ext cx="3932485" cy="2862322"/>
+            <a:off x="4718564" y="1688757"/>
+            <a:ext cx="6136616" cy="646331"/>
+          </a:xfrm>
+          <a:prstGeom prst="rect">
+            <a:avLst/>
+          </a:prstGeom>
+          <a:noFill/>
+        </p:spPr>
+        <p:txBody>
+          <a:bodyPr wrap="none" rtlCol="0">
+            <a:spAutoFit/>
+          </a:bodyPr>
+          <a:lstStyle/>
+          <a:p>
+            <a:r>
+              <a:rPr lang="en-US" dirty="0">
+                <a:latin typeface="Consolas" panose="020B0609020204030204" pitchFamily="49" charset="0"/>
+              </a:rPr>
+              <a:t>def </a:t>
+            </a:r>
+            <a:r>
+              <a:rPr lang="en-US" dirty="0" err="1">
+                <a:latin typeface="Consolas" panose="020B0609020204030204" pitchFamily="49" charset="0"/>
+              </a:rPr>
+              <a:t>word_score</a:t>
+            </a:r>
+            <a:r>
+              <a:rPr lang="en-US" dirty="0">
+                <a:latin typeface="Consolas" panose="020B0609020204030204" pitchFamily="49" charset="0"/>
+              </a:rPr>
+              <a:t>(word, required, </a:t>
+            </a:r>
+            <a:r>
+              <a:rPr lang="en-US" dirty="0" err="1">
+                <a:latin typeface="Consolas" panose="020B0609020204030204" pitchFamily="49" charset="0"/>
+              </a:rPr>
+              <a:t>puzzle_letters</a:t>
+            </a:r>
+            <a:r>
+              <a:rPr lang="en-US" dirty="0">
+                <a:latin typeface="Consolas" panose="020B0609020204030204" pitchFamily="49" charset="0"/>
+              </a:rPr>
+              <a:t>):</a:t>
+            </a:r>
+          </a:p>
+          <a:p>
+            <a:r>
+              <a:rPr lang="en-US" dirty="0">
+                <a:latin typeface="Consolas" panose="020B0609020204030204" pitchFamily="49" charset="0"/>
+              </a:rPr>
+              <a:t>    # ...</a:t>
+            </a:r>
+            <a:endParaRPr lang="en-AU" dirty="0">
+              <a:latin typeface="Consolas" panose="020B0609020204030204" pitchFamily="49" charset="0"/>
+            </a:endParaRPr>
+          </a:p>
+        </p:txBody>
+      </p:sp>
+      <p:sp>
+        <p:nvSpPr>
+          <p:cNvPr id="2" name="TextBox 1">
+            <a:extLst>
+              <a:ext uri="{FF2B5EF4-FFF2-40B4-BE49-F238E27FC236}">
+                <a16:creationId xmlns:a16="http://schemas.microsoft.com/office/drawing/2014/main" id="{AD0EB34F-4A9C-6695-0C13-AF24407D9D68}"/>
+              </a:ext>
+            </a:extLst>
+          </p:cNvPr>
+          <p:cNvSpPr txBox="1"/>
+          <p:nvPr/>
+        </p:nvSpPr>
+        <p:spPr>
+          <a:xfrm>
+            <a:off x="5805421" y="513806"/>
+            <a:ext cx="3042487" cy="646331"/>
           </a:xfrm>
           <a:prstGeom prst="rect">
             <a:avLst/>
@@ -41415,60 +42611,18 @@
           <a:p>
             <a:pPr algn="ctr"/>
             <a:r>
-              <a:rPr lang="en-CA" b="1" dirty="0"/>
-              <a:t>Word Scoring</a:t>
-            </a:r>
-            <a:endParaRPr lang="en-CA" dirty="0"/>
-          </a:p>
-          <a:p>
-            <a:r>
-              <a:rPr lang="en-CA" dirty="0"/>
-              <a:t>3 or fewer letters: 0 points</a:t>
-            </a:r>
-          </a:p>
-          <a:p>
-            <a:r>
-              <a:rPr lang="en-CA" dirty="0"/>
-              <a:t>4 or more letters: 1 point per letter</a:t>
-            </a:r>
-          </a:p>
-          <a:p>
-            <a:endParaRPr lang="en-CA" dirty="0"/>
-          </a:p>
-          <a:p>
-            <a:r>
-              <a:rPr lang="en-CA" b="1" dirty="0"/>
-              <a:t>Pangram bonus</a:t>
-            </a:r>
-          </a:p>
-          <a:p>
-            <a:pPr marL="285750" indent="-285750">
-              <a:buFont typeface="Arial" panose="020B0604020202020204" pitchFamily="34" charset="0"/>
-              <a:buChar char="•"/>
-            </a:pPr>
-            <a:r>
-              <a:rPr lang="en-CA" dirty="0"/>
-              <a:t>7 bonus points if all 7 different letters are used (plus you still get 1 point per letter)</a:t>
-            </a:r>
-          </a:p>
-          <a:p>
-            <a:pPr marL="285750" indent="-285750">
-              <a:buFont typeface="Arial" panose="020B0604020202020204" pitchFamily="34" charset="0"/>
-              <a:buChar char="•"/>
-            </a:pPr>
-            <a:r>
-              <a:rPr lang="en-CA" dirty="0"/>
-              <a:t>Each puzzle is guaranteed to have at least one pangram</a:t>
-            </a:r>
-          </a:p>
-        </p:txBody>
-      </p:sp>
-      <p:sp>
-        <p:nvSpPr>
-          <p:cNvPr id="5" name="TextBox 4">
-            <a:extLst>
-              <a:ext uri="{FF2B5EF4-FFF2-40B4-BE49-F238E27FC236}">
-                <a16:creationId xmlns:a16="http://schemas.microsoft.com/office/drawing/2014/main" id="{26539832-25B9-B678-FC28-155BA30DF887}"/>
+              <a:rPr lang="en-CA" dirty="0"/>
+              <a:t>Let’s make a function that scores a word for a puzzle …</a:t>
+            </a:r>
+          </a:p>
+        </p:txBody>
+      </p:sp>
+      <p:sp>
+        <p:nvSpPr>
+          <p:cNvPr id="3" name="TextBox 2">
+            <a:extLst>
+              <a:ext uri="{FF2B5EF4-FFF2-40B4-BE49-F238E27FC236}">
+                <a16:creationId xmlns:a16="http://schemas.microsoft.com/office/drawing/2014/main" id="{B13230A4-194E-4184-95C5-E1B0EE0134E5}"/>
               </a:ext>
             </a:extLst>
           </p:cNvPr>
@@ -41477,80 +42631,8 @@
         </p:nvSpPr>
         <p:spPr>
           <a:xfrm>
-            <a:off x="4718564" y="1688757"/>
-            <a:ext cx="6136616" cy="646331"/>
-          </a:xfrm>
-          <a:prstGeom prst="rect">
-            <a:avLst/>
-          </a:prstGeom>
-          <a:noFill/>
-        </p:spPr>
-        <p:txBody>
-          <a:bodyPr wrap="none" rtlCol="0">
-            <a:spAutoFit/>
-          </a:bodyPr>
-          <a:lstStyle/>
-          <a:p>
-            <a:r>
-              <a:rPr lang="en-US" dirty="0">
-                <a:latin typeface="Consolas" panose="020B0609020204030204" pitchFamily="49" charset="0"/>
-              </a:rPr>
-              <a:t>def </a:t>
-            </a:r>
-            <a:r>
-              <a:rPr lang="en-US" dirty="0" err="1">
-                <a:latin typeface="Consolas" panose="020B0609020204030204" pitchFamily="49" charset="0"/>
-              </a:rPr>
-              <a:t>word_score</a:t>
-            </a:r>
-            <a:r>
-              <a:rPr lang="en-US" dirty="0">
-                <a:latin typeface="Consolas" panose="020B0609020204030204" pitchFamily="49" charset="0"/>
-              </a:rPr>
-              <a:t>(word, required, </a:t>
-            </a:r>
-            <a:r>
-              <a:rPr lang="en-US" dirty="0" err="1">
-                <a:latin typeface="Consolas" panose="020B0609020204030204" pitchFamily="49" charset="0"/>
-              </a:rPr>
-              <a:t>puzzle_letters</a:t>
-            </a:r>
-            <a:r>
-              <a:rPr lang="en-US" dirty="0">
-                <a:latin typeface="Consolas" panose="020B0609020204030204" pitchFamily="49" charset="0"/>
-              </a:rPr>
-              <a:t>):</a:t>
-            </a:r>
-          </a:p>
-          <a:p>
-            <a:r>
-              <a:rPr lang="en-US" dirty="0">
-                <a:latin typeface="Consolas" panose="020B0609020204030204" pitchFamily="49" charset="0"/>
-              </a:rPr>
-              <a:t>    # ...</a:t>
-            </a:r>
-            <a:endParaRPr lang="en-AU" dirty="0">
-              <a:latin typeface="Consolas" panose="020B0609020204030204" pitchFamily="49" charset="0"/>
-            </a:endParaRPr>
-          </a:p>
-        </p:txBody>
-      </p:sp>
-      <p:sp>
-        <p:nvSpPr>
-          <p:cNvPr id="2" name="TextBox 1">
-            <a:extLst>
-              <a:ext uri="{FF2B5EF4-FFF2-40B4-BE49-F238E27FC236}">
-                <a16:creationId xmlns:a16="http://schemas.microsoft.com/office/drawing/2014/main" id="{AD0EB34F-4A9C-6695-0C13-AF24407D9D68}"/>
-              </a:ext>
-            </a:extLst>
-          </p:cNvPr>
-          <p:cNvSpPr txBox="1"/>
-          <p:nvPr/>
-        </p:nvSpPr>
-        <p:spPr>
-          <a:xfrm>
-            <a:off x="5805421" y="513806"/>
-            <a:ext cx="3042487" cy="646331"/>
+            <a:off x="143641" y="119096"/>
+            <a:ext cx="3932485" cy="2862322"/>
           </a:xfrm>
           <a:prstGeom prst="rect">
             <a:avLst/>
@@ -41568,10 +42650,50 @@
           </a:bodyPr>
           <a:lstStyle/>
           <a:p>
-            <a:pPr algn="ctr"/>
-            <a:r>
-              <a:rPr lang="en-CA" dirty="0"/>
-              <a:t>Let’s make a functions that scores a word for a puzzle …</a:t>
+            <a:r>
+              <a:rPr lang="en-CA" dirty="0"/>
+              <a:t>3 or fewer letters: 0 points</a:t>
+            </a:r>
+          </a:p>
+          <a:p>
+            <a:r>
+              <a:rPr lang="en-CA" dirty="0"/>
+              <a:t>4 letters: 1 point</a:t>
+            </a:r>
+          </a:p>
+          <a:p>
+            <a:r>
+              <a:rPr lang="en-CA" dirty="0"/>
+              <a:t>5 or more letters: 1 point per letter</a:t>
+            </a:r>
+          </a:p>
+          <a:p>
+            <a:endParaRPr lang="en-CA" dirty="0"/>
+          </a:p>
+          <a:p>
+            <a:r>
+              <a:rPr lang="en-CA" b="1" dirty="0"/>
+              <a:t>Pangram bonus</a:t>
+            </a:r>
+          </a:p>
+          <a:p>
+            <a:pPr marL="285750" indent="-285750">
+              <a:buFont typeface="Arial" panose="020B0604020202020204" pitchFamily="34" charset="0"/>
+              <a:buChar char="•"/>
+            </a:pPr>
+            <a:r>
+              <a:rPr lang="en-CA" dirty="0"/>
+              <a:t>7 bonus points if all 7 different letters are used (plus you still get 1 point per letter)</a:t>
+            </a:r>
+          </a:p>
+          <a:p>
+            <a:pPr marL="285750" indent="-285750">
+              <a:buFont typeface="Arial" panose="020B0604020202020204" pitchFamily="34" charset="0"/>
+              <a:buChar char="•"/>
+            </a:pPr>
+            <a:r>
+              <a:rPr lang="en-CA" dirty="0"/>
+              <a:t>Each puzzle is guaranteed to have at least one pangram</a:t>
             </a:r>
           </a:p>
         </p:txBody>
@@ -41589,7 +42711,7 @@
 </p:sld>
 </file>
 
-<file path=ppt/slides/slide71.xml><?xml version="1.0" encoding="utf-8"?>
+<file path=ppt/slides/slide72.xml><?xml version="1.0" encoding="utf-8"?>
 <p:sld xmlns:a="http://schemas.openxmlformats.org/drawingml/2006/main" xmlns:r="http://schemas.openxmlformats.org/officeDocument/2006/relationships" xmlns:p="http://schemas.openxmlformats.org/presentationml/2006/main">
   <p:cSld>
     <p:spTree>
@@ -41635,7 +42757,7 @@
           <a:p>
             <a:fld id="{CBA0A0CD-12E5-4065-8C87-26D031211F61}" type="slidenum">
               <a:rPr lang="en-AU" smtClean="0"/>
-              <a:t>71</a:t>
+              <a:t>72</a:t>
             </a:fld>
             <a:endParaRPr lang="en-AU"/>
           </a:p>
@@ -41809,89 +42931,6 @@
             <a:r>
               <a:rPr lang="en-CA" dirty="0"/>
               <a:t>…</a:t>
-            </a:r>
-          </a:p>
-        </p:txBody>
-      </p:sp>
-      <p:sp>
-        <p:nvSpPr>
-          <p:cNvPr id="13" name="TextBox 12">
-            <a:extLst>
-              <a:ext uri="{FF2B5EF4-FFF2-40B4-BE49-F238E27FC236}">
-                <a16:creationId xmlns:a16="http://schemas.microsoft.com/office/drawing/2014/main" id="{66BE07DC-CE31-C9E2-9195-1C1F6E45EA04}"/>
-              </a:ext>
-            </a:extLst>
-          </p:cNvPr>
-          <p:cNvSpPr txBox="1"/>
-          <p:nvPr/>
-        </p:nvSpPr>
-        <p:spPr>
-          <a:xfrm>
-            <a:off x="143641" y="136525"/>
-            <a:ext cx="3932485" cy="2862322"/>
-          </a:xfrm>
-          <a:prstGeom prst="rect">
-            <a:avLst/>
-          </a:prstGeom>
-          <a:solidFill>
-            <a:schemeClr val="accent2">
-              <a:lumMod val="40000"/>
-              <a:lumOff val="60000"/>
-            </a:schemeClr>
-          </a:solidFill>
-        </p:spPr>
-        <p:txBody>
-          <a:bodyPr wrap="square" rtlCol="0">
-            <a:spAutoFit/>
-          </a:bodyPr>
-          <a:lstStyle/>
-          <a:p>
-            <a:pPr algn="ctr"/>
-            <a:r>
-              <a:rPr lang="en-CA" b="1" dirty="0"/>
-              <a:t>Word Scoring</a:t>
-            </a:r>
-            <a:endParaRPr lang="en-CA" dirty="0"/>
-          </a:p>
-          <a:p>
-            <a:r>
-              <a:rPr lang="en-CA" dirty="0"/>
-              <a:t>3 or fewer letters: 0 points</a:t>
-            </a:r>
-          </a:p>
-          <a:p>
-            <a:r>
-              <a:rPr lang="en-CA" dirty="0"/>
-              <a:t>4 or more letters: 1 point per letter</a:t>
-            </a:r>
-          </a:p>
-          <a:p>
-            <a:endParaRPr lang="en-CA" dirty="0"/>
-          </a:p>
-          <a:p>
-            <a:r>
-              <a:rPr lang="en-CA" b="1" dirty="0"/>
-              <a:t>Pangram bonus</a:t>
-            </a:r>
-          </a:p>
-          <a:p>
-            <a:pPr marL="285750" indent="-285750">
-              <a:buFont typeface="Arial" panose="020B0604020202020204" pitchFamily="34" charset="0"/>
-              <a:buChar char="•"/>
-            </a:pPr>
-            <a:r>
-              <a:rPr lang="en-CA" dirty="0"/>
-              <a:t>7 bonus points if all 7 different letters are used (plus you still get 1 point per letter)</a:t>
-            </a:r>
-          </a:p>
-          <a:p>
-            <a:pPr marL="285750" indent="-285750">
-              <a:buFont typeface="Arial" panose="020B0604020202020204" pitchFamily="34" charset="0"/>
-              <a:buChar char="•"/>
-            </a:pPr>
-            <a:r>
-              <a:rPr lang="en-CA" dirty="0"/>
-              <a:t>Each puzzle is guaranteed to have at least one pangram</a:t>
             </a:r>
           </a:p>
         </p:txBody>
@@ -42231,6 +43270,87 @@
           </a:fontRef>
         </p:style>
       </p:cxnSp>
+      <p:sp>
+        <p:nvSpPr>
+          <p:cNvPr id="2" name="TextBox 1">
+            <a:extLst>
+              <a:ext uri="{FF2B5EF4-FFF2-40B4-BE49-F238E27FC236}">
+                <a16:creationId xmlns:a16="http://schemas.microsoft.com/office/drawing/2014/main" id="{8A4F8B5B-04FD-8F26-8E30-3F5D6A46992C}"/>
+              </a:ext>
+            </a:extLst>
+          </p:cNvPr>
+          <p:cNvSpPr txBox="1"/>
+          <p:nvPr/>
+        </p:nvSpPr>
+        <p:spPr>
+          <a:xfrm>
+            <a:off x="143641" y="119096"/>
+            <a:ext cx="3932485" cy="2862322"/>
+          </a:xfrm>
+          <a:prstGeom prst="rect">
+            <a:avLst/>
+          </a:prstGeom>
+          <a:solidFill>
+            <a:schemeClr val="accent2">
+              <a:lumMod val="40000"/>
+              <a:lumOff val="60000"/>
+            </a:schemeClr>
+          </a:solidFill>
+        </p:spPr>
+        <p:txBody>
+          <a:bodyPr wrap="square" rtlCol="0">
+            <a:spAutoFit/>
+          </a:bodyPr>
+          <a:lstStyle/>
+          <a:p>
+            <a:r>
+              <a:rPr lang="en-CA" dirty="0"/>
+              <a:t>3 or fewer letters: 0 points</a:t>
+            </a:r>
+          </a:p>
+          <a:p>
+            <a:r>
+              <a:rPr lang="en-CA" dirty="0"/>
+              <a:t>4 letters: 1 point</a:t>
+            </a:r>
+          </a:p>
+          <a:p>
+            <a:r>
+              <a:rPr lang="en-CA" dirty="0"/>
+              <a:t>5 or more letters: 1 point per letter</a:t>
+            </a:r>
+          </a:p>
+          <a:p>
+            <a:endParaRPr lang="en-CA" dirty="0"/>
+          </a:p>
+          <a:p>
+            <a:r>
+              <a:rPr lang="en-CA" b="1" dirty="0"/>
+              <a:t>Pangram bonus</a:t>
+            </a:r>
+          </a:p>
+          <a:p>
+            <a:pPr marL="285750" indent="-285750">
+              <a:buFont typeface="Arial" panose="020B0604020202020204" pitchFamily="34" charset="0"/>
+              <a:buChar char="•"/>
+            </a:pPr>
+            <a:r>
+              <a:rPr lang="en-CA" dirty="0"/>
+              <a:t>7 bonus points if all 7 different letters are used (plus you still get 1 point per letter)</a:t>
+            </a:r>
+          </a:p>
+          <a:p>
+            <a:pPr marL="285750" indent="-285750">
+              <a:buFont typeface="Arial" panose="020B0604020202020204" pitchFamily="34" charset="0"/>
+              <a:buChar char="•"/>
+            </a:pPr>
+            <a:r>
+              <a:rPr lang="en-CA" dirty="0"/>
+              <a:t>Each puzzle is guaranteed to have at least one pangram</a:t>
+            </a:r>
+          </a:p>
+        </p:txBody>
+      </p:sp>
     </p:spTree>
     <p:extLst>
       <p:ext uri="{BB962C8B-B14F-4D97-AF65-F5344CB8AC3E}">
@@ -42244,7 +43364,7 @@
 </p:sld>
 </file>
 
-<file path=ppt/slides/slide72.xml><?xml version="1.0" encoding="utf-8"?>
+<file path=ppt/slides/slide73.xml><?xml version="1.0" encoding="utf-8"?>
 <p:sld xmlns:a="http://schemas.openxmlformats.org/drawingml/2006/main" xmlns:r="http://schemas.openxmlformats.org/officeDocument/2006/relationships" xmlns:p="http://schemas.openxmlformats.org/presentationml/2006/main">
   <p:cSld>
     <p:spTree>
@@ -42290,7 +43410,7 @@
           <a:p>
             <a:fld id="{CBA0A0CD-12E5-4065-8C87-26D031211F61}" type="slidenum">
               <a:rPr lang="en-AU" smtClean="0"/>
-              <a:t>72</a:t>
+              <a:t>73</a:t>
             </a:fld>
             <a:endParaRPr lang="en-AU"/>
           </a:p>
@@ -42470,89 +43590,6 @@
       </p:sp>
       <p:sp>
         <p:nvSpPr>
-          <p:cNvPr id="13" name="TextBox 12">
-            <a:extLst>
-              <a:ext uri="{FF2B5EF4-FFF2-40B4-BE49-F238E27FC236}">
-                <a16:creationId xmlns:a16="http://schemas.microsoft.com/office/drawing/2014/main" id="{A066B6E3-4C31-0452-2F0E-A3268EEF8A08}"/>
-              </a:ext>
-            </a:extLst>
-          </p:cNvPr>
-          <p:cNvSpPr txBox="1"/>
-          <p:nvPr/>
-        </p:nvSpPr>
-        <p:spPr>
-          <a:xfrm>
-            <a:off x="143641" y="136525"/>
-            <a:ext cx="3932485" cy="2862322"/>
-          </a:xfrm>
-          <a:prstGeom prst="rect">
-            <a:avLst/>
-          </a:prstGeom>
-          <a:solidFill>
-            <a:schemeClr val="accent2">
-              <a:lumMod val="40000"/>
-              <a:lumOff val="60000"/>
-            </a:schemeClr>
-          </a:solidFill>
-        </p:spPr>
-        <p:txBody>
-          <a:bodyPr wrap="square" rtlCol="0">
-            <a:spAutoFit/>
-          </a:bodyPr>
-          <a:lstStyle/>
-          <a:p>
-            <a:pPr algn="ctr"/>
-            <a:r>
-              <a:rPr lang="en-CA" b="1" dirty="0"/>
-              <a:t>Word Scoring</a:t>
-            </a:r>
-            <a:endParaRPr lang="en-CA" dirty="0"/>
-          </a:p>
-          <a:p>
-            <a:r>
-              <a:rPr lang="en-CA" dirty="0"/>
-              <a:t>3 or fewer letters: 0 points</a:t>
-            </a:r>
-          </a:p>
-          <a:p>
-            <a:r>
-              <a:rPr lang="en-CA" dirty="0"/>
-              <a:t>4 or more letters: 1 point per letter</a:t>
-            </a:r>
-          </a:p>
-          <a:p>
-            <a:endParaRPr lang="en-CA" dirty="0"/>
-          </a:p>
-          <a:p>
-            <a:r>
-              <a:rPr lang="en-CA" b="1" dirty="0"/>
-              <a:t>Pangram bonus</a:t>
-            </a:r>
-          </a:p>
-          <a:p>
-            <a:pPr marL="285750" indent="-285750">
-              <a:buFont typeface="Arial" panose="020B0604020202020204" pitchFamily="34" charset="0"/>
-              <a:buChar char="•"/>
-            </a:pPr>
-            <a:r>
-              <a:rPr lang="en-CA" dirty="0"/>
-              <a:t>7 bonus points if all 7 different letters are used (plus you still get 1 point per letter)</a:t>
-            </a:r>
-          </a:p>
-          <a:p>
-            <a:pPr marL="285750" indent="-285750">
-              <a:buFont typeface="Arial" panose="020B0604020202020204" pitchFamily="34" charset="0"/>
-              <a:buChar char="•"/>
-            </a:pPr>
-            <a:r>
-              <a:rPr lang="en-CA" dirty="0"/>
-              <a:t>Each puzzle is guaranteed to have at least one pangram</a:t>
-            </a:r>
-          </a:p>
-        </p:txBody>
-      </p:sp>
-      <p:sp>
-        <p:nvSpPr>
           <p:cNvPr id="5" name="TextBox 4">
             <a:extLst>
               <a:ext uri="{FF2B5EF4-FFF2-40B4-BE49-F238E27FC236}">
@@ -42566,7 +43603,7 @@
         <p:spPr>
           <a:xfrm>
             <a:off x="4718564" y="1688757"/>
-            <a:ext cx="7529625" cy="2585323"/>
+            <a:ext cx="7529625" cy="3139321"/>
           </a:xfrm>
           <a:prstGeom prst="rect">
             <a:avLst/>
@@ -42688,6 +43725,37 @@
                 <a:latin typeface="Consolas" panose="020B0609020204030204" pitchFamily="49" charset="0"/>
               </a:rPr>
               <a:t>    </a:t>
+            </a:r>
+          </a:p>
+          <a:p>
+            <a:r>
+              <a:rPr lang="en-US" dirty="0">
+                <a:latin typeface="Consolas" panose="020B0609020204030204" pitchFamily="49" charset="0"/>
+              </a:rPr>
+              <a:t>    if </a:t>
+            </a:r>
+            <a:r>
+              <a:rPr lang="en-US" dirty="0" err="1">
+                <a:latin typeface="Consolas" panose="020B0609020204030204" pitchFamily="49" charset="0"/>
+              </a:rPr>
+              <a:t>len</a:t>
+            </a:r>
+            <a:r>
+              <a:rPr lang="en-US" dirty="0">
+                <a:latin typeface="Consolas" panose="020B0609020204030204" pitchFamily="49" charset="0"/>
+              </a:rPr>
+              <a:t>(score) == 4:</a:t>
+            </a:r>
+            <a:br>
+              <a:rPr lang="en-US" dirty="0">
+                <a:latin typeface="Consolas" panose="020B0609020204030204" pitchFamily="49" charset="0"/>
+              </a:rPr>
+            </a:br>
+            <a:r>
+              <a:rPr lang="en-US" dirty="0">
+                <a:latin typeface="Consolas" panose="020B0609020204030204" pitchFamily="49" charset="0"/>
+              </a:rPr>
+              <a:t>       return 1</a:t>
             </a:r>
           </a:p>
           <a:p>
@@ -43002,6 +44070,87 @@
           </a:fontRef>
         </p:style>
       </p:cxnSp>
+      <p:sp>
+        <p:nvSpPr>
+          <p:cNvPr id="2" name="TextBox 1">
+            <a:extLst>
+              <a:ext uri="{FF2B5EF4-FFF2-40B4-BE49-F238E27FC236}">
+                <a16:creationId xmlns:a16="http://schemas.microsoft.com/office/drawing/2014/main" id="{E9270EA4-1FD7-CF3E-6D21-A745D402CC3F}"/>
+              </a:ext>
+            </a:extLst>
+          </p:cNvPr>
+          <p:cNvSpPr txBox="1"/>
+          <p:nvPr/>
+        </p:nvSpPr>
+        <p:spPr>
+          <a:xfrm>
+            <a:off x="143641" y="119096"/>
+            <a:ext cx="3932485" cy="2862322"/>
+          </a:xfrm>
+          <a:prstGeom prst="rect">
+            <a:avLst/>
+          </a:prstGeom>
+          <a:solidFill>
+            <a:schemeClr val="accent2">
+              <a:lumMod val="40000"/>
+              <a:lumOff val="60000"/>
+            </a:schemeClr>
+          </a:solidFill>
+        </p:spPr>
+        <p:txBody>
+          <a:bodyPr wrap="square" rtlCol="0">
+            <a:spAutoFit/>
+          </a:bodyPr>
+          <a:lstStyle/>
+          <a:p>
+            <a:r>
+              <a:rPr lang="en-CA" dirty="0"/>
+              <a:t>3 or fewer letters: 0 points</a:t>
+            </a:r>
+          </a:p>
+          <a:p>
+            <a:r>
+              <a:rPr lang="en-CA" dirty="0"/>
+              <a:t>4 letters: 1 point</a:t>
+            </a:r>
+          </a:p>
+          <a:p>
+            <a:r>
+              <a:rPr lang="en-CA" dirty="0"/>
+              <a:t>5 or more letters: 1 point per letter</a:t>
+            </a:r>
+          </a:p>
+          <a:p>
+            <a:endParaRPr lang="en-CA" dirty="0"/>
+          </a:p>
+          <a:p>
+            <a:r>
+              <a:rPr lang="en-CA" b="1" dirty="0"/>
+              <a:t>Pangram bonus</a:t>
+            </a:r>
+          </a:p>
+          <a:p>
+            <a:pPr marL="285750" indent="-285750">
+              <a:buFont typeface="Arial" panose="020B0604020202020204" pitchFamily="34" charset="0"/>
+              <a:buChar char="•"/>
+            </a:pPr>
+            <a:r>
+              <a:rPr lang="en-CA" dirty="0"/>
+              <a:t>7 bonus points if all 7 different letters are used (plus you still get 1 point per letter)</a:t>
+            </a:r>
+          </a:p>
+          <a:p>
+            <a:pPr marL="285750" indent="-285750">
+              <a:buFont typeface="Arial" panose="020B0604020202020204" pitchFamily="34" charset="0"/>
+              <a:buChar char="•"/>
+            </a:pPr>
+            <a:r>
+              <a:rPr lang="en-CA" dirty="0"/>
+              <a:t>Each puzzle is guaranteed to have at least one pangram</a:t>
+            </a:r>
+          </a:p>
+        </p:txBody>
+      </p:sp>
     </p:spTree>
     <p:extLst>
       <p:ext uri="{BB962C8B-B14F-4D97-AF65-F5344CB8AC3E}">
@@ -43015,7 +44164,7 @@
 </p:sld>
 </file>
 
-<file path=ppt/slides/slide73.xml><?xml version="1.0" encoding="utf-8"?>
+<file path=ppt/slides/slide74.xml><?xml version="1.0" encoding="utf-8"?>
 <p:sld xmlns:a="http://schemas.openxmlformats.org/drawingml/2006/main" xmlns:r="http://schemas.openxmlformats.org/officeDocument/2006/relationships" xmlns:p="http://schemas.openxmlformats.org/presentationml/2006/main">
   <p:cSld>
     <p:spTree>
@@ -43053,7 +44202,7 @@
         <p:spPr>
           <a:xfrm>
             <a:off x="4718564" y="1688757"/>
-            <a:ext cx="7529625" cy="2585323"/>
+            <a:ext cx="7529625" cy="3139321"/>
           </a:xfrm>
           <a:prstGeom prst="rect">
             <a:avLst/>
@@ -43175,6 +44324,37 @@
                 <a:latin typeface="Consolas" panose="020B0609020204030204" pitchFamily="49" charset="0"/>
               </a:rPr>
               <a:t>    </a:t>
+            </a:r>
+          </a:p>
+          <a:p>
+            <a:r>
+              <a:rPr lang="en-US" dirty="0">
+                <a:latin typeface="Consolas" panose="020B0609020204030204" pitchFamily="49" charset="0"/>
+              </a:rPr>
+              <a:t>    if </a:t>
+            </a:r>
+            <a:r>
+              <a:rPr lang="en-US" dirty="0" err="1">
+                <a:latin typeface="Consolas" panose="020B0609020204030204" pitchFamily="49" charset="0"/>
+              </a:rPr>
+              <a:t>len</a:t>
+            </a:r>
+            <a:r>
+              <a:rPr lang="en-US" dirty="0">
+                <a:latin typeface="Consolas" panose="020B0609020204030204" pitchFamily="49" charset="0"/>
+              </a:rPr>
+              <a:t>(score) == 4:</a:t>
+            </a:r>
+            <a:br>
+              <a:rPr lang="en-US" dirty="0">
+                <a:latin typeface="Consolas" panose="020B0609020204030204" pitchFamily="49" charset="0"/>
+              </a:rPr>
+            </a:br>
+            <a:r>
+              <a:rPr lang="en-US" dirty="0">
+                <a:latin typeface="Consolas" panose="020B0609020204030204" pitchFamily="49" charset="0"/>
+              </a:rPr>
+              <a:t>       return 1</a:t>
             </a:r>
           </a:p>
           <a:p>
@@ -43249,7 +44429,7 @@
           <a:p>
             <a:fld id="{CBA0A0CD-12E5-4065-8C87-26D031211F61}" type="slidenum">
               <a:rPr lang="en-AU" smtClean="0"/>
-              <a:t>73</a:t>
+              <a:t>74</a:t>
             </a:fld>
             <a:endParaRPr lang="en-AU"/>
           </a:p>
@@ -43423,89 +44603,6 @@
             <a:r>
               <a:rPr lang="en-CA" dirty="0"/>
               <a:t>…</a:t>
-            </a:r>
-          </a:p>
-        </p:txBody>
-      </p:sp>
-      <p:sp>
-        <p:nvSpPr>
-          <p:cNvPr id="13" name="TextBox 12">
-            <a:extLst>
-              <a:ext uri="{FF2B5EF4-FFF2-40B4-BE49-F238E27FC236}">
-                <a16:creationId xmlns:a16="http://schemas.microsoft.com/office/drawing/2014/main" id="{E98030AF-790D-3684-DF4E-062503483DE0}"/>
-              </a:ext>
-            </a:extLst>
-          </p:cNvPr>
-          <p:cNvSpPr txBox="1"/>
-          <p:nvPr/>
-        </p:nvSpPr>
-        <p:spPr>
-          <a:xfrm>
-            <a:off x="143641" y="136525"/>
-            <a:ext cx="3932485" cy="2862322"/>
-          </a:xfrm>
-          <a:prstGeom prst="rect">
-            <a:avLst/>
-          </a:prstGeom>
-          <a:solidFill>
-            <a:schemeClr val="accent2">
-              <a:lumMod val="40000"/>
-              <a:lumOff val="60000"/>
-            </a:schemeClr>
-          </a:solidFill>
-        </p:spPr>
-        <p:txBody>
-          <a:bodyPr wrap="square" rtlCol="0">
-            <a:spAutoFit/>
-          </a:bodyPr>
-          <a:lstStyle/>
-          <a:p>
-            <a:pPr algn="ctr"/>
-            <a:r>
-              <a:rPr lang="en-CA" b="1" dirty="0"/>
-              <a:t>Word Scoring</a:t>
-            </a:r>
-            <a:endParaRPr lang="en-CA" dirty="0"/>
-          </a:p>
-          <a:p>
-            <a:r>
-              <a:rPr lang="en-CA" dirty="0"/>
-              <a:t>3 or fewer letters: 0 points</a:t>
-            </a:r>
-          </a:p>
-          <a:p>
-            <a:r>
-              <a:rPr lang="en-CA" dirty="0"/>
-              <a:t>4 or more letters: 1 point per letter</a:t>
-            </a:r>
-          </a:p>
-          <a:p>
-            <a:endParaRPr lang="en-CA" dirty="0"/>
-          </a:p>
-          <a:p>
-            <a:r>
-              <a:rPr lang="en-CA" b="1" dirty="0"/>
-              <a:t>Pangram bonus</a:t>
-            </a:r>
-          </a:p>
-          <a:p>
-            <a:pPr marL="285750" indent="-285750">
-              <a:buFont typeface="Arial" panose="020B0604020202020204" pitchFamily="34" charset="0"/>
-              <a:buChar char="•"/>
-            </a:pPr>
-            <a:r>
-              <a:rPr lang="en-CA" dirty="0"/>
-              <a:t>7 bonus points if all 7 different letters are used (plus you still get 1 point per letter)</a:t>
-            </a:r>
-          </a:p>
-          <a:p>
-            <a:pPr marL="285750" indent="-285750">
-              <a:buFont typeface="Arial" panose="020B0604020202020204" pitchFamily="34" charset="0"/>
-              <a:buChar char="•"/>
-            </a:pPr>
-            <a:r>
-              <a:rPr lang="en-CA" dirty="0"/>
-              <a:t>Each puzzle is guaranteed to have at least one pangram</a:t>
             </a:r>
           </a:p>
         </p:txBody>
@@ -43874,6 +44971,87 @@
           </a:fontRef>
         </p:style>
       </p:cxnSp>
+      <p:sp>
+        <p:nvSpPr>
+          <p:cNvPr id="3" name="TextBox 2">
+            <a:extLst>
+              <a:ext uri="{FF2B5EF4-FFF2-40B4-BE49-F238E27FC236}">
+                <a16:creationId xmlns:a16="http://schemas.microsoft.com/office/drawing/2014/main" id="{4D23ADFF-0DC1-14EF-E28D-7EC46295425D}"/>
+              </a:ext>
+            </a:extLst>
+          </p:cNvPr>
+          <p:cNvSpPr txBox="1"/>
+          <p:nvPr/>
+        </p:nvSpPr>
+        <p:spPr>
+          <a:xfrm>
+            <a:off x="143641" y="119096"/>
+            <a:ext cx="3932485" cy="2862322"/>
+          </a:xfrm>
+          <a:prstGeom prst="rect">
+            <a:avLst/>
+          </a:prstGeom>
+          <a:solidFill>
+            <a:schemeClr val="accent2">
+              <a:lumMod val="40000"/>
+              <a:lumOff val="60000"/>
+            </a:schemeClr>
+          </a:solidFill>
+        </p:spPr>
+        <p:txBody>
+          <a:bodyPr wrap="square" rtlCol="0">
+            <a:spAutoFit/>
+          </a:bodyPr>
+          <a:lstStyle/>
+          <a:p>
+            <a:r>
+              <a:rPr lang="en-CA" dirty="0"/>
+              <a:t>3 or fewer letters: 0 points</a:t>
+            </a:r>
+          </a:p>
+          <a:p>
+            <a:r>
+              <a:rPr lang="en-CA" dirty="0"/>
+              <a:t>4 letters: 1 point</a:t>
+            </a:r>
+          </a:p>
+          <a:p>
+            <a:r>
+              <a:rPr lang="en-CA" dirty="0"/>
+              <a:t>5 or more letters: 1 point per letter</a:t>
+            </a:r>
+          </a:p>
+          <a:p>
+            <a:endParaRPr lang="en-CA" dirty="0"/>
+          </a:p>
+          <a:p>
+            <a:r>
+              <a:rPr lang="en-CA" b="1" dirty="0"/>
+              <a:t>Pangram bonus</a:t>
+            </a:r>
+          </a:p>
+          <a:p>
+            <a:pPr marL="285750" indent="-285750">
+              <a:buFont typeface="Arial" panose="020B0604020202020204" pitchFamily="34" charset="0"/>
+              <a:buChar char="•"/>
+            </a:pPr>
+            <a:r>
+              <a:rPr lang="en-CA" dirty="0"/>
+              <a:t>7 bonus points if all 7 different letters are used (plus you still get 1 point per letter)</a:t>
+            </a:r>
+          </a:p>
+          <a:p>
+            <a:pPr marL="285750" indent="-285750">
+              <a:buFont typeface="Arial" panose="020B0604020202020204" pitchFamily="34" charset="0"/>
+              <a:buChar char="•"/>
+            </a:pPr>
+            <a:r>
+              <a:rPr lang="en-CA" dirty="0"/>
+              <a:t>Each puzzle is guaranteed to have at least one pangram</a:t>
+            </a:r>
+          </a:p>
+        </p:txBody>
+      </p:sp>
     </p:spTree>
     <p:extLst>
       <p:ext uri="{BB962C8B-B14F-4D97-AF65-F5344CB8AC3E}">
@@ -43887,7 +45065,7 @@
 </p:sld>
 </file>
 
-<file path=ppt/slides/slide74.xml><?xml version="1.0" encoding="utf-8"?>
+<file path=ppt/slides/slide75.xml><?xml version="1.0" encoding="utf-8"?>
 <p:sld xmlns:a="http://schemas.openxmlformats.org/drawingml/2006/main" xmlns:r="http://schemas.openxmlformats.org/officeDocument/2006/relationships" xmlns:p="http://schemas.openxmlformats.org/presentationml/2006/main">
   <p:cSld>
     <p:spTree>
@@ -43925,7 +45103,7 @@
         <p:spPr>
           <a:xfrm>
             <a:off x="4718564" y="1688757"/>
-            <a:ext cx="7529625" cy="2585323"/>
+            <a:ext cx="7529625" cy="3139321"/>
           </a:xfrm>
           <a:prstGeom prst="rect">
             <a:avLst/>
@@ -44047,6 +45225,37 @@
                 <a:latin typeface="Consolas" panose="020B0609020204030204" pitchFamily="49" charset="0"/>
               </a:rPr>
               <a:t>    </a:t>
+            </a:r>
+          </a:p>
+          <a:p>
+            <a:r>
+              <a:rPr lang="en-US" dirty="0">
+                <a:latin typeface="Consolas" panose="020B0609020204030204" pitchFamily="49" charset="0"/>
+              </a:rPr>
+              <a:t>    if </a:t>
+            </a:r>
+            <a:r>
+              <a:rPr lang="en-US" dirty="0" err="1">
+                <a:latin typeface="Consolas" panose="020B0609020204030204" pitchFamily="49" charset="0"/>
+              </a:rPr>
+              <a:t>len</a:t>
+            </a:r>
+            <a:r>
+              <a:rPr lang="en-US" dirty="0">
+                <a:latin typeface="Consolas" panose="020B0609020204030204" pitchFamily="49" charset="0"/>
+              </a:rPr>
+              <a:t>(score) == 4:</a:t>
+            </a:r>
+            <a:br>
+              <a:rPr lang="en-US" dirty="0">
+                <a:latin typeface="Consolas" panose="020B0609020204030204" pitchFamily="49" charset="0"/>
+              </a:rPr>
+            </a:br>
+            <a:r>
+              <a:rPr lang="en-US" dirty="0">
+                <a:latin typeface="Consolas" panose="020B0609020204030204" pitchFamily="49" charset="0"/>
+              </a:rPr>
+              <a:t>       return 1</a:t>
             </a:r>
           </a:p>
           <a:p>
@@ -44121,7 +45330,7 @@
           <a:p>
             <a:fld id="{CBA0A0CD-12E5-4065-8C87-26D031211F61}" type="slidenum">
               <a:rPr lang="en-AU" smtClean="0"/>
-              <a:t>74</a:t>
+              <a:t>75</a:t>
             </a:fld>
             <a:endParaRPr lang="en-AU"/>
           </a:p>
@@ -44295,89 +45504,6 @@
             <a:r>
               <a:rPr lang="en-CA" dirty="0"/>
               <a:t>…</a:t>
-            </a:r>
-          </a:p>
-        </p:txBody>
-      </p:sp>
-      <p:sp>
-        <p:nvSpPr>
-          <p:cNvPr id="13" name="TextBox 12">
-            <a:extLst>
-              <a:ext uri="{FF2B5EF4-FFF2-40B4-BE49-F238E27FC236}">
-                <a16:creationId xmlns:a16="http://schemas.microsoft.com/office/drawing/2014/main" id="{CD1C8DF3-2971-622F-9543-527C2EBB5F0E}"/>
-              </a:ext>
-            </a:extLst>
-          </p:cNvPr>
-          <p:cNvSpPr txBox="1"/>
-          <p:nvPr/>
-        </p:nvSpPr>
-        <p:spPr>
-          <a:xfrm>
-            <a:off x="143641" y="136525"/>
-            <a:ext cx="3932485" cy="2862322"/>
-          </a:xfrm>
-          <a:prstGeom prst="rect">
-            <a:avLst/>
-          </a:prstGeom>
-          <a:solidFill>
-            <a:schemeClr val="accent2">
-              <a:lumMod val="40000"/>
-              <a:lumOff val="60000"/>
-            </a:schemeClr>
-          </a:solidFill>
-        </p:spPr>
-        <p:txBody>
-          <a:bodyPr wrap="square" rtlCol="0">
-            <a:spAutoFit/>
-          </a:bodyPr>
-          <a:lstStyle/>
-          <a:p>
-            <a:pPr algn="ctr"/>
-            <a:r>
-              <a:rPr lang="en-CA" b="1" dirty="0"/>
-              <a:t>Word Scoring</a:t>
-            </a:r>
-            <a:endParaRPr lang="en-CA" dirty="0"/>
-          </a:p>
-          <a:p>
-            <a:r>
-              <a:rPr lang="en-CA" dirty="0"/>
-              <a:t>3 or fewer letters: 0 points</a:t>
-            </a:r>
-          </a:p>
-          <a:p>
-            <a:r>
-              <a:rPr lang="en-CA" dirty="0"/>
-              <a:t>4 or more letters: 1 point per letter</a:t>
-            </a:r>
-          </a:p>
-          <a:p>
-            <a:endParaRPr lang="en-CA" dirty="0"/>
-          </a:p>
-          <a:p>
-            <a:r>
-              <a:rPr lang="en-CA" b="1" dirty="0"/>
-              <a:t>Pangram bonus</a:t>
-            </a:r>
-          </a:p>
-          <a:p>
-            <a:pPr marL="285750" indent="-285750">
-              <a:buFont typeface="Arial" panose="020B0604020202020204" pitchFamily="34" charset="0"/>
-              <a:buChar char="•"/>
-            </a:pPr>
-            <a:r>
-              <a:rPr lang="en-CA" dirty="0"/>
-              <a:t>7 bonus points if all 7 different letters are used (plus you still get 1 point per letter)</a:t>
-            </a:r>
-          </a:p>
-          <a:p>
-            <a:pPr marL="285750" indent="-285750">
-              <a:buFont typeface="Arial" panose="020B0604020202020204" pitchFamily="34" charset="0"/>
-              <a:buChar char="•"/>
-            </a:pPr>
-            <a:r>
-              <a:rPr lang="en-CA" dirty="0"/>
-              <a:t>Each puzzle is guaranteed to have at least one pangram</a:t>
             </a:r>
           </a:p>
         </p:txBody>
@@ -44738,6 +45864,87 @@
           </a:fontRef>
         </p:style>
       </p:cxnSp>
+      <p:sp>
+        <p:nvSpPr>
+          <p:cNvPr id="3" name="TextBox 2">
+            <a:extLst>
+              <a:ext uri="{FF2B5EF4-FFF2-40B4-BE49-F238E27FC236}">
+                <a16:creationId xmlns:a16="http://schemas.microsoft.com/office/drawing/2014/main" id="{C6CD40DC-4833-AE46-EB0D-7DA7D0343282}"/>
+              </a:ext>
+            </a:extLst>
+          </p:cNvPr>
+          <p:cNvSpPr txBox="1"/>
+          <p:nvPr/>
+        </p:nvSpPr>
+        <p:spPr>
+          <a:xfrm>
+            <a:off x="143641" y="119096"/>
+            <a:ext cx="3932485" cy="2862322"/>
+          </a:xfrm>
+          <a:prstGeom prst="rect">
+            <a:avLst/>
+          </a:prstGeom>
+          <a:solidFill>
+            <a:schemeClr val="accent2">
+              <a:lumMod val="40000"/>
+              <a:lumOff val="60000"/>
+            </a:schemeClr>
+          </a:solidFill>
+        </p:spPr>
+        <p:txBody>
+          <a:bodyPr wrap="square" rtlCol="0">
+            <a:spAutoFit/>
+          </a:bodyPr>
+          <a:lstStyle/>
+          <a:p>
+            <a:r>
+              <a:rPr lang="en-CA" dirty="0"/>
+              <a:t>3 or fewer letters: 0 points</a:t>
+            </a:r>
+          </a:p>
+          <a:p>
+            <a:r>
+              <a:rPr lang="en-CA" dirty="0"/>
+              <a:t>4 letters: 1 point</a:t>
+            </a:r>
+          </a:p>
+          <a:p>
+            <a:r>
+              <a:rPr lang="en-CA" dirty="0"/>
+              <a:t>5 or more letters: 1 point per letter</a:t>
+            </a:r>
+          </a:p>
+          <a:p>
+            <a:endParaRPr lang="en-CA" dirty="0"/>
+          </a:p>
+          <a:p>
+            <a:r>
+              <a:rPr lang="en-CA" b="1" dirty="0"/>
+              <a:t>Pangram bonus</a:t>
+            </a:r>
+          </a:p>
+          <a:p>
+            <a:pPr marL="285750" indent="-285750">
+              <a:buFont typeface="Arial" panose="020B0604020202020204" pitchFamily="34" charset="0"/>
+              <a:buChar char="•"/>
+            </a:pPr>
+            <a:r>
+              <a:rPr lang="en-CA" dirty="0"/>
+              <a:t>7 bonus points if all 7 different letters are used (plus you still get 1 point per letter)</a:t>
+            </a:r>
+          </a:p>
+          <a:p>
+            <a:pPr marL="285750" indent="-285750">
+              <a:buFont typeface="Arial" panose="020B0604020202020204" pitchFamily="34" charset="0"/>
+              <a:buChar char="•"/>
+            </a:pPr>
+            <a:r>
+              <a:rPr lang="en-CA" dirty="0"/>
+              <a:t>Each puzzle is guaranteed to have at least one pangram</a:t>
+            </a:r>
+          </a:p>
+        </p:txBody>
+      </p:sp>
     </p:spTree>
     <p:extLst>
       <p:ext uri="{BB962C8B-B14F-4D97-AF65-F5344CB8AC3E}">
@@ -44751,7 +45958,7 @@
 </p:sld>
 </file>
 
-<file path=ppt/slides/slide75.xml><?xml version="1.0" encoding="utf-8"?>
+<file path=ppt/slides/slide76.xml><?xml version="1.0" encoding="utf-8"?>
 <p:sld xmlns:a="http://schemas.openxmlformats.org/drawingml/2006/main" xmlns:r="http://schemas.openxmlformats.org/officeDocument/2006/relationships" xmlns:p="http://schemas.openxmlformats.org/presentationml/2006/main">
   <p:cSld>
     <p:spTree>
@@ -44789,7 +45996,7 @@
         <p:spPr>
           <a:xfrm>
             <a:off x="4718564" y="1688757"/>
-            <a:ext cx="7529625" cy="2585323"/>
+            <a:ext cx="7529625" cy="3139321"/>
           </a:xfrm>
           <a:prstGeom prst="rect">
             <a:avLst/>
@@ -44911,6 +46118,37 @@
                 <a:latin typeface="Consolas" panose="020B0609020204030204" pitchFamily="49" charset="0"/>
               </a:rPr>
               <a:t>    </a:t>
+            </a:r>
+          </a:p>
+          <a:p>
+            <a:r>
+              <a:rPr lang="en-US" dirty="0">
+                <a:latin typeface="Consolas" panose="020B0609020204030204" pitchFamily="49" charset="0"/>
+              </a:rPr>
+              <a:t>    if </a:t>
+            </a:r>
+            <a:r>
+              <a:rPr lang="en-US" dirty="0" err="1">
+                <a:latin typeface="Consolas" panose="020B0609020204030204" pitchFamily="49" charset="0"/>
+              </a:rPr>
+              <a:t>len</a:t>
+            </a:r>
+            <a:r>
+              <a:rPr lang="en-US" dirty="0">
+                <a:latin typeface="Consolas" panose="020B0609020204030204" pitchFamily="49" charset="0"/>
+              </a:rPr>
+              <a:t>(score) == 4:</a:t>
+            </a:r>
+            <a:br>
+              <a:rPr lang="en-US" dirty="0">
+                <a:latin typeface="Consolas" panose="020B0609020204030204" pitchFamily="49" charset="0"/>
+              </a:rPr>
+            </a:br>
+            <a:r>
+              <a:rPr lang="en-US" dirty="0">
+                <a:latin typeface="Consolas" panose="020B0609020204030204" pitchFamily="49" charset="0"/>
+              </a:rPr>
+              <a:t>       return 1</a:t>
             </a:r>
           </a:p>
           <a:p>
@@ -44985,7 +46223,7 @@
           <a:p>
             <a:fld id="{CBA0A0CD-12E5-4065-8C87-26D031211F61}" type="slidenum">
               <a:rPr lang="en-AU" smtClean="0"/>
-              <a:t>75</a:t>
+              <a:t>76</a:t>
             </a:fld>
             <a:endParaRPr lang="en-AU"/>
           </a:p>
@@ -45165,10 +46403,10 @@
       </p:sp>
       <p:sp>
         <p:nvSpPr>
-          <p:cNvPr id="13" name="TextBox 12">
-            <a:extLst>
-              <a:ext uri="{FF2B5EF4-FFF2-40B4-BE49-F238E27FC236}">
-                <a16:creationId xmlns:a16="http://schemas.microsoft.com/office/drawing/2014/main" id="{F42D6FC1-4595-2ED0-305A-9CAD4AC0995D}"/>
+          <p:cNvPr id="16" name="TextBox 15">
+            <a:extLst>
+              <a:ext uri="{FF2B5EF4-FFF2-40B4-BE49-F238E27FC236}">
+                <a16:creationId xmlns:a16="http://schemas.microsoft.com/office/drawing/2014/main" id="{48AD8FBE-0821-ADF3-3C3E-D20D83F36C86}"/>
               </a:ext>
             </a:extLst>
           </p:cNvPr>
@@ -45177,8 +46415,8 @@
         </p:nvSpPr>
         <p:spPr>
           <a:xfrm>
-            <a:off x="143641" y="136525"/>
-            <a:ext cx="3932485" cy="2862322"/>
+            <a:off x="6719177" y="4902052"/>
+            <a:ext cx="3528397" cy="923330"/>
           </a:xfrm>
           <a:prstGeom prst="rect">
             <a:avLst/>
@@ -45198,89 +46436,6 @@
           <a:p>
             <a:pPr algn="ctr"/>
             <a:r>
-              <a:rPr lang="en-CA" b="1" dirty="0"/>
-              <a:t>Word Scoring</a:t>
-            </a:r>
-            <a:endParaRPr lang="en-CA" dirty="0"/>
-          </a:p>
-          <a:p>
-            <a:r>
-              <a:rPr lang="en-CA" dirty="0"/>
-              <a:t>3 or fewer letters: 0 points</a:t>
-            </a:r>
-          </a:p>
-          <a:p>
-            <a:r>
-              <a:rPr lang="en-CA" dirty="0"/>
-              <a:t>4 or more letters: 1 point per letter</a:t>
-            </a:r>
-          </a:p>
-          <a:p>
-            <a:endParaRPr lang="en-CA" dirty="0"/>
-          </a:p>
-          <a:p>
-            <a:r>
-              <a:rPr lang="en-CA" b="1" dirty="0"/>
-              <a:t>Pangram bonus</a:t>
-            </a:r>
-          </a:p>
-          <a:p>
-            <a:pPr marL="285750" indent="-285750">
-              <a:buFont typeface="Arial" panose="020B0604020202020204" pitchFamily="34" charset="0"/>
-              <a:buChar char="•"/>
-            </a:pPr>
-            <a:r>
-              <a:rPr lang="en-CA" dirty="0"/>
-              <a:t>7 bonus points if all 7 different letters are used (plus you still get 1 point per letter)</a:t>
-            </a:r>
-          </a:p>
-          <a:p>
-            <a:pPr marL="285750" indent="-285750">
-              <a:buFont typeface="Arial" panose="020B0604020202020204" pitchFamily="34" charset="0"/>
-              <a:buChar char="•"/>
-            </a:pPr>
-            <a:r>
-              <a:rPr lang="en-CA" dirty="0"/>
-              <a:t>Each puzzle is guaranteed to have at least one pangram</a:t>
-            </a:r>
-          </a:p>
-        </p:txBody>
-      </p:sp>
-      <p:sp>
-        <p:nvSpPr>
-          <p:cNvPr id="16" name="TextBox 15">
-            <a:extLst>
-              <a:ext uri="{FF2B5EF4-FFF2-40B4-BE49-F238E27FC236}">
-                <a16:creationId xmlns:a16="http://schemas.microsoft.com/office/drawing/2014/main" id="{48AD8FBE-0821-ADF3-3C3E-D20D83F36C86}"/>
-              </a:ext>
-            </a:extLst>
-          </p:cNvPr>
-          <p:cNvSpPr txBox="1"/>
-          <p:nvPr/>
-        </p:nvSpPr>
-        <p:spPr>
-          <a:xfrm>
-            <a:off x="6597074" y="4468554"/>
-            <a:ext cx="3528397" cy="923330"/>
-          </a:xfrm>
-          <a:prstGeom prst="rect">
-            <a:avLst/>
-          </a:prstGeom>
-          <a:solidFill>
-            <a:schemeClr val="accent2">
-              <a:lumMod val="40000"/>
-              <a:lumOff val="60000"/>
-            </a:schemeClr>
-          </a:solidFill>
-        </p:spPr>
-        <p:txBody>
-          <a:bodyPr wrap="square" rtlCol="0">
-            <a:spAutoFit/>
-          </a:bodyPr>
-          <a:lstStyle/>
-          <a:p>
-            <a:pPr algn="ctr"/>
-            <a:r>
               <a:rPr lang="en-CA" dirty="0"/>
               <a:t>If the code gets to this point, the score is the number of letters plus the pangram bonus …</a:t>
             </a:r>
@@ -45302,7 +46457,7 @@
         <p:spPr>
           <a:xfrm>
             <a:off x="5231839" y="3868389"/>
-            <a:ext cx="6886019" cy="405691"/>
+            <a:ext cx="6886019" cy="959689"/>
           </a:xfrm>
           <a:prstGeom prst="rect">
             <a:avLst/>
@@ -45602,6 +46757,87 @@
           </a:fontRef>
         </p:style>
       </p:cxnSp>
+      <p:sp>
+        <p:nvSpPr>
+          <p:cNvPr id="3" name="TextBox 2">
+            <a:extLst>
+              <a:ext uri="{FF2B5EF4-FFF2-40B4-BE49-F238E27FC236}">
+                <a16:creationId xmlns:a16="http://schemas.microsoft.com/office/drawing/2014/main" id="{317D8174-328E-9171-0EF9-41B449F86FB5}"/>
+              </a:ext>
+            </a:extLst>
+          </p:cNvPr>
+          <p:cNvSpPr txBox="1"/>
+          <p:nvPr/>
+        </p:nvSpPr>
+        <p:spPr>
+          <a:xfrm>
+            <a:off x="143641" y="119096"/>
+            <a:ext cx="3932485" cy="2862322"/>
+          </a:xfrm>
+          <a:prstGeom prst="rect">
+            <a:avLst/>
+          </a:prstGeom>
+          <a:solidFill>
+            <a:schemeClr val="accent2">
+              <a:lumMod val="40000"/>
+              <a:lumOff val="60000"/>
+            </a:schemeClr>
+          </a:solidFill>
+        </p:spPr>
+        <p:txBody>
+          <a:bodyPr wrap="square" rtlCol="0">
+            <a:spAutoFit/>
+          </a:bodyPr>
+          <a:lstStyle/>
+          <a:p>
+            <a:r>
+              <a:rPr lang="en-CA" dirty="0"/>
+              <a:t>3 or fewer letters: 0 points</a:t>
+            </a:r>
+          </a:p>
+          <a:p>
+            <a:r>
+              <a:rPr lang="en-CA" dirty="0"/>
+              <a:t>4 letters: 1 point</a:t>
+            </a:r>
+          </a:p>
+          <a:p>
+            <a:r>
+              <a:rPr lang="en-CA" dirty="0"/>
+              <a:t>5 or more letters: 1 point per letter</a:t>
+            </a:r>
+          </a:p>
+          <a:p>
+            <a:endParaRPr lang="en-CA" dirty="0"/>
+          </a:p>
+          <a:p>
+            <a:r>
+              <a:rPr lang="en-CA" b="1" dirty="0"/>
+              <a:t>Pangram bonus</a:t>
+            </a:r>
+          </a:p>
+          <a:p>
+            <a:pPr marL="285750" indent="-285750">
+              <a:buFont typeface="Arial" panose="020B0604020202020204" pitchFamily="34" charset="0"/>
+              <a:buChar char="•"/>
+            </a:pPr>
+            <a:r>
+              <a:rPr lang="en-CA" dirty="0"/>
+              <a:t>7 bonus points if all 7 different letters are used (plus you still get 1 point per letter)</a:t>
+            </a:r>
+          </a:p>
+          <a:p>
+            <a:pPr marL="285750" indent="-285750">
+              <a:buFont typeface="Arial" panose="020B0604020202020204" pitchFamily="34" charset="0"/>
+              <a:buChar char="•"/>
+            </a:pPr>
+            <a:r>
+              <a:rPr lang="en-CA" dirty="0"/>
+              <a:t>Each puzzle is guaranteed to have at least one pangram</a:t>
+            </a:r>
+          </a:p>
+        </p:txBody>
+      </p:sp>
     </p:spTree>
     <p:extLst>
       <p:ext uri="{BB962C8B-B14F-4D97-AF65-F5344CB8AC3E}">
@@ -45615,7 +46851,7 @@
 </p:sld>
 </file>
 
-<file path=ppt/slides/slide76.xml><?xml version="1.0" encoding="utf-8"?>
+<file path=ppt/slides/slide77.xml><?xml version="1.0" encoding="utf-8"?>
 <p:sld xmlns:a="http://schemas.openxmlformats.org/drawingml/2006/main" xmlns:r="http://schemas.openxmlformats.org/officeDocument/2006/relationships" xmlns:p="http://schemas.openxmlformats.org/presentationml/2006/main">
   <p:cSld>
     <p:spTree>
@@ -45653,7 +46889,7 @@
         <p:spPr>
           <a:xfrm>
             <a:off x="4718564" y="1688757"/>
-            <a:ext cx="7529625" cy="2585323"/>
+            <a:ext cx="7529625" cy="3416320"/>
           </a:xfrm>
           <a:prstGeom prst="rect">
             <a:avLst/>
@@ -45782,6 +47018,37 @@
               <a:rPr lang="en-US" dirty="0">
                 <a:latin typeface="Consolas" panose="020B0609020204030204" pitchFamily="49" charset="0"/>
               </a:rPr>
+              <a:t>    if </a:t>
+            </a:r>
+            <a:r>
+              <a:rPr lang="en-US" dirty="0" err="1">
+                <a:latin typeface="Consolas" panose="020B0609020204030204" pitchFamily="49" charset="0"/>
+              </a:rPr>
+              <a:t>len</a:t>
+            </a:r>
+            <a:r>
+              <a:rPr lang="en-US" dirty="0">
+                <a:latin typeface="Consolas" panose="020B0609020204030204" pitchFamily="49" charset="0"/>
+              </a:rPr>
+              <a:t>(score) == 4:</a:t>
+            </a:r>
+            <a:br>
+              <a:rPr lang="en-US" dirty="0">
+                <a:latin typeface="Consolas" panose="020B0609020204030204" pitchFamily="49" charset="0"/>
+              </a:rPr>
+            </a:br>
+            <a:r>
+              <a:rPr lang="en-US" dirty="0">
+                <a:latin typeface="Consolas" panose="020B0609020204030204" pitchFamily="49" charset="0"/>
+              </a:rPr>
+              <a:t>       return 1</a:t>
+            </a:r>
+          </a:p>
+          <a:p>
+            <a:r>
+              <a:rPr lang="en-US" dirty="0">
+                <a:latin typeface="Consolas" panose="020B0609020204030204" pitchFamily="49" charset="0"/>
+              </a:rPr>
               <a:t>    return </a:t>
             </a:r>
             <a:r>
@@ -45812,26 +47079,34 @@
                 </a:solidFill>
                 <a:latin typeface="Consolas" panose="020B0609020204030204" pitchFamily="49" charset="0"/>
               </a:rPr>
-              <a:t>(</a:t>
+              <a:t>(word, </a:t>
+            </a:r>
+            <a:r>
+              <a:rPr lang="en-US" dirty="0" err="1">
+                <a:solidFill>
+                  <a:srgbClr val="FF0000"/>
+                </a:solidFill>
+                <a:latin typeface="Consolas" panose="020B0609020204030204" pitchFamily="49" charset="0"/>
+              </a:rPr>
+              <a:t>puzzle_letters</a:t>
             </a:r>
             <a:r>
               <a:rPr lang="en-US" dirty="0">
-                <a:latin typeface="Consolas" panose="020B0609020204030204" pitchFamily="49" charset="0"/>
-              </a:rPr>
-              <a:t>word, </a:t>
-            </a:r>
-            <a:r>
-              <a:rPr lang="en-US" dirty="0" err="1">
-                <a:latin typeface="Consolas" panose="020B0609020204030204" pitchFamily="49" charset="0"/>
-              </a:rPr>
-              <a:t>puzzle_letters</a:t>
-            </a:r>
-            <a:r>
-              <a:rPr lang="en-US" dirty="0">
+                <a:solidFill>
+                  <a:srgbClr val="FF0000"/>
+                </a:solidFill>
                 <a:latin typeface="Consolas" panose="020B0609020204030204" pitchFamily="49" charset="0"/>
               </a:rPr>
               <a:t>)</a:t>
             </a:r>
+            <a:endParaRPr lang="en-AU" dirty="0">
+              <a:solidFill>
+                <a:srgbClr val="FF0000"/>
+              </a:solidFill>
+              <a:latin typeface="Consolas" panose="020B0609020204030204" pitchFamily="49" charset="0"/>
+            </a:endParaRPr>
+          </a:p>
+          <a:p>
             <a:endParaRPr lang="en-AU" dirty="0">
               <a:latin typeface="Consolas" panose="020B0609020204030204" pitchFamily="49" charset="0"/>
             </a:endParaRPr>
@@ -45861,7 +47136,7 @@
           <a:p>
             <a:fld id="{CBA0A0CD-12E5-4065-8C87-26D031211F61}" type="slidenum">
               <a:rPr lang="en-AU" smtClean="0"/>
-              <a:t>76</a:t>
+              <a:t>77</a:t>
             </a:fld>
             <a:endParaRPr lang="en-AU" dirty="0"/>
           </a:p>
@@ -46036,141 +47311,6 @@
               <a:rPr lang="en-CA" dirty="0"/>
               <a:t>…</a:t>
             </a:r>
-          </a:p>
-        </p:txBody>
-      </p:sp>
-      <p:sp>
-        <p:nvSpPr>
-          <p:cNvPr id="13" name="TextBox 12">
-            <a:extLst>
-              <a:ext uri="{FF2B5EF4-FFF2-40B4-BE49-F238E27FC236}">
-                <a16:creationId xmlns:a16="http://schemas.microsoft.com/office/drawing/2014/main" id="{90959C8C-DF63-0C8D-7AB6-B7F27BAC9135}"/>
-              </a:ext>
-            </a:extLst>
-          </p:cNvPr>
-          <p:cNvSpPr txBox="1"/>
-          <p:nvPr/>
-        </p:nvSpPr>
-        <p:spPr>
-          <a:xfrm>
-            <a:off x="143641" y="136525"/>
-            <a:ext cx="3932485" cy="2862322"/>
-          </a:xfrm>
-          <a:prstGeom prst="rect">
-            <a:avLst/>
-          </a:prstGeom>
-          <a:solidFill>
-            <a:schemeClr val="accent2">
-              <a:lumMod val="40000"/>
-              <a:lumOff val="60000"/>
-            </a:schemeClr>
-          </a:solidFill>
-        </p:spPr>
-        <p:txBody>
-          <a:bodyPr wrap="square" rtlCol="0">
-            <a:spAutoFit/>
-          </a:bodyPr>
-          <a:lstStyle/>
-          <a:p>
-            <a:pPr algn="ctr"/>
-            <a:r>
-              <a:rPr lang="en-CA" b="1" dirty="0"/>
-              <a:t>Word Scoring</a:t>
-            </a:r>
-            <a:endParaRPr lang="en-CA" dirty="0"/>
-          </a:p>
-          <a:p>
-            <a:r>
-              <a:rPr lang="en-CA" dirty="0"/>
-              <a:t>3 or fewer letters: 0 points</a:t>
-            </a:r>
-          </a:p>
-          <a:p>
-            <a:r>
-              <a:rPr lang="en-CA" dirty="0"/>
-              <a:t>4 or more letters: 1 point per letter</a:t>
-            </a:r>
-          </a:p>
-          <a:p>
-            <a:endParaRPr lang="en-CA" dirty="0"/>
-          </a:p>
-          <a:p>
-            <a:r>
-              <a:rPr lang="en-CA" b="1" dirty="0"/>
-              <a:t>Pangram bonus</a:t>
-            </a:r>
-          </a:p>
-          <a:p>
-            <a:pPr marL="285750" indent="-285750">
-              <a:buFont typeface="Arial" panose="020B0604020202020204" pitchFamily="34" charset="0"/>
-              <a:buChar char="•"/>
-            </a:pPr>
-            <a:r>
-              <a:rPr lang="en-CA" dirty="0"/>
-              <a:t>7 bonus points if all 7 different letters are used (plus you still get 1 point per letter)</a:t>
-            </a:r>
-          </a:p>
-          <a:p>
-            <a:pPr marL="285750" indent="-285750">
-              <a:buFont typeface="Arial" panose="020B0604020202020204" pitchFamily="34" charset="0"/>
-              <a:buChar char="•"/>
-            </a:pPr>
-            <a:r>
-              <a:rPr lang="en-CA" dirty="0"/>
-              <a:t>Each puzzle is guaranteed to have at least one pangram</a:t>
-            </a:r>
-          </a:p>
-        </p:txBody>
-      </p:sp>
-      <p:sp>
-        <p:nvSpPr>
-          <p:cNvPr id="2" name="Rectangle 1">
-            <a:extLst>
-              <a:ext uri="{FF2B5EF4-FFF2-40B4-BE49-F238E27FC236}">
-                <a16:creationId xmlns:a16="http://schemas.microsoft.com/office/drawing/2014/main" id="{C0CB5DA9-59DE-4210-7C00-F1ACE396232D}"/>
-              </a:ext>
-            </a:extLst>
-          </p:cNvPr>
-          <p:cNvSpPr/>
-          <p:nvPr/>
-        </p:nvSpPr>
-        <p:spPr>
-          <a:xfrm>
-            <a:off x="5231839" y="3868389"/>
-            <a:ext cx="6886019" cy="405691"/>
-          </a:xfrm>
-          <a:prstGeom prst="rect">
-            <a:avLst/>
-          </a:prstGeom>
-          <a:noFill/>
-          <a:ln>
-            <a:solidFill>
-              <a:srgbClr val="FF0000"/>
-            </a:solidFill>
-          </a:ln>
-        </p:spPr>
-        <p:style>
-          <a:lnRef idx="2">
-            <a:schemeClr val="accent1">
-              <a:shade val="15000"/>
-            </a:schemeClr>
-          </a:lnRef>
-          <a:fillRef idx="1">
-            <a:schemeClr val="accent1"/>
-          </a:fillRef>
-          <a:effectRef idx="0">
-            <a:schemeClr val="accent1"/>
-          </a:effectRef>
-          <a:fontRef idx="minor">
-            <a:schemeClr val="lt1"/>
-          </a:fontRef>
-        </p:style>
-        <p:txBody>
-          <a:bodyPr rtlCol="0" anchor="ctr"/>
-          <a:lstStyle/>
-          <a:p>
-            <a:pPr algn="ctr"/>
-            <a:endParaRPr lang="en-AU"/>
           </a:p>
         </p:txBody>
       </p:sp>
@@ -46451,7 +47591,7 @@
         </p:nvSpPr>
         <p:spPr>
           <a:xfrm>
-            <a:off x="4718564" y="4688626"/>
+            <a:off x="4718564" y="5169243"/>
             <a:ext cx="5250155" cy="1477328"/>
           </a:xfrm>
           <a:prstGeom prst="rect">
@@ -46545,6 +47685,87 @@
             <a:endParaRPr lang="en-AU" dirty="0">
               <a:latin typeface="Consolas" panose="020B0609020204030204" pitchFamily="49" charset="0"/>
             </a:endParaRPr>
+          </a:p>
+        </p:txBody>
+      </p:sp>
+      <p:sp>
+        <p:nvSpPr>
+          <p:cNvPr id="5" name="TextBox 4">
+            <a:extLst>
+              <a:ext uri="{FF2B5EF4-FFF2-40B4-BE49-F238E27FC236}">
+                <a16:creationId xmlns:a16="http://schemas.microsoft.com/office/drawing/2014/main" id="{D9B0C36F-EF08-2EE5-EBF5-266FE4C8DF4E}"/>
+              </a:ext>
+            </a:extLst>
+          </p:cNvPr>
+          <p:cNvSpPr txBox="1"/>
+          <p:nvPr/>
+        </p:nvSpPr>
+        <p:spPr>
+          <a:xfrm>
+            <a:off x="143641" y="119096"/>
+            <a:ext cx="3932485" cy="2862322"/>
+          </a:xfrm>
+          <a:prstGeom prst="rect">
+            <a:avLst/>
+          </a:prstGeom>
+          <a:solidFill>
+            <a:schemeClr val="accent2">
+              <a:lumMod val="40000"/>
+              <a:lumOff val="60000"/>
+            </a:schemeClr>
+          </a:solidFill>
+        </p:spPr>
+        <p:txBody>
+          <a:bodyPr wrap="square" rtlCol="0">
+            <a:spAutoFit/>
+          </a:bodyPr>
+          <a:lstStyle/>
+          <a:p>
+            <a:r>
+              <a:rPr lang="en-CA" dirty="0"/>
+              <a:t>3 or fewer letters: 0 points</a:t>
+            </a:r>
+          </a:p>
+          <a:p>
+            <a:r>
+              <a:rPr lang="en-CA" dirty="0"/>
+              <a:t>4 letters: 1 point</a:t>
+            </a:r>
+          </a:p>
+          <a:p>
+            <a:r>
+              <a:rPr lang="en-CA" dirty="0"/>
+              <a:t>5 or more letters: 1 point per letter</a:t>
+            </a:r>
+          </a:p>
+          <a:p>
+            <a:endParaRPr lang="en-CA" dirty="0"/>
+          </a:p>
+          <a:p>
+            <a:r>
+              <a:rPr lang="en-CA" b="1" dirty="0"/>
+              <a:t>Pangram bonus</a:t>
+            </a:r>
+          </a:p>
+          <a:p>
+            <a:pPr marL="285750" indent="-285750">
+              <a:buFont typeface="Arial" panose="020B0604020202020204" pitchFamily="34" charset="0"/>
+              <a:buChar char="•"/>
+            </a:pPr>
+            <a:r>
+              <a:rPr lang="en-CA" dirty="0"/>
+              <a:t>7 bonus points if all 7 different letters are used (plus you still get 1 point per letter)</a:t>
+            </a:r>
+          </a:p>
+          <a:p>
+            <a:pPr marL="285750" indent="-285750">
+              <a:buFont typeface="Arial" panose="020B0604020202020204" pitchFamily="34" charset="0"/>
+              <a:buChar char="•"/>
+            </a:pPr>
+            <a:r>
+              <a:rPr lang="en-CA" dirty="0"/>
+              <a:t>Each puzzle is guaranteed to have at least one pangram</a:t>
+            </a:r>
           </a:p>
         </p:txBody>
       </p:sp>
@@ -46561,7 +47782,7 @@
 </p:sld>
 </file>
 
-<file path=ppt/slides/slide77.xml><?xml version="1.0" encoding="utf-8"?>
+<file path=ppt/slides/slide78.xml><?xml version="1.0" encoding="utf-8"?>
 <p:sld xmlns:a="http://schemas.openxmlformats.org/drawingml/2006/main" xmlns:r="http://schemas.openxmlformats.org/officeDocument/2006/relationships" xmlns:p="http://schemas.openxmlformats.org/presentationml/2006/main">
   <p:cSld>
     <p:spTree>
@@ -46607,7 +47828,7 @@
           <a:p>
             <a:fld id="{CBA0A0CD-12E5-4065-8C87-26D031211F61}" type="slidenum">
               <a:rPr lang="en-AU" smtClean="0"/>
-              <a:t>77</a:t>
+              <a:t>78</a:t>
             </a:fld>
             <a:endParaRPr lang="en-AU" dirty="0"/>
           </a:p>
@@ -46787,10 +48008,10 @@
       </p:sp>
       <p:sp>
         <p:nvSpPr>
-          <p:cNvPr id="13" name="TextBox 12">
-            <a:extLst>
-              <a:ext uri="{FF2B5EF4-FFF2-40B4-BE49-F238E27FC236}">
-                <a16:creationId xmlns:a16="http://schemas.microsoft.com/office/drawing/2014/main" id="{C8E7BA90-93D3-3F19-8ECB-2E7DA69BDCEE}"/>
+          <p:cNvPr id="25" name="TextBox 24">
+            <a:extLst>
+              <a:ext uri="{FF2B5EF4-FFF2-40B4-BE49-F238E27FC236}">
+                <a16:creationId xmlns:a16="http://schemas.microsoft.com/office/drawing/2014/main" id="{4332F2AD-5609-7C67-8159-11510EC2111D}"/>
               </a:ext>
             </a:extLst>
           </p:cNvPr>
@@ -46799,7 +48020,156 @@
         </p:nvSpPr>
         <p:spPr>
           <a:xfrm>
-            <a:off x="143641" y="136525"/>
+            <a:off x="4857612" y="2484149"/>
+            <a:ext cx="6643165" cy="1754326"/>
+          </a:xfrm>
+          <a:prstGeom prst="rect">
+            <a:avLst/>
+          </a:prstGeom>
+          <a:noFill/>
+        </p:spPr>
+        <p:txBody>
+          <a:bodyPr wrap="none" rtlCol="0">
+            <a:spAutoFit/>
+          </a:bodyPr>
+          <a:lstStyle/>
+          <a:p>
+            <a:r>
+              <a:rPr lang="en-AU" dirty="0">
+                <a:latin typeface="Consolas" panose="020B0609020204030204" pitchFamily="49" charset="0"/>
+              </a:rPr>
+              <a:t>print(</a:t>
+            </a:r>
+            <a:r>
+              <a:rPr lang="en-AU" dirty="0" err="1">
+                <a:latin typeface="Consolas" panose="020B0609020204030204" pitchFamily="49" charset="0"/>
+              </a:rPr>
+              <a:t>word_score</a:t>
+            </a:r>
+            <a:r>
+              <a:rPr lang="en-AU" dirty="0">
+                <a:latin typeface="Consolas" panose="020B0609020204030204" pitchFamily="49" charset="0"/>
+              </a:rPr>
+              <a:t>('TAPE', 'P', 'CIHPETA'))      # 4</a:t>
+            </a:r>
+          </a:p>
+          <a:p>
+            <a:r>
+              <a:rPr lang="en-AU" dirty="0">
+                <a:latin typeface="Consolas" panose="020B0609020204030204" pitchFamily="49" charset="0"/>
+              </a:rPr>
+              <a:t>print(</a:t>
+            </a:r>
+            <a:r>
+              <a:rPr lang="en-AU" dirty="0" err="1">
+                <a:latin typeface="Consolas" panose="020B0609020204030204" pitchFamily="49" charset="0"/>
+              </a:rPr>
+              <a:t>word_score</a:t>
+            </a:r>
+            <a:r>
+              <a:rPr lang="en-AU" dirty="0">
+                <a:latin typeface="Consolas" panose="020B0609020204030204" pitchFamily="49" charset="0"/>
+              </a:rPr>
+              <a:t>('PATH', 'P', 'CIHPETA'))      # 4</a:t>
+            </a:r>
+          </a:p>
+          <a:p>
+            <a:r>
+              <a:rPr lang="en-AU" dirty="0">
+                <a:latin typeface="Consolas" panose="020B0609020204030204" pitchFamily="49" charset="0"/>
+              </a:rPr>
+              <a:t>print(</a:t>
+            </a:r>
+            <a:r>
+              <a:rPr lang="en-AU" dirty="0" err="1">
+                <a:latin typeface="Consolas" panose="020B0609020204030204" pitchFamily="49" charset="0"/>
+              </a:rPr>
+              <a:t>word_score</a:t>
+            </a:r>
+            <a:r>
+              <a:rPr lang="en-AU" dirty="0">
+                <a:latin typeface="Consolas" panose="020B0609020204030204" pitchFamily="49" charset="0"/>
+              </a:rPr>
+              <a:t>('CHEAP', 'P', 'CIHPETA'))     # 5</a:t>
+            </a:r>
+          </a:p>
+          <a:p>
+            <a:r>
+              <a:rPr lang="en-AU" dirty="0">
+                <a:latin typeface="Consolas" panose="020B0609020204030204" pitchFamily="49" charset="0"/>
+              </a:rPr>
+              <a:t>print(</a:t>
+            </a:r>
+            <a:r>
+              <a:rPr lang="en-AU" dirty="0" err="1">
+                <a:latin typeface="Consolas" panose="020B0609020204030204" pitchFamily="49" charset="0"/>
+              </a:rPr>
+              <a:t>word_score</a:t>
+            </a:r>
+            <a:r>
+              <a:rPr lang="en-AU" dirty="0">
+                <a:latin typeface="Consolas" panose="020B0609020204030204" pitchFamily="49" charset="0"/>
+              </a:rPr>
+              <a:t>('PATCH', 'P', 'CIHPETA'))     # 5</a:t>
+            </a:r>
+          </a:p>
+          <a:p>
+            <a:r>
+              <a:rPr lang="en-AU" dirty="0">
+                <a:latin typeface="Consolas" panose="020B0609020204030204" pitchFamily="49" charset="0"/>
+              </a:rPr>
+              <a:t>print(</a:t>
+            </a:r>
+            <a:r>
+              <a:rPr lang="en-AU" dirty="0" err="1">
+                <a:latin typeface="Consolas" panose="020B0609020204030204" pitchFamily="49" charset="0"/>
+              </a:rPr>
+              <a:t>word_score</a:t>
+            </a:r>
+            <a:r>
+              <a:rPr lang="en-AU" dirty="0">
+                <a:latin typeface="Consolas" panose="020B0609020204030204" pitchFamily="49" charset="0"/>
+              </a:rPr>
+              <a:t>('APPETITE', 'P', 'CIHPETA'))  # 8</a:t>
+            </a:r>
+          </a:p>
+          <a:p>
+            <a:r>
+              <a:rPr lang="en-AU" dirty="0">
+                <a:latin typeface="Consolas" panose="020B0609020204030204" pitchFamily="49" charset="0"/>
+              </a:rPr>
+              <a:t>print(</a:t>
+            </a:r>
+            <a:r>
+              <a:rPr lang="en-AU" dirty="0" err="1">
+                <a:latin typeface="Consolas" panose="020B0609020204030204" pitchFamily="49" charset="0"/>
+              </a:rPr>
+              <a:t>word_score</a:t>
+            </a:r>
+            <a:r>
+              <a:rPr lang="en-AU" dirty="0">
+                <a:latin typeface="Consolas" panose="020B0609020204030204" pitchFamily="49" charset="0"/>
+              </a:rPr>
+              <a:t>('PATHETIC', 'P', 'CIHPETA'))  # 15</a:t>
+            </a:r>
+          </a:p>
+        </p:txBody>
+      </p:sp>
+      <p:sp>
+        <p:nvSpPr>
+          <p:cNvPr id="2" name="TextBox 1">
+            <a:extLst>
+              <a:ext uri="{FF2B5EF4-FFF2-40B4-BE49-F238E27FC236}">
+                <a16:creationId xmlns:a16="http://schemas.microsoft.com/office/drawing/2014/main" id="{41ED180E-7A76-103A-A5EF-F6B6E677EE64}"/>
+              </a:ext>
+            </a:extLst>
+          </p:cNvPr>
+          <p:cNvSpPr txBox="1"/>
+          <p:nvPr/>
+        </p:nvSpPr>
+        <p:spPr>
+          <a:xfrm>
+            <a:off x="143641" y="119096"/>
             <a:ext cx="3932485" cy="2862322"/>
           </a:xfrm>
           <a:prstGeom prst="rect">
@@ -46818,14 +48188,6 @@
           </a:bodyPr>
           <a:lstStyle/>
           <a:p>
-            <a:pPr algn="ctr"/>
-            <a:r>
-              <a:rPr lang="en-CA" b="1" dirty="0"/>
-              <a:t>Word Scoring</a:t>
-            </a:r>
-            <a:endParaRPr lang="en-CA" dirty="0"/>
-          </a:p>
-          <a:p>
             <a:r>
               <a:rPr lang="en-CA" dirty="0"/>
               <a:t>3 or fewer letters: 0 points</a:t>
@@ -46834,7 +48196,13 @@
           <a:p>
             <a:r>
               <a:rPr lang="en-CA" dirty="0"/>
-              <a:t>4 or more letters: 1 point per letter</a:t>
+              <a:t>4 letters: 1 point</a:t>
+            </a:r>
+          </a:p>
+          <a:p>
+            <a:r>
+              <a:rPr lang="en-CA" dirty="0"/>
+              <a:t>5 or more letters: 1 point per letter</a:t>
             </a:r>
           </a:p>
           <a:p>
@@ -46864,155 +48232,6 @@
             <a:r>
               <a:rPr lang="en-CA" dirty="0"/>
               <a:t>Each puzzle is guaranteed to have at least one pangram</a:t>
-            </a:r>
-          </a:p>
-        </p:txBody>
-      </p:sp>
-      <p:sp>
-        <p:nvSpPr>
-          <p:cNvPr id="25" name="TextBox 24">
-            <a:extLst>
-              <a:ext uri="{FF2B5EF4-FFF2-40B4-BE49-F238E27FC236}">
-                <a16:creationId xmlns:a16="http://schemas.microsoft.com/office/drawing/2014/main" id="{4332F2AD-5609-7C67-8159-11510EC2111D}"/>
-              </a:ext>
-            </a:extLst>
-          </p:cNvPr>
-          <p:cNvSpPr txBox="1"/>
-          <p:nvPr/>
-        </p:nvSpPr>
-        <p:spPr>
-          <a:xfrm>
-            <a:off x="4857612" y="2484149"/>
-            <a:ext cx="6643165" cy="1754326"/>
-          </a:xfrm>
-          <a:prstGeom prst="rect">
-            <a:avLst/>
-          </a:prstGeom>
-          <a:noFill/>
-        </p:spPr>
-        <p:txBody>
-          <a:bodyPr wrap="none" rtlCol="0">
-            <a:spAutoFit/>
-          </a:bodyPr>
-          <a:lstStyle/>
-          <a:p>
-            <a:r>
-              <a:rPr lang="en-AU" dirty="0">
-                <a:latin typeface="Consolas" panose="020B0609020204030204" pitchFamily="49" charset="0"/>
-              </a:rPr>
-              <a:t>print(</a:t>
-            </a:r>
-            <a:r>
-              <a:rPr lang="en-AU" dirty="0" err="1">
-                <a:latin typeface="Consolas" panose="020B0609020204030204" pitchFamily="49" charset="0"/>
-              </a:rPr>
-              <a:t>word_score</a:t>
-            </a:r>
-            <a:r>
-              <a:rPr lang="en-AU" dirty="0">
-                <a:latin typeface="Consolas" panose="020B0609020204030204" pitchFamily="49" charset="0"/>
-              </a:rPr>
-              <a:t>('TAPE', 'P', 'CIHPETA'))      # 4</a:t>
-            </a:r>
-          </a:p>
-          <a:p>
-            <a:r>
-              <a:rPr lang="en-AU" dirty="0">
-                <a:latin typeface="Consolas" panose="020B0609020204030204" pitchFamily="49" charset="0"/>
-              </a:rPr>
-              <a:t>print(</a:t>
-            </a:r>
-            <a:r>
-              <a:rPr lang="en-AU" dirty="0" err="1">
-                <a:latin typeface="Consolas" panose="020B0609020204030204" pitchFamily="49" charset="0"/>
-              </a:rPr>
-              <a:t>word_score</a:t>
-            </a:r>
-            <a:r>
-              <a:rPr lang="en-AU" dirty="0">
-                <a:latin typeface="Consolas" panose="020B0609020204030204" pitchFamily="49" charset="0"/>
-              </a:rPr>
-              <a:t>('PATH', 'P', 'CIHPETA'))      # 4</a:t>
-            </a:r>
-          </a:p>
-          <a:p>
-            <a:r>
-              <a:rPr lang="en-AU" dirty="0">
-                <a:latin typeface="Consolas" panose="020B0609020204030204" pitchFamily="49" charset="0"/>
-              </a:rPr>
-              <a:t>print(</a:t>
-            </a:r>
-            <a:r>
-              <a:rPr lang="en-AU" dirty="0" err="1">
-                <a:latin typeface="Consolas" panose="020B0609020204030204" pitchFamily="49" charset="0"/>
-              </a:rPr>
-              <a:t>word_score</a:t>
-            </a:r>
-            <a:r>
-              <a:rPr lang="en-AU" dirty="0">
-                <a:latin typeface="Consolas" panose="020B0609020204030204" pitchFamily="49" charset="0"/>
-              </a:rPr>
-              <a:t>('CHEAP', 'P', 'CIHPETA'))     # 5</a:t>
-            </a:r>
-          </a:p>
-          <a:p>
-            <a:r>
-              <a:rPr lang="en-AU" dirty="0">
-                <a:latin typeface="Consolas" panose="020B0609020204030204" pitchFamily="49" charset="0"/>
-              </a:rPr>
-              <a:t>print(</a:t>
-            </a:r>
-            <a:r>
-              <a:rPr lang="en-AU" dirty="0" err="1">
-                <a:latin typeface="Consolas" panose="020B0609020204030204" pitchFamily="49" charset="0"/>
-              </a:rPr>
-              <a:t>word_score</a:t>
-            </a:r>
-            <a:r>
-              <a:rPr lang="en-AU" dirty="0">
-                <a:latin typeface="Consolas" panose="020B0609020204030204" pitchFamily="49" charset="0"/>
-              </a:rPr>
-              <a:t>('PATCH', 'P', 'CIHPETA'))     # 5</a:t>
-            </a:r>
-          </a:p>
-          <a:p>
-            <a:r>
-              <a:rPr lang="en-AU" dirty="0">
-                <a:latin typeface="Consolas" panose="020B0609020204030204" pitchFamily="49" charset="0"/>
-              </a:rPr>
-              <a:t>print(</a:t>
-            </a:r>
-            <a:r>
-              <a:rPr lang="en-AU" dirty="0" err="1">
-                <a:latin typeface="Consolas" panose="020B0609020204030204" pitchFamily="49" charset="0"/>
-              </a:rPr>
-              <a:t>word_score</a:t>
-            </a:r>
-            <a:r>
-              <a:rPr lang="en-AU" dirty="0">
-                <a:latin typeface="Consolas" panose="020B0609020204030204" pitchFamily="49" charset="0"/>
-              </a:rPr>
-              <a:t>('APPETITE', 'P', 'CIHPETA'))  # 8</a:t>
-            </a:r>
-          </a:p>
-          <a:p>
-            <a:r>
-              <a:rPr lang="en-AU" dirty="0">
-                <a:latin typeface="Consolas" panose="020B0609020204030204" pitchFamily="49" charset="0"/>
-              </a:rPr>
-              <a:t>print(</a:t>
-            </a:r>
-            <a:r>
-              <a:rPr lang="en-AU" dirty="0" err="1">
-                <a:latin typeface="Consolas" panose="020B0609020204030204" pitchFamily="49" charset="0"/>
-              </a:rPr>
-              <a:t>word_score</a:t>
-            </a:r>
-            <a:r>
-              <a:rPr lang="en-AU" dirty="0">
-                <a:latin typeface="Consolas" panose="020B0609020204030204" pitchFamily="49" charset="0"/>
-              </a:rPr>
-              <a:t>('PATHETIC', 'P', 'CIHPETA'))  # 15</a:t>
             </a:r>
           </a:p>
         </p:txBody>
@@ -47030,7 +48249,7 @@
 </p:sld>
 </file>
 
-<file path=ppt/slides/slide78.xml><?xml version="1.0" encoding="utf-8"?>
+<file path=ppt/slides/slide79.xml><?xml version="1.0" encoding="utf-8"?>
 <p:sld xmlns:a="http://schemas.openxmlformats.org/drawingml/2006/main" xmlns:r="http://schemas.openxmlformats.org/officeDocument/2006/relationships" xmlns:p="http://schemas.openxmlformats.org/presentationml/2006/main">
   <p:cSld>
     <p:spTree>
@@ -47076,7 +48295,7 @@
           <a:p>
             <a:fld id="{CBA0A0CD-12E5-4065-8C87-26D031211F61}" type="slidenum">
               <a:rPr lang="en-AU" smtClean="0"/>
-              <a:t>78</a:t>
+              <a:t>79</a:t>
             </a:fld>
             <a:endParaRPr lang="en-AU" dirty="0"/>
           </a:p>
@@ -47256,10 +48475,10 @@
       </p:sp>
       <p:sp>
         <p:nvSpPr>
-          <p:cNvPr id="13" name="TextBox 12">
-            <a:extLst>
-              <a:ext uri="{FF2B5EF4-FFF2-40B4-BE49-F238E27FC236}">
-                <a16:creationId xmlns:a16="http://schemas.microsoft.com/office/drawing/2014/main" id="{6E8023B5-8E01-1026-4932-2979AF8F2DE0}"/>
+          <p:cNvPr id="2" name="TextBox 1">
+            <a:extLst>
+              <a:ext uri="{FF2B5EF4-FFF2-40B4-BE49-F238E27FC236}">
+                <a16:creationId xmlns:a16="http://schemas.microsoft.com/office/drawing/2014/main" id="{97A7E02D-F94E-03EF-BB37-95D82E705B72}"/>
               </a:ext>
             </a:extLst>
           </p:cNvPr>
@@ -47268,8 +48487,8 @@
         </p:nvSpPr>
         <p:spPr>
           <a:xfrm>
-            <a:off x="143641" y="136525"/>
-            <a:ext cx="3932485" cy="2862322"/>
+            <a:off x="6246734" y="518984"/>
+            <a:ext cx="3366823" cy="923330"/>
           </a:xfrm>
           <a:prstGeom prst="rect">
             <a:avLst/>
@@ -47289,60 +48508,42 @@
           <a:p>
             <a:pPr algn="ctr"/>
             <a:r>
+              <a:rPr lang="en-CA" dirty="0"/>
+              <a:t>How can use the </a:t>
+            </a:r>
+            <a:r>
+              <a:rPr lang="en-CA" dirty="0" err="1">
+                <a:latin typeface="Consolas" panose="020B0609020204030204" pitchFamily="49" charset="0"/>
+              </a:rPr>
+              <a:t>word_score</a:t>
+            </a:r>
+            <a:r>
+              <a:rPr lang="en-CA" dirty="0">
+                <a:latin typeface="Consolas" panose="020B0609020204030204" pitchFamily="49" charset="0"/>
+              </a:rPr>
+              <a:t> </a:t>
+            </a:r>
+            <a:r>
+              <a:rPr lang="en-CA" dirty="0"/>
+              <a:t>function to find </a:t>
+            </a:r>
+            <a:r>
               <a:rPr lang="en-CA" b="1" dirty="0"/>
-              <a:t>Word Scoring</a:t>
-            </a:r>
-            <a:endParaRPr lang="en-CA" dirty="0"/>
-          </a:p>
-          <a:p>
-            <a:r>
-              <a:rPr lang="en-CA" dirty="0"/>
-              <a:t>3 or fewer letters: 0 points</a:t>
-            </a:r>
-          </a:p>
-          <a:p>
-            <a:r>
-              <a:rPr lang="en-CA" dirty="0"/>
-              <a:t>4 or more letters: 1 point per letter</a:t>
-            </a:r>
-          </a:p>
-          <a:p>
-            <a:endParaRPr lang="en-CA" dirty="0"/>
-          </a:p>
-          <a:p>
-            <a:r>
-              <a:rPr lang="en-CA" b="1" dirty="0"/>
-              <a:t>Pangram bonus</a:t>
-            </a:r>
-          </a:p>
-          <a:p>
-            <a:pPr marL="285750" indent="-285750">
-              <a:buFont typeface="Arial" panose="020B0604020202020204" pitchFamily="34" charset="0"/>
-              <a:buChar char="•"/>
-            </a:pPr>
-            <a:r>
-              <a:rPr lang="en-CA" dirty="0"/>
-              <a:t>7 bonus points if all 7 different letters are used (plus you still get 1 point per letter)</a:t>
-            </a:r>
-          </a:p>
-          <a:p>
-            <a:pPr marL="285750" indent="-285750">
-              <a:buFont typeface="Arial" panose="020B0604020202020204" pitchFamily="34" charset="0"/>
-              <a:buChar char="•"/>
-            </a:pPr>
-            <a:r>
-              <a:rPr lang="en-CA" dirty="0"/>
-              <a:t>Each puzzle is guaranteed to have at least one pangram</a:t>
-            </a:r>
-          </a:p>
-        </p:txBody>
-      </p:sp>
-      <p:sp>
-        <p:nvSpPr>
-          <p:cNvPr id="2" name="TextBox 1">
-            <a:extLst>
-              <a:ext uri="{FF2B5EF4-FFF2-40B4-BE49-F238E27FC236}">
-                <a16:creationId xmlns:a16="http://schemas.microsoft.com/office/drawing/2014/main" id="{97A7E02D-F94E-03EF-BB37-95D82E705B72}"/>
+              <a:t>all</a:t>
+            </a:r>
+            <a:r>
+              <a:rPr lang="en-CA" dirty="0"/>
+              <a:t> the valid words in a Spelling Bee puzzle?</a:t>
+            </a:r>
+          </a:p>
+        </p:txBody>
+      </p:sp>
+      <p:sp>
+        <p:nvSpPr>
+          <p:cNvPr id="3" name="TextBox 2">
+            <a:extLst>
+              <a:ext uri="{FF2B5EF4-FFF2-40B4-BE49-F238E27FC236}">
+                <a16:creationId xmlns:a16="http://schemas.microsoft.com/office/drawing/2014/main" id="{2FD0445C-C0B9-DD9B-A990-057013B90790}"/>
               </a:ext>
             </a:extLst>
           </p:cNvPr>
@@ -47351,8 +48552,8 @@
         </p:nvSpPr>
         <p:spPr>
           <a:xfrm>
-            <a:off x="6246734" y="518984"/>
-            <a:ext cx="3366823" cy="923330"/>
+            <a:off x="143641" y="119096"/>
+            <a:ext cx="3932485" cy="2862322"/>
           </a:xfrm>
           <a:prstGeom prst="rect">
             <a:avLst/>
@@ -47370,34 +48571,50 @@
           </a:bodyPr>
           <a:lstStyle/>
           <a:p>
-            <a:pPr algn="ctr"/>
-            <a:r>
-              <a:rPr lang="en-CA" dirty="0"/>
-              <a:t>How can use the </a:t>
-            </a:r>
-            <a:r>
-              <a:rPr lang="en-CA" dirty="0" err="1">
-                <a:latin typeface="Consolas" panose="020B0609020204030204" pitchFamily="49" charset="0"/>
-              </a:rPr>
-              <a:t>word_score</a:t>
-            </a:r>
-            <a:r>
-              <a:rPr lang="en-CA" dirty="0">
-                <a:latin typeface="Consolas" panose="020B0609020204030204" pitchFamily="49" charset="0"/>
-              </a:rPr>
-              <a:t> </a:t>
-            </a:r>
-            <a:r>
-              <a:rPr lang="en-CA" dirty="0"/>
-              <a:t>function to find </a:t>
-            </a:r>
+            <a:r>
+              <a:rPr lang="en-CA" dirty="0"/>
+              <a:t>3 or fewer letters: 0 points</a:t>
+            </a:r>
+          </a:p>
+          <a:p>
+            <a:r>
+              <a:rPr lang="en-CA" dirty="0"/>
+              <a:t>4 letters: 1 point</a:t>
+            </a:r>
+          </a:p>
+          <a:p>
+            <a:r>
+              <a:rPr lang="en-CA" dirty="0"/>
+              <a:t>5 or more letters: 1 point per letter</a:t>
+            </a:r>
+          </a:p>
+          <a:p>
+            <a:endParaRPr lang="en-CA" dirty="0"/>
+          </a:p>
+          <a:p>
             <a:r>
               <a:rPr lang="en-CA" b="1" dirty="0"/>
-              <a:t>all</a:t>
-            </a:r>
-            <a:r>
-              <a:rPr lang="en-CA" dirty="0"/>
-              <a:t> the valid words in Spelling Bee puzzle?</a:t>
+              <a:t>Pangram bonus</a:t>
+            </a:r>
+          </a:p>
+          <a:p>
+            <a:pPr marL="285750" indent="-285750">
+              <a:buFont typeface="Arial" panose="020B0604020202020204" pitchFamily="34" charset="0"/>
+              <a:buChar char="•"/>
+            </a:pPr>
+            <a:r>
+              <a:rPr lang="en-CA" dirty="0"/>
+              <a:t>7 bonus points if all 7 different letters are used (plus you still get 1 point per letter)</a:t>
+            </a:r>
+          </a:p>
+          <a:p>
+            <a:pPr marL="285750" indent="-285750">
+              <a:buFont typeface="Arial" panose="020B0604020202020204" pitchFamily="34" charset="0"/>
+              <a:buChar char="•"/>
+            </a:pPr>
+            <a:r>
+              <a:rPr lang="en-CA" dirty="0"/>
+              <a:t>Each puzzle is guaranteed to have at least one pangram</a:t>
             </a:r>
           </a:p>
         </p:txBody>
@@ -47406,493 +48623,6 @@
     <p:extLst>
       <p:ext uri="{BB962C8B-B14F-4D97-AF65-F5344CB8AC3E}">
         <p14:creationId xmlns:p14="http://schemas.microsoft.com/office/powerpoint/2010/main" val="1293448474"/>
-      </p:ext>
-    </p:extLst>
-  </p:cSld>
-  <p:clrMapOvr>
-    <a:masterClrMapping/>
-  </p:clrMapOvr>
-</p:sld>
-</file>
-
-<file path=ppt/slides/slide79.xml><?xml version="1.0" encoding="utf-8"?>
-<p:sld xmlns:a="http://schemas.openxmlformats.org/drawingml/2006/main" xmlns:r="http://schemas.openxmlformats.org/officeDocument/2006/relationships" xmlns:p="http://schemas.openxmlformats.org/presentationml/2006/main">
-  <p:cSld>
-    <p:spTree>
-      <p:nvGrpSpPr>
-        <p:cNvPr id="1" name="">
-          <a:extLst>
-            <a:ext uri="{FF2B5EF4-FFF2-40B4-BE49-F238E27FC236}">
-              <a16:creationId xmlns:a16="http://schemas.microsoft.com/office/drawing/2014/main" id="{5B9EB987-8E8A-9945-0810-26C3E0859AB3}"/>
-            </a:ext>
-          </a:extLst>
-        </p:cNvPr>
-        <p:cNvGrpSpPr/>
-        <p:nvPr/>
-      </p:nvGrpSpPr>
-      <p:grpSpPr>
-        <a:xfrm>
-          <a:off x="0" y="0"/>
-          <a:ext cx="0" cy="0"/>
-          <a:chOff x="0" y="0"/>
-          <a:chExt cx="0" cy="0"/>
-        </a:xfrm>
-      </p:grpSpPr>
-      <p:sp>
-        <p:nvSpPr>
-          <p:cNvPr id="4" name="Slide Number Placeholder 3">
-            <a:extLst>
-              <a:ext uri="{FF2B5EF4-FFF2-40B4-BE49-F238E27FC236}">
-                <a16:creationId xmlns:a16="http://schemas.microsoft.com/office/drawing/2014/main" id="{C262A123-8F8E-214E-7062-508054CB22C8}"/>
-              </a:ext>
-            </a:extLst>
-          </p:cNvPr>
-          <p:cNvSpPr>
-            <a:spLocks noGrp="1"/>
-          </p:cNvSpPr>
-          <p:nvPr>
-            <p:ph type="sldNum" sz="quarter" idx="12"/>
-          </p:nvPr>
-        </p:nvSpPr>
-        <p:spPr/>
-        <p:txBody>
-          <a:bodyPr/>
-          <a:lstStyle/>
-          <a:p>
-            <a:fld id="{CBA0A0CD-12E5-4065-8C87-26D031211F61}" type="slidenum">
-              <a:rPr lang="en-AU" smtClean="0"/>
-              <a:t>79</a:t>
-            </a:fld>
-            <a:endParaRPr lang="en-AU" dirty="0"/>
-          </a:p>
-        </p:txBody>
-      </p:sp>
-      <p:pic>
-        <p:nvPicPr>
-          <p:cNvPr id="6" name="Picture 5">
-            <a:extLst>
-              <a:ext uri="{FF2B5EF4-FFF2-40B4-BE49-F238E27FC236}">
-                <a16:creationId xmlns:a16="http://schemas.microsoft.com/office/drawing/2014/main" id="{4A13C0BE-8559-3EB1-7785-FAF6DC54978E}"/>
-              </a:ext>
-            </a:extLst>
-          </p:cNvPr>
-          <p:cNvPicPr>
-            <a:picLocks noChangeAspect="1"/>
-          </p:cNvPicPr>
-          <p:nvPr/>
-        </p:nvPicPr>
-        <p:blipFill>
-          <a:blip r:embed="rId2"/>
-          <a:stretch>
-            <a:fillRect/>
-          </a:stretch>
-        </p:blipFill>
-        <p:spPr>
-          <a:xfrm>
-            <a:off x="9234" y="3150700"/>
-            <a:ext cx="2201093" cy="3297778"/>
-          </a:xfrm>
-          <a:prstGeom prst="rect">
-            <a:avLst/>
-          </a:prstGeom>
-        </p:spPr>
-      </p:pic>
-      <p:sp>
-        <p:nvSpPr>
-          <p:cNvPr id="9" name="TextBox 8">
-            <a:extLst>
-              <a:ext uri="{FF2B5EF4-FFF2-40B4-BE49-F238E27FC236}">
-                <a16:creationId xmlns:a16="http://schemas.microsoft.com/office/drawing/2014/main" id="{0AA658DB-51D0-037D-1028-BFEFC2EA4C55}"/>
-              </a:ext>
-            </a:extLst>
-          </p:cNvPr>
-          <p:cNvSpPr txBox="1"/>
-          <p:nvPr/>
-        </p:nvSpPr>
-        <p:spPr>
-          <a:xfrm>
-            <a:off x="2387307" y="3455773"/>
-            <a:ext cx="1688819" cy="2308324"/>
-          </a:xfrm>
-          <a:prstGeom prst="rect">
-            <a:avLst/>
-          </a:prstGeom>
-          <a:solidFill>
-            <a:schemeClr val="accent2">
-              <a:lumMod val="40000"/>
-              <a:lumOff val="60000"/>
-            </a:schemeClr>
-          </a:solidFill>
-        </p:spPr>
-        <p:txBody>
-          <a:bodyPr wrap="square" rtlCol="0">
-            <a:spAutoFit/>
-          </a:bodyPr>
-          <a:lstStyle/>
-          <a:p>
-            <a:r>
-              <a:rPr lang="en-CA" dirty="0"/>
-              <a:t>Some words:</a:t>
-            </a:r>
-          </a:p>
-          <a:p>
-            <a:r>
-              <a:rPr lang="en-CA" dirty="0"/>
-              <a:t>TA</a:t>
-            </a:r>
-            <a:r>
-              <a:rPr lang="en-CA" dirty="0">
-                <a:solidFill>
-                  <a:srgbClr val="00B050"/>
-                </a:solidFill>
-              </a:rPr>
-              <a:t>P</a:t>
-            </a:r>
-            <a:r>
-              <a:rPr lang="en-CA" dirty="0"/>
-              <a:t>E,  4</a:t>
-            </a:r>
-          </a:p>
-          <a:p>
-            <a:r>
-              <a:rPr lang="en-CA" dirty="0">
-                <a:solidFill>
-                  <a:srgbClr val="00B050"/>
-                </a:solidFill>
-              </a:rPr>
-              <a:t>P</a:t>
-            </a:r>
-            <a:r>
-              <a:rPr lang="en-CA" dirty="0"/>
-              <a:t>ATH, 4</a:t>
-            </a:r>
-          </a:p>
-          <a:p>
-            <a:r>
-              <a:rPr lang="en-CA" dirty="0"/>
-              <a:t>CHEA</a:t>
-            </a:r>
-            <a:r>
-              <a:rPr lang="en-CA" dirty="0">
-                <a:solidFill>
-                  <a:srgbClr val="00B050"/>
-                </a:solidFill>
-              </a:rPr>
-              <a:t>P</a:t>
-            </a:r>
-            <a:r>
-              <a:rPr lang="en-CA" dirty="0"/>
-              <a:t>, 5</a:t>
-            </a:r>
-          </a:p>
-          <a:p>
-            <a:r>
-              <a:rPr lang="en-CA" dirty="0">
-                <a:solidFill>
-                  <a:srgbClr val="00B050"/>
-                </a:solidFill>
-              </a:rPr>
-              <a:t>P</a:t>
-            </a:r>
-            <a:r>
-              <a:rPr lang="en-CA" dirty="0"/>
-              <a:t>ATCH, 5</a:t>
-            </a:r>
-          </a:p>
-          <a:p>
-            <a:r>
-              <a:rPr lang="en-CA" dirty="0"/>
-              <a:t>A</a:t>
-            </a:r>
-            <a:r>
-              <a:rPr lang="en-CA" dirty="0">
-                <a:solidFill>
-                  <a:srgbClr val="00B050"/>
-                </a:solidFill>
-              </a:rPr>
-              <a:t>PP</a:t>
-            </a:r>
-            <a:r>
-              <a:rPr lang="en-CA" dirty="0"/>
-              <a:t>ETITE, 8</a:t>
-            </a:r>
-          </a:p>
-          <a:p>
-            <a:r>
-              <a:rPr lang="en-CA" dirty="0">
-                <a:solidFill>
-                  <a:srgbClr val="00B050"/>
-                </a:solidFill>
-              </a:rPr>
-              <a:t>P</a:t>
-            </a:r>
-            <a:r>
-              <a:rPr lang="en-CA" dirty="0"/>
-              <a:t>ATHETIC, 15</a:t>
-            </a:r>
-          </a:p>
-          <a:p>
-            <a:r>
-              <a:rPr lang="en-CA" dirty="0"/>
-              <a:t>…</a:t>
-            </a:r>
-          </a:p>
-        </p:txBody>
-      </p:sp>
-      <p:sp>
-        <p:nvSpPr>
-          <p:cNvPr id="13" name="TextBox 12">
-            <a:extLst>
-              <a:ext uri="{FF2B5EF4-FFF2-40B4-BE49-F238E27FC236}">
-                <a16:creationId xmlns:a16="http://schemas.microsoft.com/office/drawing/2014/main" id="{10B94123-D430-E060-427E-15EE3DD852C2}"/>
-              </a:ext>
-            </a:extLst>
-          </p:cNvPr>
-          <p:cNvSpPr txBox="1"/>
-          <p:nvPr/>
-        </p:nvSpPr>
-        <p:spPr>
-          <a:xfrm>
-            <a:off x="143641" y="136525"/>
-            <a:ext cx="3932485" cy="2862322"/>
-          </a:xfrm>
-          <a:prstGeom prst="rect">
-            <a:avLst/>
-          </a:prstGeom>
-          <a:solidFill>
-            <a:schemeClr val="accent2">
-              <a:lumMod val="40000"/>
-              <a:lumOff val="60000"/>
-            </a:schemeClr>
-          </a:solidFill>
-        </p:spPr>
-        <p:txBody>
-          <a:bodyPr wrap="square" rtlCol="0">
-            <a:spAutoFit/>
-          </a:bodyPr>
-          <a:lstStyle/>
-          <a:p>
-            <a:pPr algn="ctr"/>
-            <a:r>
-              <a:rPr lang="en-CA" b="1" dirty="0"/>
-              <a:t>Word Scoring</a:t>
-            </a:r>
-            <a:endParaRPr lang="en-CA" dirty="0"/>
-          </a:p>
-          <a:p>
-            <a:r>
-              <a:rPr lang="en-CA" dirty="0"/>
-              <a:t>3 or fewer letters: 0 points</a:t>
-            </a:r>
-          </a:p>
-          <a:p>
-            <a:r>
-              <a:rPr lang="en-CA" dirty="0"/>
-              <a:t>4 or more letters: 1 point per letter</a:t>
-            </a:r>
-          </a:p>
-          <a:p>
-            <a:endParaRPr lang="en-CA" dirty="0"/>
-          </a:p>
-          <a:p>
-            <a:r>
-              <a:rPr lang="en-CA" b="1" dirty="0"/>
-              <a:t>Pangram bonus</a:t>
-            </a:r>
-          </a:p>
-          <a:p>
-            <a:pPr marL="285750" indent="-285750">
-              <a:buFont typeface="Arial" panose="020B0604020202020204" pitchFamily="34" charset="0"/>
-              <a:buChar char="•"/>
-            </a:pPr>
-            <a:r>
-              <a:rPr lang="en-CA" dirty="0"/>
-              <a:t>7 bonus points if all 7 different letters are used (plus you still get 1 point per letter)</a:t>
-            </a:r>
-          </a:p>
-          <a:p>
-            <a:pPr marL="285750" indent="-285750">
-              <a:buFont typeface="Arial" panose="020B0604020202020204" pitchFamily="34" charset="0"/>
-              <a:buChar char="•"/>
-            </a:pPr>
-            <a:r>
-              <a:rPr lang="en-CA" dirty="0"/>
-              <a:t>Each puzzle is guaranteed to have at least one pangram</a:t>
-            </a:r>
-          </a:p>
-        </p:txBody>
-      </p:sp>
-      <p:sp>
-        <p:nvSpPr>
-          <p:cNvPr id="2" name="TextBox 1">
-            <a:extLst>
-              <a:ext uri="{FF2B5EF4-FFF2-40B4-BE49-F238E27FC236}">
-                <a16:creationId xmlns:a16="http://schemas.microsoft.com/office/drawing/2014/main" id="{E6AC7D00-8FA8-8E6A-F822-4F5436216ACD}"/>
-              </a:ext>
-            </a:extLst>
-          </p:cNvPr>
-          <p:cNvSpPr txBox="1"/>
-          <p:nvPr/>
-        </p:nvSpPr>
-        <p:spPr>
-          <a:xfrm>
-            <a:off x="6246734" y="518984"/>
-            <a:ext cx="3366823" cy="923330"/>
-          </a:xfrm>
-          <a:prstGeom prst="rect">
-            <a:avLst/>
-          </a:prstGeom>
-          <a:solidFill>
-            <a:schemeClr val="accent2">
-              <a:lumMod val="40000"/>
-              <a:lumOff val="60000"/>
-            </a:schemeClr>
-          </a:solidFill>
-        </p:spPr>
-        <p:txBody>
-          <a:bodyPr wrap="square" rtlCol="0">
-            <a:spAutoFit/>
-          </a:bodyPr>
-          <a:lstStyle/>
-          <a:p>
-            <a:pPr algn="ctr"/>
-            <a:r>
-              <a:rPr lang="en-CA" dirty="0"/>
-              <a:t>How can use the </a:t>
-            </a:r>
-            <a:r>
-              <a:rPr lang="en-CA" dirty="0" err="1">
-                <a:latin typeface="Consolas" panose="020B0609020204030204" pitchFamily="49" charset="0"/>
-              </a:rPr>
-              <a:t>word_score</a:t>
-            </a:r>
-            <a:r>
-              <a:rPr lang="en-CA" dirty="0">
-                <a:latin typeface="Consolas" panose="020B0609020204030204" pitchFamily="49" charset="0"/>
-              </a:rPr>
-              <a:t> </a:t>
-            </a:r>
-            <a:r>
-              <a:rPr lang="en-CA" dirty="0"/>
-              <a:t>function to find </a:t>
-            </a:r>
-            <a:r>
-              <a:rPr lang="en-CA" b="1" dirty="0"/>
-              <a:t>all</a:t>
-            </a:r>
-            <a:r>
-              <a:rPr lang="en-CA" dirty="0"/>
-              <a:t> the valid words in Spelling Bee puzzle?</a:t>
-            </a:r>
-          </a:p>
-        </p:txBody>
-      </p:sp>
-      <p:sp>
-        <p:nvSpPr>
-          <p:cNvPr id="5" name="TextBox 4">
-            <a:extLst>
-              <a:ext uri="{FF2B5EF4-FFF2-40B4-BE49-F238E27FC236}">
-                <a16:creationId xmlns:a16="http://schemas.microsoft.com/office/drawing/2014/main" id="{EDFCCC38-741F-1EFA-71D0-132B48B6DB66}"/>
-              </a:ext>
-            </a:extLst>
-          </p:cNvPr>
-          <p:cNvSpPr txBox="1"/>
-          <p:nvPr/>
-        </p:nvSpPr>
-        <p:spPr>
-          <a:xfrm>
-            <a:off x="6096000" y="1886465"/>
-            <a:ext cx="5672066" cy="2031325"/>
-          </a:xfrm>
-          <a:prstGeom prst="rect">
-            <a:avLst/>
-          </a:prstGeom>
-          <a:noFill/>
-        </p:spPr>
-        <p:txBody>
-          <a:bodyPr wrap="none" rtlCol="0">
-            <a:spAutoFit/>
-          </a:bodyPr>
-          <a:lstStyle/>
-          <a:p>
-            <a:r>
-              <a:rPr lang="en-CA" dirty="0"/>
-              <a:t>For each </a:t>
-            </a:r>
-            <a:r>
-              <a:rPr lang="en-CA" b="1" dirty="0"/>
-              <a:t>word</a:t>
-            </a:r>
-            <a:r>
-              <a:rPr lang="en-CA" dirty="0"/>
-              <a:t> in </a:t>
-            </a:r>
-            <a:r>
-              <a:rPr lang="en-CA" b="1" dirty="0"/>
-              <a:t>words.txt </a:t>
-            </a:r>
-            <a:r>
-              <a:rPr lang="en-CA" dirty="0"/>
-              <a:t>do the following:</a:t>
-            </a:r>
-          </a:p>
-          <a:p>
-            <a:pPr marL="285750" indent="-285750">
-              <a:buFont typeface="Arial" panose="020B0604020202020204" pitchFamily="34" charset="0"/>
-              <a:buChar char="•"/>
-            </a:pPr>
-            <a:r>
-              <a:rPr lang="en-CA" dirty="0"/>
-              <a:t>If the Spelling Bee score of </a:t>
-            </a:r>
-            <a:r>
-              <a:rPr lang="en-CA" b="1" dirty="0"/>
-              <a:t>word</a:t>
-            </a:r>
-            <a:r>
-              <a:rPr lang="en-CA" dirty="0"/>
-              <a:t> is non-zero,</a:t>
-            </a:r>
-            <a:br>
-              <a:rPr lang="en-CA" dirty="0"/>
-            </a:br>
-            <a:r>
-              <a:rPr lang="en-CA" dirty="0"/>
-              <a:t>print it.</a:t>
-            </a:r>
-          </a:p>
-          <a:p>
-            <a:pPr marL="285750" indent="-285750">
-              <a:buFont typeface="Arial" panose="020B0604020202020204" pitchFamily="34" charset="0"/>
-              <a:buChar char="•"/>
-            </a:pPr>
-            <a:endParaRPr lang="en-CA" dirty="0"/>
-          </a:p>
-          <a:p>
-            <a:r>
-              <a:rPr lang="en-CA" dirty="0"/>
-              <a:t>When done, print a count of many words were found,</a:t>
-            </a:r>
-          </a:p>
-          <a:p>
-            <a:r>
-              <a:rPr lang="en-CA" dirty="0"/>
-              <a:t>and the sum of all scores (which is the highest possible </a:t>
-            </a:r>
-          </a:p>
-          <a:p>
-            <a:r>
-              <a:rPr lang="en-CA" dirty="0"/>
-              <a:t>score for the puzzle).</a:t>
-            </a:r>
-            <a:endParaRPr lang="en-AU" dirty="0"/>
-          </a:p>
-        </p:txBody>
-      </p:sp>
-    </p:spTree>
-    <p:extLst>
-      <p:ext uri="{BB962C8B-B14F-4D97-AF65-F5344CB8AC3E}">
-        <p14:creationId xmlns:p14="http://schemas.microsoft.com/office/powerpoint/2010/main" val="421622308"/>
       </p:ext>
     </p:extLst>
   </p:cSld>
@@ -48188,6 +48918,544 @@
         <p:cNvPr id="1" name="">
           <a:extLst>
             <a:ext uri="{FF2B5EF4-FFF2-40B4-BE49-F238E27FC236}">
+              <a16:creationId xmlns:a16="http://schemas.microsoft.com/office/drawing/2014/main" id="{5B9EB987-8E8A-9945-0810-26C3E0859AB3}"/>
+            </a:ext>
+          </a:extLst>
+        </p:cNvPr>
+        <p:cNvGrpSpPr/>
+        <p:nvPr/>
+      </p:nvGrpSpPr>
+      <p:grpSpPr>
+        <a:xfrm>
+          <a:off x="0" y="0"/>
+          <a:ext cx="0" cy="0"/>
+          <a:chOff x="0" y="0"/>
+          <a:chExt cx="0" cy="0"/>
+        </a:xfrm>
+      </p:grpSpPr>
+      <p:sp>
+        <p:nvSpPr>
+          <p:cNvPr id="4" name="Slide Number Placeholder 3">
+            <a:extLst>
+              <a:ext uri="{FF2B5EF4-FFF2-40B4-BE49-F238E27FC236}">
+                <a16:creationId xmlns:a16="http://schemas.microsoft.com/office/drawing/2014/main" id="{C262A123-8F8E-214E-7062-508054CB22C8}"/>
+              </a:ext>
+            </a:extLst>
+          </p:cNvPr>
+          <p:cNvSpPr>
+            <a:spLocks noGrp="1"/>
+          </p:cNvSpPr>
+          <p:nvPr>
+            <p:ph type="sldNum" sz="quarter" idx="12"/>
+          </p:nvPr>
+        </p:nvSpPr>
+        <p:spPr/>
+        <p:txBody>
+          <a:bodyPr/>
+          <a:lstStyle/>
+          <a:p>
+            <a:fld id="{CBA0A0CD-12E5-4065-8C87-26D031211F61}" type="slidenum">
+              <a:rPr lang="en-AU" smtClean="0"/>
+              <a:t>80</a:t>
+            </a:fld>
+            <a:endParaRPr lang="en-AU" dirty="0"/>
+          </a:p>
+        </p:txBody>
+      </p:sp>
+      <p:pic>
+        <p:nvPicPr>
+          <p:cNvPr id="6" name="Picture 5">
+            <a:extLst>
+              <a:ext uri="{FF2B5EF4-FFF2-40B4-BE49-F238E27FC236}">
+                <a16:creationId xmlns:a16="http://schemas.microsoft.com/office/drawing/2014/main" id="{4A13C0BE-8559-3EB1-7785-FAF6DC54978E}"/>
+              </a:ext>
+            </a:extLst>
+          </p:cNvPr>
+          <p:cNvPicPr>
+            <a:picLocks noChangeAspect="1"/>
+          </p:cNvPicPr>
+          <p:nvPr/>
+        </p:nvPicPr>
+        <p:blipFill>
+          <a:blip r:embed="rId2"/>
+          <a:stretch>
+            <a:fillRect/>
+          </a:stretch>
+        </p:blipFill>
+        <p:spPr>
+          <a:xfrm>
+            <a:off x="9234" y="3150700"/>
+            <a:ext cx="2201093" cy="3297778"/>
+          </a:xfrm>
+          <a:prstGeom prst="rect">
+            <a:avLst/>
+          </a:prstGeom>
+        </p:spPr>
+      </p:pic>
+      <p:sp>
+        <p:nvSpPr>
+          <p:cNvPr id="9" name="TextBox 8">
+            <a:extLst>
+              <a:ext uri="{FF2B5EF4-FFF2-40B4-BE49-F238E27FC236}">
+                <a16:creationId xmlns:a16="http://schemas.microsoft.com/office/drawing/2014/main" id="{0AA658DB-51D0-037D-1028-BFEFC2EA4C55}"/>
+              </a:ext>
+            </a:extLst>
+          </p:cNvPr>
+          <p:cNvSpPr txBox="1"/>
+          <p:nvPr/>
+        </p:nvSpPr>
+        <p:spPr>
+          <a:xfrm>
+            <a:off x="2387307" y="3455773"/>
+            <a:ext cx="1688819" cy="2308324"/>
+          </a:xfrm>
+          <a:prstGeom prst="rect">
+            <a:avLst/>
+          </a:prstGeom>
+          <a:solidFill>
+            <a:schemeClr val="accent2">
+              <a:lumMod val="40000"/>
+              <a:lumOff val="60000"/>
+            </a:schemeClr>
+          </a:solidFill>
+        </p:spPr>
+        <p:txBody>
+          <a:bodyPr wrap="square" rtlCol="0">
+            <a:spAutoFit/>
+          </a:bodyPr>
+          <a:lstStyle/>
+          <a:p>
+            <a:r>
+              <a:rPr lang="en-CA" dirty="0"/>
+              <a:t>Some words:</a:t>
+            </a:r>
+          </a:p>
+          <a:p>
+            <a:r>
+              <a:rPr lang="en-CA" dirty="0"/>
+              <a:t>TA</a:t>
+            </a:r>
+            <a:r>
+              <a:rPr lang="en-CA" dirty="0">
+                <a:solidFill>
+                  <a:srgbClr val="00B050"/>
+                </a:solidFill>
+              </a:rPr>
+              <a:t>P</a:t>
+            </a:r>
+            <a:r>
+              <a:rPr lang="en-CA" dirty="0"/>
+              <a:t>E,  4</a:t>
+            </a:r>
+          </a:p>
+          <a:p>
+            <a:r>
+              <a:rPr lang="en-CA" dirty="0">
+                <a:solidFill>
+                  <a:srgbClr val="00B050"/>
+                </a:solidFill>
+              </a:rPr>
+              <a:t>P</a:t>
+            </a:r>
+            <a:r>
+              <a:rPr lang="en-CA" dirty="0"/>
+              <a:t>ATH, 4</a:t>
+            </a:r>
+          </a:p>
+          <a:p>
+            <a:r>
+              <a:rPr lang="en-CA" dirty="0"/>
+              <a:t>CHEA</a:t>
+            </a:r>
+            <a:r>
+              <a:rPr lang="en-CA" dirty="0">
+                <a:solidFill>
+                  <a:srgbClr val="00B050"/>
+                </a:solidFill>
+              </a:rPr>
+              <a:t>P</a:t>
+            </a:r>
+            <a:r>
+              <a:rPr lang="en-CA" dirty="0"/>
+              <a:t>, 5</a:t>
+            </a:r>
+          </a:p>
+          <a:p>
+            <a:r>
+              <a:rPr lang="en-CA" dirty="0">
+                <a:solidFill>
+                  <a:srgbClr val="00B050"/>
+                </a:solidFill>
+              </a:rPr>
+              <a:t>P</a:t>
+            </a:r>
+            <a:r>
+              <a:rPr lang="en-CA" dirty="0"/>
+              <a:t>ATCH, 5</a:t>
+            </a:r>
+          </a:p>
+          <a:p>
+            <a:r>
+              <a:rPr lang="en-CA" dirty="0"/>
+              <a:t>A</a:t>
+            </a:r>
+            <a:r>
+              <a:rPr lang="en-CA" dirty="0">
+                <a:solidFill>
+                  <a:srgbClr val="00B050"/>
+                </a:solidFill>
+              </a:rPr>
+              <a:t>PP</a:t>
+            </a:r>
+            <a:r>
+              <a:rPr lang="en-CA" dirty="0"/>
+              <a:t>ETITE, 8</a:t>
+            </a:r>
+          </a:p>
+          <a:p>
+            <a:r>
+              <a:rPr lang="en-CA" dirty="0">
+                <a:solidFill>
+                  <a:srgbClr val="00B050"/>
+                </a:solidFill>
+              </a:rPr>
+              <a:t>P</a:t>
+            </a:r>
+            <a:r>
+              <a:rPr lang="en-CA" dirty="0"/>
+              <a:t>ATHETIC, 15</a:t>
+            </a:r>
+          </a:p>
+          <a:p>
+            <a:r>
+              <a:rPr lang="en-CA" dirty="0"/>
+              <a:t>…</a:t>
+            </a:r>
+          </a:p>
+        </p:txBody>
+      </p:sp>
+      <p:sp>
+        <p:nvSpPr>
+          <p:cNvPr id="2" name="TextBox 1">
+            <a:extLst>
+              <a:ext uri="{FF2B5EF4-FFF2-40B4-BE49-F238E27FC236}">
+                <a16:creationId xmlns:a16="http://schemas.microsoft.com/office/drawing/2014/main" id="{E6AC7D00-8FA8-8E6A-F822-4F5436216ACD}"/>
+              </a:ext>
+            </a:extLst>
+          </p:cNvPr>
+          <p:cNvSpPr txBox="1"/>
+          <p:nvPr/>
+        </p:nvSpPr>
+        <p:spPr>
+          <a:xfrm>
+            <a:off x="6246734" y="518984"/>
+            <a:ext cx="3366823" cy="923330"/>
+          </a:xfrm>
+          <a:prstGeom prst="rect">
+            <a:avLst/>
+          </a:prstGeom>
+          <a:solidFill>
+            <a:schemeClr val="accent2">
+              <a:lumMod val="40000"/>
+              <a:lumOff val="60000"/>
+            </a:schemeClr>
+          </a:solidFill>
+        </p:spPr>
+        <p:txBody>
+          <a:bodyPr wrap="square" rtlCol="0">
+            <a:spAutoFit/>
+          </a:bodyPr>
+          <a:lstStyle/>
+          <a:p>
+            <a:pPr algn="ctr"/>
+            <a:r>
+              <a:rPr lang="en-CA" dirty="0"/>
+              <a:t>How can use the </a:t>
+            </a:r>
+            <a:r>
+              <a:rPr lang="en-CA" dirty="0" err="1">
+                <a:latin typeface="Consolas" panose="020B0609020204030204" pitchFamily="49" charset="0"/>
+              </a:rPr>
+              <a:t>word_score</a:t>
+            </a:r>
+            <a:r>
+              <a:rPr lang="en-CA" dirty="0">
+                <a:latin typeface="Consolas" panose="020B0609020204030204" pitchFamily="49" charset="0"/>
+              </a:rPr>
+              <a:t> </a:t>
+            </a:r>
+            <a:r>
+              <a:rPr lang="en-CA" dirty="0"/>
+              <a:t>function to find </a:t>
+            </a:r>
+            <a:r>
+              <a:rPr lang="en-CA" b="1" dirty="0"/>
+              <a:t>all</a:t>
+            </a:r>
+            <a:r>
+              <a:rPr lang="en-CA" dirty="0"/>
+              <a:t> the valid words in a Spelling Bee puzzle?</a:t>
+            </a:r>
+          </a:p>
+        </p:txBody>
+      </p:sp>
+      <p:sp>
+        <p:nvSpPr>
+          <p:cNvPr id="5" name="TextBox 4">
+            <a:extLst>
+              <a:ext uri="{FF2B5EF4-FFF2-40B4-BE49-F238E27FC236}">
+                <a16:creationId xmlns:a16="http://schemas.microsoft.com/office/drawing/2014/main" id="{EDFCCC38-741F-1EFA-71D0-132B48B6DB66}"/>
+              </a:ext>
+            </a:extLst>
+          </p:cNvPr>
+          <p:cNvSpPr txBox="1"/>
+          <p:nvPr/>
+        </p:nvSpPr>
+        <p:spPr>
+          <a:xfrm>
+            <a:off x="6096000" y="1886465"/>
+            <a:ext cx="5672066" cy="2031325"/>
+          </a:xfrm>
+          <a:prstGeom prst="rect">
+            <a:avLst/>
+          </a:prstGeom>
+          <a:noFill/>
+        </p:spPr>
+        <p:txBody>
+          <a:bodyPr wrap="none" rtlCol="0">
+            <a:spAutoFit/>
+          </a:bodyPr>
+          <a:lstStyle/>
+          <a:p>
+            <a:r>
+              <a:rPr lang="en-CA" dirty="0"/>
+              <a:t>For each </a:t>
+            </a:r>
+            <a:r>
+              <a:rPr lang="en-CA" b="1" dirty="0"/>
+              <a:t>word</a:t>
+            </a:r>
+            <a:r>
+              <a:rPr lang="en-CA" dirty="0"/>
+              <a:t> in </a:t>
+            </a:r>
+            <a:r>
+              <a:rPr lang="en-CA" b="1" dirty="0"/>
+              <a:t>words.txt </a:t>
+            </a:r>
+            <a:r>
+              <a:rPr lang="en-CA" dirty="0"/>
+              <a:t>do the following:</a:t>
+            </a:r>
+          </a:p>
+          <a:p>
+            <a:pPr marL="285750" indent="-285750">
+              <a:buFont typeface="Arial" panose="020B0604020202020204" pitchFamily="34" charset="0"/>
+              <a:buChar char="•"/>
+            </a:pPr>
+            <a:r>
+              <a:rPr lang="en-CA" dirty="0"/>
+              <a:t>If the Spelling Bee score of </a:t>
+            </a:r>
+            <a:r>
+              <a:rPr lang="en-CA" b="1" dirty="0"/>
+              <a:t>word</a:t>
+            </a:r>
+            <a:r>
+              <a:rPr lang="en-CA" dirty="0"/>
+              <a:t> is non-zero,</a:t>
+            </a:r>
+            <a:br>
+              <a:rPr lang="en-CA" dirty="0"/>
+            </a:br>
+            <a:r>
+              <a:rPr lang="en-CA" dirty="0"/>
+              <a:t>print it.</a:t>
+            </a:r>
+          </a:p>
+          <a:p>
+            <a:pPr marL="285750" indent="-285750">
+              <a:buFont typeface="Arial" panose="020B0604020202020204" pitchFamily="34" charset="0"/>
+              <a:buChar char="•"/>
+            </a:pPr>
+            <a:endParaRPr lang="en-CA" dirty="0"/>
+          </a:p>
+          <a:p>
+            <a:r>
+              <a:rPr lang="en-CA" dirty="0"/>
+              <a:t>When done, print a count of many words were found,</a:t>
+            </a:r>
+          </a:p>
+          <a:p>
+            <a:r>
+              <a:rPr lang="en-CA" dirty="0"/>
+              <a:t>and the sum of all scores (which is the highest possible </a:t>
+            </a:r>
+          </a:p>
+          <a:p>
+            <a:r>
+              <a:rPr lang="en-CA" dirty="0"/>
+              <a:t>score for the puzzle).</a:t>
+            </a:r>
+            <a:endParaRPr lang="en-AU" dirty="0"/>
+          </a:p>
+        </p:txBody>
+      </p:sp>
+      <p:sp>
+        <p:nvSpPr>
+          <p:cNvPr id="3" name="TextBox 2">
+            <a:extLst>
+              <a:ext uri="{FF2B5EF4-FFF2-40B4-BE49-F238E27FC236}">
+                <a16:creationId xmlns:a16="http://schemas.microsoft.com/office/drawing/2014/main" id="{38AECEDE-0163-7D72-1A0D-A9624FDA574C}"/>
+              </a:ext>
+            </a:extLst>
+          </p:cNvPr>
+          <p:cNvSpPr txBox="1"/>
+          <p:nvPr/>
+        </p:nvSpPr>
+        <p:spPr>
+          <a:xfrm>
+            <a:off x="7930145" y="4361941"/>
+            <a:ext cx="3544966" cy="1754326"/>
+          </a:xfrm>
+          <a:prstGeom prst="rect">
+            <a:avLst/>
+          </a:prstGeom>
+          <a:solidFill>
+            <a:schemeClr val="accent2">
+              <a:lumMod val="40000"/>
+              <a:lumOff val="60000"/>
+            </a:schemeClr>
+          </a:solidFill>
+        </p:spPr>
+        <p:txBody>
+          <a:bodyPr wrap="square" rtlCol="0">
+            <a:spAutoFit/>
+          </a:bodyPr>
+          <a:lstStyle/>
+          <a:p>
+            <a:pPr algn="ctr"/>
+            <a:r>
+              <a:rPr lang="en-CA" b="1" dirty="0"/>
+              <a:t>Note</a:t>
+            </a:r>
+            <a:r>
+              <a:rPr lang="en-CA" dirty="0"/>
+              <a:t>: The official Spelling Bee puzzle has its own personal list of allowable words, which is not the same as </a:t>
+            </a:r>
+            <a:r>
+              <a:rPr lang="en-CA" b="1" dirty="0" err="1"/>
+              <a:t>words.txt</a:t>
+            </a:r>
+            <a:r>
+              <a:rPr lang="en-CA" dirty="0"/>
+              <a:t>. So we might miss some words, or claim some words the official puzzle rejects.</a:t>
+            </a:r>
+          </a:p>
+        </p:txBody>
+      </p:sp>
+      <p:sp>
+        <p:nvSpPr>
+          <p:cNvPr id="7" name="TextBox 6">
+            <a:extLst>
+              <a:ext uri="{FF2B5EF4-FFF2-40B4-BE49-F238E27FC236}">
+                <a16:creationId xmlns:a16="http://schemas.microsoft.com/office/drawing/2014/main" id="{36317DB9-B17B-48F0-5368-E5AC938DFEFD}"/>
+              </a:ext>
+            </a:extLst>
+          </p:cNvPr>
+          <p:cNvSpPr txBox="1"/>
+          <p:nvPr/>
+        </p:nvSpPr>
+        <p:spPr>
+          <a:xfrm>
+            <a:off x="143641" y="119096"/>
+            <a:ext cx="3932485" cy="2862322"/>
+          </a:xfrm>
+          <a:prstGeom prst="rect">
+            <a:avLst/>
+          </a:prstGeom>
+          <a:solidFill>
+            <a:schemeClr val="accent2">
+              <a:lumMod val="40000"/>
+              <a:lumOff val="60000"/>
+            </a:schemeClr>
+          </a:solidFill>
+        </p:spPr>
+        <p:txBody>
+          <a:bodyPr wrap="square" rtlCol="0">
+            <a:spAutoFit/>
+          </a:bodyPr>
+          <a:lstStyle/>
+          <a:p>
+            <a:r>
+              <a:rPr lang="en-CA" dirty="0"/>
+              <a:t>3 or fewer letters: 0 points</a:t>
+            </a:r>
+          </a:p>
+          <a:p>
+            <a:r>
+              <a:rPr lang="en-CA" dirty="0"/>
+              <a:t>4 letters: 1 point</a:t>
+            </a:r>
+          </a:p>
+          <a:p>
+            <a:r>
+              <a:rPr lang="en-CA" dirty="0"/>
+              <a:t>5 or more letters: 1 point per letter</a:t>
+            </a:r>
+          </a:p>
+          <a:p>
+            <a:endParaRPr lang="en-CA" dirty="0"/>
+          </a:p>
+          <a:p>
+            <a:r>
+              <a:rPr lang="en-CA" b="1" dirty="0"/>
+              <a:t>Pangram bonus</a:t>
+            </a:r>
+          </a:p>
+          <a:p>
+            <a:pPr marL="285750" indent="-285750">
+              <a:buFont typeface="Arial" panose="020B0604020202020204" pitchFamily="34" charset="0"/>
+              <a:buChar char="•"/>
+            </a:pPr>
+            <a:r>
+              <a:rPr lang="en-CA" dirty="0"/>
+              <a:t>7 bonus points if all 7 different letters are used (plus you still get 1 point per letter)</a:t>
+            </a:r>
+          </a:p>
+          <a:p>
+            <a:pPr marL="285750" indent="-285750">
+              <a:buFont typeface="Arial" panose="020B0604020202020204" pitchFamily="34" charset="0"/>
+              <a:buChar char="•"/>
+            </a:pPr>
+            <a:r>
+              <a:rPr lang="en-CA" dirty="0"/>
+              <a:t>Each puzzle is guaranteed to have at least one pangram</a:t>
+            </a:r>
+          </a:p>
+        </p:txBody>
+      </p:sp>
+    </p:spTree>
+    <p:extLst>
+      <p:ext uri="{BB962C8B-B14F-4D97-AF65-F5344CB8AC3E}">
+        <p14:creationId xmlns:p14="http://schemas.microsoft.com/office/powerpoint/2010/main" val="421622308"/>
+      </p:ext>
+    </p:extLst>
+  </p:cSld>
+  <p:clrMapOvr>
+    <a:masterClrMapping/>
+  </p:clrMapOvr>
+</p:sld>
+</file>
+
+<file path=ppt/slides/slide81.xml><?xml version="1.0" encoding="utf-8"?>
+<p:sld xmlns:a="http://schemas.openxmlformats.org/drawingml/2006/main" xmlns:r="http://schemas.openxmlformats.org/officeDocument/2006/relationships" xmlns:p="http://schemas.openxmlformats.org/presentationml/2006/main">
+  <p:cSld>
+    <p:spTree>
+      <p:nvGrpSpPr>
+        <p:cNvPr id="1" name="">
+          <a:extLst>
+            <a:ext uri="{FF2B5EF4-FFF2-40B4-BE49-F238E27FC236}">
               <a16:creationId xmlns:a16="http://schemas.microsoft.com/office/drawing/2014/main" id="{1C5CD4AB-ED99-0AB7-A82B-5E4D559FAA67}"/>
             </a:ext>
           </a:extLst>
@@ -48226,7 +49494,7 @@
           <a:p>
             <a:fld id="{CBA0A0CD-12E5-4065-8C87-26D031211F61}" type="slidenum">
               <a:rPr lang="en-AU" smtClean="0"/>
-              <a:t>80</a:t>
+              <a:t>81</a:t>
             </a:fld>
             <a:endParaRPr lang="en-AU" dirty="0"/>
           </a:p>
@@ -48406,10 +49674,10 @@
       </p:sp>
       <p:sp>
         <p:nvSpPr>
-          <p:cNvPr id="13" name="TextBox 12">
-            <a:extLst>
-              <a:ext uri="{FF2B5EF4-FFF2-40B4-BE49-F238E27FC236}">
-                <a16:creationId xmlns:a16="http://schemas.microsoft.com/office/drawing/2014/main" id="{C99DBD87-F576-6EE2-374A-F38781E8C895}"/>
+          <p:cNvPr id="2" name="TextBox 1">
+            <a:extLst>
+              <a:ext uri="{FF2B5EF4-FFF2-40B4-BE49-F238E27FC236}">
+                <a16:creationId xmlns:a16="http://schemas.microsoft.com/office/drawing/2014/main" id="{0802DE20-4740-E599-D8A9-90E09B216072}"/>
               </a:ext>
             </a:extLst>
           </p:cNvPr>
@@ -48418,8 +49686,8 @@
         </p:nvSpPr>
         <p:spPr>
           <a:xfrm>
-            <a:off x="143641" y="136525"/>
-            <a:ext cx="3932485" cy="2862322"/>
+            <a:off x="6246734" y="518984"/>
+            <a:ext cx="3366823" cy="923330"/>
           </a:xfrm>
           <a:prstGeom prst="rect">
             <a:avLst/>
@@ -48439,60 +49707,42 @@
           <a:p>
             <a:pPr algn="ctr"/>
             <a:r>
+              <a:rPr lang="en-CA" dirty="0"/>
+              <a:t>How can use the </a:t>
+            </a:r>
+            <a:r>
+              <a:rPr lang="en-CA" dirty="0" err="1">
+                <a:latin typeface="Consolas" panose="020B0609020204030204" pitchFamily="49" charset="0"/>
+              </a:rPr>
+              <a:t>word_score</a:t>
+            </a:r>
+            <a:r>
+              <a:rPr lang="en-CA" dirty="0">
+                <a:latin typeface="Consolas" panose="020B0609020204030204" pitchFamily="49" charset="0"/>
+              </a:rPr>
+              <a:t> </a:t>
+            </a:r>
+            <a:r>
+              <a:rPr lang="en-CA" dirty="0"/>
+              <a:t>function to find </a:t>
+            </a:r>
+            <a:r>
               <a:rPr lang="en-CA" b="1" dirty="0"/>
-              <a:t>Word Scoring</a:t>
-            </a:r>
-            <a:endParaRPr lang="en-CA" dirty="0"/>
-          </a:p>
-          <a:p>
-            <a:r>
-              <a:rPr lang="en-CA" dirty="0"/>
-              <a:t>3 or fewer letters: 0 points</a:t>
-            </a:r>
-          </a:p>
-          <a:p>
-            <a:r>
-              <a:rPr lang="en-CA" dirty="0"/>
-              <a:t>4 or more letters: 1 point per letter</a:t>
-            </a:r>
-          </a:p>
-          <a:p>
-            <a:endParaRPr lang="en-CA" dirty="0"/>
-          </a:p>
-          <a:p>
-            <a:r>
-              <a:rPr lang="en-CA" b="1" dirty="0"/>
-              <a:t>Pangram bonus</a:t>
-            </a:r>
-          </a:p>
-          <a:p>
-            <a:pPr marL="285750" indent="-285750">
-              <a:buFont typeface="Arial" panose="020B0604020202020204" pitchFamily="34" charset="0"/>
-              <a:buChar char="•"/>
-            </a:pPr>
-            <a:r>
-              <a:rPr lang="en-CA" dirty="0"/>
-              <a:t>7 bonus points if all 7 different letters are used (plus you still get 1 point per letter)</a:t>
-            </a:r>
-          </a:p>
-          <a:p>
-            <a:pPr marL="285750" indent="-285750">
-              <a:buFont typeface="Arial" panose="020B0604020202020204" pitchFamily="34" charset="0"/>
-              <a:buChar char="•"/>
-            </a:pPr>
-            <a:r>
-              <a:rPr lang="en-CA" dirty="0"/>
-              <a:t>Each puzzle is guaranteed to have at least one pangram</a:t>
-            </a:r>
-          </a:p>
-        </p:txBody>
-      </p:sp>
-      <p:sp>
-        <p:nvSpPr>
-          <p:cNvPr id="2" name="TextBox 1">
-            <a:extLst>
-              <a:ext uri="{FF2B5EF4-FFF2-40B4-BE49-F238E27FC236}">
-                <a16:creationId xmlns:a16="http://schemas.microsoft.com/office/drawing/2014/main" id="{0802DE20-4740-E599-D8A9-90E09B216072}"/>
+              <a:t>all</a:t>
+            </a:r>
+            <a:r>
+              <a:rPr lang="en-CA" dirty="0"/>
+              <a:t> the valid words in Spelling Bee puzzle?</a:t>
+            </a:r>
+          </a:p>
+        </p:txBody>
+      </p:sp>
+      <p:sp>
+        <p:nvSpPr>
+          <p:cNvPr id="5" name="TextBox 4">
+            <a:extLst>
+              <a:ext uri="{FF2B5EF4-FFF2-40B4-BE49-F238E27FC236}">
+                <a16:creationId xmlns:a16="http://schemas.microsoft.com/office/drawing/2014/main" id="{74500349-6A04-0D1E-FD63-9FD1660106DF}"/>
               </a:ext>
             </a:extLst>
           </p:cNvPr>
@@ -48501,8 +49751,346 @@
         </p:nvSpPr>
         <p:spPr>
           <a:xfrm>
-            <a:off x="6246734" y="518984"/>
-            <a:ext cx="3366823" cy="923330"/>
+            <a:off x="4794423" y="1567686"/>
+            <a:ext cx="7974468" cy="5078313"/>
+          </a:xfrm>
+          <a:prstGeom prst="rect">
+            <a:avLst/>
+          </a:prstGeom>
+          <a:noFill/>
+        </p:spPr>
+        <p:txBody>
+          <a:bodyPr wrap="square" rtlCol="0">
+            <a:spAutoFit/>
+          </a:bodyPr>
+          <a:lstStyle/>
+          <a:p>
+            <a:r>
+              <a:rPr lang="en-CA" dirty="0" err="1">
+                <a:latin typeface="Consolas" panose="020B0609020204030204" pitchFamily="49" charset="0"/>
+              </a:rPr>
+              <a:t>puzzle_letters</a:t>
+            </a:r>
+            <a:r>
+              <a:rPr lang="en-CA" dirty="0">
+                <a:latin typeface="Consolas" panose="020B0609020204030204" pitchFamily="49" charset="0"/>
+              </a:rPr>
+              <a:t> = 'CIHPETA'</a:t>
+            </a:r>
+          </a:p>
+          <a:p>
+            <a:r>
+              <a:rPr lang="en-CA" dirty="0" err="1">
+                <a:latin typeface="Consolas" panose="020B0609020204030204" pitchFamily="49" charset="0"/>
+              </a:rPr>
+              <a:t>required_letter</a:t>
+            </a:r>
+            <a:r>
+              <a:rPr lang="en-CA" dirty="0">
+                <a:latin typeface="Consolas" panose="020B0609020204030204" pitchFamily="49" charset="0"/>
+              </a:rPr>
+              <a:t> = 'P'</a:t>
+            </a:r>
+          </a:p>
+          <a:p>
+            <a:endParaRPr lang="en-CA" dirty="0">
+              <a:latin typeface="Consolas" panose="020B0609020204030204" pitchFamily="49" charset="0"/>
+            </a:endParaRPr>
+          </a:p>
+          <a:p>
+            <a:r>
+              <a:rPr lang="en-CA" dirty="0" err="1">
+                <a:latin typeface="Consolas" panose="020B0609020204030204" pitchFamily="49" charset="0"/>
+              </a:rPr>
+              <a:t>total_score</a:t>
+            </a:r>
+            <a:r>
+              <a:rPr lang="en-CA" dirty="0">
+                <a:latin typeface="Consolas" panose="020B0609020204030204" pitchFamily="49" charset="0"/>
+              </a:rPr>
+              <a:t> = 0</a:t>
+            </a:r>
+            <a:br>
+              <a:rPr lang="en-CA" dirty="0">
+                <a:latin typeface="Consolas" panose="020B0609020204030204" pitchFamily="49" charset="0"/>
+              </a:rPr>
+            </a:br>
+            <a:r>
+              <a:rPr lang="en-CA" dirty="0" err="1">
+                <a:latin typeface="Consolas" panose="020B0609020204030204" pitchFamily="49" charset="0"/>
+              </a:rPr>
+              <a:t>scoring_words</a:t>
+            </a:r>
+            <a:r>
+              <a:rPr lang="en-CA" dirty="0">
+                <a:latin typeface="Consolas" panose="020B0609020204030204" pitchFamily="49" charset="0"/>
+              </a:rPr>
+              <a:t> = 0</a:t>
+            </a:r>
+          </a:p>
+          <a:p>
+            <a:r>
+              <a:rPr lang="en-CA" dirty="0" err="1">
+                <a:latin typeface="Consolas" panose="020B0609020204030204" pitchFamily="49" charset="0"/>
+              </a:rPr>
+              <a:t>file_object</a:t>
+            </a:r>
+            <a:r>
+              <a:rPr lang="en-CA" dirty="0">
+                <a:latin typeface="Consolas" panose="020B0609020204030204" pitchFamily="49" charset="0"/>
+              </a:rPr>
+              <a:t> = open('words.txt')</a:t>
+            </a:r>
+          </a:p>
+          <a:p>
+            <a:r>
+              <a:rPr lang="en-CA" dirty="0">
+                <a:latin typeface="Consolas" panose="020B0609020204030204" pitchFamily="49" charset="0"/>
+              </a:rPr>
+              <a:t>for w in </a:t>
+            </a:r>
+            <a:r>
+              <a:rPr lang="en-CA" dirty="0" err="1">
+                <a:latin typeface="Consolas" panose="020B0609020204030204" pitchFamily="49" charset="0"/>
+              </a:rPr>
+              <a:t>file_object</a:t>
+            </a:r>
+            <a:r>
+              <a:rPr lang="en-CA" dirty="0">
+                <a:latin typeface="Consolas" panose="020B0609020204030204" pitchFamily="49" charset="0"/>
+              </a:rPr>
+              <a:t>:</a:t>
+            </a:r>
+          </a:p>
+          <a:p>
+            <a:r>
+              <a:rPr lang="en-CA" dirty="0">
+                <a:latin typeface="Consolas" panose="020B0609020204030204" pitchFamily="49" charset="0"/>
+              </a:rPr>
+              <a:t>    w = </a:t>
+            </a:r>
+            <a:r>
+              <a:rPr lang="en-CA" dirty="0" err="1">
+                <a:latin typeface="Consolas" panose="020B0609020204030204" pitchFamily="49" charset="0"/>
+              </a:rPr>
+              <a:t>w.strip</a:t>
+            </a:r>
+            <a:r>
+              <a:rPr lang="en-CA" dirty="0">
+                <a:latin typeface="Consolas" panose="020B0609020204030204" pitchFamily="49" charset="0"/>
+              </a:rPr>
+              <a:t>().upper()</a:t>
+            </a:r>
+          </a:p>
+          <a:p>
+            <a:r>
+              <a:rPr lang="en-CA" dirty="0">
+                <a:latin typeface="Consolas" panose="020B0609020204030204" pitchFamily="49" charset="0"/>
+              </a:rPr>
+              <a:t>    </a:t>
+            </a:r>
+          </a:p>
+          <a:p>
+            <a:r>
+              <a:rPr lang="en-CA" dirty="0">
+                <a:latin typeface="Consolas" panose="020B0609020204030204" pitchFamily="49" charset="0"/>
+              </a:rPr>
+              <a:t>    score = </a:t>
+            </a:r>
+            <a:r>
+              <a:rPr lang="en-CA" dirty="0" err="1">
+                <a:latin typeface="Consolas" panose="020B0609020204030204" pitchFamily="49" charset="0"/>
+              </a:rPr>
+              <a:t>word_score</a:t>
+            </a:r>
+            <a:r>
+              <a:rPr lang="en-CA" dirty="0">
+                <a:latin typeface="Consolas" panose="020B0609020204030204" pitchFamily="49" charset="0"/>
+              </a:rPr>
+              <a:t>(w, </a:t>
+            </a:r>
+            <a:r>
+              <a:rPr lang="en-CA" dirty="0" err="1">
+                <a:latin typeface="Consolas" panose="020B0609020204030204" pitchFamily="49" charset="0"/>
+              </a:rPr>
+              <a:t>required_letter</a:t>
+            </a:r>
+            <a:r>
+              <a:rPr lang="en-CA" dirty="0">
+                <a:latin typeface="Consolas" panose="020B0609020204030204" pitchFamily="49" charset="0"/>
+              </a:rPr>
+              <a:t>, </a:t>
+            </a:r>
+            <a:r>
+              <a:rPr lang="en-CA" dirty="0" err="1">
+                <a:latin typeface="Consolas" panose="020B0609020204030204" pitchFamily="49" charset="0"/>
+              </a:rPr>
+              <a:t>puzzle_letters</a:t>
+            </a:r>
+            <a:r>
+              <a:rPr lang="en-CA" dirty="0">
+                <a:latin typeface="Consolas" panose="020B0609020204030204" pitchFamily="49" charset="0"/>
+              </a:rPr>
+              <a:t>)</a:t>
+            </a:r>
+          </a:p>
+          <a:p>
+            <a:r>
+              <a:rPr lang="en-CA" dirty="0">
+                <a:latin typeface="Consolas" panose="020B0609020204030204" pitchFamily="49" charset="0"/>
+              </a:rPr>
+              <a:t>    if score &gt; 0:</a:t>
+            </a:r>
+            <a:br>
+              <a:rPr lang="en-CA" dirty="0">
+                <a:latin typeface="Consolas" panose="020B0609020204030204" pitchFamily="49" charset="0"/>
+              </a:rPr>
+            </a:br>
+            <a:r>
+              <a:rPr lang="en-CA" dirty="0">
+                <a:latin typeface="Consolas" panose="020B0609020204030204" pitchFamily="49" charset="0"/>
+              </a:rPr>
+              <a:t>        </a:t>
+            </a:r>
+            <a:r>
+              <a:rPr lang="en-CA" dirty="0" err="1">
+                <a:latin typeface="Consolas" panose="020B0609020204030204" pitchFamily="49" charset="0"/>
+              </a:rPr>
+              <a:t>total_score</a:t>
+            </a:r>
+            <a:r>
+              <a:rPr lang="en-CA" dirty="0">
+                <a:latin typeface="Consolas" panose="020B0609020204030204" pitchFamily="49" charset="0"/>
+              </a:rPr>
+              <a:t> += score</a:t>
+            </a:r>
+          </a:p>
+          <a:p>
+            <a:r>
+              <a:rPr lang="en-CA" dirty="0">
+                <a:latin typeface="Consolas" panose="020B0609020204030204" pitchFamily="49" charset="0"/>
+              </a:rPr>
+              <a:t>        </a:t>
+            </a:r>
+            <a:r>
+              <a:rPr lang="en-CA" dirty="0" err="1">
+                <a:latin typeface="Consolas" panose="020B0609020204030204" pitchFamily="49" charset="0"/>
+              </a:rPr>
+              <a:t>scoring_words</a:t>
+            </a:r>
+            <a:r>
+              <a:rPr lang="en-CA" dirty="0">
+                <a:latin typeface="Consolas" panose="020B0609020204030204" pitchFamily="49" charset="0"/>
+              </a:rPr>
+              <a:t> += 1</a:t>
+            </a:r>
+          </a:p>
+          <a:p>
+            <a:r>
+              <a:rPr lang="en-CA" dirty="0">
+                <a:latin typeface="Consolas" panose="020B0609020204030204" pitchFamily="49" charset="0"/>
+              </a:rPr>
+              <a:t>        print(f'{w}, {score} points')</a:t>
+            </a:r>
+          </a:p>
+          <a:p>
+            <a:endParaRPr lang="en-CA" dirty="0">
+              <a:latin typeface="Consolas" panose="020B0609020204030204" pitchFamily="49" charset="0"/>
+            </a:endParaRPr>
+          </a:p>
+          <a:p>
+            <a:r>
+              <a:rPr lang="en-CA" dirty="0">
+                <a:latin typeface="Consolas" panose="020B0609020204030204" pitchFamily="49" charset="0"/>
+              </a:rPr>
+              <a:t>print()</a:t>
+            </a:r>
+          </a:p>
+          <a:p>
+            <a:r>
+              <a:rPr lang="en-CA" dirty="0">
+                <a:latin typeface="Consolas" panose="020B0609020204030204" pitchFamily="49" charset="0"/>
+              </a:rPr>
+              <a:t>print(</a:t>
+            </a:r>
+            <a:r>
+              <a:rPr lang="en-CA" dirty="0" err="1">
+                <a:latin typeface="Consolas" panose="020B0609020204030204" pitchFamily="49" charset="0"/>
+              </a:rPr>
+              <a:t>f'Total</a:t>
+            </a:r>
+            <a:r>
+              <a:rPr lang="en-CA" dirty="0">
+                <a:latin typeface="Consolas" panose="020B0609020204030204" pitchFamily="49" charset="0"/>
+              </a:rPr>
+              <a:t> score: {</a:t>
+            </a:r>
+            <a:r>
+              <a:rPr lang="en-CA" dirty="0" err="1">
+                <a:latin typeface="Consolas" panose="020B0609020204030204" pitchFamily="49" charset="0"/>
+              </a:rPr>
+              <a:t>total_score</a:t>
+            </a:r>
+            <a:r>
+              <a:rPr lang="en-CA" dirty="0">
+                <a:latin typeface="Consolas" panose="020B0609020204030204" pitchFamily="49" charset="0"/>
+              </a:rPr>
+              <a:t>}')</a:t>
+            </a:r>
+          </a:p>
+          <a:p>
+            <a:r>
+              <a:rPr lang="en-CA" dirty="0">
+                <a:latin typeface="Consolas" panose="020B0609020204030204" pitchFamily="49" charset="0"/>
+              </a:rPr>
+              <a:t>print(</a:t>
+            </a:r>
+            <a:r>
+              <a:rPr lang="en-CA" dirty="0" err="1">
+                <a:latin typeface="Consolas" panose="020B0609020204030204" pitchFamily="49" charset="0"/>
+              </a:rPr>
+              <a:t>f'Total</a:t>
+            </a:r>
+            <a:r>
+              <a:rPr lang="en-CA" dirty="0">
+                <a:latin typeface="Consolas" panose="020B0609020204030204" pitchFamily="49" charset="0"/>
+              </a:rPr>
+              <a:t> scoring words: {</a:t>
+            </a:r>
+            <a:r>
+              <a:rPr lang="en-CA" dirty="0" err="1">
+                <a:latin typeface="Consolas" panose="020B0609020204030204" pitchFamily="49" charset="0"/>
+              </a:rPr>
+              <a:t>scoring_words</a:t>
+            </a:r>
+            <a:r>
+              <a:rPr lang="en-CA" dirty="0">
+                <a:latin typeface="Consolas" panose="020B0609020204030204" pitchFamily="49" charset="0"/>
+              </a:rPr>
+              <a:t>}')</a:t>
+            </a:r>
+            <a:endParaRPr lang="en-AU" dirty="0">
+              <a:latin typeface="Consolas" panose="020B0609020204030204" pitchFamily="49" charset="0"/>
+            </a:endParaRPr>
+          </a:p>
+        </p:txBody>
+      </p:sp>
+      <p:sp>
+        <p:nvSpPr>
+          <p:cNvPr id="3" name="TextBox 2">
+            <a:extLst>
+              <a:ext uri="{FF2B5EF4-FFF2-40B4-BE49-F238E27FC236}">
+                <a16:creationId xmlns:a16="http://schemas.microsoft.com/office/drawing/2014/main" id="{5B24FC2C-71BC-E179-2C3C-54F23083FFAF}"/>
+              </a:ext>
+            </a:extLst>
+          </p:cNvPr>
+          <p:cNvSpPr txBox="1"/>
+          <p:nvPr/>
+        </p:nvSpPr>
+        <p:spPr>
+          <a:xfrm>
+            <a:off x="143641" y="119096"/>
+            <a:ext cx="3932485" cy="2862322"/>
           </a:xfrm>
           <a:prstGeom prst="rect">
             <a:avLst/>
@@ -48520,370 +50108,51 @@
           </a:bodyPr>
           <a:lstStyle/>
           <a:p>
-            <a:pPr algn="ctr"/>
-            <a:r>
-              <a:rPr lang="en-CA" dirty="0"/>
-              <a:t>How can use the </a:t>
-            </a:r>
-            <a:r>
-              <a:rPr lang="en-CA" dirty="0" err="1">
-                <a:latin typeface="Consolas" panose="020B0609020204030204" pitchFamily="49" charset="0"/>
-              </a:rPr>
-              <a:t>word_score</a:t>
-            </a:r>
-            <a:r>
-              <a:rPr lang="en-CA" dirty="0">
-                <a:latin typeface="Consolas" panose="020B0609020204030204" pitchFamily="49" charset="0"/>
-              </a:rPr>
-              <a:t> </a:t>
-            </a:r>
-            <a:r>
-              <a:rPr lang="en-CA" dirty="0"/>
-              <a:t>function to find </a:t>
-            </a:r>
+            <a:r>
+              <a:rPr lang="en-CA" dirty="0"/>
+              <a:t>3 or fewer letters: 0 points</a:t>
+            </a:r>
+          </a:p>
+          <a:p>
+            <a:r>
+              <a:rPr lang="en-CA" dirty="0"/>
+              <a:t>4 letters: 1 point</a:t>
+            </a:r>
+          </a:p>
+          <a:p>
+            <a:r>
+              <a:rPr lang="en-CA" dirty="0"/>
+              <a:t>5 or more letters: 1 point per letter</a:t>
+            </a:r>
+          </a:p>
+          <a:p>
+            <a:endParaRPr lang="en-CA" dirty="0"/>
+          </a:p>
+          <a:p>
             <a:r>
               <a:rPr lang="en-CA" b="1" dirty="0"/>
-              <a:t>all</a:t>
-            </a:r>
-            <a:r>
-              <a:rPr lang="en-CA" dirty="0"/>
-              <a:t> the valid words in Spelling Bee puzzle?</a:t>
-            </a:r>
-          </a:p>
-        </p:txBody>
-      </p:sp>
-      <p:sp>
-        <p:nvSpPr>
-          <p:cNvPr id="5" name="TextBox 4">
-            <a:extLst>
-              <a:ext uri="{FF2B5EF4-FFF2-40B4-BE49-F238E27FC236}">
-                <a16:creationId xmlns:a16="http://schemas.microsoft.com/office/drawing/2014/main" id="{74500349-6A04-0D1E-FD63-9FD1660106DF}"/>
-              </a:ext>
-            </a:extLst>
-          </p:cNvPr>
-          <p:cNvSpPr txBox="1"/>
-          <p:nvPr/>
-        </p:nvSpPr>
-        <p:spPr>
-          <a:xfrm>
-            <a:off x="4794423" y="1567686"/>
-            <a:ext cx="7974468" cy="5078313"/>
-          </a:xfrm>
-          <a:prstGeom prst="rect">
-            <a:avLst/>
-          </a:prstGeom>
-          <a:noFill/>
-        </p:spPr>
-        <p:txBody>
-          <a:bodyPr wrap="square" rtlCol="0">
-            <a:spAutoFit/>
-          </a:bodyPr>
-          <a:lstStyle/>
-          <a:p>
-            <a:r>
-              <a:rPr lang="en-CA" dirty="0" err="1">
-                <a:latin typeface="Consolas" panose="020B0609020204030204" pitchFamily="49" charset="0"/>
-              </a:rPr>
-              <a:t>puzzle_letters</a:t>
-            </a:r>
-            <a:r>
-              <a:rPr lang="en-CA" dirty="0">
-                <a:latin typeface="Consolas" panose="020B0609020204030204" pitchFamily="49" charset="0"/>
-              </a:rPr>
-              <a:t> = ‘CIHPETA'</a:t>
-            </a:r>
-          </a:p>
-          <a:p>
-            <a:r>
-              <a:rPr lang="en-CA" dirty="0" err="1">
-                <a:latin typeface="Consolas" panose="020B0609020204030204" pitchFamily="49" charset="0"/>
-              </a:rPr>
-              <a:t>required_letter</a:t>
-            </a:r>
-            <a:r>
-              <a:rPr lang="en-CA" dirty="0">
-                <a:latin typeface="Consolas" panose="020B0609020204030204" pitchFamily="49" charset="0"/>
-              </a:rPr>
-              <a:t> = 'P'</a:t>
-            </a:r>
-          </a:p>
-          <a:p>
-            <a:endParaRPr lang="en-CA" dirty="0">
-              <a:latin typeface="Consolas" panose="020B0609020204030204" pitchFamily="49" charset="0"/>
-            </a:endParaRPr>
-          </a:p>
-          <a:p>
-            <a:r>
-              <a:rPr lang="en-CA" dirty="0" err="1">
-                <a:latin typeface="Consolas" panose="020B0609020204030204" pitchFamily="49" charset="0"/>
-              </a:rPr>
-              <a:t>total_score</a:t>
-            </a:r>
-            <a:r>
-              <a:rPr lang="en-CA" dirty="0">
-                <a:latin typeface="Consolas" panose="020B0609020204030204" pitchFamily="49" charset="0"/>
-              </a:rPr>
-              <a:t> = 0</a:t>
-            </a:r>
-            <a:br>
-              <a:rPr lang="en-CA" dirty="0">
-                <a:latin typeface="Consolas" panose="020B0609020204030204" pitchFamily="49" charset="0"/>
-              </a:rPr>
-            </a:br>
-            <a:r>
-              <a:rPr lang="en-CA" dirty="0" err="1">
-                <a:latin typeface="Consolas" panose="020B0609020204030204" pitchFamily="49" charset="0"/>
-              </a:rPr>
-              <a:t>scoring_words</a:t>
-            </a:r>
-            <a:r>
-              <a:rPr lang="en-CA" dirty="0">
-                <a:latin typeface="Consolas" panose="020B0609020204030204" pitchFamily="49" charset="0"/>
-              </a:rPr>
-              <a:t> = 0</a:t>
-            </a:r>
-          </a:p>
-          <a:p>
-            <a:r>
-              <a:rPr lang="en-CA" dirty="0" err="1">
-                <a:latin typeface="Consolas" panose="020B0609020204030204" pitchFamily="49" charset="0"/>
-              </a:rPr>
-              <a:t>file_object</a:t>
-            </a:r>
-            <a:r>
-              <a:rPr lang="en-CA" dirty="0">
-                <a:latin typeface="Consolas" panose="020B0609020204030204" pitchFamily="49" charset="0"/>
-              </a:rPr>
-              <a:t> = open('words.txt')</a:t>
-            </a:r>
-          </a:p>
-          <a:p>
-            <a:r>
-              <a:rPr lang="en-CA" dirty="0">
-                <a:latin typeface="Consolas" panose="020B0609020204030204" pitchFamily="49" charset="0"/>
-              </a:rPr>
-              <a:t>for w in </a:t>
-            </a:r>
-            <a:r>
-              <a:rPr lang="en-CA" dirty="0" err="1">
-                <a:latin typeface="Consolas" panose="020B0609020204030204" pitchFamily="49" charset="0"/>
-              </a:rPr>
-              <a:t>file_object</a:t>
-            </a:r>
-            <a:r>
-              <a:rPr lang="en-CA" dirty="0">
-                <a:latin typeface="Consolas" panose="020B0609020204030204" pitchFamily="49" charset="0"/>
-              </a:rPr>
-              <a:t>:</a:t>
-            </a:r>
-          </a:p>
-          <a:p>
-            <a:r>
-              <a:rPr lang="en-CA" dirty="0">
-                <a:latin typeface="Consolas" panose="020B0609020204030204" pitchFamily="49" charset="0"/>
-              </a:rPr>
-              <a:t>    w = </a:t>
-            </a:r>
-            <a:r>
-              <a:rPr lang="en-CA" dirty="0" err="1">
-                <a:latin typeface="Consolas" panose="020B0609020204030204" pitchFamily="49" charset="0"/>
-              </a:rPr>
-              <a:t>w.strip</a:t>
-            </a:r>
-            <a:r>
-              <a:rPr lang="en-CA" dirty="0">
-                <a:latin typeface="Consolas" panose="020B0609020204030204" pitchFamily="49" charset="0"/>
-              </a:rPr>
-              <a:t>().upper()</a:t>
-            </a:r>
-          </a:p>
-          <a:p>
-            <a:r>
-              <a:rPr lang="en-CA" dirty="0">
-                <a:latin typeface="Consolas" panose="020B0609020204030204" pitchFamily="49" charset="0"/>
-              </a:rPr>
-              <a:t>    </a:t>
-            </a:r>
-          </a:p>
-          <a:p>
-            <a:r>
-              <a:rPr lang="en-CA" dirty="0">
-                <a:latin typeface="Consolas" panose="020B0609020204030204" pitchFamily="49" charset="0"/>
-              </a:rPr>
-              <a:t>    score = </a:t>
-            </a:r>
-            <a:r>
-              <a:rPr lang="en-CA" dirty="0" err="1">
-                <a:latin typeface="Consolas" panose="020B0609020204030204" pitchFamily="49" charset="0"/>
-              </a:rPr>
-              <a:t>word_score</a:t>
-            </a:r>
-            <a:r>
-              <a:rPr lang="en-CA" dirty="0">
-                <a:latin typeface="Consolas" panose="020B0609020204030204" pitchFamily="49" charset="0"/>
-              </a:rPr>
-              <a:t>(w, </a:t>
-            </a:r>
-            <a:r>
-              <a:rPr lang="en-CA" dirty="0" err="1">
-                <a:latin typeface="Consolas" panose="020B0609020204030204" pitchFamily="49" charset="0"/>
-              </a:rPr>
-              <a:t>required_letter</a:t>
-            </a:r>
-            <a:r>
-              <a:rPr lang="en-CA" dirty="0">
-                <a:latin typeface="Consolas" panose="020B0609020204030204" pitchFamily="49" charset="0"/>
-              </a:rPr>
-              <a:t>, </a:t>
-            </a:r>
-            <a:r>
-              <a:rPr lang="en-CA" dirty="0" err="1">
-                <a:latin typeface="Consolas" panose="020B0609020204030204" pitchFamily="49" charset="0"/>
-              </a:rPr>
-              <a:t>puzzle_letters</a:t>
-            </a:r>
-            <a:r>
-              <a:rPr lang="en-CA" dirty="0">
-                <a:latin typeface="Consolas" panose="020B0609020204030204" pitchFamily="49" charset="0"/>
-              </a:rPr>
-              <a:t>)</a:t>
-            </a:r>
-          </a:p>
-          <a:p>
-            <a:r>
-              <a:rPr lang="en-CA" dirty="0">
-                <a:latin typeface="Consolas" panose="020B0609020204030204" pitchFamily="49" charset="0"/>
-              </a:rPr>
-              <a:t>    </a:t>
-            </a:r>
-            <a:r>
-              <a:rPr lang="en-CA" dirty="0" err="1">
-                <a:latin typeface="Consolas" panose="020B0609020204030204" pitchFamily="49" charset="0"/>
-              </a:rPr>
-              <a:t>total_score</a:t>
-            </a:r>
-            <a:r>
-              <a:rPr lang="en-CA" dirty="0">
-                <a:latin typeface="Consolas" panose="020B0609020204030204" pitchFamily="49" charset="0"/>
-              </a:rPr>
-              <a:t> += score</a:t>
-            </a:r>
-          </a:p>
-          <a:p>
-            <a:r>
-              <a:rPr lang="en-CA" dirty="0">
-                <a:latin typeface="Consolas" panose="020B0609020204030204" pitchFamily="49" charset="0"/>
-              </a:rPr>
-              <a:t>    if score &gt; 0:</a:t>
-            </a:r>
-          </a:p>
-          <a:p>
-            <a:r>
-              <a:rPr lang="en-CA" dirty="0">
-                <a:latin typeface="Consolas" panose="020B0609020204030204" pitchFamily="49" charset="0"/>
-              </a:rPr>
-              <a:t>        </a:t>
-            </a:r>
-            <a:r>
-              <a:rPr lang="en-CA" dirty="0" err="1">
-                <a:latin typeface="Consolas" panose="020B0609020204030204" pitchFamily="49" charset="0"/>
-              </a:rPr>
-              <a:t>scoring_words</a:t>
-            </a:r>
-            <a:r>
-              <a:rPr lang="en-CA" dirty="0">
-                <a:latin typeface="Consolas" panose="020B0609020204030204" pitchFamily="49" charset="0"/>
-              </a:rPr>
-              <a:t> += 1</a:t>
-            </a:r>
-          </a:p>
-          <a:p>
-            <a:r>
-              <a:rPr lang="en-CA" dirty="0">
-                <a:latin typeface="Consolas" panose="020B0609020204030204" pitchFamily="49" charset="0"/>
-              </a:rPr>
-              <a:t>        print(f'{w}, {score} points')</a:t>
-            </a:r>
-          </a:p>
-          <a:p>
-            <a:endParaRPr lang="en-CA" dirty="0">
-              <a:latin typeface="Consolas" panose="020B0609020204030204" pitchFamily="49" charset="0"/>
-            </a:endParaRPr>
-          </a:p>
-          <a:p>
-            <a:r>
-              <a:rPr lang="en-CA" dirty="0">
-                <a:latin typeface="Consolas" panose="020B0609020204030204" pitchFamily="49" charset="0"/>
-              </a:rPr>
-              <a:t>print()</a:t>
-            </a:r>
-          </a:p>
-          <a:p>
-            <a:r>
-              <a:rPr lang="en-CA" dirty="0">
-                <a:latin typeface="Consolas" panose="020B0609020204030204" pitchFamily="49" charset="0"/>
-              </a:rPr>
-              <a:t>print(</a:t>
-            </a:r>
-            <a:r>
-              <a:rPr lang="en-CA" dirty="0" err="1">
-                <a:latin typeface="Consolas" panose="020B0609020204030204" pitchFamily="49" charset="0"/>
-              </a:rPr>
-              <a:t>f'Total</a:t>
-            </a:r>
-            <a:r>
-              <a:rPr lang="en-CA" dirty="0">
-                <a:latin typeface="Consolas" panose="020B0609020204030204" pitchFamily="49" charset="0"/>
-              </a:rPr>
-              <a:t> score: {</a:t>
-            </a:r>
-            <a:r>
-              <a:rPr lang="en-CA" dirty="0" err="1">
-                <a:latin typeface="Consolas" panose="020B0609020204030204" pitchFamily="49" charset="0"/>
-              </a:rPr>
-              <a:t>total_score</a:t>
-            </a:r>
-            <a:r>
-              <a:rPr lang="en-CA" dirty="0">
-                <a:latin typeface="Consolas" panose="020B0609020204030204" pitchFamily="49" charset="0"/>
-              </a:rPr>
-              <a:t>}')</a:t>
-            </a:r>
-          </a:p>
-          <a:p>
-            <a:r>
-              <a:rPr lang="en-CA" dirty="0">
-                <a:latin typeface="Consolas" panose="020B0609020204030204" pitchFamily="49" charset="0"/>
-              </a:rPr>
-              <a:t>print(</a:t>
-            </a:r>
-            <a:r>
-              <a:rPr lang="en-CA" dirty="0" err="1">
-                <a:latin typeface="Consolas" panose="020B0609020204030204" pitchFamily="49" charset="0"/>
-              </a:rPr>
-              <a:t>f'Total</a:t>
-            </a:r>
-            <a:r>
-              <a:rPr lang="en-CA" dirty="0">
-                <a:latin typeface="Consolas" panose="020B0609020204030204" pitchFamily="49" charset="0"/>
-              </a:rPr>
-              <a:t> scoring words: {</a:t>
-            </a:r>
-            <a:r>
-              <a:rPr lang="en-CA" dirty="0" err="1">
-                <a:latin typeface="Consolas" panose="020B0609020204030204" pitchFamily="49" charset="0"/>
-              </a:rPr>
-              <a:t>scoring_words</a:t>
-            </a:r>
-            <a:r>
-              <a:rPr lang="en-CA" dirty="0">
-                <a:latin typeface="Consolas" panose="020B0609020204030204" pitchFamily="49" charset="0"/>
-              </a:rPr>
-              <a:t>}')</a:t>
-            </a:r>
-            <a:endParaRPr lang="en-AU" dirty="0">
-              <a:latin typeface="Consolas" panose="020B0609020204030204" pitchFamily="49" charset="0"/>
-            </a:endParaRPr>
+              <a:t>Pangram bonus</a:t>
+            </a:r>
+          </a:p>
+          <a:p>
+            <a:pPr marL="285750" indent="-285750">
+              <a:buFont typeface="Arial" panose="020B0604020202020204" pitchFamily="34" charset="0"/>
+              <a:buChar char="•"/>
+            </a:pPr>
+            <a:r>
+              <a:rPr lang="en-CA" dirty="0"/>
+              <a:t>7 bonus points if all 7 different letters are used (plus you still get 1 point per letter)</a:t>
+            </a:r>
+          </a:p>
+          <a:p>
+            <a:pPr marL="285750" indent="-285750">
+              <a:buFont typeface="Arial" panose="020B0604020202020204" pitchFamily="34" charset="0"/>
+              <a:buChar char="•"/>
+            </a:pPr>
+            <a:r>
+              <a:rPr lang="en-CA" dirty="0"/>
+              <a:t>Each puzzle is guaranteed to have at least one pangram</a:t>
+            </a:r>
           </a:p>
         </p:txBody>
       </p:sp>
@@ -48900,7 +50169,7 @@
 </p:sld>
 </file>
 
-<file path=ppt/slides/slide81.xml><?xml version="1.0" encoding="utf-8"?>
+<file path=ppt/slides/slide82.xml><?xml version="1.0" encoding="utf-8"?>
 <p:sld xmlns:a="http://schemas.openxmlformats.org/drawingml/2006/main" xmlns:r="http://schemas.openxmlformats.org/officeDocument/2006/relationships" xmlns:p="http://schemas.openxmlformats.org/presentationml/2006/main">
   <p:cSld>
     <p:spTree>
@@ -48946,7 +50215,7 @@
           <a:p>
             <a:fld id="{CBA0A0CD-12E5-4065-8C87-26D031211F61}" type="slidenum">
               <a:rPr lang="en-AU" smtClean="0"/>
-              <a:t>81</a:t>
+              <a:t>82</a:t>
             </a:fld>
             <a:endParaRPr lang="en-AU" dirty="0"/>
           </a:p>
@@ -49126,10 +50395,10 @@
       </p:sp>
       <p:sp>
         <p:nvSpPr>
-          <p:cNvPr id="13" name="TextBox 12">
-            <a:extLst>
-              <a:ext uri="{FF2B5EF4-FFF2-40B4-BE49-F238E27FC236}">
-                <a16:creationId xmlns:a16="http://schemas.microsoft.com/office/drawing/2014/main" id="{6CCC3F08-505C-0466-33F3-58C6FA026FCC}"/>
+          <p:cNvPr id="2" name="TextBox 1">
+            <a:extLst>
+              <a:ext uri="{FF2B5EF4-FFF2-40B4-BE49-F238E27FC236}">
+                <a16:creationId xmlns:a16="http://schemas.microsoft.com/office/drawing/2014/main" id="{850C2437-B506-EEDF-8039-3D041AFBF699}"/>
               </a:ext>
             </a:extLst>
           </p:cNvPr>
@@ -49138,8 +50407,8 @@
         </p:nvSpPr>
         <p:spPr>
           <a:xfrm>
-            <a:off x="143641" y="136525"/>
-            <a:ext cx="3932485" cy="2862322"/>
+            <a:off x="6246734" y="518984"/>
+            <a:ext cx="3366823" cy="923330"/>
           </a:xfrm>
           <a:prstGeom prst="rect">
             <a:avLst/>
@@ -49159,60 +50428,42 @@
           <a:p>
             <a:pPr algn="ctr"/>
             <a:r>
+              <a:rPr lang="en-CA" dirty="0"/>
+              <a:t>How can use the </a:t>
+            </a:r>
+            <a:r>
+              <a:rPr lang="en-CA" dirty="0" err="1">
+                <a:latin typeface="Consolas" panose="020B0609020204030204" pitchFamily="49" charset="0"/>
+              </a:rPr>
+              <a:t>word_score</a:t>
+            </a:r>
+            <a:r>
+              <a:rPr lang="en-CA" dirty="0">
+                <a:latin typeface="Consolas" panose="020B0609020204030204" pitchFamily="49" charset="0"/>
+              </a:rPr>
+              <a:t> </a:t>
+            </a:r>
+            <a:r>
+              <a:rPr lang="en-CA" dirty="0"/>
+              <a:t>function to find </a:t>
+            </a:r>
+            <a:r>
               <a:rPr lang="en-CA" b="1" dirty="0"/>
-              <a:t>Word Scoring</a:t>
-            </a:r>
-            <a:endParaRPr lang="en-CA" dirty="0"/>
-          </a:p>
-          <a:p>
-            <a:r>
-              <a:rPr lang="en-CA" dirty="0"/>
-              <a:t>3 or fewer letters: 0 points</a:t>
-            </a:r>
-          </a:p>
-          <a:p>
-            <a:r>
-              <a:rPr lang="en-CA" dirty="0"/>
-              <a:t>4 or more letters: 1 point per letter</a:t>
-            </a:r>
-          </a:p>
-          <a:p>
-            <a:endParaRPr lang="en-CA" dirty="0"/>
-          </a:p>
-          <a:p>
-            <a:r>
-              <a:rPr lang="en-CA" b="1" dirty="0"/>
-              <a:t>Pangram bonus</a:t>
-            </a:r>
-          </a:p>
-          <a:p>
-            <a:pPr marL="285750" indent="-285750">
-              <a:buFont typeface="Arial" panose="020B0604020202020204" pitchFamily="34" charset="0"/>
-              <a:buChar char="•"/>
-            </a:pPr>
-            <a:r>
-              <a:rPr lang="en-CA" dirty="0"/>
-              <a:t>7 bonus points if all 7 different letters are used (plus you still get 1 point per letter)</a:t>
-            </a:r>
-          </a:p>
-          <a:p>
-            <a:pPr marL="285750" indent="-285750">
-              <a:buFont typeface="Arial" panose="020B0604020202020204" pitchFamily="34" charset="0"/>
-              <a:buChar char="•"/>
-            </a:pPr>
-            <a:r>
-              <a:rPr lang="en-CA" dirty="0"/>
-              <a:t>Each puzzle is guaranteed to have at least one pangram</a:t>
-            </a:r>
-          </a:p>
-        </p:txBody>
-      </p:sp>
-      <p:sp>
-        <p:nvSpPr>
-          <p:cNvPr id="2" name="TextBox 1">
-            <a:extLst>
-              <a:ext uri="{FF2B5EF4-FFF2-40B4-BE49-F238E27FC236}">
-                <a16:creationId xmlns:a16="http://schemas.microsoft.com/office/drawing/2014/main" id="{850C2437-B506-EEDF-8039-3D041AFBF699}"/>
+              <a:t>all</a:t>
+            </a:r>
+            <a:r>
+              <a:rPr lang="en-CA" dirty="0"/>
+              <a:t> the valid words in Spelling Bee puzzle?</a:t>
+            </a:r>
+          </a:p>
+        </p:txBody>
+      </p:sp>
+      <p:sp>
+        <p:nvSpPr>
+          <p:cNvPr id="5" name="TextBox 4">
+            <a:extLst>
+              <a:ext uri="{FF2B5EF4-FFF2-40B4-BE49-F238E27FC236}">
+                <a16:creationId xmlns:a16="http://schemas.microsoft.com/office/drawing/2014/main" id="{D43E71ED-3E6E-4891-EC34-E9120BA46C87}"/>
               </a:ext>
             </a:extLst>
           </p:cNvPr>
@@ -49221,8 +50472,125 @@
         </p:nvSpPr>
         <p:spPr>
           <a:xfrm>
-            <a:off x="6246734" y="518984"/>
-            <a:ext cx="3366823" cy="923330"/>
+            <a:off x="4794423" y="1567686"/>
+            <a:ext cx="7974468" cy="3139321"/>
+          </a:xfrm>
+          <a:prstGeom prst="rect">
+            <a:avLst/>
+          </a:prstGeom>
+          <a:noFill/>
+        </p:spPr>
+        <p:txBody>
+          <a:bodyPr wrap="square" rtlCol="0">
+            <a:spAutoFit/>
+          </a:bodyPr>
+          <a:lstStyle/>
+          <a:p>
+            <a:r>
+              <a:rPr lang="fr-FR" dirty="0">
+                <a:latin typeface="Consolas" panose="020B0609020204030204" pitchFamily="49" charset="0"/>
+              </a:rPr>
+              <a:t>ACCEPT, 6 points</a:t>
+            </a:r>
+          </a:p>
+          <a:p>
+            <a:r>
+              <a:rPr lang="fr-FR" dirty="0">
+                <a:latin typeface="Consolas" panose="020B0609020204030204" pitchFamily="49" charset="0"/>
+              </a:rPr>
+              <a:t>ACCEPTEE, 8 points</a:t>
+            </a:r>
+          </a:p>
+          <a:p>
+            <a:r>
+              <a:rPr lang="fr-FR" dirty="0">
+                <a:latin typeface="Consolas" panose="020B0609020204030204" pitchFamily="49" charset="0"/>
+              </a:rPr>
+              <a:t>APACE, 5 points</a:t>
+            </a:r>
+          </a:p>
+          <a:p>
+            <a:r>
+              <a:rPr lang="fr-FR" dirty="0">
+                <a:latin typeface="Consolas" panose="020B0609020204030204" pitchFamily="49" charset="0"/>
+              </a:rPr>
+              <a:t>APACHE, 6 points</a:t>
+            </a:r>
+          </a:p>
+          <a:p>
+            <a:r>
+              <a:rPr lang="fr-FR" dirty="0">
+                <a:latin typeface="Consolas" panose="020B0609020204030204" pitchFamily="49" charset="0"/>
+              </a:rPr>
+              <a:t>...</a:t>
+            </a:r>
+          </a:p>
+          <a:p>
+            <a:r>
+              <a:rPr lang="en-US" dirty="0">
+                <a:latin typeface="Consolas" panose="020B0609020204030204" pitchFamily="49" charset="0"/>
+              </a:rPr>
+              <a:t>TIPCAT, 6 points</a:t>
+            </a:r>
+          </a:p>
+          <a:p>
+            <a:r>
+              <a:rPr lang="en-US" dirty="0">
+                <a:latin typeface="Consolas" panose="020B0609020204030204" pitchFamily="49" charset="0"/>
+              </a:rPr>
+              <a:t>TIPI, 4 points</a:t>
+            </a:r>
+          </a:p>
+          <a:p>
+            <a:r>
+              <a:rPr lang="en-US" dirty="0">
+                <a:latin typeface="Consolas" panose="020B0609020204030204" pitchFamily="49" charset="0"/>
+              </a:rPr>
+              <a:t>TIPPET, 6 points</a:t>
+            </a:r>
+          </a:p>
+          <a:p>
+            <a:endParaRPr lang="en-US" dirty="0">
+              <a:latin typeface="Consolas" panose="020B0609020204030204" pitchFamily="49" charset="0"/>
+            </a:endParaRPr>
+          </a:p>
+          <a:p>
+            <a:r>
+              <a:rPr lang="en-US" dirty="0">
+                <a:latin typeface="Consolas" panose="020B0609020204030204" pitchFamily="49" charset="0"/>
+              </a:rPr>
+              <a:t>Total score: 566</a:t>
+            </a:r>
+          </a:p>
+          <a:p>
+            <a:r>
+              <a:rPr lang="en-US" dirty="0">
+                <a:latin typeface="Consolas" panose="020B0609020204030204" pitchFamily="49" charset="0"/>
+              </a:rPr>
+              <a:t>Total scoring words: 92</a:t>
+            </a:r>
+            <a:endParaRPr lang="en-AU" dirty="0">
+              <a:latin typeface="Consolas" panose="020B0609020204030204" pitchFamily="49" charset="0"/>
+            </a:endParaRPr>
+          </a:p>
+        </p:txBody>
+      </p:sp>
+      <p:sp>
+        <p:nvSpPr>
+          <p:cNvPr id="3" name="TextBox 2">
+            <a:extLst>
+              <a:ext uri="{FF2B5EF4-FFF2-40B4-BE49-F238E27FC236}">
+                <a16:creationId xmlns:a16="http://schemas.microsoft.com/office/drawing/2014/main" id="{92BE6071-8F04-B4E8-794B-DBCC72027577}"/>
+              </a:ext>
+            </a:extLst>
+          </p:cNvPr>
+          <p:cNvSpPr txBox="1"/>
+          <p:nvPr/>
+        </p:nvSpPr>
+        <p:spPr>
+          <a:xfrm>
+            <a:off x="8781657" y="2768491"/>
+            <a:ext cx="2315978" cy="923330"/>
           </a:xfrm>
           <a:prstGeom prst="rect">
             <a:avLst/>
@@ -49243,41 +50611,17 @@
             <a:pPr algn="ctr"/>
             <a:r>
               <a:rPr lang="en-CA" dirty="0"/>
-              <a:t>How can use the </a:t>
-            </a:r>
-            <a:r>
-              <a:rPr lang="en-CA" dirty="0" err="1">
-                <a:latin typeface="Consolas" panose="020B0609020204030204" pitchFamily="49" charset="0"/>
-              </a:rPr>
-              <a:t>word_score</a:t>
-            </a:r>
-            <a:r>
-              <a:rPr lang="en-CA" dirty="0">
-                <a:latin typeface="Consolas" panose="020B0609020204030204" pitchFamily="49" charset="0"/>
-              </a:rPr>
-              <a:t> </a:t>
-            </a:r>
-            <a:r>
-              <a:rPr lang="en-CA" dirty="0"/>
-              <a:t>function to find </a:t>
-            </a:r>
-            <a:r>
-              <a:rPr lang="en-CA" b="1" dirty="0"/>
-              <a:t>all</a:t>
-            </a:r>
-            <a:r>
-              <a:rPr lang="en-CA" dirty="0"/>
-              <a:t> the valid words in Spelling Bee puzzle?</a:t>
-            </a:r>
-          </a:p>
-        </p:txBody>
-      </p:sp>
-      <p:sp>
-        <p:nvSpPr>
-          <p:cNvPr id="5" name="TextBox 4">
-            <a:extLst>
-              <a:ext uri="{FF2B5EF4-FFF2-40B4-BE49-F238E27FC236}">
-                <a16:creationId xmlns:a16="http://schemas.microsoft.com/office/drawing/2014/main" id="{D43E71ED-3E6E-4891-EC34-E9120BA46C87}"/>
+              <a:t>This runs in less than a tenth of a second on my computer!</a:t>
+            </a:r>
+          </a:p>
+        </p:txBody>
+      </p:sp>
+      <p:sp>
+        <p:nvSpPr>
+          <p:cNvPr id="7" name="TextBox 6">
+            <a:extLst>
+              <a:ext uri="{FF2B5EF4-FFF2-40B4-BE49-F238E27FC236}">
+                <a16:creationId xmlns:a16="http://schemas.microsoft.com/office/drawing/2014/main" id="{3931F9C5-CB5A-4AE2-3811-DF8AA0BB9594}"/>
               </a:ext>
             </a:extLst>
           </p:cNvPr>
@@ -49286,125 +50630,8 @@
         </p:nvSpPr>
         <p:spPr>
           <a:xfrm>
-            <a:off x="4794423" y="1567686"/>
-            <a:ext cx="7974468" cy="3139321"/>
-          </a:xfrm>
-          <a:prstGeom prst="rect">
-            <a:avLst/>
-          </a:prstGeom>
-          <a:noFill/>
-        </p:spPr>
-        <p:txBody>
-          <a:bodyPr wrap="square" rtlCol="0">
-            <a:spAutoFit/>
-          </a:bodyPr>
-          <a:lstStyle/>
-          <a:p>
-            <a:r>
-              <a:rPr lang="fr-FR" dirty="0">
-                <a:latin typeface="Consolas" panose="020B0609020204030204" pitchFamily="49" charset="0"/>
-              </a:rPr>
-              <a:t>ACCEPT, 6 points</a:t>
-            </a:r>
-          </a:p>
-          <a:p>
-            <a:r>
-              <a:rPr lang="fr-FR" dirty="0">
-                <a:latin typeface="Consolas" panose="020B0609020204030204" pitchFamily="49" charset="0"/>
-              </a:rPr>
-              <a:t>ACCEPTEE, 8 points</a:t>
-            </a:r>
-          </a:p>
-          <a:p>
-            <a:r>
-              <a:rPr lang="fr-FR" dirty="0">
-                <a:latin typeface="Consolas" panose="020B0609020204030204" pitchFamily="49" charset="0"/>
-              </a:rPr>
-              <a:t>APACE, 5 points</a:t>
-            </a:r>
-          </a:p>
-          <a:p>
-            <a:r>
-              <a:rPr lang="fr-FR" dirty="0">
-                <a:latin typeface="Consolas" panose="020B0609020204030204" pitchFamily="49" charset="0"/>
-              </a:rPr>
-              <a:t>APACHE, 6 points</a:t>
-            </a:r>
-          </a:p>
-          <a:p>
-            <a:r>
-              <a:rPr lang="fr-FR" dirty="0">
-                <a:latin typeface="Consolas" panose="020B0609020204030204" pitchFamily="49" charset="0"/>
-              </a:rPr>
-              <a:t>...</a:t>
-            </a:r>
-          </a:p>
-          <a:p>
-            <a:r>
-              <a:rPr lang="en-US" dirty="0">
-                <a:latin typeface="Consolas" panose="020B0609020204030204" pitchFamily="49" charset="0"/>
-              </a:rPr>
-              <a:t>TIPCAT, 6 points</a:t>
-            </a:r>
-          </a:p>
-          <a:p>
-            <a:r>
-              <a:rPr lang="en-US" dirty="0">
-                <a:latin typeface="Consolas" panose="020B0609020204030204" pitchFamily="49" charset="0"/>
-              </a:rPr>
-              <a:t>TIPI, 4 points</a:t>
-            </a:r>
-          </a:p>
-          <a:p>
-            <a:r>
-              <a:rPr lang="en-US" dirty="0">
-                <a:latin typeface="Consolas" panose="020B0609020204030204" pitchFamily="49" charset="0"/>
-              </a:rPr>
-              <a:t>TIPPET, 6 points</a:t>
-            </a:r>
-          </a:p>
-          <a:p>
-            <a:endParaRPr lang="en-US" dirty="0">
-              <a:latin typeface="Consolas" panose="020B0609020204030204" pitchFamily="49" charset="0"/>
-            </a:endParaRPr>
-          </a:p>
-          <a:p>
-            <a:r>
-              <a:rPr lang="en-US" dirty="0">
-                <a:latin typeface="Consolas" panose="020B0609020204030204" pitchFamily="49" charset="0"/>
-              </a:rPr>
-              <a:t>Total score: 566</a:t>
-            </a:r>
-          </a:p>
-          <a:p>
-            <a:r>
-              <a:rPr lang="en-US" dirty="0">
-                <a:latin typeface="Consolas" panose="020B0609020204030204" pitchFamily="49" charset="0"/>
-              </a:rPr>
-              <a:t>Total scoring words: 92</a:t>
-            </a:r>
-            <a:endParaRPr lang="en-AU" dirty="0">
-              <a:latin typeface="Consolas" panose="020B0609020204030204" pitchFamily="49" charset="0"/>
-            </a:endParaRPr>
-          </a:p>
-        </p:txBody>
-      </p:sp>
-      <p:sp>
-        <p:nvSpPr>
-          <p:cNvPr id="3" name="TextBox 2">
-            <a:extLst>
-              <a:ext uri="{FF2B5EF4-FFF2-40B4-BE49-F238E27FC236}">
-                <a16:creationId xmlns:a16="http://schemas.microsoft.com/office/drawing/2014/main" id="{92BE6071-8F04-B4E8-794B-DBCC72027577}"/>
-              </a:ext>
-            </a:extLst>
-          </p:cNvPr>
-          <p:cNvSpPr txBox="1"/>
-          <p:nvPr/>
-        </p:nvSpPr>
-        <p:spPr>
-          <a:xfrm>
-            <a:off x="8781657" y="2768491"/>
-            <a:ext cx="2315978" cy="923330"/>
+            <a:off x="143641" y="119096"/>
+            <a:ext cx="3932485" cy="2862322"/>
           </a:xfrm>
           <a:prstGeom prst="rect">
             <a:avLst/>
@@ -49422,10 +50649,50 @@
           </a:bodyPr>
           <a:lstStyle/>
           <a:p>
-            <a:pPr algn="ctr"/>
-            <a:r>
-              <a:rPr lang="en-CA" dirty="0"/>
-              <a:t>This runs in less than a tenth of a second on my computer!</a:t>
+            <a:r>
+              <a:rPr lang="en-CA" dirty="0"/>
+              <a:t>3 or fewer letters: 0 points</a:t>
+            </a:r>
+          </a:p>
+          <a:p>
+            <a:r>
+              <a:rPr lang="en-CA" dirty="0"/>
+              <a:t>4 letters: 1 point</a:t>
+            </a:r>
+          </a:p>
+          <a:p>
+            <a:r>
+              <a:rPr lang="en-CA" dirty="0"/>
+              <a:t>5 or more letters: 1 point per letter</a:t>
+            </a:r>
+          </a:p>
+          <a:p>
+            <a:endParaRPr lang="en-CA" dirty="0"/>
+          </a:p>
+          <a:p>
+            <a:r>
+              <a:rPr lang="en-CA" b="1" dirty="0"/>
+              <a:t>Pangram bonus</a:t>
+            </a:r>
+          </a:p>
+          <a:p>
+            <a:pPr marL="285750" indent="-285750">
+              <a:buFont typeface="Arial" panose="020B0604020202020204" pitchFamily="34" charset="0"/>
+              <a:buChar char="•"/>
+            </a:pPr>
+            <a:r>
+              <a:rPr lang="en-CA" dirty="0"/>
+              <a:t>7 bonus points if all 7 different letters are used (plus you still get 1 point per letter)</a:t>
+            </a:r>
+          </a:p>
+          <a:p>
+            <a:pPr marL="285750" indent="-285750">
+              <a:buFont typeface="Arial" panose="020B0604020202020204" pitchFamily="34" charset="0"/>
+              <a:buChar char="•"/>
+            </a:pPr>
+            <a:r>
+              <a:rPr lang="en-CA" dirty="0"/>
+              <a:t>Each puzzle is guaranteed to have at least one pangram</a:t>
             </a:r>
           </a:p>
         </p:txBody>
@@ -49443,7 +50710,7 @@
 </p:sld>
 </file>
 
-<file path=ppt/slides/slide82.xml><?xml version="1.0" encoding="utf-8"?>
+<file path=ppt/slides/slide83.xml><?xml version="1.0" encoding="utf-8"?>
 <p:sld xmlns:a="http://schemas.openxmlformats.org/drawingml/2006/main" xmlns:r="http://schemas.openxmlformats.org/officeDocument/2006/relationships" xmlns:p="http://schemas.openxmlformats.org/presentationml/2006/main">
   <p:cSld>
     <p:spTree>
@@ -49489,7 +50756,7 @@
           <a:p>
             <a:fld id="{CBA0A0CD-12E5-4065-8C87-26D031211F61}" type="slidenum">
               <a:rPr lang="en-AU" smtClean="0"/>
-              <a:t>82</a:t>
+              <a:t>83</a:t>
             </a:fld>
             <a:endParaRPr lang="en-AU" dirty="0"/>
           </a:p>
@@ -49669,10 +50936,10 @@
       </p:sp>
       <p:sp>
         <p:nvSpPr>
-          <p:cNvPr id="13" name="TextBox 12">
-            <a:extLst>
-              <a:ext uri="{FF2B5EF4-FFF2-40B4-BE49-F238E27FC236}">
-                <a16:creationId xmlns:a16="http://schemas.microsoft.com/office/drawing/2014/main" id="{8659986C-907D-6665-29FE-4520A6EB225C}"/>
+          <p:cNvPr id="2" name="TextBox 1">
+            <a:extLst>
+              <a:ext uri="{FF2B5EF4-FFF2-40B4-BE49-F238E27FC236}">
+                <a16:creationId xmlns:a16="http://schemas.microsoft.com/office/drawing/2014/main" id="{DD006AC6-C208-FA92-7F61-FEDC4D4C3D7A}"/>
               </a:ext>
             </a:extLst>
           </p:cNvPr>
@@ -49681,8 +50948,8 @@
         </p:nvSpPr>
         <p:spPr>
           <a:xfrm>
-            <a:off x="143641" y="136525"/>
-            <a:ext cx="3932485" cy="2862322"/>
+            <a:off x="6246734" y="518984"/>
+            <a:ext cx="3366823" cy="923330"/>
           </a:xfrm>
           <a:prstGeom prst="rect">
             <a:avLst/>
@@ -49702,60 +50969,42 @@
           <a:p>
             <a:pPr algn="ctr"/>
             <a:r>
+              <a:rPr lang="en-CA" dirty="0"/>
+              <a:t>How can use the </a:t>
+            </a:r>
+            <a:r>
+              <a:rPr lang="en-CA" dirty="0" err="1">
+                <a:latin typeface="Consolas" panose="020B0609020204030204" pitchFamily="49" charset="0"/>
+              </a:rPr>
+              <a:t>word_score</a:t>
+            </a:r>
+            <a:r>
+              <a:rPr lang="en-CA" dirty="0">
+                <a:latin typeface="Consolas" panose="020B0609020204030204" pitchFamily="49" charset="0"/>
+              </a:rPr>
+              <a:t> </a:t>
+            </a:r>
+            <a:r>
+              <a:rPr lang="en-CA" dirty="0"/>
+              <a:t>function to find </a:t>
+            </a:r>
+            <a:r>
               <a:rPr lang="en-CA" b="1" dirty="0"/>
-              <a:t>Word Scoring</a:t>
-            </a:r>
-            <a:endParaRPr lang="en-CA" dirty="0"/>
-          </a:p>
-          <a:p>
-            <a:r>
-              <a:rPr lang="en-CA" dirty="0"/>
-              <a:t>3 or fewer letters: 0 points</a:t>
-            </a:r>
-          </a:p>
-          <a:p>
-            <a:r>
-              <a:rPr lang="en-CA" dirty="0"/>
-              <a:t>4 or more letters: 1 point per letter</a:t>
-            </a:r>
-          </a:p>
-          <a:p>
-            <a:endParaRPr lang="en-CA" dirty="0"/>
-          </a:p>
-          <a:p>
-            <a:r>
-              <a:rPr lang="en-CA" b="1" dirty="0"/>
-              <a:t>Pangram bonus</a:t>
-            </a:r>
-          </a:p>
-          <a:p>
-            <a:pPr marL="285750" indent="-285750">
-              <a:buFont typeface="Arial" panose="020B0604020202020204" pitchFamily="34" charset="0"/>
-              <a:buChar char="•"/>
-            </a:pPr>
-            <a:r>
-              <a:rPr lang="en-CA" dirty="0"/>
-              <a:t>7 bonus points if all 7 different letters are used (plus you still get 1 point per letter)</a:t>
-            </a:r>
-          </a:p>
-          <a:p>
-            <a:pPr marL="285750" indent="-285750">
-              <a:buFont typeface="Arial" panose="020B0604020202020204" pitchFamily="34" charset="0"/>
-              <a:buChar char="•"/>
-            </a:pPr>
-            <a:r>
-              <a:rPr lang="en-CA" dirty="0"/>
-              <a:t>Each puzzle is guaranteed to have at least one pangram</a:t>
-            </a:r>
-          </a:p>
-        </p:txBody>
-      </p:sp>
-      <p:sp>
-        <p:nvSpPr>
-          <p:cNvPr id="2" name="TextBox 1">
-            <a:extLst>
-              <a:ext uri="{FF2B5EF4-FFF2-40B4-BE49-F238E27FC236}">
-                <a16:creationId xmlns:a16="http://schemas.microsoft.com/office/drawing/2014/main" id="{DD006AC6-C208-FA92-7F61-FEDC4D4C3D7A}"/>
+              <a:t>all</a:t>
+            </a:r>
+            <a:r>
+              <a:rPr lang="en-CA" dirty="0"/>
+              <a:t> the valid words in Spelling Bee puzzle?</a:t>
+            </a:r>
+          </a:p>
+        </p:txBody>
+      </p:sp>
+      <p:sp>
+        <p:nvSpPr>
+          <p:cNvPr id="5" name="TextBox 4">
+            <a:extLst>
+              <a:ext uri="{FF2B5EF4-FFF2-40B4-BE49-F238E27FC236}">
+                <a16:creationId xmlns:a16="http://schemas.microsoft.com/office/drawing/2014/main" id="{CD4C86CB-11A0-D5A4-B9F6-1961C208F04E}"/>
               </a:ext>
             </a:extLst>
           </p:cNvPr>
@@ -49764,8 +51013,125 @@
         </p:nvSpPr>
         <p:spPr>
           <a:xfrm>
-            <a:off x="6246734" y="518984"/>
-            <a:ext cx="3366823" cy="923330"/>
+            <a:off x="4794423" y="1567686"/>
+            <a:ext cx="7974468" cy="3139321"/>
+          </a:xfrm>
+          <a:prstGeom prst="rect">
+            <a:avLst/>
+          </a:prstGeom>
+          <a:noFill/>
+        </p:spPr>
+        <p:txBody>
+          <a:bodyPr wrap="square" rtlCol="0">
+            <a:spAutoFit/>
+          </a:bodyPr>
+          <a:lstStyle/>
+          <a:p>
+            <a:r>
+              <a:rPr lang="fr-FR" dirty="0">
+                <a:latin typeface="Consolas" panose="020B0609020204030204" pitchFamily="49" charset="0"/>
+              </a:rPr>
+              <a:t>ACCEPT, 6 points</a:t>
+            </a:r>
+          </a:p>
+          <a:p>
+            <a:r>
+              <a:rPr lang="fr-FR" dirty="0">
+                <a:latin typeface="Consolas" panose="020B0609020204030204" pitchFamily="49" charset="0"/>
+              </a:rPr>
+              <a:t>ACCEPTEE, 8 points</a:t>
+            </a:r>
+          </a:p>
+          <a:p>
+            <a:r>
+              <a:rPr lang="fr-FR" dirty="0">
+                <a:latin typeface="Consolas" panose="020B0609020204030204" pitchFamily="49" charset="0"/>
+              </a:rPr>
+              <a:t>APACE, 5 points</a:t>
+            </a:r>
+          </a:p>
+          <a:p>
+            <a:r>
+              <a:rPr lang="fr-FR" dirty="0">
+                <a:latin typeface="Consolas" panose="020B0609020204030204" pitchFamily="49" charset="0"/>
+              </a:rPr>
+              <a:t>APACHE, 6 points</a:t>
+            </a:r>
+          </a:p>
+          <a:p>
+            <a:r>
+              <a:rPr lang="fr-FR" dirty="0">
+                <a:latin typeface="Consolas" panose="020B0609020204030204" pitchFamily="49" charset="0"/>
+              </a:rPr>
+              <a:t>...</a:t>
+            </a:r>
+          </a:p>
+          <a:p>
+            <a:r>
+              <a:rPr lang="en-US" dirty="0">
+                <a:latin typeface="Consolas" panose="020B0609020204030204" pitchFamily="49" charset="0"/>
+              </a:rPr>
+              <a:t>TIPCAT, 6 points</a:t>
+            </a:r>
+          </a:p>
+          <a:p>
+            <a:r>
+              <a:rPr lang="en-US" dirty="0">
+                <a:latin typeface="Consolas" panose="020B0609020204030204" pitchFamily="49" charset="0"/>
+              </a:rPr>
+              <a:t>TIPI, 4 points</a:t>
+            </a:r>
+          </a:p>
+          <a:p>
+            <a:r>
+              <a:rPr lang="en-US" dirty="0">
+                <a:latin typeface="Consolas" panose="020B0609020204030204" pitchFamily="49" charset="0"/>
+              </a:rPr>
+              <a:t>TIPPET, 6 points</a:t>
+            </a:r>
+          </a:p>
+          <a:p>
+            <a:endParaRPr lang="en-US" dirty="0">
+              <a:latin typeface="Consolas" panose="020B0609020204030204" pitchFamily="49" charset="0"/>
+            </a:endParaRPr>
+          </a:p>
+          <a:p>
+            <a:r>
+              <a:rPr lang="en-US" dirty="0">
+                <a:latin typeface="Consolas" panose="020B0609020204030204" pitchFamily="49" charset="0"/>
+              </a:rPr>
+              <a:t>Total score: 566</a:t>
+            </a:r>
+          </a:p>
+          <a:p>
+            <a:r>
+              <a:rPr lang="en-US" dirty="0">
+                <a:latin typeface="Consolas" panose="020B0609020204030204" pitchFamily="49" charset="0"/>
+              </a:rPr>
+              <a:t>Total scoring words: 92</a:t>
+            </a:r>
+            <a:endParaRPr lang="en-AU" dirty="0">
+              <a:latin typeface="Consolas" panose="020B0609020204030204" pitchFamily="49" charset="0"/>
+            </a:endParaRPr>
+          </a:p>
+        </p:txBody>
+      </p:sp>
+      <p:sp>
+        <p:nvSpPr>
+          <p:cNvPr id="3" name="TextBox 2">
+            <a:extLst>
+              <a:ext uri="{FF2B5EF4-FFF2-40B4-BE49-F238E27FC236}">
+                <a16:creationId xmlns:a16="http://schemas.microsoft.com/office/drawing/2014/main" id="{B8F1FD90-ED7D-9210-FE80-023045036278}"/>
+              </a:ext>
+            </a:extLst>
+          </p:cNvPr>
+          <p:cNvSpPr txBox="1"/>
+          <p:nvPr/>
+        </p:nvSpPr>
+        <p:spPr>
+          <a:xfrm>
+            <a:off x="8781657" y="2768491"/>
+            <a:ext cx="2315978" cy="923330"/>
           </a:xfrm>
           <a:prstGeom prst="rect">
             <a:avLst/>
@@ -49786,41 +51152,17 @@
             <a:pPr algn="ctr"/>
             <a:r>
               <a:rPr lang="en-CA" dirty="0"/>
-              <a:t>How can use the </a:t>
-            </a:r>
-            <a:r>
-              <a:rPr lang="en-CA" dirty="0" err="1">
-                <a:latin typeface="Consolas" panose="020B0609020204030204" pitchFamily="49" charset="0"/>
-              </a:rPr>
-              <a:t>word_score</a:t>
-            </a:r>
-            <a:r>
-              <a:rPr lang="en-CA" dirty="0">
-                <a:latin typeface="Consolas" panose="020B0609020204030204" pitchFamily="49" charset="0"/>
-              </a:rPr>
-              <a:t> </a:t>
-            </a:r>
-            <a:r>
-              <a:rPr lang="en-CA" dirty="0"/>
-              <a:t>function to find </a:t>
-            </a:r>
-            <a:r>
-              <a:rPr lang="en-CA" b="1" dirty="0"/>
-              <a:t>all</a:t>
-            </a:r>
-            <a:r>
-              <a:rPr lang="en-CA" dirty="0"/>
-              <a:t> the valid words in Spelling Bee puzzle?</a:t>
-            </a:r>
-          </a:p>
-        </p:txBody>
-      </p:sp>
-      <p:sp>
-        <p:nvSpPr>
-          <p:cNvPr id="5" name="TextBox 4">
-            <a:extLst>
-              <a:ext uri="{FF2B5EF4-FFF2-40B4-BE49-F238E27FC236}">
-                <a16:creationId xmlns:a16="http://schemas.microsoft.com/office/drawing/2014/main" id="{CD4C86CB-11A0-D5A4-B9F6-1961C208F04E}"/>
+              <a:t>This runs in less than a tenth of a second on my computer!</a:t>
+            </a:r>
+          </a:p>
+        </p:txBody>
+      </p:sp>
+      <p:sp>
+        <p:nvSpPr>
+          <p:cNvPr id="7" name="TextBox 6">
+            <a:extLst>
+              <a:ext uri="{FF2B5EF4-FFF2-40B4-BE49-F238E27FC236}">
+                <a16:creationId xmlns:a16="http://schemas.microsoft.com/office/drawing/2014/main" id="{F616990B-4AF3-DD0B-9C3A-C6E4BF6C45FA}"/>
               </a:ext>
             </a:extLst>
           </p:cNvPr>
@@ -49829,125 +51171,8 @@
         </p:nvSpPr>
         <p:spPr>
           <a:xfrm>
-            <a:off x="4794423" y="1567686"/>
-            <a:ext cx="7974468" cy="3139321"/>
-          </a:xfrm>
-          <a:prstGeom prst="rect">
-            <a:avLst/>
-          </a:prstGeom>
-          <a:noFill/>
-        </p:spPr>
-        <p:txBody>
-          <a:bodyPr wrap="square" rtlCol="0">
-            <a:spAutoFit/>
-          </a:bodyPr>
-          <a:lstStyle/>
-          <a:p>
-            <a:r>
-              <a:rPr lang="fr-FR" dirty="0">
-                <a:latin typeface="Consolas" panose="020B0609020204030204" pitchFamily="49" charset="0"/>
-              </a:rPr>
-              <a:t>ACCEPT, 6 points</a:t>
-            </a:r>
-          </a:p>
-          <a:p>
-            <a:r>
-              <a:rPr lang="fr-FR" dirty="0">
-                <a:latin typeface="Consolas" panose="020B0609020204030204" pitchFamily="49" charset="0"/>
-              </a:rPr>
-              <a:t>ACCEPTEE, 8 points</a:t>
-            </a:r>
-          </a:p>
-          <a:p>
-            <a:r>
-              <a:rPr lang="fr-FR" dirty="0">
-                <a:latin typeface="Consolas" panose="020B0609020204030204" pitchFamily="49" charset="0"/>
-              </a:rPr>
-              <a:t>APACE, 5 points</a:t>
-            </a:r>
-          </a:p>
-          <a:p>
-            <a:r>
-              <a:rPr lang="fr-FR" dirty="0">
-                <a:latin typeface="Consolas" panose="020B0609020204030204" pitchFamily="49" charset="0"/>
-              </a:rPr>
-              <a:t>APACHE, 6 points</a:t>
-            </a:r>
-          </a:p>
-          <a:p>
-            <a:r>
-              <a:rPr lang="fr-FR" dirty="0">
-                <a:latin typeface="Consolas" panose="020B0609020204030204" pitchFamily="49" charset="0"/>
-              </a:rPr>
-              <a:t>...</a:t>
-            </a:r>
-          </a:p>
-          <a:p>
-            <a:r>
-              <a:rPr lang="en-US" dirty="0">
-                <a:latin typeface="Consolas" panose="020B0609020204030204" pitchFamily="49" charset="0"/>
-              </a:rPr>
-              <a:t>TIPCAT, 6 points</a:t>
-            </a:r>
-          </a:p>
-          <a:p>
-            <a:r>
-              <a:rPr lang="en-US" dirty="0">
-                <a:latin typeface="Consolas" panose="020B0609020204030204" pitchFamily="49" charset="0"/>
-              </a:rPr>
-              <a:t>TIPI, 4 points</a:t>
-            </a:r>
-          </a:p>
-          <a:p>
-            <a:r>
-              <a:rPr lang="en-US" dirty="0">
-                <a:latin typeface="Consolas" panose="020B0609020204030204" pitchFamily="49" charset="0"/>
-              </a:rPr>
-              <a:t>TIPPET, 6 points</a:t>
-            </a:r>
-          </a:p>
-          <a:p>
-            <a:endParaRPr lang="en-US" dirty="0">
-              <a:latin typeface="Consolas" panose="020B0609020204030204" pitchFamily="49" charset="0"/>
-            </a:endParaRPr>
-          </a:p>
-          <a:p>
-            <a:r>
-              <a:rPr lang="en-US" dirty="0">
-                <a:latin typeface="Consolas" panose="020B0609020204030204" pitchFamily="49" charset="0"/>
-              </a:rPr>
-              <a:t>Total score: 566</a:t>
-            </a:r>
-          </a:p>
-          <a:p>
-            <a:r>
-              <a:rPr lang="en-US" dirty="0">
-                <a:latin typeface="Consolas" panose="020B0609020204030204" pitchFamily="49" charset="0"/>
-              </a:rPr>
-              <a:t>Total scoring words: 92</a:t>
-            </a:r>
-            <a:endParaRPr lang="en-AU" dirty="0">
-              <a:latin typeface="Consolas" panose="020B0609020204030204" pitchFamily="49" charset="0"/>
-            </a:endParaRPr>
-          </a:p>
-        </p:txBody>
-      </p:sp>
-      <p:sp>
-        <p:nvSpPr>
-          <p:cNvPr id="3" name="TextBox 2">
-            <a:extLst>
-              <a:ext uri="{FF2B5EF4-FFF2-40B4-BE49-F238E27FC236}">
-                <a16:creationId xmlns:a16="http://schemas.microsoft.com/office/drawing/2014/main" id="{B8F1FD90-ED7D-9210-FE80-023045036278}"/>
-              </a:ext>
-            </a:extLst>
-          </p:cNvPr>
-          <p:cNvSpPr txBox="1"/>
-          <p:nvPr/>
-        </p:nvSpPr>
-        <p:spPr>
-          <a:xfrm>
-            <a:off x="8781657" y="2768491"/>
-            <a:ext cx="2315978" cy="923330"/>
+            <a:off x="8674851" y="4198938"/>
+            <a:ext cx="2529589" cy="1754326"/>
           </a:xfrm>
           <a:prstGeom prst="rect">
             <a:avLst/>
@@ -49968,17 +51193,28 @@
             <a:pPr algn="ctr"/>
             <a:r>
               <a:rPr lang="en-CA" dirty="0"/>
-              <a:t>This runs in less than a tenth of a second on my computer!</a:t>
-            </a:r>
-          </a:p>
-        </p:txBody>
-      </p:sp>
-      <p:sp>
-        <p:nvSpPr>
-          <p:cNvPr id="7" name="TextBox 6">
-            <a:extLst>
-              <a:ext uri="{FF2B5EF4-FFF2-40B4-BE49-F238E27FC236}">
-                <a16:creationId xmlns:a16="http://schemas.microsoft.com/office/drawing/2014/main" id="{F616990B-4AF3-DD0B-9C3A-C6E4BF6C45FA}"/>
+              <a:t>This is not how humans would solve this puzzle!</a:t>
+            </a:r>
+          </a:p>
+          <a:p>
+            <a:pPr algn="ctr"/>
+            <a:r>
+              <a:rPr lang="en-CA"/>
+              <a:t>But </a:t>
+            </a:r>
+            <a:r>
+              <a:rPr lang="en-CA" dirty="0"/>
+              <a:t>computers are so fast that checking all possible words is a reasonable method.</a:t>
+            </a:r>
+          </a:p>
+        </p:txBody>
+      </p:sp>
+      <p:sp>
+        <p:nvSpPr>
+          <p:cNvPr id="8" name="TextBox 7">
+            <a:extLst>
+              <a:ext uri="{FF2B5EF4-FFF2-40B4-BE49-F238E27FC236}">
+                <a16:creationId xmlns:a16="http://schemas.microsoft.com/office/drawing/2014/main" id="{FF1DFB6F-E89F-DB36-0EC8-E26B3D6227BF}"/>
               </a:ext>
             </a:extLst>
           </p:cNvPr>
@@ -49987,8 +51223,8 @@
         </p:nvSpPr>
         <p:spPr>
           <a:xfrm>
-            <a:off x="8674851" y="4198938"/>
-            <a:ext cx="2529589" cy="1754326"/>
+            <a:off x="143641" y="119096"/>
+            <a:ext cx="3932485" cy="2862322"/>
           </a:xfrm>
           <a:prstGeom prst="rect">
             <a:avLst/>
@@ -50006,21 +51242,50 @@
           </a:bodyPr>
           <a:lstStyle/>
           <a:p>
-            <a:pPr algn="ctr"/>
-            <a:r>
-              <a:rPr lang="en-CA" dirty="0"/>
-              <a:t>This is not how humans would solve this puzzle!</a:t>
-            </a:r>
-          </a:p>
-          <a:p>
-            <a:pPr algn="ctr"/>
-            <a:r>
-              <a:rPr lang="en-CA"/>
-              <a:t>But </a:t>
-            </a:r>
-            <a:r>
-              <a:rPr lang="en-CA" dirty="0"/>
-              <a:t>computers are so fast that checking all possible words is a reasonable method.</a:t>
+            <a:r>
+              <a:rPr lang="en-CA" dirty="0"/>
+              <a:t>3 or fewer letters: 0 points</a:t>
+            </a:r>
+          </a:p>
+          <a:p>
+            <a:r>
+              <a:rPr lang="en-CA" dirty="0"/>
+              <a:t>4 letters: 1 point</a:t>
+            </a:r>
+          </a:p>
+          <a:p>
+            <a:r>
+              <a:rPr lang="en-CA" dirty="0"/>
+              <a:t>5 or more letters: 1 point per letter</a:t>
+            </a:r>
+          </a:p>
+          <a:p>
+            <a:endParaRPr lang="en-CA" dirty="0"/>
+          </a:p>
+          <a:p>
+            <a:r>
+              <a:rPr lang="en-CA" b="1" dirty="0"/>
+              <a:t>Pangram bonus</a:t>
+            </a:r>
+          </a:p>
+          <a:p>
+            <a:pPr marL="285750" indent="-285750">
+              <a:buFont typeface="Arial" panose="020B0604020202020204" pitchFamily="34" charset="0"/>
+              <a:buChar char="•"/>
+            </a:pPr>
+            <a:r>
+              <a:rPr lang="en-CA" dirty="0"/>
+              <a:t>7 bonus points if all 7 different letters are used (plus you still get 1 point per letter)</a:t>
+            </a:r>
+          </a:p>
+          <a:p>
+            <a:pPr marL="285750" indent="-285750">
+              <a:buFont typeface="Arial" panose="020B0604020202020204" pitchFamily="34" charset="0"/>
+              <a:buChar char="•"/>
+            </a:pPr>
+            <a:r>
+              <a:rPr lang="en-CA" dirty="0"/>
+              <a:t>Each puzzle is guaranteed to have at least one pangram</a:t>
             </a:r>
           </a:p>
         </p:txBody>

--- a/lecture_notes/chapter7/chapter7.pptx
+++ b/lecture_notes/chapter7/chapter7.pptx
@@ -765,7 +765,7 @@
   <pc:docChgLst>
     <pc:chgData name="Toby Donaldson" userId="2e6e5431-bb17-4c41-9985-d39c50d83c73" providerId="ADAL" clId="{7F9681A8-EEE2-56F4-9B39-ECCBEE0471AC}"/>
     <pc:docChg chg="undo custSel addSld delSld modSld sldOrd modSection">
-      <pc:chgData name="Toby Donaldson" userId="2e6e5431-bb17-4c41-9985-d39c50d83c73" providerId="ADAL" clId="{7F9681A8-EEE2-56F4-9B39-ECCBEE0471AC}" dt="2026-02-22T22:18:53.621" v="905" actId="20577"/>
+      <pc:chgData name="Toby Donaldson" userId="2e6e5431-bb17-4c41-9985-d39c50d83c73" providerId="ADAL" clId="{7F9681A8-EEE2-56F4-9B39-ECCBEE0471AC}" dt="2026-02-22T22:29:36.826" v="906" actId="20577"/>
       <pc:docMkLst>
         <pc:docMk/>
       </pc:docMkLst>
@@ -1277,13 +1277,13 @@
         </pc:spChg>
       </pc:sldChg>
       <pc:sldChg chg="modSp mod">
-        <pc:chgData name="Toby Donaldson" userId="2e6e5431-bb17-4c41-9985-d39c50d83c73" providerId="ADAL" clId="{7F9681A8-EEE2-56F4-9B39-ECCBEE0471AC}" dt="2026-02-22T21:17:00.744" v="107" actId="20577"/>
+        <pc:chgData name="Toby Donaldson" userId="2e6e5431-bb17-4c41-9985-d39c50d83c73" providerId="ADAL" clId="{7F9681A8-EEE2-56F4-9B39-ECCBEE0471AC}" dt="2026-02-22T22:29:36.826" v="906" actId="20577"/>
         <pc:sldMkLst>
           <pc:docMk/>
           <pc:sldMk cId="3054231408" sldId="372"/>
         </pc:sldMkLst>
         <pc:spChg chg="mod">
-          <ac:chgData name="Toby Donaldson" userId="2e6e5431-bb17-4c41-9985-d39c50d83c73" providerId="ADAL" clId="{7F9681A8-EEE2-56F4-9B39-ECCBEE0471AC}" dt="2026-02-22T21:17:00.744" v="107" actId="20577"/>
+          <ac:chgData name="Toby Donaldson" userId="2e6e5431-bb17-4c41-9985-d39c50d83c73" providerId="ADAL" clId="{7F9681A8-EEE2-56F4-9B39-ECCBEE0471AC}" dt="2026-02-22T22:29:36.826" v="906" actId="20577"/>
           <ac:spMkLst>
             <pc:docMk/>
             <pc:sldMk cId="3054231408" sldId="372"/>
@@ -14889,20 +14889,6 @@
             <a:r>
               <a:rPr lang="en-US" dirty="0"/>
               <a:t>While loops</a:t>
-            </a:r>
-          </a:p>
-          <a:p>
-            <a:pPr lvl="1"/>
-            <a:r>
-              <a:rPr lang="en-US" dirty="0"/>
-              <a:t>Wall clock example</a:t>
-            </a:r>
-          </a:p>
-          <a:p>
-            <a:pPr lvl="1"/>
-            <a:r>
-              <a:rPr lang="en-US" dirty="0"/>
-              <a:t>Curtain raising example</a:t>
             </a:r>
           </a:p>
           <a:p>

--- a/lecture_notes/chapter7/chapter7.pptx
+++ b/lecture_notes/chapter7/chapter7.pptx
@@ -319,7 +319,7 @@
 <file path=ppt/revisionInfo.xml><?xml version="1.0" encoding="utf-8"?>
 <p1510:revInfo xmlns:a="http://schemas.openxmlformats.org/drawingml/2006/main" xmlns:r="http://schemas.openxmlformats.org/officeDocument/2006/relationships" xmlns:p1510="http://schemas.microsoft.com/office/powerpoint/2015/10/main">
   <p1510:revLst>
-    <p1510:client id="{561D49D2-520B-EC45-9286-8C23B84321E3}" v="27" dt="2026-02-24T23:51:54.756"/>
+    <p1510:client id="{561D49D2-520B-EC45-9286-8C23B84321E3}" v="31" dt="2026-02-25T00:17:03.373"/>
   </p1510:revLst>
 </p1510:revInfo>
 </file>
@@ -542,13 +542,6 @@
           </ac:inkMkLst>
         </pc:inkChg>
       </pc:sldChg>
-      <pc:sldChg chg="del">
-        <pc:chgData name="Toby Donaldson" userId="2e6e5431-bb17-4c41-9985-d39c50d83c73" providerId="ADAL" clId="{F31BC264-820E-54C4-A6D1-F92AF9CC222E}" dt="2026-02-23T17:11:54.896" v="627" actId="2696"/>
-        <pc:sldMkLst>
-          <pc:docMk/>
-          <pc:sldMk cId="1074488400" sldId="349"/>
-        </pc:sldMkLst>
-      </pc:sldChg>
       <pc:sldChg chg="addSp">
         <pc:chgData name="Toby Donaldson" userId="2e6e5431-bb17-4c41-9985-d39c50d83c73" providerId="ADAL" clId="{F31BC264-820E-54C4-A6D1-F92AF9CC222E}" dt="2026-02-23T17:51:15.146" v="629"/>
         <pc:sldMkLst>
@@ -563,13 +556,6 @@
             <ac:inkMk id="6" creationId="{1CEBCAF4-AB7E-FD1E-1C62-6D646947D977}"/>
           </ac:inkMkLst>
         </pc:inkChg>
-      </pc:sldChg>
-      <pc:sldChg chg="del">
-        <pc:chgData name="Toby Donaldson" userId="2e6e5431-bb17-4c41-9985-d39c50d83c73" providerId="ADAL" clId="{F31BC264-820E-54C4-A6D1-F92AF9CC222E}" dt="2026-02-23T17:11:45.628" v="626" actId="2696"/>
-        <pc:sldMkLst>
-          <pc:docMk/>
-          <pc:sldMk cId="2698669342" sldId="351"/>
-        </pc:sldMkLst>
       </pc:sldChg>
       <pc:sldChg chg="addSp">
         <pc:chgData name="Toby Donaldson" userId="2e6e5431-bb17-4c41-9985-d39c50d83c73" providerId="ADAL" clId="{F31BC264-820E-54C4-A6D1-F92AF9CC222E}" dt="2026-02-23T18:05:35.110" v="630"/>
@@ -922,7 +908,7 @@
   <pc:docChgLst>
     <pc:chgData name="Toby Donaldson" userId="2e6e5431-bb17-4c41-9985-d39c50d83c73" providerId="ADAL" clId="{7F9681A8-EEE2-56F4-9B39-ECCBEE0471AC}"/>
     <pc:docChg chg="undo custSel addSld delSld modSld sldOrd modSection">
-      <pc:chgData name="Toby Donaldson" userId="2e6e5431-bb17-4c41-9985-d39c50d83c73" providerId="ADAL" clId="{7F9681A8-EEE2-56F4-9B39-ECCBEE0471AC}" dt="2026-02-24T23:51:54.756" v="1259"/>
+      <pc:chgData name="Toby Donaldson" userId="2e6e5431-bb17-4c41-9985-d39c50d83c73" providerId="ADAL" clId="{7F9681A8-EEE2-56F4-9B39-ECCBEE0471AC}" dt="2026-02-25T00:17:03.373" v="1265"/>
       <pc:docMkLst>
         <pc:docMk/>
       </pc:docMkLst>
@@ -993,6 +979,66 @@
             <ac:spMk id="7" creationId="{112E5B17-BA4C-5026-B057-CBA5D95EBEA1}"/>
           </ac:spMkLst>
         </pc:spChg>
+      </pc:sldChg>
+      <pc:sldChg chg="addSp modSp mod">
+        <pc:chgData name="Toby Donaldson" userId="2e6e5431-bb17-4c41-9985-d39c50d83c73" providerId="ADAL" clId="{7F9681A8-EEE2-56F4-9B39-ECCBEE0471AC}" dt="2026-02-25T00:16:48.883" v="1262" actId="1076"/>
+        <pc:sldMkLst>
+          <pc:docMk/>
+          <pc:sldMk cId="3679495432" sldId="313"/>
+        </pc:sldMkLst>
+        <pc:picChg chg="add mod">
+          <ac:chgData name="Toby Donaldson" userId="2e6e5431-bb17-4c41-9985-d39c50d83c73" providerId="ADAL" clId="{7F9681A8-EEE2-56F4-9B39-ECCBEE0471AC}" dt="2026-02-25T00:16:48.883" v="1262" actId="1076"/>
+          <ac:picMkLst>
+            <pc:docMk/>
+            <pc:sldMk cId="3679495432" sldId="313"/>
+            <ac:picMk id="3" creationId="{DEA813A2-DF77-B5ED-3924-6389AF8F63CA}"/>
+          </ac:picMkLst>
+        </pc:picChg>
+      </pc:sldChg>
+      <pc:sldChg chg="addSp modSp">
+        <pc:chgData name="Toby Donaldson" userId="2e6e5431-bb17-4c41-9985-d39c50d83c73" providerId="ADAL" clId="{7F9681A8-EEE2-56F4-9B39-ECCBEE0471AC}" dt="2026-02-25T00:16:54.198" v="1263"/>
+        <pc:sldMkLst>
+          <pc:docMk/>
+          <pc:sldMk cId="3919650652" sldId="314"/>
+        </pc:sldMkLst>
+        <pc:picChg chg="add mod">
+          <ac:chgData name="Toby Donaldson" userId="2e6e5431-bb17-4c41-9985-d39c50d83c73" providerId="ADAL" clId="{7F9681A8-EEE2-56F4-9B39-ECCBEE0471AC}" dt="2026-02-25T00:16:54.198" v="1263"/>
+          <ac:picMkLst>
+            <pc:docMk/>
+            <pc:sldMk cId="3919650652" sldId="314"/>
+            <ac:picMk id="3" creationId="{D60E2122-34EB-65E8-A6CC-88337044A6B1}"/>
+          </ac:picMkLst>
+        </pc:picChg>
+      </pc:sldChg>
+      <pc:sldChg chg="addSp modSp">
+        <pc:chgData name="Toby Donaldson" userId="2e6e5431-bb17-4c41-9985-d39c50d83c73" providerId="ADAL" clId="{7F9681A8-EEE2-56F4-9B39-ECCBEE0471AC}" dt="2026-02-25T00:16:59.711" v="1264"/>
+        <pc:sldMkLst>
+          <pc:docMk/>
+          <pc:sldMk cId="1760039024" sldId="315"/>
+        </pc:sldMkLst>
+        <pc:picChg chg="add mod">
+          <ac:chgData name="Toby Donaldson" userId="2e6e5431-bb17-4c41-9985-d39c50d83c73" providerId="ADAL" clId="{7F9681A8-EEE2-56F4-9B39-ECCBEE0471AC}" dt="2026-02-25T00:16:59.711" v="1264"/>
+          <ac:picMkLst>
+            <pc:docMk/>
+            <pc:sldMk cId="1760039024" sldId="315"/>
+            <ac:picMk id="3" creationId="{03A06E90-5E0B-1147-DF21-3C3365C5F673}"/>
+          </ac:picMkLst>
+        </pc:picChg>
+      </pc:sldChg>
+      <pc:sldChg chg="addSp modSp">
+        <pc:chgData name="Toby Donaldson" userId="2e6e5431-bb17-4c41-9985-d39c50d83c73" providerId="ADAL" clId="{7F9681A8-EEE2-56F4-9B39-ECCBEE0471AC}" dt="2026-02-25T00:17:03.373" v="1265"/>
+        <pc:sldMkLst>
+          <pc:docMk/>
+          <pc:sldMk cId="3344777113" sldId="316"/>
+        </pc:sldMkLst>
+        <pc:picChg chg="add mod">
+          <ac:chgData name="Toby Donaldson" userId="2e6e5431-bb17-4c41-9985-d39c50d83c73" providerId="ADAL" clId="{7F9681A8-EEE2-56F4-9B39-ECCBEE0471AC}" dt="2026-02-25T00:17:03.373" v="1265"/>
+          <ac:picMkLst>
+            <pc:docMk/>
+            <pc:sldMk cId="3344777113" sldId="316"/>
+            <ac:picMk id="6" creationId="{E572D20D-DE4C-1A44-2C8B-A8C196E49445}"/>
+          </ac:picMkLst>
+        </pc:picChg>
       </pc:sldChg>
       <pc:sldChg chg="addSp delSp modSp mod">
         <pc:chgData name="Toby Donaldson" userId="2e6e5431-bb17-4c41-9985-d39c50d83c73" providerId="ADAL" clId="{7F9681A8-EEE2-56F4-9B39-ECCBEE0471AC}" dt="2026-02-24T23:51:54.756" v="1259"/>
@@ -24986,6 +25032,36 @@
           </a:p>
         </p:txBody>
       </p:sp>
+      <p:pic>
+        <p:nvPicPr>
+          <p:cNvPr id="3" name="Picture 2">
+            <a:extLst>
+              <a:ext uri="{FF2B5EF4-FFF2-40B4-BE49-F238E27FC236}">
+                <a16:creationId xmlns:a16="http://schemas.microsoft.com/office/drawing/2014/main" id="{DEA813A2-DF77-B5ED-3924-6389AF8F63CA}"/>
+              </a:ext>
+            </a:extLst>
+          </p:cNvPr>
+          <p:cNvPicPr>
+            <a:picLocks noChangeAspect="1"/>
+          </p:cNvPicPr>
+          <p:nvPr/>
+        </p:nvPicPr>
+        <p:blipFill>
+          <a:blip r:embed="rId3"/>
+          <a:stretch>
+            <a:fillRect/>
+          </a:stretch>
+        </p:blipFill>
+        <p:spPr>
+          <a:xfrm>
+            <a:off x="2209800" y="2082384"/>
+            <a:ext cx="1179945" cy="1179945"/>
+          </a:xfrm>
+          <a:prstGeom prst="rect">
+            <a:avLst/>
+          </a:prstGeom>
+        </p:spPr>
+      </p:pic>
     </p:spTree>
     <p:extLst>
       <p:ext uri="{BB962C8B-B14F-4D97-AF65-F5344CB8AC3E}">
@@ -25372,6 +25448,36 @@
           </a:p>
         </p:txBody>
       </p:sp>
+      <p:pic>
+        <p:nvPicPr>
+          <p:cNvPr id="3" name="Picture 2">
+            <a:extLst>
+              <a:ext uri="{FF2B5EF4-FFF2-40B4-BE49-F238E27FC236}">
+                <a16:creationId xmlns:a16="http://schemas.microsoft.com/office/drawing/2014/main" id="{D60E2122-34EB-65E8-A6CC-88337044A6B1}"/>
+              </a:ext>
+            </a:extLst>
+          </p:cNvPr>
+          <p:cNvPicPr>
+            <a:picLocks noChangeAspect="1"/>
+          </p:cNvPicPr>
+          <p:nvPr/>
+        </p:nvPicPr>
+        <p:blipFill>
+          <a:blip r:embed="rId3"/>
+          <a:stretch>
+            <a:fillRect/>
+          </a:stretch>
+        </p:blipFill>
+        <p:spPr>
+          <a:xfrm>
+            <a:off x="2209800" y="2082384"/>
+            <a:ext cx="1179945" cy="1179945"/>
+          </a:xfrm>
+          <a:prstGeom prst="rect">
+            <a:avLst/>
+          </a:prstGeom>
+        </p:spPr>
+      </p:pic>
     </p:spTree>
     <p:extLst>
       <p:ext uri="{BB962C8B-B14F-4D97-AF65-F5344CB8AC3E}">
@@ -25667,6 +25773,36 @@
           </a:p>
         </p:txBody>
       </p:sp>
+      <p:pic>
+        <p:nvPicPr>
+          <p:cNvPr id="3" name="Picture 2">
+            <a:extLst>
+              <a:ext uri="{FF2B5EF4-FFF2-40B4-BE49-F238E27FC236}">
+                <a16:creationId xmlns:a16="http://schemas.microsoft.com/office/drawing/2014/main" id="{03A06E90-5E0B-1147-DF21-3C3365C5F673}"/>
+              </a:ext>
+            </a:extLst>
+          </p:cNvPr>
+          <p:cNvPicPr>
+            <a:picLocks noChangeAspect="1"/>
+          </p:cNvPicPr>
+          <p:nvPr/>
+        </p:nvPicPr>
+        <p:blipFill>
+          <a:blip r:embed="rId3"/>
+          <a:stretch>
+            <a:fillRect/>
+          </a:stretch>
+        </p:blipFill>
+        <p:spPr>
+          <a:xfrm>
+            <a:off x="2209800" y="2082384"/>
+            <a:ext cx="1179945" cy="1179945"/>
+          </a:xfrm>
+          <a:prstGeom prst="rect">
+            <a:avLst/>
+          </a:prstGeom>
+        </p:spPr>
+      </p:pic>
     </p:spTree>
     <p:extLst>
       <p:ext uri="{BB962C8B-B14F-4D97-AF65-F5344CB8AC3E}">
@@ -26019,6 +26155,36 @@
           </a:p>
         </p:txBody>
       </p:sp>
+      <p:pic>
+        <p:nvPicPr>
+          <p:cNvPr id="6" name="Picture 5">
+            <a:extLst>
+              <a:ext uri="{FF2B5EF4-FFF2-40B4-BE49-F238E27FC236}">
+                <a16:creationId xmlns:a16="http://schemas.microsoft.com/office/drawing/2014/main" id="{E572D20D-DE4C-1A44-2C8B-A8C196E49445}"/>
+              </a:ext>
+            </a:extLst>
+          </p:cNvPr>
+          <p:cNvPicPr>
+            <a:picLocks noChangeAspect="1"/>
+          </p:cNvPicPr>
+          <p:nvPr/>
+        </p:nvPicPr>
+        <p:blipFill>
+          <a:blip r:embed="rId3"/>
+          <a:stretch>
+            <a:fillRect/>
+          </a:stretch>
+        </p:blipFill>
+        <p:spPr>
+          <a:xfrm>
+            <a:off x="2209800" y="2082384"/>
+            <a:ext cx="1179945" cy="1179945"/>
+          </a:xfrm>
+          <a:prstGeom prst="rect">
+            <a:avLst/>
+          </a:prstGeom>
+        </p:spPr>
+      </p:pic>
     </p:spTree>
     <p:extLst>
       <p:ext uri="{BB962C8B-B14F-4D97-AF65-F5344CB8AC3E}">
